--- a/outputs/plans/VANI_Persona_Design_Deck_v2_visual.pptx
+++ b/outputs/plans/VANI_Persona_Design_Deck_v2_visual.pptx
@@ -986,7 +986,7 @@
           <a:lstStyle/>
           <a:p>
             <a:r>
-              <a:t>Left: today's VANI uses one script, one voice and one pace for every seller. The opening rests on an enquiry count and the city; the seller details we hold (similar sellers, live buy-lead data, order value, catalogue quality, plan, handler) are not in the call. Right: a persona designed per seller, adapted live. Number: a rush signal in the seller's words (busy, jaldi, time nahi, baad mein, driving, call back) appears in about 21% of transcribed calls; those calls end with a meeting about 14% of the time against about 26% when no rush signal appears (keyword method on 11,834 transcribed calls, approximate). A rushed seller halves the chance of a meeting, and today's VANI does not change for them.</a:t>
+              <a:t>Left: today's VANI uses one script, one voice and one pace for every seller. The opening rests on an enquiry count and the city; the seller details we hold (similar sellers, live buy-lead data, order value, catalogue quality, plan, handler) are not in the call. Right: a persona designed per seller, adapted live. Number: a rush signal in the seller's words (busy, jaldi, time nahi, baad mein, driving, call back) appears in about 21% of transcribed calls; those calls end with a meeting about 14% of the time against about 26% when no rush signal appears (keyword method on 11,834 transcribed calls, approximate; the base in that set is 23.4%). Transcribed calls skew toward engaged sellers (22.4% meeting rate against 11.5% over all 269,455 answered calls), so read the rush effect inside that set, not against the 11.5% base. A rushed seller roughly halves the chance of a meeting, and today's VANI does not change for them.</a:t>
             </a:r>
           </a:p>
         </p:txBody>
@@ -1218,7 +1218,7 @@
           <a:lstStyle/>
           <a:p>
             <a:r>
-              <a:t>START of call: the Sarvam voice agent's start tool applies the persona before the first word: voice, pace, pitch, the start language and the opening line; the persona and hook fill one fixed prompt through per-call variables. MID-CALL: a signal tool runs on every seller turn and returns the seller's mode and a directive that overrides the speaking style for that reply only (rushed: one short sentence and a callback; confused: one idea in short phrases; frustrated: brief apology, no pitch; interested: answer briefly and ask for the day and time; declined: keep the call open; bot question: sidestep once, then 'virtual assistant'; opt-out: apologise and end; language switch: reply in the seller's language). Voice, pace and pitch are fixed after the start (platform limit); tone changes through the words. Every change is written to a switch log: turn, utterance, from mode, to mode, cue, change, reason. END: the booking tool records the meeting with the seller's sales handler, or a callback; VANI never quotes a plan or price. IMPROVE: Claude reviews the call against compliance rules (7 fatal and 13 non-fatal items); results update persona and hook scoreboards by seller segment and per-field value groups; reports show meeting rate by reason type and uplift against the control. Scoreboards are empty at the start; picks are a division-based lean plus a random draw until real calls arrive.</a:t>
+              <a:t>START of call: the Sarvam voice agent's start tool applies the persona before the first word: voice, pace, pitch, the start language and the opening line; the persona and hook fill one fixed prompt through per-call variables. MID-CALL: a signal tool runs on every seller turn and returns the seller's mode and a directive that overrides the speaking style for that reply only (rushed: one short sentence and a callback; confused: one idea in short phrases; frustrated: brief apology, no pitch; interested: answer briefly and ask for the day and time; declined: keep the call open; bot question: sidestep once, then 'virtual assistant'; opt-out: apologise and end; language switch: reply in the seller's language). Voice, pace and pitch are fixed after the start (platform limit); tone changes through the words. Every change is written to a switch log: turn, utterance, from mode, to mode, cue, change, reason. END: the booking tool records the meeting with the seller's sales handler when a name exists (for a pool: 'our IndiaMART executive'), or a callback; after booking VANI asks 'anything else?' and ends only on the seller's no or goodbye; the call ends early only on an explicit request (stop calling, cut the call, do not call); 'not interested' keeps the line open (the hook again, then one topic per 'no'). VANI never quotes a plan or price. IMPROVE: Claude reviews the call against compliance rules (7 fatal and 13 non-fatal items) and the call-rule checks R1-R6 (pass, fail or unknown per language); results update persona and hook scoreboards by seller segment and per-field value groups; reports show meeting rate by reason type and uplift against the control. Scoreboards are empty at the start; picks are a division-based lean plus a random draw until real calls arrive.</a:t>
             </a:r>
           </a:p>
         </p:txBody>
@@ -1276,7 +1276,7 @@
           <a:lstStyle/>
           <a:p>
             <a:r>
-              <a:t>Examples of the live signal tool at work. Every seller turn is read; the tool returns a mode (rushed, frustrated, confused, interested, declined, bot question, opt-out, language switch; question and handler questions as one-turn overlays) and a directive. In scripted test calls every switch type fired on the same turn, including a language switch from Marathi to Hindi to English. A switch log row records: turn, utterance, from mode, to mode, cue, directive id, change made, reason, whether asking for the meeting is allowed, milliseconds. Honest limits: voice, pace and pitch cannot change mid-call (a Sarvam platform limit), tone changes through wording; the keyword classifier is a baseline with about 0.60 measured accuracy on a small reviewed set, presented as a measurement not a production figure; a slower external classifier (Jev) was parked because of latency. Handler: VANI names the sales handler when one exists, and the meeting is booked with that person.</a:t>
+              <a:t>Examples of the live signal tool at work. Every seller turn is read; the tool returns a mode (rushed, frustrated, confused, interested, declined, bot question, opt-out, language switch; question and handler questions as one-turn overlays) and a directive. In scripted test calls every switch type fired on the same turn, including a language switch from Marathi to Hindi to English. A switch log row records: turn, utterance, from mode, to mode, cue, directive id, change made, reason, whether asking for the meeting is allowed, milliseconds. Honest limits: voice, pace and pitch cannot change mid-call (a Sarvam platform limit), tone changes through wording; the keyword classifier is a baseline with about 0.60 measured accuracy on a small reviewed set, presented as a measurement not a production figure; a slower external classifier (Jev) was parked because of latency. Handler: with a handler name VANI says the name and books with that person; with a pool it says 'our IndiaMART team handles your account; the executive will introduce themselves when they call' and never a made-up name. 'Nahi chahiye' keeps the call open and restates the hook.</a:t>
             </a:r>
           </a:p>
         </p:txBody>
@@ -1334,7 +1334,7 @@
           <a:lstStyle/>
           <a:p>
             <a:r>
-              <a:t>Context builder: offline PS07 and Global Context files, internal APIs (data warehouse, user service, company page) and read-only queries on the buy-lead and catalogue databases write one folder per seller (laptop, VPN). Safe export: names become tokens, a hard PII check refuses any leak, sources are stripped; real names stay on the laptop. Persona agent: Claude Opus 5.5 in an isolated Daytona sandbox; scripts compute traits, states, guards and hook eligibility and propose the top two personas; the agent selects one and decides every field with a checkable reason; a single writer tool, read log, stop gate and validator refuse anything uncited. Compile: the validated persona becomes the Sarvam agent's per-call variables and prompt sections; names are filled in only then, on the laptop. Voice call: the Sarvam voice agent (speech to text, language model, text to speech) with a start tool, a signal tool and a booking tool, one fixed prompt template with per-call variables, and the IndiaMART knowledge base. Review and learning: Claude reviews each call; scoreboards update by seller segment. Compliance: identity rule, verified facts only, no selling on the call, 7 fatal and 13 non-fatal rubric items checked before and after each call; humans approve persona library changes.</a:t>
+              <a:t>Context builder: offline PS07 and Global Context files, internal APIs (data warehouse, user service, company page) and read-only queries on the buy-lead and catalogue databases write one folder per seller (laptop, VPN). Safe export: names become tokens, a hard PII check refuses any leak, sources are stripped; real names stay on the laptop. Persona agent: Claude Opus 5.5 in an isolated Daytona sandbox; scripts compute traits, states, guards and hook eligibility and propose the top two personas; the agent selects one and decides every field with a checkable reason; a single writer tool, read log, stop gate and validator refuse anything uncited. Compile: the validated persona becomes the Sarvam agent's per-call variables and prompt sections; names are filled in only then, on the laptop. Voice call: the Sarvam voice agent (speech to text, language model, text to speech) with a start tool, a signal tool and a booking tool, one fixed prompt template with per-call variables, and the IndiaMART knowledge base. Review and learning: Claude reviews each call; scoreboards update by seller segment. Compliance: identity rule (never AI, bot or manager; never claims to be human; if pressed, 'IndiaMART's virtual assistant'), verified facts only, no selling on the call, 7 fatal and 13 non-fatal rubric items checked before and after each call; humans approve persona library changes.</a:t>
             </a:r>
           </a:p>
         </p:txBody>
@@ -1450,7 +1450,7 @@
           <a:lstStyle/>
           <a:p>
             <a:r>
-              <a:t>Planned scenarios; videos to be added. Call 1: a free seller in a regional-language region: warm local persona, profile-gap hook, language follows the seller. Call 2: a paying seller with buy-lead data: numbers-first persona, credit-usage or money-lead hook; the seller says 'busy', VANI shortens and offers a callback. Call 3: a high-turnover seller: senior persona, English start; the seller asks about the handler, VANI names the executive and books the meeting. Evidence to date: full persona runs on the sandbox for 3 sellers (about 2 minutes, about one dollar each; validation passed twice), about 6 real phone tests and 15 scripted voice calls where all 21 to 22 per-call variables arrived, 0 fatal review items on the reviewed call, agent response time about 0.8 to 1.6 seconds per turn, languages tested Marathi, Hindi, English and Telugu. Recordings contain real seller details and are shared only with approval.</a:t>
+              <a:t>Planned scenarios; videos to be added. Call 1: a free seller in a regional-language region: warm local persona, profile-gap hook, language follows the seller. Call 2: a paying seller with buy-lead data: numbers-first persona, credit-usage or money-lead hook; the seller says 'busy', VANI shortens and offers a callback. Call 3: a high-turnover seller: senior persona, English start; the seller asks about the handler, VANI names the executive and books the meeting. Evidence to date: 7 full persona runs on the sandbox (1 more running; about 2 to 3 minutes and $1 to $1.5 each; validation passed twice), about 7 real phone tests and about 16 scripted voice calls where all 21 to 22 per-call variables arrived, 0 fatal review items on the reviewed call, agent response time about 0.8 to 1.6 seconds per turn, languages tested Marathi, Hindi, English and Telugu. Recordings contain real seller details and are shared only with approval.</a:t>
             </a:r>
           </a:p>
         </p:txBody>
@@ -12247,7 +12247,7 @@
                 </a:solidFill>
                 <a:latin typeface="Arial"/>
               </a:rPr>
-              <a:t>14% vs 26%</a:t>
+              <a:t>26% to 14%</a:t>
             </a:r>
           </a:p>
         </p:txBody>
@@ -12286,7 +12286,7 @@
                 </a:solidFill>
                 <a:latin typeface="Arial"/>
               </a:rPr>
-              <a:t>meeting rate when the seller sounds rushed vs not (halves)</a:t>
+              <a:t>in transcribed calls (n = 11,834), a rush signal cuts the meeting rate</a:t>
             </a:r>
           </a:p>
         </p:txBody>
@@ -15553,7 +15553,24 @@
                 </a:solidFill>
                 <a:latin typeface="Arial"/>
               </a:rPr>
-              <a:t>With the sales handler</a:t>
+              <a:t>With the sales handler, or our executive</a:t>
+            </a:r>
+          </a:p>
+          <a:p>
+            <a:pPr algn="l" marL="182880" indent="-164592">
+              <a:spcAft>
+                <a:spcPts val="600"/>
+              </a:spcAft>
+              <a:buChar char="•"/>
+            </a:pPr>
+            <a:r>
+              <a:rPr sz="1300" b="0">
+                <a:solidFill>
+                  <a:srgbClr val="262626"/>
+                </a:solidFill>
+                <a:latin typeface="Arial"/>
+              </a:rPr>
+              <a:t>Then: anything else?</a:t>
             </a:r>
           </a:p>
           <a:p>
@@ -15748,7 +15765,7 @@
                 </a:solidFill>
                 <a:latin typeface="Arial"/>
               </a:rPr>
-              <a:t>Review the call</a:t>
+              <a:t>Review the call, rule checks R1-R6</a:t>
             </a:r>
           </a:p>
           <a:p>
@@ -15916,8 +15933,8 @@
         </p:nvSpPr>
         <p:spPr>
           <a:xfrm>
-            <a:off x="566928" y="1417320"/>
-            <a:ext cx="4754880" cy="731520"/>
+            <a:off x="566928" y="1371600"/>
+            <a:ext cx="4754880" cy="621792"/>
           </a:xfrm>
           <a:prstGeom prst="roundRect">
             <a:avLst>
@@ -15964,7 +15981,7 @@
                 </a:solidFill>
                 <a:latin typeface="Arial"/>
               </a:rPr>
-              <a:t>“I'm busy right now”</a:t>
+              <a:t>“Nahi chahiye”</a:t>
             </a:r>
           </a:p>
         </p:txBody>
@@ -15977,14 +15994,14 @@
         </p:nvSpPr>
         <p:spPr>
           <a:xfrm>
-            <a:off x="5440680" y="1600200"/>
+            <a:off x="5440680" y="1499616"/>
             <a:ext cx="457200" cy="365760"/>
           </a:xfrm>
           <a:prstGeom prst="rightArrow">
             <a:avLst/>
           </a:prstGeom>
           <a:solidFill>
-            <a:srgbClr val="002060"/>
+            <a:srgbClr val="E08A00"/>
           </a:solidFill>
           <a:ln>
             <a:noFill/>
@@ -16020,8 +16037,8 @@
         </p:nvSpPr>
         <p:spPr>
           <a:xfrm>
-            <a:off x="6035040" y="1417320"/>
-            <a:ext cx="5577840" cy="731520"/>
+            <a:off x="6035040" y="1371600"/>
+            <a:ext cx="5577840" cy="621792"/>
           </a:xfrm>
           <a:prstGeom prst="roundRect">
             <a:avLst>
@@ -16029,7 +16046,7 @@
             </a:avLst>
           </a:prstGeom>
           <a:solidFill>
-            <a:srgbClr val="002060"/>
+            <a:srgbClr val="E08A00"/>
           </a:solidFill>
           <a:ln>
             <a:noFill/>
@@ -16066,7 +16083,7 @@
                 </a:solidFill>
                 <a:latin typeface="Arial"/>
               </a:rPr>
-              <a:t>One short sentence, offers a callback</a:t>
+              <a:t>Stays on the line, restates the hook</a:t>
             </a:r>
           </a:p>
         </p:txBody>
@@ -16079,8 +16096,8 @@
         </p:nvSpPr>
         <p:spPr>
           <a:xfrm>
-            <a:off x="566928" y="2313432"/>
-            <a:ext cx="4754880" cy="731520"/>
+            <a:off x="566928" y="2130552"/>
+            <a:ext cx="4754880" cy="621792"/>
           </a:xfrm>
           <a:prstGeom prst="roundRect">
             <a:avLst>
@@ -16127,7 +16144,7 @@
                 </a:solidFill>
                 <a:latin typeface="Arial"/>
               </a:rPr>
-              <a:t>“Samajh nahi aaya”</a:t>
+              <a:t>“I'm busy right now”</a:t>
             </a:r>
           </a:p>
         </p:txBody>
@@ -16140,14 +16157,14 @@
         </p:nvSpPr>
         <p:spPr>
           <a:xfrm>
-            <a:off x="5440680" y="2496312"/>
+            <a:off x="5440680" y="2258568"/>
             <a:ext cx="457200" cy="365760"/>
           </a:xfrm>
           <a:prstGeom prst="rightArrow">
             <a:avLst/>
           </a:prstGeom>
           <a:solidFill>
-            <a:srgbClr val="2EA896"/>
+            <a:srgbClr val="002060"/>
           </a:solidFill>
           <a:ln>
             <a:noFill/>
@@ -16183,8 +16200,8 @@
         </p:nvSpPr>
         <p:spPr>
           <a:xfrm>
-            <a:off x="6035040" y="2313432"/>
-            <a:ext cx="5577840" cy="731520"/>
+            <a:off x="6035040" y="2130552"/>
+            <a:ext cx="5577840" cy="621792"/>
           </a:xfrm>
           <a:prstGeom prst="roundRect">
             <a:avLst>
@@ -16192,7 +16209,7 @@
             </a:avLst>
           </a:prstGeom>
           <a:solidFill>
-            <a:srgbClr val="2EA896"/>
+            <a:srgbClr val="002060"/>
           </a:solidFill>
           <a:ln>
             <a:noFill/>
@@ -16229,7 +16246,7 @@
                 </a:solidFill>
                 <a:latin typeface="Arial"/>
               </a:rPr>
-              <a:t>One idea, simple short phrases</a:t>
+              <a:t>One short sentence, offers a callback</a:t>
             </a:r>
           </a:p>
         </p:txBody>
@@ -16242,8 +16259,8 @@
         </p:nvSpPr>
         <p:spPr>
           <a:xfrm>
-            <a:off x="566928" y="3209544"/>
-            <a:ext cx="4754880" cy="731520"/>
+            <a:off x="566928" y="2889504"/>
+            <a:ext cx="4754880" cy="621792"/>
           </a:xfrm>
           <a:prstGeom prst="roundRect">
             <a:avLst>
@@ -16290,7 +16307,7 @@
                 </a:solidFill>
                 <a:latin typeface="Arial"/>
               </a:rPr>
-              <a:t>“Kitni baar call karoge!”</a:t>
+              <a:t>“Samajh nahi aaya”</a:t>
             </a:r>
           </a:p>
         </p:txBody>
@@ -16303,14 +16320,14 @@
         </p:nvSpPr>
         <p:spPr>
           <a:xfrm>
-            <a:off x="5440680" y="3392424"/>
+            <a:off x="5440680" y="3017520"/>
             <a:ext cx="457200" cy="365760"/>
           </a:xfrm>
           <a:prstGeom prst="rightArrow">
             <a:avLst/>
           </a:prstGeom>
           <a:solidFill>
-            <a:srgbClr val="C00000"/>
+            <a:srgbClr val="2EA896"/>
           </a:solidFill>
           <a:ln>
             <a:noFill/>
@@ -16346,8 +16363,8 @@
         </p:nvSpPr>
         <p:spPr>
           <a:xfrm>
-            <a:off x="6035040" y="3209544"/>
-            <a:ext cx="5577840" cy="731520"/>
+            <a:off x="6035040" y="2889504"/>
+            <a:ext cx="5577840" cy="621792"/>
           </a:xfrm>
           <a:prstGeom prst="roundRect">
             <a:avLst>
@@ -16355,7 +16372,7 @@
             </a:avLst>
           </a:prstGeom>
           <a:solidFill>
-            <a:srgbClr val="C00000"/>
+            <a:srgbClr val="2EA896"/>
           </a:solidFill>
           <a:ln>
             <a:noFill/>
@@ -16392,7 +16409,7 @@
                 </a:solidFill>
                 <a:latin typeface="Arial"/>
               </a:rPr>
-              <a:t>Brief apology, stops the pitch</a:t>
+              <a:t>One idea, simple short phrases</a:t>
             </a:r>
           </a:p>
         </p:txBody>
@@ -16405,8 +16422,8 @@
         </p:nvSpPr>
         <p:spPr>
           <a:xfrm>
-            <a:off x="566928" y="4105656"/>
-            <a:ext cx="4754880" cy="731520"/>
+            <a:off x="566928" y="3648456"/>
+            <a:ext cx="4754880" cy="621792"/>
           </a:xfrm>
           <a:prstGeom prst="roundRect">
             <a:avLst>
@@ -16453,7 +16470,7 @@
                 </a:solidFill>
                 <a:latin typeface="Arial"/>
               </a:rPr>
-              <a:t>Speaks Marathi, then Hindi</a:t>
+              <a:t>“Kitni baar call karoge!”</a:t>
             </a:r>
           </a:p>
         </p:txBody>
@@ -16466,14 +16483,14 @@
         </p:nvSpPr>
         <p:spPr>
           <a:xfrm>
-            <a:off x="5440680" y="4288536"/>
+            <a:off x="5440680" y="3776472"/>
             <a:ext cx="457200" cy="365760"/>
           </a:xfrm>
           <a:prstGeom prst="rightArrow">
             <a:avLst/>
           </a:prstGeom>
           <a:solidFill>
-            <a:srgbClr val="5B3E96"/>
+            <a:srgbClr val="C00000"/>
           </a:solidFill>
           <a:ln>
             <a:noFill/>
@@ -16509,8 +16526,8 @@
         </p:nvSpPr>
         <p:spPr>
           <a:xfrm>
-            <a:off x="6035040" y="4105656"/>
-            <a:ext cx="5577840" cy="731520"/>
+            <a:off x="6035040" y="3648456"/>
+            <a:ext cx="5577840" cy="621792"/>
           </a:xfrm>
           <a:prstGeom prst="roundRect">
             <a:avLst>
@@ -16518,7 +16535,7 @@
             </a:avLst>
           </a:prstGeom>
           <a:solidFill>
-            <a:srgbClr val="5B3E96"/>
+            <a:srgbClr val="C00000"/>
           </a:solidFill>
           <a:ln>
             <a:noFill/>
@@ -16555,7 +16572,7 @@
                 </a:solidFill>
                 <a:latin typeface="Arial"/>
               </a:rPr>
-              <a:t>Replies in the seller's language</a:t>
+              <a:t>Brief apology, stops the pitch</a:t>
             </a:r>
           </a:p>
         </p:txBody>
@@ -16568,8 +16585,8 @@
         </p:nvSpPr>
         <p:spPr>
           <a:xfrm>
-            <a:off x="566928" y="5001768"/>
-            <a:ext cx="4754880" cy="731520"/>
+            <a:off x="566928" y="4407408"/>
+            <a:ext cx="4754880" cy="621792"/>
           </a:xfrm>
           <a:prstGeom prst="roundRect">
             <a:avLst>
@@ -16616,7 +16633,7 @@
                 </a:solidFill>
                 <a:latin typeface="Arial"/>
               </a:rPr>
-              <a:t>“Who handles my account?”</a:t>
+              <a:t>Speaks Marathi, then Hindi</a:t>
             </a:r>
           </a:p>
         </p:txBody>
@@ -16629,7 +16646,170 @@
         </p:nvSpPr>
         <p:spPr>
           <a:xfrm>
-            <a:off x="5440680" y="5184648"/>
+            <a:off x="5440680" y="4535424"/>
+            <a:ext cx="457200" cy="365760"/>
+          </a:xfrm>
+          <a:prstGeom prst="rightArrow">
+            <a:avLst/>
+          </a:prstGeom>
+          <a:solidFill>
+            <a:srgbClr val="5B3E96"/>
+          </a:solidFill>
+          <a:ln>
+            <a:noFill/>
+          </a:ln>
+        </p:spPr>
+        <p:style>
+          <a:lnRef idx="1">
+            <a:schemeClr val="accent1"/>
+          </a:lnRef>
+          <a:fillRef idx="3">
+            <a:schemeClr val="accent1"/>
+          </a:fillRef>
+          <a:effectRef idx="2">
+            <a:schemeClr val="accent1"/>
+          </a:effectRef>
+          <a:fontRef idx="minor">
+            <a:schemeClr val="lt1"/>
+          </a:fontRef>
+        </p:style>
+        <p:txBody>
+          <a:bodyPr rtlCol="0" anchor="ctr"/>
+          <a:lstStyle/>
+          <a:p>
+            <a:pPr algn="ctr"/>
+          </a:p>
+        </p:txBody>
+      </p:sp>
+      <p:sp>
+        <p:nvSpPr>
+          <p:cNvPr id="17" name="Rounded Rectangle 16"/>
+          <p:cNvSpPr/>
+          <p:nvPr/>
+        </p:nvSpPr>
+        <p:spPr>
+          <a:xfrm>
+            <a:off x="6035040" y="4407408"/>
+            <a:ext cx="5577840" cy="621792"/>
+          </a:xfrm>
+          <a:prstGeom prst="roundRect">
+            <a:avLst>
+              <a:gd name="adj" fmla="val 40000"/>
+            </a:avLst>
+          </a:prstGeom>
+          <a:solidFill>
+            <a:srgbClr val="5B3E96"/>
+          </a:solidFill>
+          <a:ln>
+            <a:noFill/>
+          </a:ln>
+          <a:effectLst/>
+        </p:spPr>
+        <p:style>
+          <a:lnRef idx="1">
+            <a:schemeClr val="accent1"/>
+          </a:lnRef>
+          <a:fillRef idx="3">
+            <a:schemeClr val="accent1"/>
+          </a:fillRef>
+          <a:effectRef idx="2">
+            <a:schemeClr val="accent1"/>
+          </a:effectRef>
+          <a:fontRef idx="minor">
+            <a:schemeClr val="lt1"/>
+          </a:fontRef>
+        </p:style>
+        <p:txBody>
+          <a:bodyPr rtlCol="0" anchor="ctr" wrap="square" lIns="109728" rIns="109728" tIns="54864" bIns="54864"/>
+          <a:lstStyle/>
+          <a:p>
+            <a:pPr algn="l">
+              <a:spcAft>
+                <a:spcPts val="0"/>
+              </a:spcAft>
+            </a:pPr>
+            <a:r>
+              <a:rPr sz="1400" b="1">
+                <a:solidFill>
+                  <a:srgbClr val="FFFFFF"/>
+                </a:solidFill>
+                <a:latin typeface="Arial"/>
+              </a:rPr>
+              <a:t>Replies in the seller's language</a:t>
+            </a:r>
+          </a:p>
+        </p:txBody>
+      </p:sp>
+      <p:sp>
+        <p:nvSpPr>
+          <p:cNvPr id="18" name="Rounded Rectangle 17"/>
+          <p:cNvSpPr/>
+          <p:nvPr/>
+        </p:nvSpPr>
+        <p:spPr>
+          <a:xfrm>
+            <a:off x="566928" y="5166359"/>
+            <a:ext cx="4754880" cy="621792"/>
+          </a:xfrm>
+          <a:prstGeom prst="roundRect">
+            <a:avLst>
+              <a:gd name="adj" fmla="val 40000"/>
+            </a:avLst>
+          </a:prstGeom>
+          <a:solidFill>
+            <a:srgbClr val="EEF2F8"/>
+          </a:solidFill>
+          <a:ln w="12700">
+            <a:solidFill>
+              <a:srgbClr val="595959"/>
+            </a:solidFill>
+          </a:ln>
+          <a:effectLst/>
+        </p:spPr>
+        <p:style>
+          <a:lnRef idx="1">
+            <a:schemeClr val="accent1"/>
+          </a:lnRef>
+          <a:fillRef idx="3">
+            <a:schemeClr val="accent1"/>
+          </a:fillRef>
+          <a:effectRef idx="2">
+            <a:schemeClr val="accent1"/>
+          </a:effectRef>
+          <a:fontRef idx="minor">
+            <a:schemeClr val="lt1"/>
+          </a:fontRef>
+        </p:style>
+        <p:txBody>
+          <a:bodyPr rtlCol="0" anchor="ctr" wrap="square" lIns="109728" rIns="109728" tIns="54864" bIns="54864"/>
+          <a:lstStyle/>
+          <a:p>
+            <a:pPr algn="l">
+              <a:spcAft>
+                <a:spcPts val="0"/>
+              </a:spcAft>
+            </a:pPr>
+            <a:r>
+              <a:rPr sz="1400" b="0">
+                <a:solidFill>
+                  <a:srgbClr val="262626"/>
+                </a:solidFill>
+                <a:latin typeface="Arial"/>
+              </a:rPr>
+              <a:t>“Who handles my account?”</a:t>
+            </a:r>
+          </a:p>
+        </p:txBody>
+      </p:sp>
+      <p:sp>
+        <p:nvSpPr>
+          <p:cNvPr id="19" name="Right Arrow 18"/>
+          <p:cNvSpPr/>
+          <p:nvPr/>
+        </p:nvSpPr>
+        <p:spPr>
+          <a:xfrm>
+            <a:off x="5440680" y="5294375"/>
             <a:ext cx="457200" cy="365760"/>
           </a:xfrm>
           <a:prstGeom prst="rightArrow">
@@ -16666,14 +16846,14 @@
       </p:sp>
       <p:sp>
         <p:nvSpPr>
-          <p:cNvPr id="17" name="Rounded Rectangle 16"/>
+          <p:cNvPr id="20" name="Rounded Rectangle 19"/>
           <p:cNvSpPr/>
           <p:nvPr/>
         </p:nvSpPr>
         <p:spPr>
           <a:xfrm>
-            <a:off x="6035040" y="5001768"/>
-            <a:ext cx="5577840" cy="731520"/>
+            <a:off x="6035040" y="5166359"/>
+            <a:ext cx="5577840" cy="621792"/>
           </a:xfrm>
           <a:prstGeom prst="roundRect">
             <a:avLst>
@@ -16718,14 +16898,14 @@
                 </a:solidFill>
                 <a:latin typeface="Arial"/>
               </a:rPr>
-              <a:t>Names the executive, books the meeting with them</a:t>
+              <a:t>Names the handler and books with them; a team if none</a:t>
             </a:r>
           </a:p>
         </p:txBody>
       </p:sp>
       <p:sp>
         <p:nvSpPr>
-          <p:cNvPr id="18" name="TextBox 17"/>
+          <p:cNvPr id="21" name="TextBox 20"/>
           <p:cNvSpPr txBox="1"/>
           <p:nvPr/>
         </p:nvSpPr>
@@ -16764,7 +16944,7 @@
       </p:sp>
       <p:sp>
         <p:nvSpPr>
-          <p:cNvPr id="19" name="TextBox 18"/>
+          <p:cNvPr id="22" name="TextBox 21"/>
           <p:cNvSpPr txBox="1"/>
           <p:nvPr/>
         </p:nvSpPr>
@@ -17797,7 +17977,7 @@
                 </a:solidFill>
                 <a:latin typeface="Arial"/>
               </a:rPr>
-              <a:t>Safety rails: never AI, bot or manager  |  numbers only from verified facts  |  names stay tokens in the sandbox  |  no price on the call</a:t>
+              <a:t>Safety rails: never AI, bot or manager; never claims to be human  |  numbers only from verified facts  |  names stay tokens in the sandbox  |  no price on the call</a:t>
             </a:r>
           </a:p>
         </p:txBody>

--- a/outputs/plans/VANI_Persona_Design_Deck_v2_visual.pptx
+++ b/outputs/plans/VANI_Persona_Design_Deck_v2_visual.pptx
@@ -1392,7 +1392,7 @@
           <a:lstStyle/>
           <a:p>
             <a:r>
-              <a:t>Now: meeting arrangement. The right persona and hook per seller to book the executive meeting, with live adaptation. Next: seller enrichment. Catalogue improvement calls (photos, prices, categories) with suggestions drawn from the seller's top categories and similar sellers; a top-category hook; profile completion with the seller on the call. Later: selling higher packages. Upsell and renewal calls using credit usage, lead quality and peer proof, from the same persona engine. Platform: learning from real calls, more languages and voices, production telephony at scale (today the phone route reaches only whitelisted test numbers).</a:t>
+              <a:t>Now: meeting arrangement. The right persona and hook per seller to book the executive meeting, with live adaptation. Next: seller enrichment. Catalogue improvement calls (photos, prices, categories) with suggestions drawn from the seller's top categories and similar sellers; a top-category hook; profile completion with the seller on the call. Personalise further, per seller: (1) a personalised objective for the seller persona: the call goal itself is chosen per seller from meeting, enrichment or NPS (net promoter score); (2) a preferred call time per seller, to improve the share of calls that are answered (call scheduling is handled outside the persona today); (3) a preferred or suggested language per seller, from the seller's location, GST state and the languages heard on earlier calls. Platform: learning from real calls, more languages and voices, production telephony at scale (today the phone route reaches only whitelisted test numbers).</a:t>
             </a:r>
           </a:p>
         </p:txBody>
@@ -18023,70 +18023,14 @@
       </p:sp>
       <p:sp>
         <p:nvSpPr>
-          <p:cNvPr id="3" name="Oval 2"/>
+          <p:cNvPr id="3" name="Rounded Rectangle 2"/>
           <p:cNvSpPr/>
           <p:nvPr/>
         </p:nvSpPr>
         <p:spPr>
           <a:xfrm>
-            <a:off x="1755648" y="1554480"/>
-            <a:ext cx="1097280" cy="1097280"/>
-          </a:xfrm>
-          <a:prstGeom prst="ellipse">
-            <a:avLst/>
-          </a:prstGeom>
-          <a:solidFill>
-            <a:srgbClr val="C00000"/>
-          </a:solidFill>
-          <a:ln>
-            <a:noFill/>
-          </a:ln>
-        </p:spPr>
-        <p:style>
-          <a:lnRef idx="1">
-            <a:schemeClr val="accent1"/>
-          </a:lnRef>
-          <a:fillRef idx="3">
-            <a:schemeClr val="accent1"/>
-          </a:fillRef>
-          <a:effectRef idx="2">
-            <a:schemeClr val="accent1"/>
-          </a:effectRef>
-          <a:fontRef idx="minor">
-            <a:schemeClr val="lt1"/>
-          </a:fontRef>
-        </p:style>
-        <p:txBody>
-          <a:bodyPr rtlCol="0" anchor="ctr" lIns="0" rIns="0" tIns="0" bIns="0"/>
-          <a:lstStyle/>
-          <a:p>
-            <a:pPr algn="ctr">
-              <a:spcAft>
-                <a:spcPts val="0"/>
-              </a:spcAft>
-            </a:pPr>
-            <a:r>
-              <a:rPr sz="1800" b="1">
-                <a:solidFill>
-                  <a:srgbClr val="FFFFFF"/>
-                </a:solidFill>
-                <a:latin typeface="Arial"/>
-              </a:rPr>
-              <a:t>NOW</a:t>
-            </a:r>
-          </a:p>
-        </p:txBody>
-      </p:sp>
-      <p:sp>
-        <p:nvSpPr>
-          <p:cNvPr id="4" name="Rounded Rectangle 3"/>
-          <p:cNvSpPr/>
-          <p:nvPr/>
-        </p:nvSpPr>
-        <p:spPr>
-          <a:xfrm>
-            <a:off x="566928" y="2834640"/>
-            <a:ext cx="3383280" cy="1554480"/>
+            <a:off x="566928" y="1463040"/>
+            <a:ext cx="5212080" cy="1371600"/>
           </a:xfrm>
           <a:prstGeom prst="roundRect">
             <a:avLst>
@@ -18131,7 +18075,7 @@
                 </a:solidFill>
                 <a:latin typeface="Arial"/>
               </a:rPr>
-              <a:t>Meeting arrangement</a:t>
+              <a:t>NOW: Meeting arrangement</a:t>
             </a:r>
           </a:p>
           <a:p>
@@ -18154,14 +18098,14 @@
       </p:sp>
       <p:sp>
         <p:nvSpPr>
-          <p:cNvPr id="5" name="Right Arrow 4"/>
+          <p:cNvPr id="4" name="Right Arrow 3"/>
           <p:cNvSpPr/>
           <p:nvPr/>
         </p:nvSpPr>
         <p:spPr>
           <a:xfrm>
-            <a:off x="3995928" y="3383280"/>
-            <a:ext cx="365760" cy="411480"/>
+            <a:off x="5852160" y="1920240"/>
+            <a:ext cx="457200" cy="411480"/>
           </a:xfrm>
           <a:prstGeom prst="rightArrow">
             <a:avLst/>
@@ -18197,70 +18141,14 @@
       </p:sp>
       <p:sp>
         <p:nvSpPr>
-          <p:cNvPr id="6" name="Oval 5"/>
+          <p:cNvPr id="5" name="Rounded Rectangle 4"/>
           <p:cNvSpPr/>
           <p:nvPr/>
         </p:nvSpPr>
         <p:spPr>
           <a:xfrm>
-            <a:off x="5596128" y="1554480"/>
-            <a:ext cx="1097280" cy="1097280"/>
-          </a:xfrm>
-          <a:prstGeom prst="ellipse">
-            <a:avLst/>
-          </a:prstGeom>
-          <a:solidFill>
-            <a:srgbClr val="002060"/>
-          </a:solidFill>
-          <a:ln>
-            <a:noFill/>
-          </a:ln>
-        </p:spPr>
-        <p:style>
-          <a:lnRef idx="1">
-            <a:schemeClr val="accent1"/>
-          </a:lnRef>
-          <a:fillRef idx="3">
-            <a:schemeClr val="accent1"/>
-          </a:fillRef>
-          <a:effectRef idx="2">
-            <a:schemeClr val="accent1"/>
-          </a:effectRef>
-          <a:fontRef idx="minor">
-            <a:schemeClr val="lt1"/>
-          </a:fontRef>
-        </p:style>
-        <p:txBody>
-          <a:bodyPr rtlCol="0" anchor="ctr" lIns="0" rIns="0" tIns="0" bIns="0"/>
-          <a:lstStyle/>
-          <a:p>
-            <a:pPr algn="ctr">
-              <a:spcAft>
-                <a:spcPts val="0"/>
-              </a:spcAft>
-            </a:pPr>
-            <a:r>
-              <a:rPr sz="1800" b="1">
-                <a:solidFill>
-                  <a:srgbClr val="FFFFFF"/>
-                </a:solidFill>
-                <a:latin typeface="Arial"/>
-              </a:rPr>
-              <a:t>NEXT</a:t>
-            </a:r>
-          </a:p>
-        </p:txBody>
-      </p:sp>
-      <p:sp>
-        <p:nvSpPr>
-          <p:cNvPr id="7" name="Rounded Rectangle 6"/>
-          <p:cNvSpPr/>
-          <p:nvPr/>
-        </p:nvSpPr>
-        <p:spPr>
-          <a:xfrm>
-            <a:off x="4407408" y="2834640"/>
-            <a:ext cx="3383280" cy="1554480"/>
+            <a:off x="6400800" y="1463040"/>
+            <a:ext cx="5212080" cy="1371600"/>
           </a:xfrm>
           <a:prstGeom prst="roundRect">
             <a:avLst>
@@ -18305,7 +18193,7 @@
                 </a:solidFill>
                 <a:latin typeface="Arial"/>
               </a:rPr>
-              <a:t>Seller enrichment</a:t>
+              <a:t>NEXT: Seller enrichment</a:t>
             </a:r>
           </a:p>
           <a:p>
@@ -18328,24 +18216,68 @@
       </p:sp>
       <p:sp>
         <p:nvSpPr>
-          <p:cNvPr id="8" name="Right Arrow 7"/>
+          <p:cNvPr id="6" name="TextBox 5"/>
+          <p:cNvSpPr txBox="1"/>
+          <p:nvPr/>
+        </p:nvSpPr>
+        <p:spPr>
+          <a:xfrm>
+            <a:off x="566928" y="3154680"/>
+            <a:ext cx="10972800" cy="365760"/>
+          </a:xfrm>
+          <a:prstGeom prst="rect">
+            <a:avLst/>
+          </a:prstGeom>
+          <a:noFill/>
+        </p:spPr>
+        <p:txBody>
+          <a:bodyPr wrap="square">
+            <a:spAutoFit/>
+          </a:bodyPr>
+          <a:lstStyle/>
+          <a:p>
+            <a:pPr algn="l">
+              <a:spcAft>
+                <a:spcPts val="0"/>
+              </a:spcAft>
+            </a:pPr>
+            <a:r>
+              <a:rPr sz="1600" b="1">
+                <a:solidFill>
+                  <a:srgbClr val="5B3E96"/>
+                </a:solidFill>
+                <a:latin typeface="Arial"/>
+              </a:rPr>
+              <a:t>Personalise further, per seller</a:t>
+            </a:r>
+          </a:p>
+        </p:txBody>
+      </p:sp>
+      <p:sp>
+        <p:nvSpPr>
+          <p:cNvPr id="7" name="Rounded Rectangle 6"/>
           <p:cNvSpPr/>
           <p:nvPr/>
         </p:nvSpPr>
         <p:spPr>
           <a:xfrm>
-            <a:off x="7836408" y="3383280"/>
-            <a:ext cx="365760" cy="411480"/>
+            <a:off x="566928" y="3611880"/>
+            <a:ext cx="3566160" cy="1828800"/>
           </a:xfrm>
-          <a:prstGeom prst="rightArrow">
-            <a:avLst/>
+          <a:prstGeom prst="roundRect">
+            <a:avLst>
+              <a:gd name="adj" fmla="val 6000"/>
+            </a:avLst>
           </a:prstGeom>
           <a:solidFill>
-            <a:srgbClr val="595959"/>
+            <a:srgbClr val="FFFFFF"/>
           </a:solidFill>
-          <a:ln>
-            <a:noFill/>
+          <a:ln w="12700">
+            <a:solidFill>
+              <a:srgbClr val="2EA896"/>
+            </a:solidFill>
           </a:ln>
+          <a:effectLst/>
         </p:spPr>
         <p:style>
           <a:lnRef idx="1">
@@ -18362,23 +18294,52 @@
           </a:fontRef>
         </p:style>
         <p:txBody>
-          <a:bodyPr rtlCol="0" anchor="ctr"/>
+          <a:bodyPr rtlCol="0" anchor="ctr" wrap="square" lIns="1005840" rIns="109728" tIns="54864" bIns="54864"/>
           <a:lstStyle/>
           <a:p>
-            <a:pPr algn="ctr"/>
+            <a:pPr algn="l">
+              <a:spcAft>
+                <a:spcPts val="300"/>
+              </a:spcAft>
+            </a:pPr>
+            <a:r>
+              <a:rPr sz="1600" b="1">
+                <a:solidFill>
+                  <a:srgbClr val="2EA896"/>
+                </a:solidFill>
+                <a:latin typeface="Arial"/>
+              </a:rPr>
+              <a:t>Objective per seller</a:t>
+            </a:r>
+          </a:p>
+          <a:p>
+            <a:pPr algn="l">
+              <a:spcAft>
+                <a:spcPts val="0"/>
+              </a:spcAft>
+            </a:pPr>
+            <a:r>
+              <a:rPr sz="1300" b="0">
+                <a:solidFill>
+                  <a:srgbClr val="262626"/>
+                </a:solidFill>
+                <a:latin typeface="Arial"/>
+              </a:rPr>
+              <a:t>Meeting, enrichment or NPS</a:t>
+            </a:r>
           </a:p>
         </p:txBody>
       </p:sp>
       <p:sp>
         <p:nvSpPr>
-          <p:cNvPr id="9" name="Oval 8"/>
+          <p:cNvPr id="8" name="Oval 7"/>
           <p:cNvSpPr/>
           <p:nvPr/>
         </p:nvSpPr>
         <p:spPr>
           <a:xfrm>
-            <a:off x="9436608" y="1554480"/>
-            <a:ext cx="1097280" cy="1097280"/>
+            <a:off x="749808" y="3794760"/>
+            <a:ext cx="640080" cy="640080"/>
           </a:xfrm>
           <a:prstGeom prst="ellipse">
             <a:avLst/>
@@ -18414,27 +18375,27 @@
               </a:spcAft>
             </a:pPr>
             <a:r>
-              <a:rPr sz="1800" b="1">
+              <a:rPr sz="2000" b="1">
                 <a:solidFill>
                   <a:srgbClr val="FFFFFF"/>
                 </a:solidFill>
                 <a:latin typeface="Arial"/>
               </a:rPr>
-              <a:t>LATER</a:t>
+              <a:t>1</a:t>
             </a:r>
           </a:p>
         </p:txBody>
       </p:sp>
       <p:sp>
         <p:nvSpPr>
-          <p:cNvPr id="10" name="Rounded Rectangle 9"/>
+          <p:cNvPr id="9" name="Rounded Rectangle 8"/>
           <p:cNvSpPr/>
           <p:nvPr/>
         </p:nvSpPr>
         <p:spPr>
           <a:xfrm>
-            <a:off x="8247888" y="2834640"/>
-            <a:ext cx="3383280" cy="1554480"/>
+            <a:off x="4407408" y="3611880"/>
+            <a:ext cx="3566160" cy="1828800"/>
           </a:xfrm>
           <a:prstGeom prst="roundRect">
             <a:avLst>
@@ -18442,10 +18403,12 @@
             </a:avLst>
           </a:prstGeom>
           <a:solidFill>
-            <a:srgbClr val="2EA896"/>
+            <a:srgbClr val="FFFFFF"/>
           </a:solidFill>
-          <a:ln>
-            <a:noFill/>
+          <a:ln w="12700">
+            <a:solidFill>
+              <a:srgbClr val="E08A00"/>
+            </a:solidFill>
           </a:ln>
           <a:effectLst/>
         </p:spPr>
@@ -18464,26 +18427,26 @@
           </a:fontRef>
         </p:style>
         <p:txBody>
-          <a:bodyPr rtlCol="0" anchor="ctr" wrap="square" lIns="109728" rIns="109728" tIns="54864" bIns="54864"/>
+          <a:bodyPr rtlCol="0" anchor="ctr" wrap="square" lIns="1005840" rIns="109728" tIns="54864" bIns="54864"/>
           <a:lstStyle/>
           <a:p>
-            <a:pPr algn="ctr">
-              <a:spcAft>
-                <a:spcPts val="200"/>
+            <a:pPr algn="l">
+              <a:spcAft>
+                <a:spcPts val="300"/>
               </a:spcAft>
             </a:pPr>
             <a:r>
-              <a:rPr sz="1700" b="1">
-                <a:solidFill>
-                  <a:srgbClr val="FFFFFF"/>
+              <a:rPr sz="1600" b="1">
+                <a:solidFill>
+                  <a:srgbClr val="E08A00"/>
                 </a:solidFill>
                 <a:latin typeface="Arial"/>
               </a:rPr>
-              <a:t>Higher packages</a:t>
+              <a:t>Preferred call time</a:t>
             </a:r>
           </a:p>
           <a:p>
-            <a:pPr algn="ctr">
+            <a:pPr algn="l">
               <a:spcAft>
                 <a:spcPts val="0"/>
               </a:spcAft>
@@ -18491,35 +18454,52 @@
             <a:r>
               <a:rPr sz="1300" b="0">
                 <a:solidFill>
-                  <a:srgbClr val="FFFFFF"/>
+                  <a:srgbClr val="262626"/>
                 </a:solidFill>
                 <a:latin typeface="Arial"/>
               </a:rPr>
-              <a:t>Upsell and renewal, same engine</a:t>
+              <a:t>More calls answered</a:t>
             </a:r>
           </a:p>
         </p:txBody>
       </p:sp>
       <p:sp>
         <p:nvSpPr>
-          <p:cNvPr id="11" name="TextBox 10"/>
-          <p:cNvSpPr txBox="1"/>
+          <p:cNvPr id="10" name="Oval 9"/>
+          <p:cNvSpPr/>
           <p:nvPr/>
         </p:nvSpPr>
         <p:spPr>
           <a:xfrm>
-            <a:off x="566928" y="4846320"/>
-            <a:ext cx="10972800" cy="457200"/>
+            <a:off x="4590288" y="3794760"/>
+            <a:ext cx="640080" cy="640080"/>
           </a:xfrm>
-          <a:prstGeom prst="rect">
+          <a:prstGeom prst="ellipse">
             <a:avLst/>
           </a:prstGeom>
-          <a:noFill/>
+          <a:solidFill>
+            <a:srgbClr val="E08A00"/>
+          </a:solidFill>
+          <a:ln>
+            <a:noFill/>
+          </a:ln>
         </p:spPr>
+        <p:style>
+          <a:lnRef idx="1">
+            <a:schemeClr val="accent1"/>
+          </a:lnRef>
+          <a:fillRef idx="3">
+            <a:schemeClr val="accent1"/>
+          </a:fillRef>
+          <a:effectRef idx="2">
+            <a:schemeClr val="accent1"/>
+          </a:effectRef>
+          <a:fontRef idx="minor">
+            <a:schemeClr val="lt1"/>
+          </a:fontRef>
+        </p:style>
         <p:txBody>
-          <a:bodyPr wrap="square">
-            <a:spAutoFit/>
-          </a:bodyPr>
+          <a:bodyPr rtlCol="0" anchor="ctr" lIns="0" rIns="0" tIns="0" bIns="0"/>
           <a:lstStyle/>
           <a:p>
             <a:pPr algn="ctr">
@@ -18528,13 +18508,146 @@
               </a:spcAft>
             </a:pPr>
             <a:r>
-              <a:rPr sz="1400" b="0">
-                <a:solidFill>
-                  <a:srgbClr val="595959"/>
+              <a:rPr sz="2000" b="1">
+                <a:solidFill>
+                  <a:srgbClr val="FFFFFF"/>
                 </a:solidFill>
                 <a:latin typeface="Arial"/>
               </a:rPr>
-              <a:t>More languages and voices  |  learning from real calls  |  production telephony</a:t>
+              <a:t>2</a:t>
+            </a:r>
+          </a:p>
+        </p:txBody>
+      </p:sp>
+      <p:sp>
+        <p:nvSpPr>
+          <p:cNvPr id="11" name="Rounded Rectangle 10"/>
+          <p:cNvSpPr/>
+          <p:nvPr/>
+        </p:nvSpPr>
+        <p:spPr>
+          <a:xfrm>
+            <a:off x="8247888" y="3611880"/>
+            <a:ext cx="3566160" cy="1828800"/>
+          </a:xfrm>
+          <a:prstGeom prst="roundRect">
+            <a:avLst>
+              <a:gd name="adj" fmla="val 6000"/>
+            </a:avLst>
+          </a:prstGeom>
+          <a:solidFill>
+            <a:srgbClr val="FFFFFF"/>
+          </a:solidFill>
+          <a:ln w="12700">
+            <a:solidFill>
+              <a:srgbClr val="5B3E96"/>
+            </a:solidFill>
+          </a:ln>
+          <a:effectLst/>
+        </p:spPr>
+        <p:style>
+          <a:lnRef idx="1">
+            <a:schemeClr val="accent1"/>
+          </a:lnRef>
+          <a:fillRef idx="3">
+            <a:schemeClr val="accent1"/>
+          </a:fillRef>
+          <a:effectRef idx="2">
+            <a:schemeClr val="accent1"/>
+          </a:effectRef>
+          <a:fontRef idx="minor">
+            <a:schemeClr val="lt1"/>
+          </a:fontRef>
+        </p:style>
+        <p:txBody>
+          <a:bodyPr rtlCol="0" anchor="ctr" wrap="square" lIns="1005840" rIns="109728" tIns="54864" bIns="54864"/>
+          <a:lstStyle/>
+          <a:p>
+            <a:pPr algn="l">
+              <a:spcAft>
+                <a:spcPts val="300"/>
+              </a:spcAft>
+            </a:pPr>
+            <a:r>
+              <a:rPr sz="1600" b="1">
+                <a:solidFill>
+                  <a:srgbClr val="5B3E96"/>
+                </a:solidFill>
+                <a:latin typeface="Arial"/>
+              </a:rPr>
+              <a:t>Preferred language</a:t>
+            </a:r>
+          </a:p>
+          <a:p>
+            <a:pPr algn="l">
+              <a:spcAft>
+                <a:spcPts val="0"/>
+              </a:spcAft>
+            </a:pPr>
+            <a:r>
+              <a:rPr sz="1300" b="0">
+                <a:solidFill>
+                  <a:srgbClr val="262626"/>
+                </a:solidFill>
+                <a:latin typeface="Arial"/>
+              </a:rPr>
+              <a:t>Suggested from the seller's data</a:t>
+            </a:r>
+          </a:p>
+        </p:txBody>
+      </p:sp>
+      <p:sp>
+        <p:nvSpPr>
+          <p:cNvPr id="12" name="Oval 11"/>
+          <p:cNvSpPr/>
+          <p:nvPr/>
+        </p:nvSpPr>
+        <p:spPr>
+          <a:xfrm>
+            <a:off x="8430767" y="3794760"/>
+            <a:ext cx="640080" cy="640080"/>
+          </a:xfrm>
+          <a:prstGeom prst="ellipse">
+            <a:avLst/>
+          </a:prstGeom>
+          <a:solidFill>
+            <a:srgbClr val="5B3E96"/>
+          </a:solidFill>
+          <a:ln>
+            <a:noFill/>
+          </a:ln>
+        </p:spPr>
+        <p:style>
+          <a:lnRef idx="1">
+            <a:schemeClr val="accent1"/>
+          </a:lnRef>
+          <a:fillRef idx="3">
+            <a:schemeClr val="accent1"/>
+          </a:fillRef>
+          <a:effectRef idx="2">
+            <a:schemeClr val="accent1"/>
+          </a:effectRef>
+          <a:fontRef idx="minor">
+            <a:schemeClr val="lt1"/>
+          </a:fontRef>
+        </p:style>
+        <p:txBody>
+          <a:bodyPr rtlCol="0" anchor="ctr" lIns="0" rIns="0" tIns="0" bIns="0"/>
+          <a:lstStyle/>
+          <a:p>
+            <a:pPr algn="ctr">
+              <a:spcAft>
+                <a:spcPts val="0"/>
+              </a:spcAft>
+            </a:pPr>
+            <a:r>
+              <a:rPr sz="2000" b="1">
+                <a:solidFill>
+                  <a:srgbClr val="FFFFFF"/>
+                </a:solidFill>
+                <a:latin typeface="Arial"/>
+              </a:rPr>
+              <a:t>3</a:t>
             </a:r>
           </a:p>
         </p:txBody>

--- a/outputs/plans/VANI_Persona_Design_Deck_v2_visual.pptx
+++ b/outputs/plans/VANI_Persona_Design_Deck_v2_visual.pptx
@@ -1276,7 +1276,7 @@
           <a:lstStyle/>
           <a:p>
             <a:r>
-              <a:t>Examples of the live signal tool at work. Every seller turn is read; the tool returns a mode (rushed, frustrated, confused, interested, declined, bot question, opt-out, language switch; question and handler questions as one-turn overlays) and a directive. In scripted test calls every switch type fired on the same turn, including a language switch from Marathi to Hindi to English. A switch log row records: turn, utterance, from mode, to mode, cue, directive id, change made, reason, whether asking for the meeting is allowed, milliseconds. Honest limits: voice, pace and pitch cannot change mid-call (a Sarvam platform limit), tone changes through wording; the keyword classifier is a baseline with about 0.60 measured accuracy on a small reviewed set, presented as a measurement not a production figure; a slower external classifier (Jev) was parked because of latency. Handler: with a handler name VANI says the name and books with that person; with a pool it says 'our IndiaMART team handles your account; the executive will introduce themselves when they call' and never a made-up name. 'Nahi chahiye' keeps the call open and restates the hook.</a:t>
+              <a:t>Examples of the live signal tool at work. Every seller turn is read; the tool returns a mode (rushed, frustrated, confused, interested, declined, bot question, opt-out, language switch; question and handler questions as one-turn overlays) and a directive. In scripted test calls every switch type fired on the same turn, including a language switch from Marathi to Hindi to English. A switch log row records: turn, utterance, from mode, to mode, cue, directive id, change made, reason, whether asking for the meeting is allowed, milliseconds. Honest limits: voice, pace and pitch cannot change mid-call (a Sarvam platform limit), tone changes through wording; the instant keyword classifier is a baseline with about 0.60 measured accuracy on a small reviewed set, presented as a measurement not a production figure. Jev (typesafe jev-1.13, a decision model reached through OpenRouter) judges mood with six questions (rushed, frustrated, confused, bot question, interested, language) in one request, about 0.5 s at the median; it was tested in live scripted calls through a relay, and it labels real call turns that score and improve the keyword tool between runs. Because its network round trip adds about 0.5 s to a spoken reply, in live calls it is used on fewer turns for now and the instant keyword tool answers first. Handler: with a handler name VANI says the name and books with that person; with a pool it says 'our IndiaMART team handles your account; the executive will introduce themselves when they call' and never a made-up name. 'Nahi chahiye' keeps the call open and restates the hook.</a:t>
             </a:r>
           </a:p>
         </p:txBody>
@@ -15882,6 +15882,67 @@
                 <a:latin typeface="Arial"/>
               </a:rPr>
               <a:t>The improvement loop feeds the next call's persona and hook</a:t>
+            </a:r>
+          </a:p>
+        </p:txBody>
+      </p:sp>
+      <p:sp>
+        <p:nvSpPr>
+          <p:cNvPr id="16" name="Rounded Rectangle 15"/>
+          <p:cNvSpPr/>
+          <p:nvPr/>
+        </p:nvSpPr>
+        <p:spPr>
+          <a:xfrm>
+            <a:off x="502920" y="5440680"/>
+            <a:ext cx="11338560" cy="594360"/>
+          </a:xfrm>
+          <a:prstGeom prst="roundRect">
+            <a:avLst>
+              <a:gd name="adj" fmla="val 30000"/>
+            </a:avLst>
+          </a:prstGeom>
+          <a:solidFill>
+            <a:srgbClr val="FFFFFF"/>
+          </a:solidFill>
+          <a:ln w="12700">
+            <a:solidFill>
+              <a:srgbClr val="2EA896"/>
+            </a:solidFill>
+          </a:ln>
+          <a:effectLst/>
+        </p:spPr>
+        <p:style>
+          <a:lnRef idx="1">
+            <a:schemeClr val="accent1"/>
+          </a:lnRef>
+          <a:fillRef idx="3">
+            <a:schemeClr val="accent1"/>
+          </a:fillRef>
+          <a:effectRef idx="2">
+            <a:schemeClr val="accent1"/>
+          </a:effectRef>
+          <a:fontRef idx="minor">
+            <a:schemeClr val="lt1"/>
+          </a:fontRef>
+        </p:style>
+        <p:txBody>
+          <a:bodyPr rtlCol="0" anchor="ctr" wrap="square" lIns="109728" rIns="109728" tIns="54864" bIns="54864"/>
+          <a:lstStyle/>
+          <a:p>
+            <a:pPr algn="ctr">
+              <a:spcAft>
+                <a:spcPts val="0"/>
+              </a:spcAft>
+            </a:pPr>
+            <a:r>
+              <a:rPr sz="1200" b="1">
+                <a:solidFill>
+                  <a:srgbClr val="002060"/>
+                </a:solidFill>
+                <a:latin typeface="Arial"/>
+              </a:rPr>
+              <a:t>Mood decision: instant keyword tool in-call, plus Jev decision model (6 mood questions, ~0.5 s) to label real calls and check the tool</a:t>
             </a:r>
           </a:p>
         </p:txBody>

--- a/outputs/plans/VANI_Persona_Design_Deck_v2_visual.pptx
+++ b/outputs/plans/VANI_Persona_Design_Deck_v2_visual.pptx
@@ -20,6 +20,9 @@
     <p:sldId id="271" r:id="rId25"/>
     <p:sldId id="272" r:id="rId26"/>
     <p:sldId id="273" r:id="rId27"/>
+    <p:sldId id="274" r:id="rId28"/>
+    <p:sldId id="275" r:id="rId29"/>
+    <p:sldId id="276" r:id="rId30"/>
     <p:sldId id="263" r:id="rId13"/>
   </p:sldIdLst>
   <p:sldSz cy="6858000" cx="12192000"/>
@@ -1160,7 +1163,7 @@
           <a:lstStyle/>
           <a:p>
             <a:r>
-              <a:t>A hook is the one reason VANI gives for the meeting; the hook decides what the first sentence is about. Money lead: a live or recent buy lead with its order value, product, quantity and city (never the buyer's name, never 'this order is yours'); used first when one exists. Profile gap: the catalogue is weak, for example products without photo or price; mainly for free sellers. Category demand: buy requirements in the seller's own category, from counts. Unused credits (paid only): credits lapsed or unused; never says the credits come back. Lead quality fix (paid only): many rejected leads; offers to set filters with the executive. Enquiry drop: enquiries fell against last quarter; never names a cause that is not in the data. Peer usage: at least five same-size sellers in the same category bought leads; VANI may name a similar paid seller with city and 'for many years' but never a figure next to a named seller. Resolve grievance: an open complaint or a grievance in a recent call; said first, before any other hook. The agent picks one main hook and a backup, each with cited evidence; eligibility is computed by script from the data. In the old bot experiment the enquiry-count opening beat the 'interest' and 'discovery' openings; only 13 of 73 segment rows are statistically significant, so hook preferences are starting points the learning loop updates.</a:t>
+              <a:t>Illustrative sellers (invented for the slide, not real data). The same engine builds a different persona for each seller. Scoreboards by seller segment give the top two personas; the agent selects one and decides every field (voice gender, pace, pitch, language start, language mix, formality, sophistication, warmth, empathy, words per reply, hook, opening) with a cited reason: seller evidence first, then hierarchy data from earlier calls, else the persona's own value. Row 1: a free seller in a small town in a Telugu-speaking region gets the warm local helper in their own language with simple words and the profile-gap hook. Row 2: a paid seller with many buy leads who is always busy gets the brief persona, one short line and a callback offer, with the unused-credits or money-lead hook. Row 3: a high-turnover owner gets the senior advisor, English-led, brief, with the peer-usage hook. Row 4: a seller with an open complaint gets the problem-solver, who acknowledges the problem first and does not pitch. 15% of calls use the control persona P0 so uplift can be measured.</a:t>
             </a:r>
           </a:p>
         </p:txBody>
@@ -1218,7 +1221,7 @@
           <a:lstStyle/>
           <a:p>
             <a:r>
-              <a:t>START of call: the Sarvam voice agent's start tool applies the persona before the first word: voice, pace, pitch, the start language and the opening line; the persona and hook fill one fixed prompt through per-call variables. MID-CALL: a signal tool runs on every seller turn and returns the seller's mode and a directive that overrides the speaking style for that reply only (rushed: one short sentence and a callback; confused: one idea in short phrases; frustrated: brief apology, no pitch; interested: answer briefly and ask for the day and time; declined: keep the call open; bot question: sidestep once, then 'virtual assistant'; opt-out: apologise and end; language switch: reply in the seller's language). Voice, pace and pitch are fixed after the start (platform limit); tone changes through the words. Every change is written to a switch log: turn, utterance, from mode, to mode, cue, change, reason. END: the booking tool records the meeting with the seller's sales handler when a name exists (for a pool: 'our IndiaMART executive'), or a callback; after booking VANI asks 'anything else?' and ends only on the seller's no or goodbye; the call ends early only on an explicit request (stop calling, cut the call, do not call); 'not interested' keeps the line open (the hook again, then one topic per 'no'). VANI never quotes a plan or price. IMPROVE: Claude reviews the call against compliance rules (7 fatal and 13 non-fatal items) and the call-rule checks R1-R6 (pass, fail or unknown per language); results update persona and hook scoreboards by seller segment and per-field value groups; reports show meeting rate by reason type and uplift against the control. Scoreboards are empty at the start; picks are a division-based lean plus a random draw until real calls arrive.</a:t>
+              <a:t>A hook is the one reason VANI gives for the meeting; the hook decides what the first sentence is about. Money lead: a live or recent buy lead with its order value, product, quantity and city (never the buyer's name, never 'this order is yours'); used first when one exists. Profile gap: the catalogue is weak, for example products without photo or price; mainly for free sellers. Category demand: buy requirements in the seller's own category, from counts. Unused credits (paid only): credits lapsed or unused; never says the credits come back. Lead quality fix (paid only): many rejected leads; offers to set filters with the executive. Enquiry drop: enquiries fell against last quarter; never names a cause that is not in the data. Peer usage: at least five same-size sellers in the same category bought leads; VANI may name a similar paid seller with city and 'for many years' but never a figure next to a named seller. Resolve grievance: an open complaint or a grievance in a recent call; said first, before any other hook. The agent picks one main hook and a backup, each with cited evidence; eligibility is computed by script from the data. In the old bot experiment the enquiry-count opening beat the 'interest' and 'discovery' openings; only 13 of 73 segment rows are statistically significant, so hook preferences are starting points the learning loop updates.</a:t>
             </a:r>
           </a:p>
         </p:txBody>
@@ -1276,7 +1279,7 @@
           <a:lstStyle/>
           <a:p>
             <a:r>
-              <a:t>Examples of the live signal tool at work. Every seller turn is read; the tool returns a mode (rushed, frustrated, confused, interested, declined, bot question, opt-out, language switch; question and handler questions as one-turn overlays) and a directive. In scripted test calls every switch type fired on the same turn, including a language switch from Marathi to Hindi to English. A switch log row records: turn, utterance, from mode, to mode, cue, directive id, change made, reason, whether asking for the meeting is allowed, milliseconds. Honest limits: voice, pace and pitch cannot change mid-call (a Sarvam platform limit), tone changes through wording; the instant keyword classifier is a baseline with about 0.60 measured accuracy on a small reviewed set, presented as a measurement not a production figure. Jev (typesafe jev-1.13, a decision model reached through OpenRouter) judges mood with six questions (rushed, frustrated, confused, bot question, interested, language) in one request, about 0.5 s at the median; it was tested in live scripted calls through a relay, and it labels real call turns that score and improve the keyword tool between runs. Because its network round trip adds about 0.5 s to a spoken reply, in live calls it is used on fewer turns for now and the instant keyword tool answers first. Handler: with a handler name VANI says the name and books with that person; with a pool it says 'our IndiaMART team handles your account; the executive will introduce themselves when they call' and never a made-up name. 'Nahi chahiye' keeps the call open and restates the hook.</a:t>
+              <a:t>START of call: the Sarvam voice agent's start tool applies the persona before the first word: voice, pace, pitch, the start language and the opening line; the persona and hook fill one fixed prompt through per-call variables. MID-CALL: a signal tool runs on every seller turn and returns the seller's mode and a directive that overrides the speaking style for that reply only (rushed: one short sentence and a callback; confused: one idea in short phrases; frustrated: brief apology, no pitch; interested: answer briefly and ask for the day and time; declined: keep the call open; bot question: sidestep once, then 'virtual assistant'; opt-out: apologise and end; language switch: reply in the seller's language). Voice, pace and pitch are fixed after the start (platform limit); tone changes through the words. Every change is written to a switch log: turn, utterance, from mode, to mode, cue, change, reason. END: the booking tool records the meeting with the seller's sales handler when a name exists (for a pool: 'our IndiaMART executive'), or a callback; after booking VANI asks 'anything else?' and ends only on the seller's no or goodbye; the call ends early only on an explicit request (stop calling, cut the call, do not call); 'not interested' keeps the line open (the hook again, then one topic per 'no'). VANI never quotes a plan or price. IMPROVE: Claude reviews the call against compliance rules (7 fatal and 13 non-fatal items) and the call-rule checks R1-R6 (pass, fail or unknown per language); results update persona and hook scoreboards by seller segment and per-field value groups; reports show meeting rate by reason type and uplift against the control. Scoreboards are empty at the start; picks are a division-based lean plus a random draw until real calls arrive.</a:t>
             </a:r>
           </a:p>
         </p:txBody>
@@ -1334,7 +1337,7 @@
           <a:lstStyle/>
           <a:p>
             <a:r>
-              <a:t>Context builder: offline PS07 and Global Context files, internal APIs (data warehouse, user service, company page) and read-only queries on the buy-lead and catalogue databases write one folder per seller (laptop, VPN). Safe export: names become tokens, a hard PII check refuses any leak, sources are stripped; real names stay on the laptop. Persona agent: Claude Opus 5.5 in an isolated Daytona sandbox; scripts compute traits, states, guards and hook eligibility and propose the top two personas; the agent selects one and decides every field with a checkable reason; a single writer tool, read log, stop gate and validator refuse anything uncited. Compile: the validated persona becomes the Sarvam agent's per-call variables and prompt sections; names are filled in only then, on the laptop. Voice call: the Sarvam voice agent (speech to text, language model, text to speech) with a start tool, a signal tool and a booking tool, one fixed prompt template with per-call variables, and the IndiaMART knowledge base. Review and learning: Claude reviews each call; scoreboards update by seller segment. Compliance: identity rule (never AI, bot or manager; never claims to be human; if pressed, 'IndiaMART's virtual assistant'), verified facts only, no selling on the call, 7 fatal and 13 non-fatal rubric items checked before and after each call; humans approve persona library changes.</a:t>
+              <a:t>Examples of the live signal tool at work. Every seller turn is read; the tool returns a mode (rushed, frustrated, confused, interested, declined, bot question, opt-out, language switch; question and handler questions as one-turn overlays) and a directive. In scripted test calls every switch type fired on the same turn, including a language switch from Marathi to Hindi to English. A switch log row records: turn, utterance, from mode, to mode, cue, directive id, change made, reason, whether asking for the meeting is allowed, milliseconds. Honest limits: voice, pace and pitch cannot change mid-call (a Sarvam platform limit), tone changes through wording; the instant keyword classifier is a baseline with about 0.60 measured accuracy on a small reviewed set, presented as a measurement not a production figure. Jev (typesafe jev-1.13, a decision model reached through OpenRouter) judges mood with six questions (rushed, frustrated, confused, bot question, interested, language) in one request, about 0.5 s at the median; it was tested in live scripted calls through a relay, and it labels real call turns that score and improve the keyword tool between runs. Because its network round trip adds about 0.5 s to a spoken reply, in live calls it is used on fewer turns for now and the instant keyword tool answers first. Handler: with a handler name VANI says the name and books with that person; with a pool it says 'our IndiaMART team handles your account; the executive will introduce themselves when they call' and never a made-up name. 'Nahi chahiye' keeps the call open and restates the hook.</a:t>
             </a:r>
           </a:p>
         </p:txBody>
@@ -1392,7 +1395,7 @@
           <a:lstStyle/>
           <a:p>
             <a:r>
-              <a:t>Now: meeting arrangement. The right persona and hook per seller to book the executive meeting, with live adaptation. Next: seller enrichment. Catalogue improvement calls (photos, prices, categories) with suggestions drawn from the seller's top categories and similar sellers; a top-category hook; profile completion with the seller on the call. Personalise further, per seller: (1) a personalised objective for the seller persona: the call goal itself is chosen per seller from meeting, enrichment or NPS (net promoter score); (2) a preferred call time per seller, to improve the share of calls that are answered (call scheduling is handled outside the persona today); (3) a preferred or suggested language per seller, from the seller's location, GST state and the languages heard on earlier calls. Platform: learning from real calls, more languages and voices, production telephony at scale (today the phone route reaches only whitelisted test numbers).</a:t>
+              <a:t>Two layers decide the seller's mood. Layer 1, the keyword tool, runs inside the Sarvam call on every seller turn in well under a millisecond, so the directive applies on the same turn; its measured accuracy is about 0.60 on a small reviewed set, presented as a measurement. Layer 2, Jev (typesafe jev-1.13, a decision model reached through OpenRouter), answers six yes/no mood questions in one request (rushed, frustrated, confused, bot question, interested, language) with a probability for each; about 0.5 s at the median, a tiny fraction of a cent per turn; 49 of 51 correct on a native-script test set and 10 of 10 on a tricky set; it catches cases the keywords miss, such as an irritated 'I am asking again, tell me the price or I hang up'. Jev labels real call turns, which scores and improves the keyword tool between runs (the gold set), and we tested it in live scripted calls through a relay. A web call adds about 0.5 s to a spoken reply, so in live calls it is used on fewer turns for now and the instant keyword tool answers first; a hybrid that asks Jev only on unclear turns within a strict time budget is the next step. We also evaluated a Sarvam chat model, a small trained classifier and fast hosted models, and measured their latency before choosing this design.</a:t>
             </a:r>
           </a:p>
         </p:txBody>
@@ -1406,6 +1409,180 @@
 </file>
 
 <file path=ppt/notesSlides/notesSlide18.xml><?xml version="1.0" encoding="utf-8"?>
+<p:notes xmlns:a="http://schemas.openxmlformats.org/drawingml/2006/main" xmlns:p="http://schemas.openxmlformats.org/presentationml/2006/main" xmlns:r="http://schemas.openxmlformats.org/officeDocument/2006/relationships">
+  <p:cSld>
+    <p:spTree>
+      <p:nvGrpSpPr>
+        <p:cNvPr id="1" name=""/>
+        <p:cNvGrpSpPr/>
+        <p:nvPr/>
+      </p:nvGrpSpPr>
+      <p:grpSpPr>
+        <a:xfrm>
+          <a:off x="0" y="0"/>
+          <a:ext cx="0" cy="0"/>
+          <a:chOff x="0" y="0"/>
+          <a:chExt cx="0" cy="0"/>
+        </a:xfrm>
+      </p:grpSpPr>
+      <p:sp>
+        <p:nvSpPr>
+          <p:cNvPr id="2" name="Slide Image Placeholder 1"/>
+          <p:cNvSpPr>
+            <a:spLocks noGrp="1"/>
+          </p:cNvSpPr>
+          <p:nvPr>
+            <p:ph type="sldImg" idx="2"/>
+          </p:nvPr>
+        </p:nvSpPr>
+        <p:spPr/>
+      </p:sp>
+      <p:sp>
+        <p:nvSpPr>
+          <p:cNvPr id="3" name="Notes Placeholder 2"/>
+          <p:cNvSpPr>
+            <a:spLocks noGrp="1"/>
+          </p:cNvSpPr>
+          <p:nvPr>
+            <p:ph type="body" idx="1"/>
+          </p:nvPr>
+        </p:nvSpPr>
+        <p:spPr/>
+        <p:txBody>
+          <a:bodyPr/>
+          <a:lstStyle/>
+          <a:p>
+            <a:r>
+              <a:t>The loop runs between calls, never during one. 1 Call: the persona and hook are applied at the start, the live signal tool adapts every turn, the call is recorded with a switch log. 2 Review: Claude reviews the call against the compliance rubric (7 fatal and 13 non-fatal items) and the call-rule checks R1 to R6 (pass, fail or unknown per language), judges persona fit per dimension and whether the hook landed. 3 Label: Jev labels real seller turns by mood; the labels build a gold set that scores the keyword tool, and missed or wrong switches become proposals for keyword and directive changes; each proposal must not be worse on the gold set and needs a human's approval. 4 Score: the result is credited to the persona arm the agent selected, to each field's value group with its reason type (seller evidence, hierarchy data or the persona's own value), to the start rule that fixed a value, and to the hook. 5 Update: scoreboards by seller segment (all sellers, division, turnover band, order value tier, zone, state, category group) are updated; reports show meeting rate by reason type and by start rule, and uplift of each persona against the control persona P0 (15% of calls). The next call starts from a better persona and hook. Scoreboards start empty today: every pick is a division-based lean plus a random draw until real calls arrive; new persona library versions need a person's approval.</a:t>
+            </a:r>
+          </a:p>
+        </p:txBody>
+      </p:sp>
+    </p:spTree>
+  </p:cSld>
+  <p:clrMapOvr>
+    <a:masterClrMapping/>
+  </p:clrMapOvr>
+</p:notes>
+</file>
+
+<file path=ppt/notesSlides/notesSlide19.xml><?xml version="1.0" encoding="utf-8"?>
+<p:notes xmlns:a="http://schemas.openxmlformats.org/drawingml/2006/main" xmlns:p="http://schemas.openxmlformats.org/presentationml/2006/main" xmlns:r="http://schemas.openxmlformats.org/officeDocument/2006/relationships">
+  <p:cSld>
+    <p:spTree>
+      <p:nvGrpSpPr>
+        <p:cNvPr id="1" name=""/>
+        <p:cNvGrpSpPr/>
+        <p:nvPr/>
+      </p:nvGrpSpPr>
+      <p:grpSpPr>
+        <a:xfrm>
+          <a:off x="0" y="0"/>
+          <a:ext cx="0" cy="0"/>
+          <a:chOff x="0" y="0"/>
+          <a:chExt cx="0" cy="0"/>
+        </a:xfrm>
+      </p:grpSpPr>
+      <p:sp>
+        <p:nvSpPr>
+          <p:cNvPr id="2" name="Slide Image Placeholder 1"/>
+          <p:cNvSpPr>
+            <a:spLocks noGrp="1"/>
+          </p:cNvSpPr>
+          <p:nvPr>
+            <p:ph type="sldImg" idx="2"/>
+          </p:nvPr>
+        </p:nvSpPr>
+        <p:spPr/>
+      </p:sp>
+      <p:sp>
+        <p:nvSpPr>
+          <p:cNvPr id="3" name="Notes Placeholder 2"/>
+          <p:cNvSpPr>
+            <a:spLocks noGrp="1"/>
+          </p:cNvSpPr>
+          <p:nvPr>
+            <p:ph type="body" idx="1"/>
+          </p:nvPr>
+        </p:nvSpPr>
+        <p:spPr/>
+        <p:txBody>
+          <a:bodyPr/>
+          <a:lstStyle/>
+          <a:p>
+            <a:r>
+              <a:t>Context builder: offline PS07 and Global Context files, internal APIs (data warehouse, user service, company page) and read-only queries on the buy-lead and catalogue databases write one folder per seller (laptop, VPN). Safe export: names become tokens, a hard PII check refuses any leak, sources are stripped; real names stay on the laptop. Persona agent: Claude Opus 5.5 in an isolated Daytona sandbox; scripts compute traits, states, guards and hook eligibility and propose the top two personas; the agent selects one and decides every field with a checkable reason; a single writer tool, read log, stop gate and validator refuse anything uncited. Compile: the validated persona becomes the Sarvam agent's per-call variables and prompt sections; names are filled in only then, on the laptop. Voice call: the Sarvam voice agent (speech to text, language model, text to speech) with a start tool, a signal tool and a booking tool, one fixed prompt template with per-call variables, and the IndiaMART knowledge base. Review and learning: Claude reviews each call; scoreboards update by seller segment. Compliance: identity rule (never AI, bot or manager; never claims to be human; if pressed, 'IndiaMART's virtual assistant'), verified facts only, no selling on the call, 7 fatal and 13 non-fatal rubric items checked before and after each call; humans approve persona library changes.</a:t>
+            </a:r>
+          </a:p>
+        </p:txBody>
+      </p:sp>
+    </p:spTree>
+  </p:cSld>
+  <p:clrMapOvr>
+    <a:masterClrMapping/>
+  </p:clrMapOvr>
+</p:notes>
+</file>
+
+<file path=ppt/notesSlides/notesSlide20.xml><?xml version="1.0" encoding="utf-8"?>
+<p:notes xmlns:a="http://schemas.openxmlformats.org/drawingml/2006/main" xmlns:p="http://schemas.openxmlformats.org/presentationml/2006/main" xmlns:r="http://schemas.openxmlformats.org/officeDocument/2006/relationships">
+  <p:cSld>
+    <p:spTree>
+      <p:nvGrpSpPr>
+        <p:cNvPr id="1" name=""/>
+        <p:cNvGrpSpPr/>
+        <p:nvPr/>
+      </p:nvGrpSpPr>
+      <p:grpSpPr>
+        <a:xfrm>
+          <a:off x="0" y="0"/>
+          <a:ext cx="0" cy="0"/>
+          <a:chOff x="0" y="0"/>
+          <a:chExt cx="0" cy="0"/>
+        </a:xfrm>
+      </p:grpSpPr>
+      <p:sp>
+        <p:nvSpPr>
+          <p:cNvPr id="2" name="Slide Image Placeholder 1"/>
+          <p:cNvSpPr>
+            <a:spLocks noGrp="1"/>
+          </p:cNvSpPr>
+          <p:nvPr>
+            <p:ph type="sldImg" idx="2"/>
+          </p:nvPr>
+        </p:nvSpPr>
+        <p:spPr/>
+      </p:sp>
+      <p:sp>
+        <p:nvSpPr>
+          <p:cNvPr id="3" name="Notes Placeholder 2"/>
+          <p:cNvSpPr>
+            <a:spLocks noGrp="1"/>
+          </p:cNvSpPr>
+          <p:nvPr>
+            <p:ph type="body" idx="1"/>
+          </p:nvPr>
+        </p:nvSpPr>
+        <p:spPr/>
+        <p:txBody>
+          <a:bodyPr/>
+          <a:lstStyle/>
+          <a:p>
+            <a:r>
+              <a:t>Now: meeting arrangement. The right persona and hook per seller to book the executive meeting, with live adaptation. Next: seller enrichment. Catalogue improvement calls (photos, prices, categories) with suggestions drawn from the seller's top categories and similar sellers; a top-category hook; profile completion with the seller on the call. Personalise further, per seller: (1) a personalised objective for the seller persona: the call goal itself is chosen per seller from meeting, enrichment or NPS (net promoter score); (2) a preferred call time per seller, to improve the share of calls that are answered (call scheduling is handled outside the persona today); (3) a preferred or suggested language per seller, from the seller's location, GST state and the languages heard on earlier calls. Platform: learning from real calls, more languages and voices, production telephony at scale (today the phone route reaches only whitelisted test numbers).</a:t>
+            </a:r>
+          </a:p>
+        </p:txBody>
+      </p:sp>
+    </p:spTree>
+  </p:cSld>
+  <p:clrMapOvr>
+    <a:masterClrMapping/>
+  </p:clrMapOvr>
+</p:notes>
+</file>
+
+<file path=ppt/notesSlides/notesSlide21.xml><?xml version="1.0" encoding="utf-8"?>
 <p:notes xmlns:a="http://schemas.openxmlformats.org/drawingml/2006/main" xmlns:p="http://schemas.openxmlformats.org/presentationml/2006/main" xmlns:r="http://schemas.openxmlformats.org/officeDocument/2006/relationships">
   <p:cSld>
     <p:spTree>
@@ -14260,7 +14437,7 @@
           <a:lstStyle/>
           <a:p>
             <a:r>
-              <a:t>8 Hooks: Why Should The Seller Meet Us</a:t>
+              <a:t>Same Engine, Different Persona</a:t>
             </a:r>
           </a:p>
         </p:txBody>
@@ -14273,8 +14450,8 @@
         </p:nvSpPr>
         <p:spPr>
           <a:xfrm>
-            <a:off x="502920" y="1417320"/>
-            <a:ext cx="2743200" cy="1691640"/>
+            <a:off x="566928" y="1371600"/>
+            <a:ext cx="3383280" cy="868680"/>
           </a:xfrm>
           <a:prstGeom prst="roundRect">
             <a:avLst>
@@ -14313,13 +14490,13 @@
               </a:spcAft>
             </a:pPr>
             <a:r>
-              <a:rPr sz="1600" b="1">
+              <a:rPr sz="1500" b="1">
                 <a:solidFill>
                   <a:srgbClr val="FFFFFF"/>
                 </a:solidFill>
                 <a:latin typeface="Arial"/>
               </a:rPr>
-              <a:t>Money lead</a:t>
+              <a:t>Scoreboards</a:t>
             </a:r>
           </a:p>
           <a:p>
@@ -14329,40 +14506,37 @@
               </a:spcAft>
             </a:pPr>
             <a:r>
-              <a:rPr sz="1200" b="0">
+              <a:rPr sz="1100" b="0">
                 <a:solidFill>
                   <a:srgbClr val="FFFFFF"/>
                 </a:solidFill>
                 <a:latin typeface="Arial"/>
               </a:rPr>
-              <a:t>a real order with its value</a:t>
-            </a:r>
-          </a:p>
-        </p:txBody>
-      </p:sp>
-      <p:sp>
-        <p:nvSpPr>
-          <p:cNvPr id="4" name="Rounded Rectangle 3"/>
+              <a:t>top 2 personas</a:t>
+            </a:r>
+          </a:p>
+        </p:txBody>
+      </p:sp>
+      <p:sp>
+        <p:nvSpPr>
+          <p:cNvPr id="4" name="Right Arrow 3"/>
           <p:cNvSpPr/>
           <p:nvPr/>
         </p:nvSpPr>
         <p:spPr>
           <a:xfrm>
-            <a:off x="3429000" y="1417320"/>
-            <a:ext cx="2743200" cy="1691640"/>
-          </a:xfrm>
-          <a:prstGeom prst="roundRect">
-            <a:avLst>
-              <a:gd name="adj" fmla="val 6000"/>
-            </a:avLst>
-          </a:prstGeom>
-          <a:solidFill>
-            <a:srgbClr val="C00000"/>
+            <a:off x="3995928" y="1600200"/>
+            <a:ext cx="365760" cy="365760"/>
+          </a:xfrm>
+          <a:prstGeom prst="rightArrow">
+            <a:avLst/>
+          </a:prstGeom>
+          <a:solidFill>
+            <a:srgbClr val="595959"/>
           </a:solidFill>
           <a:ln>
             <a:noFill/>
           </a:ln>
-          <a:effectLst/>
         </p:spPr>
         <p:style>
           <a:lnRef idx="1">
@@ -14379,39 +14553,10 @@
           </a:fontRef>
         </p:style>
         <p:txBody>
-          <a:bodyPr rtlCol="0" anchor="ctr" wrap="square" lIns="109728" rIns="109728" tIns="54864" bIns="54864"/>
+          <a:bodyPr rtlCol="0" anchor="ctr"/>
           <a:lstStyle/>
           <a:p>
-            <a:pPr algn="ctr">
-              <a:spcAft>
-                <a:spcPts val="200"/>
-              </a:spcAft>
-            </a:pPr>
-            <a:r>
-              <a:rPr sz="1600" b="1">
-                <a:solidFill>
-                  <a:srgbClr val="FFFFFF"/>
-                </a:solidFill>
-                <a:latin typeface="Arial"/>
-              </a:rPr>
-              <a:t>Profile gap</a:t>
-            </a:r>
-          </a:p>
-          <a:p>
-            <a:pPr algn="ctr">
-              <a:spcAft>
-                <a:spcPts val="0"/>
-              </a:spcAft>
-            </a:pPr>
-            <a:r>
-              <a:rPr sz="1200" b="0">
-                <a:solidFill>
-                  <a:srgbClr val="FFFFFF"/>
-                </a:solidFill>
-                <a:latin typeface="Arial"/>
-              </a:rPr>
-              <a:t>photos and prices missing</a:t>
-            </a:r>
+            <a:pPr algn="ctr"/>
           </a:p>
         </p:txBody>
       </p:sp>
@@ -14423,8 +14568,8 @@
         </p:nvSpPr>
         <p:spPr>
           <a:xfrm>
-            <a:off x="6355080" y="1417320"/>
-            <a:ext cx="2743200" cy="1691640"/>
+            <a:off x="4407408" y="1371600"/>
+            <a:ext cx="3383280" cy="868680"/>
           </a:xfrm>
           <a:prstGeom prst="roundRect">
             <a:avLst>
@@ -14432,7 +14577,7 @@
             </a:avLst>
           </a:prstGeom>
           <a:solidFill>
-            <a:srgbClr val="2EA896"/>
+            <a:srgbClr val="C00000"/>
           </a:solidFill>
           <a:ln>
             <a:noFill/>
@@ -14463,13 +14608,13 @@
               </a:spcAft>
             </a:pPr>
             <a:r>
-              <a:rPr sz="1600" b="1">
+              <a:rPr sz="1500" b="1">
                 <a:solidFill>
                   <a:srgbClr val="FFFFFF"/>
                 </a:solidFill>
                 <a:latin typeface="Arial"/>
               </a:rPr>
-              <a:t>Category demand</a:t>
+              <a:t>Agent picks 1</a:t>
             </a:r>
           </a:p>
           <a:p>
@@ -14479,40 +14624,37 @@
               </a:spcAft>
             </a:pPr>
             <a:r>
-              <a:rPr sz="1200" b="0">
+              <a:rPr sz="1100" b="0">
                 <a:solidFill>
                   <a:srgbClr val="FFFFFF"/>
                 </a:solidFill>
                 <a:latin typeface="Arial"/>
               </a:rPr>
-              <a:t>buyers asking in your category</a:t>
-            </a:r>
-          </a:p>
-        </p:txBody>
-      </p:sp>
-      <p:sp>
-        <p:nvSpPr>
-          <p:cNvPr id="6" name="Rounded Rectangle 5"/>
+              <a:t>from the seller's data</a:t>
+            </a:r>
+          </a:p>
+        </p:txBody>
+      </p:sp>
+      <p:sp>
+        <p:nvSpPr>
+          <p:cNvPr id="6" name="Right Arrow 5"/>
           <p:cNvSpPr/>
           <p:nvPr/>
         </p:nvSpPr>
         <p:spPr>
           <a:xfrm>
-            <a:off x="9281160" y="1417320"/>
-            <a:ext cx="2743200" cy="1691640"/>
-          </a:xfrm>
-          <a:prstGeom prst="roundRect">
-            <a:avLst>
-              <a:gd name="adj" fmla="val 6000"/>
-            </a:avLst>
-          </a:prstGeom>
-          <a:solidFill>
-            <a:srgbClr val="5B3E96"/>
+            <a:off x="7836408" y="1600200"/>
+            <a:ext cx="365760" cy="365760"/>
+          </a:xfrm>
+          <a:prstGeom prst="rightArrow">
+            <a:avLst/>
+          </a:prstGeom>
+          <a:solidFill>
+            <a:srgbClr val="595959"/>
           </a:solidFill>
           <a:ln>
             <a:noFill/>
           </a:ln>
-          <a:effectLst/>
         </p:spPr>
         <p:style>
           <a:lnRef idx="1">
@@ -14529,39 +14671,10 @@
           </a:fontRef>
         </p:style>
         <p:txBody>
-          <a:bodyPr rtlCol="0" anchor="ctr" wrap="square" lIns="109728" rIns="109728" tIns="54864" bIns="54864"/>
+          <a:bodyPr rtlCol="0" anchor="ctr"/>
           <a:lstStyle/>
           <a:p>
-            <a:pPr algn="ctr">
-              <a:spcAft>
-                <a:spcPts val="200"/>
-              </a:spcAft>
-            </a:pPr>
-            <a:r>
-              <a:rPr sz="1600" b="1">
-                <a:solidFill>
-                  <a:srgbClr val="FFFFFF"/>
-                </a:solidFill>
-                <a:latin typeface="Arial"/>
-              </a:rPr>
-              <a:t>Unused credits</a:t>
-            </a:r>
-          </a:p>
-          <a:p>
-            <a:pPr algn="ctr">
-              <a:spcAft>
-                <a:spcPts val="0"/>
-              </a:spcAft>
-            </a:pPr>
-            <a:r>
-              <a:rPr sz="1200" b="0">
-                <a:solidFill>
-                  <a:srgbClr val="FFFFFF"/>
-                </a:solidFill>
-                <a:latin typeface="Arial"/>
-              </a:rPr>
-              <a:t>paid for leads, not using them</a:t>
-            </a:r>
+            <a:pPr algn="ctr"/>
           </a:p>
         </p:txBody>
       </p:sp>
@@ -14573,8 +14686,8 @@
         </p:nvSpPr>
         <p:spPr>
           <a:xfrm>
-            <a:off x="502920" y="3337560"/>
-            <a:ext cx="2743200" cy="1691640"/>
+            <a:off x="8247888" y="1371600"/>
+            <a:ext cx="3383280" cy="868680"/>
           </a:xfrm>
           <a:prstGeom prst="roundRect">
             <a:avLst>
@@ -14582,7 +14695,7 @@
             </a:avLst>
           </a:prstGeom>
           <a:solidFill>
-            <a:srgbClr val="E08A00"/>
+            <a:srgbClr val="2EA896"/>
           </a:solidFill>
           <a:ln>
             <a:noFill/>
@@ -14613,13 +14726,13 @@
               </a:spcAft>
             </a:pPr>
             <a:r>
-              <a:rPr sz="1600" b="1">
+              <a:rPr sz="1500" b="1">
                 <a:solidFill>
                   <a:srgbClr val="FFFFFF"/>
                 </a:solidFill>
                 <a:latin typeface="Arial"/>
               </a:rPr>
-              <a:t>Lead quality fix</a:t>
+              <a:t>Tunes 12 fields</a:t>
             </a:r>
           </a:p>
           <a:p>
@@ -14629,38 +14742,196 @@
               </a:spcAft>
             </a:pPr>
             <a:r>
-              <a:rPr sz="1200" b="0">
+              <a:rPr sz="1100" b="0">
                 <a:solidFill>
                   <a:srgbClr val="FFFFFF"/>
                 </a:solidFill>
                 <a:latin typeface="Arial"/>
               </a:rPr>
-              <a:t>set filters for the right buyers</a:t>
-            </a:r>
-          </a:p>
-        </p:txBody>
-      </p:sp>
-      <p:sp>
-        <p:nvSpPr>
-          <p:cNvPr id="8" name="Rounded Rectangle 7"/>
+              <a:t>each with a cited reason</a:t>
+            </a:r>
+          </a:p>
+        </p:txBody>
+      </p:sp>
+      <p:sp>
+        <p:nvSpPr>
+          <p:cNvPr id="8" name="TextBox 7"/>
+          <p:cNvSpPr txBox="1"/>
+          <p:nvPr/>
+        </p:nvSpPr>
+        <p:spPr>
+          <a:xfrm>
+            <a:off x="566928" y="2377440"/>
+            <a:ext cx="3291840" cy="274320"/>
+          </a:xfrm>
+          <a:prstGeom prst="rect">
+            <a:avLst/>
+          </a:prstGeom>
+          <a:noFill/>
+        </p:spPr>
+        <p:txBody>
+          <a:bodyPr wrap="square">
+            <a:spAutoFit/>
+          </a:bodyPr>
+          <a:lstStyle/>
+          <a:p>
+            <a:pPr algn="l">
+              <a:spcAft>
+                <a:spcPts val="0"/>
+              </a:spcAft>
+            </a:pPr>
+            <a:r>
+              <a:rPr sz="1000" b="1">
+                <a:solidFill>
+                  <a:srgbClr val="595959"/>
+                </a:solidFill>
+                <a:latin typeface="Arial"/>
+              </a:rPr>
+              <a:t>SELLER (illustrative)</a:t>
+            </a:r>
+          </a:p>
+        </p:txBody>
+      </p:sp>
+      <p:sp>
+        <p:nvSpPr>
+          <p:cNvPr id="9" name="TextBox 8"/>
+          <p:cNvSpPr txBox="1"/>
+          <p:nvPr/>
+        </p:nvSpPr>
+        <p:spPr>
+          <a:xfrm>
+            <a:off x="4114800" y="2377440"/>
+            <a:ext cx="2468880" cy="274320"/>
+          </a:xfrm>
+          <a:prstGeom prst="rect">
+            <a:avLst/>
+          </a:prstGeom>
+          <a:noFill/>
+        </p:spPr>
+        <p:txBody>
+          <a:bodyPr wrap="square">
+            <a:spAutoFit/>
+          </a:bodyPr>
+          <a:lstStyle/>
+          <a:p>
+            <a:pPr algn="l">
+              <a:spcAft>
+                <a:spcPts val="0"/>
+              </a:spcAft>
+            </a:pPr>
+            <a:r>
+              <a:rPr sz="1000" b="1">
+                <a:solidFill>
+                  <a:srgbClr val="595959"/>
+                </a:solidFill>
+                <a:latin typeface="Arial"/>
+              </a:rPr>
+              <a:t>PERSONA</a:t>
+            </a:r>
+          </a:p>
+        </p:txBody>
+      </p:sp>
+      <p:sp>
+        <p:nvSpPr>
+          <p:cNvPr id="10" name="TextBox 9"/>
+          <p:cNvSpPr txBox="1"/>
+          <p:nvPr/>
+        </p:nvSpPr>
+        <p:spPr>
+          <a:xfrm>
+            <a:off x="6720840" y="2377440"/>
+            <a:ext cx="2286000" cy="274320"/>
+          </a:xfrm>
+          <a:prstGeom prst="rect">
+            <a:avLst/>
+          </a:prstGeom>
+          <a:noFill/>
+        </p:spPr>
+        <p:txBody>
+          <a:bodyPr wrap="square">
+            <a:spAutoFit/>
+          </a:bodyPr>
+          <a:lstStyle/>
+          <a:p>
+            <a:pPr algn="l">
+              <a:spcAft>
+                <a:spcPts val="0"/>
+              </a:spcAft>
+            </a:pPr>
+            <a:r>
+              <a:rPr sz="1000" b="1">
+                <a:solidFill>
+                  <a:srgbClr val="595959"/>
+                </a:solidFill>
+                <a:latin typeface="Arial"/>
+              </a:rPr>
+              <a:t>HOOK</a:t>
+            </a:r>
+          </a:p>
+        </p:txBody>
+      </p:sp>
+      <p:sp>
+        <p:nvSpPr>
+          <p:cNvPr id="11" name="TextBox 10"/>
+          <p:cNvSpPr txBox="1"/>
+          <p:nvPr/>
+        </p:nvSpPr>
+        <p:spPr>
+          <a:xfrm>
+            <a:off x="9144000" y="2377440"/>
+            <a:ext cx="2468880" cy="274320"/>
+          </a:xfrm>
+          <a:prstGeom prst="rect">
+            <a:avLst/>
+          </a:prstGeom>
+          <a:noFill/>
+        </p:spPr>
+        <p:txBody>
+          <a:bodyPr wrap="square">
+            <a:spAutoFit/>
+          </a:bodyPr>
+          <a:lstStyle/>
+          <a:p>
+            <a:pPr algn="l">
+              <a:spcAft>
+                <a:spcPts val="0"/>
+              </a:spcAft>
+            </a:pPr>
+            <a:r>
+              <a:rPr sz="1000" b="1">
+                <a:solidFill>
+                  <a:srgbClr val="595959"/>
+                </a:solidFill>
+                <a:latin typeface="Arial"/>
+              </a:rPr>
+              <a:t>SOUNDS LIKE</a:t>
+            </a:r>
+          </a:p>
+        </p:txBody>
+      </p:sp>
+      <p:sp>
+        <p:nvSpPr>
+          <p:cNvPr id="12" name="Rounded Rectangle 11"/>
           <p:cNvSpPr/>
           <p:nvPr/>
         </p:nvSpPr>
         <p:spPr>
           <a:xfrm>
-            <a:off x="3429000" y="3337560"/>
-            <a:ext cx="2743200" cy="1691640"/>
+            <a:off x="566928" y="2697480"/>
+            <a:ext cx="3291840" cy="713232"/>
           </a:xfrm>
           <a:prstGeom prst="roundRect">
             <a:avLst>
-              <a:gd name="adj" fmla="val 6000"/>
+              <a:gd name="adj" fmla="val 30000"/>
             </a:avLst>
           </a:prstGeom>
           <a:solidFill>
-            <a:srgbClr val="595959"/>
-          </a:solidFill>
-          <a:ln>
-            <a:noFill/>
+            <a:srgbClr val="EEF2F8"/>
+          </a:solidFill>
+          <a:ln w="12700">
+            <a:solidFill>
+              <a:srgbClr val="595959"/>
+            </a:solidFill>
           </a:ln>
           <a:effectLst/>
         </p:spPr>
@@ -14682,62 +14953,43 @@
           <a:bodyPr rtlCol="0" anchor="ctr" wrap="square" lIns="109728" rIns="109728" tIns="54864" bIns="54864"/>
           <a:lstStyle/>
           <a:p>
-            <a:pPr algn="ctr">
-              <a:spcAft>
-                <a:spcPts val="200"/>
+            <a:pPr algn="l">
+              <a:spcAft>
+                <a:spcPts val="0"/>
               </a:spcAft>
             </a:pPr>
             <a:r>
-              <a:rPr sz="1600" b="1">
-                <a:solidFill>
-                  <a:srgbClr val="FFFFFF"/>
+              <a:rPr sz="1200" b="0">
+                <a:solidFill>
+                  <a:srgbClr val="262626"/>
                 </a:solidFill>
                 <a:latin typeface="Arial"/>
               </a:rPr>
-              <a:t>Enquiry drop</a:t>
-            </a:r>
-          </a:p>
-          <a:p>
-            <a:pPr algn="ctr">
-              <a:spcAft>
-                <a:spcPts val="0"/>
-              </a:spcAft>
-            </a:pPr>
-            <a:r>
-              <a:rPr sz="1200" b="0">
-                <a:solidFill>
-                  <a:srgbClr val="FFFFFF"/>
-                </a:solidFill>
-                <a:latin typeface="Arial"/>
-              </a:rPr>
-              <a:t>enquiries fell vs last quarter</a:t>
-            </a:r>
-          </a:p>
-        </p:txBody>
-      </p:sp>
-      <p:sp>
-        <p:nvSpPr>
-          <p:cNvPr id="9" name="Rounded Rectangle 8"/>
+              <a:t>Free seller, small town, Telugu region</a:t>
+            </a:r>
+          </a:p>
+        </p:txBody>
+      </p:sp>
+      <p:sp>
+        <p:nvSpPr>
+          <p:cNvPr id="13" name="Right Arrow 12"/>
           <p:cNvSpPr/>
           <p:nvPr/>
         </p:nvSpPr>
         <p:spPr>
           <a:xfrm>
-            <a:off x="6355080" y="3337560"/>
-            <a:ext cx="2743200" cy="1691640"/>
-          </a:xfrm>
-          <a:prstGeom prst="roundRect">
-            <a:avLst>
-              <a:gd name="adj" fmla="val 6000"/>
-            </a:avLst>
-          </a:prstGeom>
-          <a:solidFill>
-            <a:srgbClr val="1B6B5E"/>
+            <a:off x="3886200" y="2880360"/>
+            <a:ext cx="274320" cy="320040"/>
+          </a:xfrm>
+          <a:prstGeom prst="rightArrow">
+            <a:avLst/>
+          </a:prstGeom>
+          <a:solidFill>
+            <a:srgbClr val="C00000"/>
           </a:solidFill>
           <a:ln>
             <a:noFill/>
           </a:ln>
-          <a:effectLst/>
         </p:spPr>
         <p:style>
           <a:lnRef idx="1">
@@ -14754,60 +15006,31 @@
           </a:fontRef>
         </p:style>
         <p:txBody>
-          <a:bodyPr rtlCol="0" anchor="ctr" wrap="square" lIns="109728" rIns="109728" tIns="54864" bIns="54864"/>
+          <a:bodyPr rtlCol="0" anchor="ctr"/>
           <a:lstStyle/>
           <a:p>
-            <a:pPr algn="ctr">
-              <a:spcAft>
-                <a:spcPts val="200"/>
-              </a:spcAft>
-            </a:pPr>
-            <a:r>
-              <a:rPr sz="1600" b="1">
-                <a:solidFill>
-                  <a:srgbClr val="FFFFFF"/>
-                </a:solidFill>
-                <a:latin typeface="Arial"/>
-              </a:rPr>
-              <a:t>Peer usage</a:t>
-            </a:r>
-          </a:p>
-          <a:p>
-            <a:pPr algn="ctr">
-              <a:spcAft>
-                <a:spcPts val="0"/>
-              </a:spcAft>
-            </a:pPr>
-            <a:r>
-              <a:rPr sz="1200" b="0">
-                <a:solidFill>
-                  <a:srgbClr val="FFFFFF"/>
-                </a:solidFill>
-                <a:latin typeface="Arial"/>
-              </a:rPr>
-              <a:t>similar sellers buy leads</a:t>
-            </a:r>
-          </a:p>
-        </p:txBody>
-      </p:sp>
-      <p:sp>
-        <p:nvSpPr>
-          <p:cNvPr id="10" name="Rounded Rectangle 9"/>
+            <a:pPr algn="ctr"/>
+          </a:p>
+        </p:txBody>
+      </p:sp>
+      <p:sp>
+        <p:nvSpPr>
+          <p:cNvPr id="14" name="Rounded Rectangle 13"/>
           <p:cNvSpPr/>
           <p:nvPr/>
         </p:nvSpPr>
         <p:spPr>
           <a:xfrm>
-            <a:off x="9281160" y="3337560"/>
-            <a:ext cx="2743200" cy="1691640"/>
+            <a:off x="4206240" y="2697480"/>
+            <a:ext cx="2377440" cy="713232"/>
           </a:xfrm>
           <a:prstGeom prst="roundRect">
             <a:avLst>
-              <a:gd name="adj" fmla="val 6000"/>
+              <a:gd name="adj" fmla="val 30000"/>
             </a:avLst>
           </a:prstGeom>
           <a:solidFill>
-            <a:srgbClr val="8A1C1C"/>
+            <a:srgbClr val="C00000"/>
           </a:solidFill>
           <a:ln>
             <a:noFill/>
@@ -14832,49 +15055,33 @@
           <a:bodyPr rtlCol="0" anchor="ctr" wrap="square" lIns="109728" rIns="109728" tIns="54864" bIns="54864"/>
           <a:lstStyle/>
           <a:p>
-            <a:pPr algn="ctr">
-              <a:spcAft>
-                <a:spcPts val="200"/>
+            <a:pPr algn="l">
+              <a:spcAft>
+                <a:spcPts val="0"/>
               </a:spcAft>
             </a:pPr>
             <a:r>
-              <a:rPr sz="1600" b="1">
+              <a:rPr sz="1200" b="1">
                 <a:solidFill>
                   <a:srgbClr val="FFFFFF"/>
                 </a:solidFill>
                 <a:latin typeface="Arial"/>
               </a:rPr>
-              <a:t>Resolve grievance</a:t>
-            </a:r>
-          </a:p>
-          <a:p>
-            <a:pPr algn="ctr">
-              <a:spcAft>
-                <a:spcPts val="0"/>
-              </a:spcAft>
-            </a:pPr>
-            <a:r>
-              <a:rPr sz="1200" b="0">
-                <a:solidFill>
-                  <a:srgbClr val="FFFFFF"/>
-                </a:solidFill>
-                <a:latin typeface="Arial"/>
-              </a:rPr>
-              <a:t>own the complaint first</a:t>
-            </a:r>
-          </a:p>
-        </p:txBody>
-      </p:sp>
-      <p:sp>
-        <p:nvSpPr>
-          <p:cNvPr id="11" name="Rounded Rectangle 10"/>
+              <a:t>P2 Warm local helper</a:t>
+            </a:r>
+          </a:p>
+        </p:txBody>
+      </p:sp>
+      <p:sp>
+        <p:nvSpPr>
+          <p:cNvPr id="15" name="Rounded Rectangle 14"/>
           <p:cNvSpPr/>
           <p:nvPr/>
         </p:nvSpPr>
         <p:spPr>
           <a:xfrm>
-            <a:off x="502920" y="5349240"/>
-            <a:ext cx="11338560" cy="640080"/>
+            <a:off x="6720840" y="2697480"/>
+            <a:ext cx="2286000" cy="713232"/>
           </a:xfrm>
           <a:prstGeom prst="roundRect">
             <a:avLst>
@@ -14882,12 +15089,10 @@
             </a:avLst>
           </a:prstGeom>
           <a:solidFill>
-            <a:srgbClr val="EEF2F8"/>
-          </a:solidFill>
-          <a:ln w="12700">
-            <a:solidFill>
-              <a:srgbClr val="002060"/>
-            </a:solidFill>
+            <a:srgbClr val="C00000"/>
+          </a:solidFill>
+          <a:ln>
+            <a:noFill/>
           </a:ln>
           <a:effectLst/>
         </p:spPr>
@@ -14909,19 +15114,921 @@
           <a:bodyPr rtlCol="0" anchor="ctr" wrap="square" lIns="109728" rIns="109728" tIns="54864" bIns="54864"/>
           <a:lstStyle/>
           <a:p>
-            <a:pPr algn="ctr">
+            <a:pPr algn="l">
               <a:spcAft>
                 <a:spcPts val="0"/>
               </a:spcAft>
             </a:pPr>
             <a:r>
-              <a:rPr sz="1400" b="1">
-                <a:solidFill>
-                  <a:srgbClr val="002060"/>
+              <a:rPr sz="1200" b="1">
+                <a:solidFill>
+                  <a:srgbClr val="FFFFFF"/>
                 </a:solidFill>
                 <a:latin typeface="Arial"/>
               </a:rPr>
-              <a:t>One main hook plus a backup per seller. Every number comes from the seller's data.</a:t>
+              <a:t>Profile gap</a:t>
+            </a:r>
+          </a:p>
+        </p:txBody>
+      </p:sp>
+      <p:sp>
+        <p:nvSpPr>
+          <p:cNvPr id="16" name="Rounded Rectangle 15"/>
+          <p:cNvSpPr/>
+          <p:nvPr/>
+        </p:nvSpPr>
+        <p:spPr>
+          <a:xfrm>
+            <a:off x="9144000" y="2697480"/>
+            <a:ext cx="2514600" cy="713232"/>
+          </a:xfrm>
+          <a:prstGeom prst="roundRect">
+            <a:avLst>
+              <a:gd name="adj" fmla="val 30000"/>
+            </a:avLst>
+          </a:prstGeom>
+          <a:solidFill>
+            <a:srgbClr val="C00000"/>
+          </a:solidFill>
+          <a:ln>
+            <a:noFill/>
+          </a:ln>
+          <a:effectLst/>
+        </p:spPr>
+        <p:style>
+          <a:lnRef idx="1">
+            <a:schemeClr val="accent1"/>
+          </a:lnRef>
+          <a:fillRef idx="3">
+            <a:schemeClr val="accent1"/>
+          </a:fillRef>
+          <a:effectRef idx="2">
+            <a:schemeClr val="accent1"/>
+          </a:effectRef>
+          <a:fontRef idx="minor">
+            <a:schemeClr val="lt1"/>
+          </a:fontRef>
+        </p:style>
+        <p:txBody>
+          <a:bodyPr rtlCol="0" anchor="ctr" wrap="square" lIns="109728" rIns="109728" tIns="54864" bIns="54864"/>
+          <a:lstStyle/>
+          <a:p>
+            <a:pPr algn="l">
+              <a:spcAft>
+                <a:spcPts val="0"/>
+              </a:spcAft>
+            </a:pPr>
+            <a:r>
+              <a:rPr sz="1200" b="1">
+                <a:solidFill>
+                  <a:srgbClr val="FFFFFF"/>
+                </a:solidFill>
+                <a:latin typeface="Arial"/>
+              </a:rPr>
+              <a:t>Own language, simple words</a:t>
+            </a:r>
+          </a:p>
+        </p:txBody>
+      </p:sp>
+      <p:sp>
+        <p:nvSpPr>
+          <p:cNvPr id="17" name="Rounded Rectangle 16"/>
+          <p:cNvSpPr/>
+          <p:nvPr/>
+        </p:nvSpPr>
+        <p:spPr>
+          <a:xfrm>
+            <a:off x="566928" y="3538728"/>
+            <a:ext cx="3291840" cy="713232"/>
+          </a:xfrm>
+          <a:prstGeom prst="roundRect">
+            <a:avLst>
+              <a:gd name="adj" fmla="val 30000"/>
+            </a:avLst>
+          </a:prstGeom>
+          <a:solidFill>
+            <a:srgbClr val="EEF2F8"/>
+          </a:solidFill>
+          <a:ln w="12700">
+            <a:solidFill>
+              <a:srgbClr val="595959"/>
+            </a:solidFill>
+          </a:ln>
+          <a:effectLst/>
+        </p:spPr>
+        <p:style>
+          <a:lnRef idx="1">
+            <a:schemeClr val="accent1"/>
+          </a:lnRef>
+          <a:fillRef idx="3">
+            <a:schemeClr val="accent1"/>
+          </a:fillRef>
+          <a:effectRef idx="2">
+            <a:schemeClr val="accent1"/>
+          </a:effectRef>
+          <a:fontRef idx="minor">
+            <a:schemeClr val="lt1"/>
+          </a:fontRef>
+        </p:style>
+        <p:txBody>
+          <a:bodyPr rtlCol="0" anchor="ctr" wrap="square" lIns="109728" rIns="109728" tIns="54864" bIns="54864"/>
+          <a:lstStyle/>
+          <a:p>
+            <a:pPr algn="l">
+              <a:spcAft>
+                <a:spcPts val="0"/>
+              </a:spcAft>
+            </a:pPr>
+            <a:r>
+              <a:rPr sz="1200" b="0">
+                <a:solidFill>
+                  <a:srgbClr val="262626"/>
+                </a:solidFill>
+                <a:latin typeface="Arial"/>
+              </a:rPr>
+              <a:t>Paid seller, many buy leads, always busy</a:t>
+            </a:r>
+          </a:p>
+        </p:txBody>
+      </p:sp>
+      <p:sp>
+        <p:nvSpPr>
+          <p:cNvPr id="18" name="Right Arrow 17"/>
+          <p:cNvSpPr/>
+          <p:nvPr/>
+        </p:nvSpPr>
+        <p:spPr>
+          <a:xfrm>
+            <a:off x="3886200" y="3721608"/>
+            <a:ext cx="274320" cy="320040"/>
+          </a:xfrm>
+          <a:prstGeom prst="rightArrow">
+            <a:avLst/>
+          </a:prstGeom>
+          <a:solidFill>
+            <a:srgbClr val="E08A00"/>
+          </a:solidFill>
+          <a:ln>
+            <a:noFill/>
+          </a:ln>
+        </p:spPr>
+        <p:style>
+          <a:lnRef idx="1">
+            <a:schemeClr val="accent1"/>
+          </a:lnRef>
+          <a:fillRef idx="3">
+            <a:schemeClr val="accent1"/>
+          </a:fillRef>
+          <a:effectRef idx="2">
+            <a:schemeClr val="accent1"/>
+          </a:effectRef>
+          <a:fontRef idx="minor">
+            <a:schemeClr val="lt1"/>
+          </a:fontRef>
+        </p:style>
+        <p:txBody>
+          <a:bodyPr rtlCol="0" anchor="ctr"/>
+          <a:lstStyle/>
+          <a:p>
+            <a:pPr algn="ctr"/>
+          </a:p>
+        </p:txBody>
+      </p:sp>
+      <p:sp>
+        <p:nvSpPr>
+          <p:cNvPr id="19" name="Rounded Rectangle 18"/>
+          <p:cNvSpPr/>
+          <p:nvPr/>
+        </p:nvSpPr>
+        <p:spPr>
+          <a:xfrm>
+            <a:off x="4206240" y="3538728"/>
+            <a:ext cx="2377440" cy="713232"/>
+          </a:xfrm>
+          <a:prstGeom prst="roundRect">
+            <a:avLst>
+              <a:gd name="adj" fmla="val 30000"/>
+            </a:avLst>
+          </a:prstGeom>
+          <a:solidFill>
+            <a:srgbClr val="E08A00"/>
+          </a:solidFill>
+          <a:ln>
+            <a:noFill/>
+          </a:ln>
+          <a:effectLst/>
+        </p:spPr>
+        <p:style>
+          <a:lnRef idx="1">
+            <a:schemeClr val="accent1"/>
+          </a:lnRef>
+          <a:fillRef idx="3">
+            <a:schemeClr val="accent1"/>
+          </a:fillRef>
+          <a:effectRef idx="2">
+            <a:schemeClr val="accent1"/>
+          </a:effectRef>
+          <a:fontRef idx="minor">
+            <a:schemeClr val="lt1"/>
+          </a:fontRef>
+        </p:style>
+        <p:txBody>
+          <a:bodyPr rtlCol="0" anchor="ctr" wrap="square" lIns="109728" rIns="109728" tIns="54864" bIns="54864"/>
+          <a:lstStyle/>
+          <a:p>
+            <a:pPr algn="l">
+              <a:spcAft>
+                <a:spcPts val="0"/>
+              </a:spcAft>
+            </a:pPr>
+            <a:r>
+              <a:rPr sz="1200" b="1">
+                <a:solidFill>
+                  <a:srgbClr val="FFFFFF"/>
+                </a:solidFill>
+                <a:latin typeface="Arial"/>
+              </a:rPr>
+              <a:t>P4 Brief and busy-friendly</a:t>
+            </a:r>
+          </a:p>
+        </p:txBody>
+      </p:sp>
+      <p:sp>
+        <p:nvSpPr>
+          <p:cNvPr id="20" name="Rounded Rectangle 19"/>
+          <p:cNvSpPr/>
+          <p:nvPr/>
+        </p:nvSpPr>
+        <p:spPr>
+          <a:xfrm>
+            <a:off x="6720840" y="3538728"/>
+            <a:ext cx="2286000" cy="713232"/>
+          </a:xfrm>
+          <a:prstGeom prst="roundRect">
+            <a:avLst>
+              <a:gd name="adj" fmla="val 30000"/>
+            </a:avLst>
+          </a:prstGeom>
+          <a:solidFill>
+            <a:srgbClr val="E08A00"/>
+          </a:solidFill>
+          <a:ln>
+            <a:noFill/>
+          </a:ln>
+          <a:effectLst/>
+        </p:spPr>
+        <p:style>
+          <a:lnRef idx="1">
+            <a:schemeClr val="accent1"/>
+          </a:lnRef>
+          <a:fillRef idx="3">
+            <a:schemeClr val="accent1"/>
+          </a:fillRef>
+          <a:effectRef idx="2">
+            <a:schemeClr val="accent1"/>
+          </a:effectRef>
+          <a:fontRef idx="minor">
+            <a:schemeClr val="lt1"/>
+          </a:fontRef>
+        </p:style>
+        <p:txBody>
+          <a:bodyPr rtlCol="0" anchor="ctr" wrap="square" lIns="109728" rIns="109728" tIns="54864" bIns="54864"/>
+          <a:lstStyle/>
+          <a:p>
+            <a:pPr algn="l">
+              <a:spcAft>
+                <a:spcPts val="0"/>
+              </a:spcAft>
+            </a:pPr>
+            <a:r>
+              <a:rPr sz="1200" b="1">
+                <a:solidFill>
+                  <a:srgbClr val="FFFFFF"/>
+                </a:solidFill>
+                <a:latin typeface="Arial"/>
+              </a:rPr>
+              <a:t>Unused credits or money lead</a:t>
+            </a:r>
+          </a:p>
+        </p:txBody>
+      </p:sp>
+      <p:sp>
+        <p:nvSpPr>
+          <p:cNvPr id="21" name="Rounded Rectangle 20"/>
+          <p:cNvSpPr/>
+          <p:nvPr/>
+        </p:nvSpPr>
+        <p:spPr>
+          <a:xfrm>
+            <a:off x="9144000" y="3538728"/>
+            <a:ext cx="2514600" cy="713232"/>
+          </a:xfrm>
+          <a:prstGeom prst="roundRect">
+            <a:avLst>
+              <a:gd name="adj" fmla="val 30000"/>
+            </a:avLst>
+          </a:prstGeom>
+          <a:solidFill>
+            <a:srgbClr val="E08A00"/>
+          </a:solidFill>
+          <a:ln>
+            <a:noFill/>
+          </a:ln>
+          <a:effectLst/>
+        </p:spPr>
+        <p:style>
+          <a:lnRef idx="1">
+            <a:schemeClr val="accent1"/>
+          </a:lnRef>
+          <a:fillRef idx="3">
+            <a:schemeClr val="accent1"/>
+          </a:fillRef>
+          <a:effectRef idx="2">
+            <a:schemeClr val="accent1"/>
+          </a:effectRef>
+          <a:fontRef idx="minor">
+            <a:schemeClr val="lt1"/>
+          </a:fontRef>
+        </p:style>
+        <p:txBody>
+          <a:bodyPr rtlCol="0" anchor="ctr" wrap="square" lIns="109728" rIns="109728" tIns="54864" bIns="54864"/>
+          <a:lstStyle/>
+          <a:p>
+            <a:pPr algn="l">
+              <a:spcAft>
+                <a:spcPts val="0"/>
+              </a:spcAft>
+            </a:pPr>
+            <a:r>
+              <a:rPr sz="1200" b="1">
+                <a:solidFill>
+                  <a:srgbClr val="FFFFFF"/>
+                </a:solidFill>
+                <a:latin typeface="Arial"/>
+              </a:rPr>
+              <a:t>One short line, callback offer</a:t>
+            </a:r>
+          </a:p>
+        </p:txBody>
+      </p:sp>
+      <p:sp>
+        <p:nvSpPr>
+          <p:cNvPr id="22" name="Rounded Rectangle 21"/>
+          <p:cNvSpPr/>
+          <p:nvPr/>
+        </p:nvSpPr>
+        <p:spPr>
+          <a:xfrm>
+            <a:off x="566928" y="4379976"/>
+            <a:ext cx="3291840" cy="713232"/>
+          </a:xfrm>
+          <a:prstGeom prst="roundRect">
+            <a:avLst>
+              <a:gd name="adj" fmla="val 30000"/>
+            </a:avLst>
+          </a:prstGeom>
+          <a:solidFill>
+            <a:srgbClr val="EEF2F8"/>
+          </a:solidFill>
+          <a:ln w="12700">
+            <a:solidFill>
+              <a:srgbClr val="595959"/>
+            </a:solidFill>
+          </a:ln>
+          <a:effectLst/>
+        </p:spPr>
+        <p:style>
+          <a:lnRef idx="1">
+            <a:schemeClr val="accent1"/>
+          </a:lnRef>
+          <a:fillRef idx="3">
+            <a:schemeClr val="accent1"/>
+          </a:fillRef>
+          <a:effectRef idx="2">
+            <a:schemeClr val="accent1"/>
+          </a:effectRef>
+          <a:fontRef idx="minor">
+            <a:schemeClr val="lt1"/>
+          </a:fontRef>
+        </p:style>
+        <p:txBody>
+          <a:bodyPr rtlCol="0" anchor="ctr" wrap="square" lIns="109728" rIns="109728" tIns="54864" bIns="54864"/>
+          <a:lstStyle/>
+          <a:p>
+            <a:pPr algn="l">
+              <a:spcAft>
+                <a:spcPts val="0"/>
+              </a:spcAft>
+            </a:pPr>
+            <a:r>
+              <a:rPr sz="1200" b="0">
+                <a:solidFill>
+                  <a:srgbClr val="262626"/>
+                </a:solidFill>
+                <a:latin typeface="Arial"/>
+              </a:rPr>
+              <a:t>High-turnover owner, Delhi</a:t>
+            </a:r>
+          </a:p>
+        </p:txBody>
+      </p:sp>
+      <p:sp>
+        <p:nvSpPr>
+          <p:cNvPr id="23" name="Right Arrow 22"/>
+          <p:cNvSpPr/>
+          <p:nvPr/>
+        </p:nvSpPr>
+        <p:spPr>
+          <a:xfrm>
+            <a:off x="3886200" y="4562856"/>
+            <a:ext cx="274320" cy="320040"/>
+          </a:xfrm>
+          <a:prstGeom prst="rightArrow">
+            <a:avLst/>
+          </a:prstGeom>
+          <a:solidFill>
+            <a:srgbClr val="1B6B5E"/>
+          </a:solidFill>
+          <a:ln>
+            <a:noFill/>
+          </a:ln>
+        </p:spPr>
+        <p:style>
+          <a:lnRef idx="1">
+            <a:schemeClr val="accent1"/>
+          </a:lnRef>
+          <a:fillRef idx="3">
+            <a:schemeClr val="accent1"/>
+          </a:fillRef>
+          <a:effectRef idx="2">
+            <a:schemeClr val="accent1"/>
+          </a:effectRef>
+          <a:fontRef idx="minor">
+            <a:schemeClr val="lt1"/>
+          </a:fontRef>
+        </p:style>
+        <p:txBody>
+          <a:bodyPr rtlCol="0" anchor="ctr"/>
+          <a:lstStyle/>
+          <a:p>
+            <a:pPr algn="ctr"/>
+          </a:p>
+        </p:txBody>
+      </p:sp>
+      <p:sp>
+        <p:nvSpPr>
+          <p:cNvPr id="24" name="Rounded Rectangle 23"/>
+          <p:cNvSpPr/>
+          <p:nvPr/>
+        </p:nvSpPr>
+        <p:spPr>
+          <a:xfrm>
+            <a:off x="4206240" y="4379976"/>
+            <a:ext cx="2377440" cy="713232"/>
+          </a:xfrm>
+          <a:prstGeom prst="roundRect">
+            <a:avLst>
+              <a:gd name="adj" fmla="val 30000"/>
+            </a:avLst>
+          </a:prstGeom>
+          <a:solidFill>
+            <a:srgbClr val="1B6B5E"/>
+          </a:solidFill>
+          <a:ln>
+            <a:noFill/>
+          </a:ln>
+          <a:effectLst/>
+        </p:spPr>
+        <p:style>
+          <a:lnRef idx="1">
+            <a:schemeClr val="accent1"/>
+          </a:lnRef>
+          <a:fillRef idx="3">
+            <a:schemeClr val="accent1"/>
+          </a:fillRef>
+          <a:effectRef idx="2">
+            <a:schemeClr val="accent1"/>
+          </a:effectRef>
+          <a:fontRef idx="minor">
+            <a:schemeClr val="lt1"/>
+          </a:fontRef>
+        </p:style>
+        <p:txBody>
+          <a:bodyPr rtlCol="0" anchor="ctr" wrap="square" lIns="109728" rIns="109728" tIns="54864" bIns="54864"/>
+          <a:lstStyle/>
+          <a:p>
+            <a:pPr algn="l">
+              <a:spcAft>
+                <a:spcPts val="0"/>
+              </a:spcAft>
+            </a:pPr>
+            <a:r>
+              <a:rPr sz="1200" b="1">
+                <a:solidFill>
+                  <a:srgbClr val="FFFFFF"/>
+                </a:solidFill>
+                <a:latin typeface="Arial"/>
+              </a:rPr>
+              <a:t>P6 Senior advisor</a:t>
+            </a:r>
+          </a:p>
+        </p:txBody>
+      </p:sp>
+      <p:sp>
+        <p:nvSpPr>
+          <p:cNvPr id="25" name="Rounded Rectangle 24"/>
+          <p:cNvSpPr/>
+          <p:nvPr/>
+        </p:nvSpPr>
+        <p:spPr>
+          <a:xfrm>
+            <a:off x="6720840" y="4379976"/>
+            <a:ext cx="2286000" cy="713232"/>
+          </a:xfrm>
+          <a:prstGeom prst="roundRect">
+            <a:avLst>
+              <a:gd name="adj" fmla="val 30000"/>
+            </a:avLst>
+          </a:prstGeom>
+          <a:solidFill>
+            <a:srgbClr val="1B6B5E"/>
+          </a:solidFill>
+          <a:ln>
+            <a:noFill/>
+          </a:ln>
+          <a:effectLst/>
+        </p:spPr>
+        <p:style>
+          <a:lnRef idx="1">
+            <a:schemeClr val="accent1"/>
+          </a:lnRef>
+          <a:fillRef idx="3">
+            <a:schemeClr val="accent1"/>
+          </a:fillRef>
+          <a:effectRef idx="2">
+            <a:schemeClr val="accent1"/>
+          </a:effectRef>
+          <a:fontRef idx="minor">
+            <a:schemeClr val="lt1"/>
+          </a:fontRef>
+        </p:style>
+        <p:txBody>
+          <a:bodyPr rtlCol="0" anchor="ctr" wrap="square" lIns="109728" rIns="109728" tIns="54864" bIns="54864"/>
+          <a:lstStyle/>
+          <a:p>
+            <a:pPr algn="l">
+              <a:spcAft>
+                <a:spcPts val="0"/>
+              </a:spcAft>
+            </a:pPr>
+            <a:r>
+              <a:rPr sz="1200" b="1">
+                <a:solidFill>
+                  <a:srgbClr val="FFFFFF"/>
+                </a:solidFill>
+                <a:latin typeface="Arial"/>
+              </a:rPr>
+              <a:t>Peer usage</a:t>
+            </a:r>
+          </a:p>
+        </p:txBody>
+      </p:sp>
+      <p:sp>
+        <p:nvSpPr>
+          <p:cNvPr id="26" name="Rounded Rectangle 25"/>
+          <p:cNvSpPr/>
+          <p:nvPr/>
+        </p:nvSpPr>
+        <p:spPr>
+          <a:xfrm>
+            <a:off x="9144000" y="4379976"/>
+            <a:ext cx="2514600" cy="713232"/>
+          </a:xfrm>
+          <a:prstGeom prst="roundRect">
+            <a:avLst>
+              <a:gd name="adj" fmla="val 30000"/>
+            </a:avLst>
+          </a:prstGeom>
+          <a:solidFill>
+            <a:srgbClr val="1B6B5E"/>
+          </a:solidFill>
+          <a:ln>
+            <a:noFill/>
+          </a:ln>
+          <a:effectLst/>
+        </p:spPr>
+        <p:style>
+          <a:lnRef idx="1">
+            <a:schemeClr val="accent1"/>
+          </a:lnRef>
+          <a:fillRef idx="3">
+            <a:schemeClr val="accent1"/>
+          </a:fillRef>
+          <a:effectRef idx="2">
+            <a:schemeClr val="accent1"/>
+          </a:effectRef>
+          <a:fontRef idx="minor">
+            <a:schemeClr val="lt1"/>
+          </a:fontRef>
+        </p:style>
+        <p:txBody>
+          <a:bodyPr rtlCol="0" anchor="ctr" wrap="square" lIns="109728" rIns="109728" tIns="54864" bIns="54864"/>
+          <a:lstStyle/>
+          <a:p>
+            <a:pPr algn="l">
+              <a:spcAft>
+                <a:spcPts val="0"/>
+              </a:spcAft>
+            </a:pPr>
+            <a:r>
+              <a:rPr sz="1200" b="1">
+                <a:solidFill>
+                  <a:srgbClr val="FFFFFF"/>
+                </a:solidFill>
+                <a:latin typeface="Arial"/>
+              </a:rPr>
+              <a:t>English-led, numbers, brief</a:t>
+            </a:r>
+          </a:p>
+        </p:txBody>
+      </p:sp>
+      <p:sp>
+        <p:nvSpPr>
+          <p:cNvPr id="27" name="Rounded Rectangle 26"/>
+          <p:cNvSpPr/>
+          <p:nvPr/>
+        </p:nvSpPr>
+        <p:spPr>
+          <a:xfrm>
+            <a:off x="566928" y="5221224"/>
+            <a:ext cx="3291840" cy="713232"/>
+          </a:xfrm>
+          <a:prstGeom prst="roundRect">
+            <a:avLst>
+              <a:gd name="adj" fmla="val 30000"/>
+            </a:avLst>
+          </a:prstGeom>
+          <a:solidFill>
+            <a:srgbClr val="EEF2F8"/>
+          </a:solidFill>
+          <a:ln w="12700">
+            <a:solidFill>
+              <a:srgbClr val="595959"/>
+            </a:solidFill>
+          </a:ln>
+          <a:effectLst/>
+        </p:spPr>
+        <p:style>
+          <a:lnRef idx="1">
+            <a:schemeClr val="accent1"/>
+          </a:lnRef>
+          <a:fillRef idx="3">
+            <a:schemeClr val="accent1"/>
+          </a:fillRef>
+          <a:effectRef idx="2">
+            <a:schemeClr val="accent1"/>
+          </a:effectRef>
+          <a:fontRef idx="minor">
+            <a:schemeClr val="lt1"/>
+          </a:fontRef>
+        </p:style>
+        <p:txBody>
+          <a:bodyPr rtlCol="0" anchor="ctr" wrap="square" lIns="109728" rIns="109728" tIns="54864" bIns="54864"/>
+          <a:lstStyle/>
+          <a:p>
+            <a:pPr algn="l">
+              <a:spcAft>
+                <a:spcPts val="0"/>
+              </a:spcAft>
+            </a:pPr>
+            <a:r>
+              <a:rPr sz="1200" b="0">
+                <a:solidFill>
+                  <a:srgbClr val="262626"/>
+                </a:solidFill>
+                <a:latin typeface="Arial"/>
+              </a:rPr>
+              <a:t>Seller with an open complaint</a:t>
+            </a:r>
+          </a:p>
+        </p:txBody>
+      </p:sp>
+      <p:sp>
+        <p:nvSpPr>
+          <p:cNvPr id="28" name="Right Arrow 27"/>
+          <p:cNvSpPr/>
+          <p:nvPr/>
+        </p:nvSpPr>
+        <p:spPr>
+          <a:xfrm>
+            <a:off x="3886200" y="5404104"/>
+            <a:ext cx="274320" cy="320040"/>
+          </a:xfrm>
+          <a:prstGeom prst="rightArrow">
+            <a:avLst/>
+          </a:prstGeom>
+          <a:solidFill>
+            <a:srgbClr val="5B3E96"/>
+          </a:solidFill>
+          <a:ln>
+            <a:noFill/>
+          </a:ln>
+        </p:spPr>
+        <p:style>
+          <a:lnRef idx="1">
+            <a:schemeClr val="accent1"/>
+          </a:lnRef>
+          <a:fillRef idx="3">
+            <a:schemeClr val="accent1"/>
+          </a:fillRef>
+          <a:effectRef idx="2">
+            <a:schemeClr val="accent1"/>
+          </a:effectRef>
+          <a:fontRef idx="minor">
+            <a:schemeClr val="lt1"/>
+          </a:fontRef>
+        </p:style>
+        <p:txBody>
+          <a:bodyPr rtlCol="0" anchor="ctr"/>
+          <a:lstStyle/>
+          <a:p>
+            <a:pPr algn="ctr"/>
+          </a:p>
+        </p:txBody>
+      </p:sp>
+      <p:sp>
+        <p:nvSpPr>
+          <p:cNvPr id="29" name="Rounded Rectangle 28"/>
+          <p:cNvSpPr/>
+          <p:nvPr/>
+        </p:nvSpPr>
+        <p:spPr>
+          <a:xfrm>
+            <a:off x="4206240" y="5221224"/>
+            <a:ext cx="2377440" cy="713232"/>
+          </a:xfrm>
+          <a:prstGeom prst="roundRect">
+            <a:avLst>
+              <a:gd name="adj" fmla="val 30000"/>
+            </a:avLst>
+          </a:prstGeom>
+          <a:solidFill>
+            <a:srgbClr val="5B3E96"/>
+          </a:solidFill>
+          <a:ln>
+            <a:noFill/>
+          </a:ln>
+          <a:effectLst/>
+        </p:spPr>
+        <p:style>
+          <a:lnRef idx="1">
+            <a:schemeClr val="accent1"/>
+          </a:lnRef>
+          <a:fillRef idx="3">
+            <a:schemeClr val="accent1"/>
+          </a:fillRef>
+          <a:effectRef idx="2">
+            <a:schemeClr val="accent1"/>
+          </a:effectRef>
+          <a:fontRef idx="minor">
+            <a:schemeClr val="lt1"/>
+          </a:fontRef>
+        </p:style>
+        <p:txBody>
+          <a:bodyPr rtlCol="0" anchor="ctr" wrap="square" lIns="109728" rIns="109728" tIns="54864" bIns="54864"/>
+          <a:lstStyle/>
+          <a:p>
+            <a:pPr algn="l">
+              <a:spcAft>
+                <a:spcPts val="0"/>
+              </a:spcAft>
+            </a:pPr>
+            <a:r>
+              <a:rPr sz="1200" b="1">
+                <a:solidFill>
+                  <a:srgbClr val="FFFFFF"/>
+                </a:solidFill>
+                <a:latin typeface="Arial"/>
+              </a:rPr>
+              <a:t>P5 Problem-solver</a:t>
+            </a:r>
+          </a:p>
+        </p:txBody>
+      </p:sp>
+      <p:sp>
+        <p:nvSpPr>
+          <p:cNvPr id="30" name="Rounded Rectangle 29"/>
+          <p:cNvSpPr/>
+          <p:nvPr/>
+        </p:nvSpPr>
+        <p:spPr>
+          <a:xfrm>
+            <a:off x="6720840" y="5221224"/>
+            <a:ext cx="2286000" cy="713232"/>
+          </a:xfrm>
+          <a:prstGeom prst="roundRect">
+            <a:avLst>
+              <a:gd name="adj" fmla="val 30000"/>
+            </a:avLst>
+          </a:prstGeom>
+          <a:solidFill>
+            <a:srgbClr val="5B3E96"/>
+          </a:solidFill>
+          <a:ln>
+            <a:noFill/>
+          </a:ln>
+          <a:effectLst/>
+        </p:spPr>
+        <p:style>
+          <a:lnRef idx="1">
+            <a:schemeClr val="accent1"/>
+          </a:lnRef>
+          <a:fillRef idx="3">
+            <a:schemeClr val="accent1"/>
+          </a:fillRef>
+          <a:effectRef idx="2">
+            <a:schemeClr val="accent1"/>
+          </a:effectRef>
+          <a:fontRef idx="minor">
+            <a:schemeClr val="lt1"/>
+          </a:fontRef>
+        </p:style>
+        <p:txBody>
+          <a:bodyPr rtlCol="0" anchor="ctr" wrap="square" lIns="109728" rIns="109728" tIns="54864" bIns="54864"/>
+          <a:lstStyle/>
+          <a:p>
+            <a:pPr algn="l">
+              <a:spcAft>
+                <a:spcPts val="0"/>
+              </a:spcAft>
+            </a:pPr>
+            <a:r>
+              <a:rPr sz="1200" b="1">
+                <a:solidFill>
+                  <a:srgbClr val="FFFFFF"/>
+                </a:solidFill>
+                <a:latin typeface="Arial"/>
+              </a:rPr>
+              <a:t>Resolve grievance</a:t>
+            </a:r>
+          </a:p>
+        </p:txBody>
+      </p:sp>
+      <p:sp>
+        <p:nvSpPr>
+          <p:cNvPr id="31" name="Rounded Rectangle 30"/>
+          <p:cNvSpPr/>
+          <p:nvPr/>
+        </p:nvSpPr>
+        <p:spPr>
+          <a:xfrm>
+            <a:off x="9144000" y="5221224"/>
+            <a:ext cx="2514600" cy="713232"/>
+          </a:xfrm>
+          <a:prstGeom prst="roundRect">
+            <a:avLst>
+              <a:gd name="adj" fmla="val 30000"/>
+            </a:avLst>
+          </a:prstGeom>
+          <a:solidFill>
+            <a:srgbClr val="5B3E96"/>
+          </a:solidFill>
+          <a:ln>
+            <a:noFill/>
+          </a:ln>
+          <a:effectLst/>
+        </p:spPr>
+        <p:style>
+          <a:lnRef idx="1">
+            <a:schemeClr val="accent1"/>
+          </a:lnRef>
+          <a:fillRef idx="3">
+            <a:schemeClr val="accent1"/>
+          </a:fillRef>
+          <a:effectRef idx="2">
+            <a:schemeClr val="accent1"/>
+          </a:effectRef>
+          <a:fontRef idx="minor">
+            <a:schemeClr val="lt1"/>
+          </a:fontRef>
+        </p:style>
+        <p:txBody>
+          <a:bodyPr rtlCol="0" anchor="ctr" wrap="square" lIns="109728" rIns="109728" tIns="54864" bIns="54864"/>
+          <a:lstStyle/>
+          <a:p>
+            <a:pPr algn="l">
+              <a:spcAft>
+                <a:spcPts val="0"/>
+              </a:spcAft>
+            </a:pPr>
+            <a:r>
+              <a:rPr sz="1200" b="1">
+                <a:solidFill>
+                  <a:srgbClr val="FFFFFF"/>
+                </a:solidFill>
+                <a:latin typeface="Arial"/>
+              </a:rPr>
+              <a:t>Acknowledges first, no pitch</a:t>
             </a:r>
           </a:p>
         </p:txBody>
@@ -14960,7 +16067,7 @@
           <a:lstStyle/>
           <a:p>
             <a:r>
-              <a:t>One Call: Start, Mid-Call, End, Improve</a:t>
+              <a:t>8 Hooks: Why Should The Seller Meet Us</a:t>
             </a:r>
           </a:p>
         </p:txBody>
@@ -14973,8 +16080,8 @@
         </p:nvSpPr>
         <p:spPr>
           <a:xfrm>
-            <a:off x="502920" y="1463040"/>
-            <a:ext cx="2606040" cy="914400"/>
+            <a:off x="502920" y="1417320"/>
+            <a:ext cx="2743200" cy="1691640"/>
           </a:xfrm>
           <a:prstGeom prst="roundRect">
             <a:avLst>
@@ -14982,7 +16089,7 @@
             </a:avLst>
           </a:prstGeom>
           <a:solidFill>
-            <a:srgbClr val="2EA896"/>
+            <a:srgbClr val="002060"/>
           </a:solidFill>
           <a:ln>
             <a:noFill/>
@@ -15009,17 +16116,17 @@
           <a:p>
             <a:pPr algn="ctr">
               <a:spcAft>
-                <a:spcPts val="100"/>
+                <a:spcPts val="200"/>
               </a:spcAft>
             </a:pPr>
             <a:r>
-              <a:rPr sz="1800" b="1">
+              <a:rPr sz="1600" b="1">
                 <a:solidFill>
                   <a:srgbClr val="FFFFFF"/>
                 </a:solidFill>
                 <a:latin typeface="Arial"/>
               </a:rPr>
-              <a:t>START</a:t>
+              <a:t>Money lead</a:t>
             </a:r>
           </a:p>
           <a:p>
@@ -15035,7 +16142,7 @@
                 </a:solidFill>
                 <a:latin typeface="Arial"/>
               </a:rPr>
-              <a:t>Persona is set</a:t>
+              <a:t>a real order with its value</a:t>
             </a:r>
           </a:p>
         </p:txBody>
@@ -15048,8 +16155,8 @@
         </p:nvSpPr>
         <p:spPr>
           <a:xfrm>
-            <a:off x="502920" y="2468880"/>
-            <a:ext cx="2606040" cy="1920240"/>
+            <a:off x="3429000" y="1417320"/>
+            <a:ext cx="2743200" cy="1691640"/>
           </a:xfrm>
           <a:prstGeom prst="roundRect">
             <a:avLst>
@@ -15057,7 +16164,7 @@
             </a:avLst>
           </a:prstGeom>
           <a:solidFill>
-            <a:srgbClr val="EEF2F8"/>
+            <a:srgbClr val="C00000"/>
           </a:solidFill>
           <a:ln>
             <a:noFill/>
@@ -15079,81 +16186,65 @@
           </a:fontRef>
         </p:style>
         <p:txBody>
-          <a:bodyPr rtlCol="0" anchor="t" wrap="square" lIns="109728" rIns="109728" tIns="54864" bIns="54864"/>
+          <a:bodyPr rtlCol="0" anchor="ctr" wrap="square" lIns="109728" rIns="109728" tIns="54864" bIns="54864"/>
           <a:lstStyle/>
           <a:p>
-            <a:pPr algn="l" marL="182880" indent="-164592">
-              <a:spcAft>
-                <a:spcPts val="600"/>
-              </a:spcAft>
-              <a:buChar char="•"/>
+            <a:pPr algn="ctr">
+              <a:spcAft>
+                <a:spcPts val="200"/>
+              </a:spcAft>
             </a:pPr>
             <a:r>
-              <a:rPr sz="1300" b="0">
-                <a:solidFill>
-                  <a:srgbClr val="262626"/>
+              <a:rPr sz="1600" b="1">
+                <a:solidFill>
+                  <a:srgbClr val="FFFFFF"/>
                 </a:solidFill>
                 <a:latin typeface="Arial"/>
               </a:rPr>
-              <a:t>Voice, pace, pitch</a:t>
-            </a:r>
-          </a:p>
-          <a:p>
-            <a:pPr algn="l" marL="182880" indent="-164592">
-              <a:spcAft>
-                <a:spcPts val="600"/>
-              </a:spcAft>
-              <a:buChar char="•"/>
+              <a:t>Profile gap</a:t>
+            </a:r>
+          </a:p>
+          <a:p>
+            <a:pPr algn="ctr">
+              <a:spcAft>
+                <a:spcPts val="0"/>
+              </a:spcAft>
             </a:pPr>
             <a:r>
-              <a:rPr sz="1300" b="0">
-                <a:solidFill>
-                  <a:srgbClr val="262626"/>
+              <a:rPr sz="1200" b="0">
+                <a:solidFill>
+                  <a:srgbClr val="FFFFFF"/>
                 </a:solidFill>
                 <a:latin typeface="Arial"/>
               </a:rPr>
-              <a:t>Start language</a:t>
-            </a:r>
-          </a:p>
-          <a:p>
-            <a:pPr algn="l" marL="182880" indent="-164592">
-              <a:spcAft>
-                <a:spcPts val="600"/>
-              </a:spcAft>
-              <a:buChar char="•"/>
-            </a:pPr>
-            <a:r>
-              <a:rPr sz="1300" b="0">
-                <a:solidFill>
-                  <a:srgbClr val="262626"/>
-                </a:solidFill>
-                <a:latin typeface="Arial"/>
-              </a:rPr>
-              <a:t>Opening line and hook</a:t>
-            </a:r>
-          </a:p>
-        </p:txBody>
-      </p:sp>
-      <p:sp>
-        <p:nvSpPr>
-          <p:cNvPr id="5" name="Right Arrow 4"/>
+              <a:t>photos and prices missing</a:t>
+            </a:r>
+          </a:p>
+        </p:txBody>
+      </p:sp>
+      <p:sp>
+        <p:nvSpPr>
+          <p:cNvPr id="5" name="Rounded Rectangle 4"/>
           <p:cNvSpPr/>
           <p:nvPr/>
         </p:nvSpPr>
         <p:spPr>
           <a:xfrm>
-            <a:off x="3136391" y="1737360"/>
-            <a:ext cx="292608" cy="365760"/>
-          </a:xfrm>
-          <a:prstGeom prst="rightArrow">
-            <a:avLst/>
-          </a:prstGeom>
-          <a:solidFill>
-            <a:srgbClr val="595959"/>
+            <a:off x="6355080" y="1417320"/>
+            <a:ext cx="2743200" cy="1691640"/>
+          </a:xfrm>
+          <a:prstGeom prst="roundRect">
+            <a:avLst>
+              <a:gd name="adj" fmla="val 6000"/>
+            </a:avLst>
+          </a:prstGeom>
+          <a:solidFill>
+            <a:srgbClr val="2EA896"/>
           </a:solidFill>
           <a:ln>
             <a:noFill/>
           </a:ln>
+          <a:effectLst/>
         </p:spPr>
         <p:style>
           <a:lnRef idx="1">
@@ -15170,10 +16261,39 @@
           </a:fontRef>
         </p:style>
         <p:txBody>
-          <a:bodyPr rtlCol="0" anchor="ctr"/>
+          <a:bodyPr rtlCol="0" anchor="ctr" wrap="square" lIns="109728" rIns="109728" tIns="54864" bIns="54864"/>
           <a:lstStyle/>
           <a:p>
-            <a:pPr algn="ctr"/>
+            <a:pPr algn="ctr">
+              <a:spcAft>
+                <a:spcPts val="200"/>
+              </a:spcAft>
+            </a:pPr>
+            <a:r>
+              <a:rPr sz="1600" b="1">
+                <a:solidFill>
+                  <a:srgbClr val="FFFFFF"/>
+                </a:solidFill>
+                <a:latin typeface="Arial"/>
+              </a:rPr>
+              <a:t>Category demand</a:t>
+            </a:r>
+          </a:p>
+          <a:p>
+            <a:pPr algn="ctr">
+              <a:spcAft>
+                <a:spcPts val="0"/>
+              </a:spcAft>
+            </a:pPr>
+            <a:r>
+              <a:rPr sz="1200" b="0">
+                <a:solidFill>
+                  <a:srgbClr val="FFFFFF"/>
+                </a:solidFill>
+                <a:latin typeface="Arial"/>
+              </a:rPr>
+              <a:t>buyers asking in your category</a:t>
+            </a:r>
           </a:p>
         </p:txBody>
       </p:sp>
@@ -15185,8 +16305,8 @@
         </p:nvSpPr>
         <p:spPr>
           <a:xfrm>
-            <a:off x="3429000" y="1463040"/>
-            <a:ext cx="2606040" cy="914400"/>
+            <a:off x="9281160" y="1417320"/>
+            <a:ext cx="2743200" cy="1691640"/>
           </a:xfrm>
           <a:prstGeom prst="roundRect">
             <a:avLst>
@@ -15194,7 +16314,7 @@
             </a:avLst>
           </a:prstGeom>
           <a:solidFill>
-            <a:srgbClr val="002060"/>
+            <a:srgbClr val="5B3E96"/>
           </a:solidFill>
           <a:ln>
             <a:noFill/>
@@ -15221,17 +16341,17 @@
           <a:p>
             <a:pPr algn="ctr">
               <a:spcAft>
-                <a:spcPts val="100"/>
+                <a:spcPts val="200"/>
               </a:spcAft>
             </a:pPr>
             <a:r>
-              <a:rPr sz="1800" b="1">
+              <a:rPr sz="1600" b="1">
                 <a:solidFill>
                   <a:srgbClr val="FFFFFF"/>
                 </a:solidFill>
                 <a:latin typeface="Arial"/>
               </a:rPr>
-              <a:t>MID-CALL</a:t>
+              <a:t>Unused credits</a:t>
             </a:r>
           </a:p>
           <a:p>
@@ -15247,7 +16367,7 @@
                 </a:solidFill>
                 <a:latin typeface="Arial"/>
               </a:rPr>
-              <a:t>It listens every turn</a:t>
+              <a:t>paid for leads, not using them</a:t>
             </a:r>
           </a:p>
         </p:txBody>
@@ -15260,8 +16380,8 @@
         </p:nvSpPr>
         <p:spPr>
           <a:xfrm>
-            <a:off x="3429000" y="2468880"/>
-            <a:ext cx="2606040" cy="1920240"/>
+            <a:off x="502920" y="3337560"/>
+            <a:ext cx="2743200" cy="1691640"/>
           </a:xfrm>
           <a:prstGeom prst="roundRect">
             <a:avLst>
@@ -15269,7 +16389,7 @@
             </a:avLst>
           </a:prstGeom>
           <a:solidFill>
-            <a:srgbClr val="EEF2F8"/>
+            <a:srgbClr val="E08A00"/>
           </a:solidFill>
           <a:ln>
             <a:noFill/>
@@ -15291,91 +16411,57 @@
           </a:fontRef>
         </p:style>
         <p:txBody>
-          <a:bodyPr rtlCol="0" anchor="t" wrap="square" lIns="109728" rIns="109728" tIns="54864" bIns="54864"/>
+          <a:bodyPr rtlCol="0" anchor="ctr" wrap="square" lIns="109728" rIns="109728" tIns="54864" bIns="54864"/>
           <a:lstStyle/>
           <a:p>
-            <a:pPr algn="l" marL="182880" indent="-164592">
-              <a:spcAft>
-                <a:spcPts val="600"/>
-              </a:spcAft>
-              <a:buChar char="•"/>
+            <a:pPr algn="ctr">
+              <a:spcAft>
+                <a:spcPts val="200"/>
+              </a:spcAft>
             </a:pPr>
             <a:r>
-              <a:rPr sz="1300" b="0">
-                <a:solidFill>
-                  <a:srgbClr val="262626"/>
+              <a:rPr sz="1600" b="1">
+                <a:solidFill>
+                  <a:srgbClr val="FFFFFF"/>
                 </a:solidFill>
                 <a:latin typeface="Arial"/>
               </a:rPr>
-              <a:t>Rushed: shorter</a:t>
-            </a:r>
-          </a:p>
-          <a:p>
-            <a:pPr algn="l" marL="182880" indent="-164592">
-              <a:spcAft>
-                <a:spcPts val="600"/>
-              </a:spcAft>
-              <a:buChar char="•"/>
+              <a:t>Lead quality fix</a:t>
+            </a:r>
+          </a:p>
+          <a:p>
+            <a:pPr algn="ctr">
+              <a:spcAft>
+                <a:spcPts val="0"/>
+              </a:spcAft>
             </a:pPr>
             <a:r>
-              <a:rPr sz="1300" b="0">
-                <a:solidFill>
-                  <a:srgbClr val="262626"/>
+              <a:rPr sz="1200" b="0">
+                <a:solidFill>
+                  <a:srgbClr val="FFFFFF"/>
                 </a:solidFill>
                 <a:latin typeface="Arial"/>
               </a:rPr>
-              <a:t>Confused: simpler</a:t>
-            </a:r>
-          </a:p>
-          <a:p>
-            <a:pPr algn="l" marL="182880" indent="-164592">
-              <a:spcAft>
-                <a:spcPts val="600"/>
-              </a:spcAft>
-              <a:buChar char="•"/>
-            </a:pPr>
-            <a:r>
-              <a:rPr sz="1300" b="0">
-                <a:solidFill>
-                  <a:srgbClr val="262626"/>
-                </a:solidFill>
-                <a:latin typeface="Arial"/>
-              </a:rPr>
-              <a:t>Irritated: apologises</a:t>
-            </a:r>
-          </a:p>
-          <a:p>
-            <a:pPr algn="l" marL="182880" indent="-164592">
-              <a:spcAft>
-                <a:spcPts val="600"/>
-              </a:spcAft>
-              <a:buChar char="•"/>
-            </a:pPr>
-            <a:r>
-              <a:rPr sz="1300" b="0">
-                <a:solidFill>
-                  <a:srgbClr val="262626"/>
-                </a:solidFill>
-                <a:latin typeface="Arial"/>
-              </a:rPr>
-              <a:t>Language switch: follows</a:t>
-            </a:r>
-          </a:p>
-        </p:txBody>
-      </p:sp>
-      <p:sp>
-        <p:nvSpPr>
-          <p:cNvPr id="8" name="Right Arrow 7"/>
+              <a:t>set filters for the right buyers</a:t>
+            </a:r>
+          </a:p>
+        </p:txBody>
+      </p:sp>
+      <p:sp>
+        <p:nvSpPr>
+          <p:cNvPr id="8" name="Rounded Rectangle 7"/>
           <p:cNvSpPr/>
           <p:nvPr/>
         </p:nvSpPr>
         <p:spPr>
           <a:xfrm>
-            <a:off x="6062472" y="1737360"/>
-            <a:ext cx="292608" cy="365760"/>
-          </a:xfrm>
-          <a:prstGeom prst="rightArrow">
-            <a:avLst/>
+            <a:off x="3429000" y="3337560"/>
+            <a:ext cx="2743200" cy="1691640"/>
+          </a:xfrm>
+          <a:prstGeom prst="roundRect">
+            <a:avLst>
+              <a:gd name="adj" fmla="val 6000"/>
+            </a:avLst>
           </a:prstGeom>
           <a:solidFill>
             <a:srgbClr val="595959"/>
@@ -15383,6 +16469,7 @@
           <a:ln>
             <a:noFill/>
           </a:ln>
+          <a:effectLst/>
         </p:spPr>
         <p:style>
           <a:lnRef idx="1">
@@ -15399,10 +16486,39 @@
           </a:fontRef>
         </p:style>
         <p:txBody>
-          <a:bodyPr rtlCol="0" anchor="ctr"/>
+          <a:bodyPr rtlCol="0" anchor="ctr" wrap="square" lIns="109728" rIns="109728" tIns="54864" bIns="54864"/>
           <a:lstStyle/>
           <a:p>
-            <a:pPr algn="ctr"/>
+            <a:pPr algn="ctr">
+              <a:spcAft>
+                <a:spcPts val="200"/>
+              </a:spcAft>
+            </a:pPr>
+            <a:r>
+              <a:rPr sz="1600" b="1">
+                <a:solidFill>
+                  <a:srgbClr val="FFFFFF"/>
+                </a:solidFill>
+                <a:latin typeface="Arial"/>
+              </a:rPr>
+              <a:t>Enquiry drop</a:t>
+            </a:r>
+          </a:p>
+          <a:p>
+            <a:pPr algn="ctr">
+              <a:spcAft>
+                <a:spcPts val="0"/>
+              </a:spcAft>
+            </a:pPr>
+            <a:r>
+              <a:rPr sz="1200" b="0">
+                <a:solidFill>
+                  <a:srgbClr val="FFFFFF"/>
+                </a:solidFill>
+                <a:latin typeface="Arial"/>
+              </a:rPr>
+              <a:t>enquiries fell vs last quarter</a:t>
+            </a:r>
           </a:p>
         </p:txBody>
       </p:sp>
@@ -15414,8 +16530,8 @@
         </p:nvSpPr>
         <p:spPr>
           <a:xfrm>
-            <a:off x="6355080" y="1463040"/>
-            <a:ext cx="2606040" cy="914400"/>
+            <a:off x="6355080" y="3337560"/>
+            <a:ext cx="2743200" cy="1691640"/>
           </a:xfrm>
           <a:prstGeom prst="roundRect">
             <a:avLst>
@@ -15423,7 +16539,7 @@
             </a:avLst>
           </a:prstGeom>
           <a:solidFill>
-            <a:srgbClr val="C00000"/>
+            <a:srgbClr val="1B6B5E"/>
           </a:solidFill>
           <a:ln>
             <a:noFill/>
@@ -15450,17 +16566,17 @@
           <a:p>
             <a:pPr algn="ctr">
               <a:spcAft>
-                <a:spcPts val="100"/>
+                <a:spcPts val="200"/>
               </a:spcAft>
             </a:pPr>
             <a:r>
-              <a:rPr sz="1800" b="1">
+              <a:rPr sz="1600" b="1">
                 <a:solidFill>
                   <a:srgbClr val="FFFFFF"/>
                 </a:solidFill>
                 <a:latin typeface="Arial"/>
               </a:rPr>
-              <a:t>END</a:t>
+              <a:t>Peer usage</a:t>
             </a:r>
           </a:p>
           <a:p>
@@ -15476,7 +16592,7 @@
                 </a:solidFill>
                 <a:latin typeface="Arial"/>
               </a:rPr>
-              <a:t>Meeting booked</a:t>
+              <a:t>similar sellers buy leads</a:t>
             </a:r>
           </a:p>
         </p:txBody>
@@ -15489,8 +16605,8 @@
         </p:nvSpPr>
         <p:spPr>
           <a:xfrm>
-            <a:off x="6355080" y="2468880"/>
-            <a:ext cx="2606040" cy="1920240"/>
+            <a:off x="9281160" y="3337560"/>
+            <a:ext cx="2743200" cy="1691640"/>
           </a:xfrm>
           <a:prstGeom prst="roundRect">
             <a:avLst>
@@ -15498,7 +16614,7 @@
             </a:avLst>
           </a:prstGeom>
           <a:solidFill>
-            <a:srgbClr val="EEF2F8"/>
+            <a:srgbClr val="8A1C1C"/>
           </a:solidFill>
           <a:ln>
             <a:noFill/>
@@ -15520,98 +16636,67 @@
           </a:fontRef>
         </p:style>
         <p:txBody>
-          <a:bodyPr rtlCol="0" anchor="t" wrap="square" lIns="109728" rIns="109728" tIns="54864" bIns="54864"/>
+          <a:bodyPr rtlCol="0" anchor="ctr" wrap="square" lIns="109728" rIns="109728" tIns="54864" bIns="54864"/>
           <a:lstStyle/>
           <a:p>
-            <a:pPr algn="l" marL="182880" indent="-164592">
-              <a:spcAft>
-                <a:spcPts val="600"/>
-              </a:spcAft>
-              <a:buChar char="•"/>
+            <a:pPr algn="ctr">
+              <a:spcAft>
+                <a:spcPts val="200"/>
+              </a:spcAft>
             </a:pPr>
             <a:r>
-              <a:rPr sz="1300" b="0">
-                <a:solidFill>
-                  <a:srgbClr val="262626"/>
+              <a:rPr sz="1600" b="1">
+                <a:solidFill>
+                  <a:srgbClr val="FFFFFF"/>
                 </a:solidFill>
                 <a:latin typeface="Arial"/>
               </a:rPr>
-              <a:t>Day and time agreed</a:t>
-            </a:r>
-          </a:p>
-          <a:p>
-            <a:pPr algn="l" marL="182880" indent="-164592">
-              <a:spcAft>
-                <a:spcPts val="600"/>
-              </a:spcAft>
-              <a:buChar char="•"/>
+              <a:t>Resolve grievance</a:t>
+            </a:r>
+          </a:p>
+          <a:p>
+            <a:pPr algn="ctr">
+              <a:spcAft>
+                <a:spcPts val="0"/>
+              </a:spcAft>
             </a:pPr>
             <a:r>
-              <a:rPr sz="1300" b="0">
-                <a:solidFill>
-                  <a:srgbClr val="262626"/>
+              <a:rPr sz="1200" b="0">
+                <a:solidFill>
+                  <a:srgbClr val="FFFFFF"/>
                 </a:solidFill>
                 <a:latin typeface="Arial"/>
               </a:rPr>
-              <a:t>With the sales handler, or our executive</a:t>
-            </a:r>
-          </a:p>
-          <a:p>
-            <a:pPr algn="l" marL="182880" indent="-164592">
-              <a:spcAft>
-                <a:spcPts val="600"/>
-              </a:spcAft>
-              <a:buChar char="•"/>
-            </a:pPr>
-            <a:r>
-              <a:rPr sz="1300" b="0">
-                <a:solidFill>
-                  <a:srgbClr val="262626"/>
-                </a:solidFill>
-                <a:latin typeface="Arial"/>
-              </a:rPr>
-              <a:t>Then: anything else?</a:t>
-            </a:r>
-          </a:p>
-          <a:p>
-            <a:pPr algn="l" marL="182880" indent="-164592">
-              <a:spcAft>
-                <a:spcPts val="600"/>
-              </a:spcAft>
-              <a:buChar char="•"/>
-            </a:pPr>
-            <a:r>
-              <a:rPr sz="1300" b="0">
-                <a:solidFill>
-                  <a:srgbClr val="262626"/>
-                </a:solidFill>
-                <a:latin typeface="Arial"/>
-              </a:rPr>
-              <a:t>Or a callback</a:t>
-            </a:r>
-          </a:p>
-        </p:txBody>
-      </p:sp>
-      <p:sp>
-        <p:nvSpPr>
-          <p:cNvPr id="11" name="Right Arrow 10"/>
+              <a:t>own the complaint first</a:t>
+            </a:r>
+          </a:p>
+        </p:txBody>
+      </p:sp>
+      <p:sp>
+        <p:nvSpPr>
+          <p:cNvPr id="11" name="Rounded Rectangle 10"/>
           <p:cNvSpPr/>
           <p:nvPr/>
         </p:nvSpPr>
         <p:spPr>
           <a:xfrm>
-            <a:off x="8988552" y="1737360"/>
-            <a:ext cx="292608" cy="365760"/>
-          </a:xfrm>
-          <a:prstGeom prst="rightArrow">
-            <a:avLst/>
-          </a:prstGeom>
-          <a:solidFill>
-            <a:srgbClr val="595959"/>
-          </a:solidFill>
-          <a:ln>
-            <a:noFill/>
+            <a:off x="502920" y="5349240"/>
+            <a:ext cx="11338560" cy="640080"/>
+          </a:xfrm>
+          <a:prstGeom prst="roundRect">
+            <a:avLst>
+              <a:gd name="adj" fmla="val 30000"/>
+            </a:avLst>
+          </a:prstGeom>
+          <a:solidFill>
+            <a:srgbClr val="EEF2F8"/>
+          </a:solidFill>
+          <a:ln w="12700">
+            <a:solidFill>
+              <a:srgbClr val="002060"/>
+            </a:solidFill>
           </a:ln>
+          <a:effectLst/>
         </p:spPr>
         <p:style>
           <a:lnRef idx="1">
@@ -15628,321 +16713,22 @@
           </a:fontRef>
         </p:style>
         <p:txBody>
-          <a:bodyPr rtlCol="0" anchor="ctr"/>
-          <a:lstStyle/>
-          <a:p>
-            <a:pPr algn="ctr"/>
-          </a:p>
-        </p:txBody>
-      </p:sp>
-      <p:sp>
-        <p:nvSpPr>
-          <p:cNvPr id="12" name="Rounded Rectangle 11"/>
-          <p:cNvSpPr/>
-          <p:nvPr/>
-        </p:nvSpPr>
-        <p:spPr>
-          <a:xfrm>
-            <a:off x="9281160" y="1463040"/>
-            <a:ext cx="2606040" cy="914400"/>
-          </a:xfrm>
-          <a:prstGeom prst="roundRect">
-            <a:avLst>
-              <a:gd name="adj" fmla="val 6000"/>
-            </a:avLst>
-          </a:prstGeom>
-          <a:solidFill>
-            <a:srgbClr val="5B3E96"/>
-          </a:solidFill>
-          <a:ln>
-            <a:noFill/>
-          </a:ln>
-          <a:effectLst/>
-        </p:spPr>
-        <p:style>
-          <a:lnRef idx="1">
-            <a:schemeClr val="accent1"/>
-          </a:lnRef>
-          <a:fillRef idx="3">
-            <a:schemeClr val="accent1"/>
-          </a:fillRef>
-          <a:effectRef idx="2">
-            <a:schemeClr val="accent1"/>
-          </a:effectRef>
-          <a:fontRef idx="minor">
-            <a:schemeClr val="lt1"/>
-          </a:fontRef>
-        </p:style>
-        <p:txBody>
           <a:bodyPr rtlCol="0" anchor="ctr" wrap="square" lIns="109728" rIns="109728" tIns="54864" bIns="54864"/>
           <a:lstStyle/>
           <a:p>
             <a:pPr algn="ctr">
               <a:spcAft>
-                <a:spcPts val="100"/>
+                <a:spcPts val="0"/>
               </a:spcAft>
             </a:pPr>
             <a:r>
-              <a:rPr sz="1800" b="1">
-                <a:solidFill>
-                  <a:srgbClr val="FFFFFF"/>
+              <a:rPr sz="1400" b="1">
+                <a:solidFill>
+                  <a:srgbClr val="002060"/>
                 </a:solidFill>
                 <a:latin typeface="Arial"/>
               </a:rPr>
-              <a:t>IMPROVE</a:t>
-            </a:r>
-          </a:p>
-          <a:p>
-            <a:pPr algn="ctr">
-              <a:spcAft>
-                <a:spcPts val="0"/>
-              </a:spcAft>
-            </a:pPr>
-            <a:r>
-              <a:rPr sz="1200" b="0">
-                <a:solidFill>
-                  <a:srgbClr val="FFFFFF"/>
-                </a:solidFill>
-                <a:latin typeface="Arial"/>
-              </a:rPr>
-              <a:t>Every call teaches</a:t>
-            </a:r>
-          </a:p>
-        </p:txBody>
-      </p:sp>
-      <p:sp>
-        <p:nvSpPr>
-          <p:cNvPr id="13" name="Rounded Rectangle 12"/>
-          <p:cNvSpPr/>
-          <p:nvPr/>
-        </p:nvSpPr>
-        <p:spPr>
-          <a:xfrm>
-            <a:off x="9281160" y="2468880"/>
-            <a:ext cx="2606040" cy="1920240"/>
-          </a:xfrm>
-          <a:prstGeom prst="roundRect">
-            <a:avLst>
-              <a:gd name="adj" fmla="val 6000"/>
-            </a:avLst>
-          </a:prstGeom>
-          <a:solidFill>
-            <a:srgbClr val="EEF2F8"/>
-          </a:solidFill>
-          <a:ln>
-            <a:noFill/>
-          </a:ln>
-          <a:effectLst/>
-        </p:spPr>
-        <p:style>
-          <a:lnRef idx="1">
-            <a:schemeClr val="accent1"/>
-          </a:lnRef>
-          <a:fillRef idx="3">
-            <a:schemeClr val="accent1"/>
-          </a:fillRef>
-          <a:effectRef idx="2">
-            <a:schemeClr val="accent1"/>
-          </a:effectRef>
-          <a:fontRef idx="minor">
-            <a:schemeClr val="lt1"/>
-          </a:fontRef>
-        </p:style>
-        <p:txBody>
-          <a:bodyPr rtlCol="0" anchor="t" wrap="square" lIns="109728" rIns="109728" tIns="54864" bIns="54864"/>
-          <a:lstStyle/>
-          <a:p>
-            <a:pPr algn="l" marL="182880" indent="-164592">
-              <a:spcAft>
-                <a:spcPts val="600"/>
-              </a:spcAft>
-              <a:buChar char="•"/>
-            </a:pPr>
-            <a:r>
-              <a:rPr sz="1300" b="0">
-                <a:solidFill>
-                  <a:srgbClr val="262626"/>
-                </a:solidFill>
-                <a:latin typeface="Arial"/>
-              </a:rPr>
-              <a:t>Review the call, rule checks R1-R6</a:t>
-            </a:r>
-          </a:p>
-          <a:p>
-            <a:pPr algn="l" marL="182880" indent="-164592">
-              <a:spcAft>
-                <a:spcPts val="600"/>
-              </a:spcAft>
-              <a:buChar char="•"/>
-            </a:pPr>
-            <a:r>
-              <a:rPr sz="1300" b="0">
-                <a:solidFill>
-                  <a:srgbClr val="262626"/>
-                </a:solidFill>
-                <a:latin typeface="Arial"/>
-              </a:rPr>
-              <a:t>Score persona and hook</a:t>
-            </a:r>
-          </a:p>
-          <a:p>
-            <a:pPr algn="l" marL="182880" indent="-164592">
-              <a:spcAft>
-                <a:spcPts val="600"/>
-              </a:spcAft>
-              <a:buChar char="•"/>
-            </a:pPr>
-            <a:r>
-              <a:rPr sz="1300" b="0">
-                <a:solidFill>
-                  <a:srgbClr val="262626"/>
-                </a:solidFill>
-                <a:latin typeface="Arial"/>
-              </a:rPr>
-              <a:t>Better pick next time</a:t>
-            </a:r>
-          </a:p>
-        </p:txBody>
-      </p:sp>
-      <p:sp>
-        <p:nvSpPr>
-          <p:cNvPr id="14" name="Left Arrow 13"/>
-          <p:cNvSpPr/>
-          <p:nvPr/>
-        </p:nvSpPr>
-        <p:spPr>
-          <a:xfrm>
-            <a:off x="1463040" y="4754880"/>
-            <a:ext cx="9144000" cy="548640"/>
-          </a:xfrm>
-          <a:prstGeom prst="leftArrow">
-            <a:avLst/>
-          </a:prstGeom>
-          <a:solidFill>
-            <a:srgbClr val="B9A7DB"/>
-          </a:solidFill>
-          <a:ln>
-            <a:noFill/>
-          </a:ln>
-        </p:spPr>
-        <p:style>
-          <a:lnRef idx="1">
-            <a:schemeClr val="accent1"/>
-          </a:lnRef>
-          <a:fillRef idx="3">
-            <a:schemeClr val="accent1"/>
-          </a:fillRef>
-          <a:effectRef idx="2">
-            <a:schemeClr val="accent1"/>
-          </a:effectRef>
-          <a:fontRef idx="minor">
-            <a:schemeClr val="lt1"/>
-          </a:fontRef>
-        </p:style>
-        <p:txBody>
-          <a:bodyPr rtlCol="0" anchor="ctr"/>
-          <a:lstStyle/>
-          <a:p>
-            <a:pPr algn="ctr"/>
-          </a:p>
-        </p:txBody>
-      </p:sp>
-      <p:sp>
-        <p:nvSpPr>
-          <p:cNvPr id="15" name="TextBox 14"/>
-          <p:cNvSpPr txBox="1"/>
-          <p:nvPr/>
-        </p:nvSpPr>
-        <p:spPr>
-          <a:xfrm>
-            <a:off x="2377440" y="4846320"/>
-            <a:ext cx="7315200" cy="365760"/>
-          </a:xfrm>
-          <a:prstGeom prst="rect">
-            <a:avLst/>
-          </a:prstGeom>
-          <a:noFill/>
-        </p:spPr>
-        <p:txBody>
-          <a:bodyPr wrap="square">
-            <a:spAutoFit/>
-          </a:bodyPr>
-          <a:lstStyle/>
-          <a:p>
-            <a:pPr algn="ctr">
-              <a:spcAft>
-                <a:spcPts val="0"/>
-              </a:spcAft>
-            </a:pPr>
-            <a:r>
-              <a:rPr sz="1400" b="1">
-                <a:solidFill>
-                  <a:srgbClr val="5B3E96"/>
-                </a:solidFill>
-                <a:latin typeface="Arial"/>
-              </a:rPr>
-              <a:t>The improvement loop feeds the next call's persona and hook</a:t>
-            </a:r>
-          </a:p>
-        </p:txBody>
-      </p:sp>
-      <p:sp>
-        <p:nvSpPr>
-          <p:cNvPr id="16" name="Rounded Rectangle 15"/>
-          <p:cNvSpPr/>
-          <p:nvPr/>
-        </p:nvSpPr>
-        <p:spPr>
-          <a:xfrm>
-            <a:off x="502920" y="5440680"/>
-            <a:ext cx="11338560" cy="594360"/>
-          </a:xfrm>
-          <a:prstGeom prst="roundRect">
-            <a:avLst>
-              <a:gd name="adj" fmla="val 30000"/>
-            </a:avLst>
-          </a:prstGeom>
-          <a:solidFill>
-            <a:srgbClr val="FFFFFF"/>
-          </a:solidFill>
-          <a:ln w="12700">
-            <a:solidFill>
-              <a:srgbClr val="2EA896"/>
-            </a:solidFill>
-          </a:ln>
-          <a:effectLst/>
-        </p:spPr>
-        <p:style>
-          <a:lnRef idx="1">
-            <a:schemeClr val="accent1"/>
-          </a:lnRef>
-          <a:fillRef idx="3">
-            <a:schemeClr val="accent1"/>
-          </a:fillRef>
-          <a:effectRef idx="2">
-            <a:schemeClr val="accent1"/>
-          </a:effectRef>
-          <a:fontRef idx="minor">
-            <a:schemeClr val="lt1"/>
-          </a:fontRef>
-        </p:style>
-        <p:txBody>
-          <a:bodyPr rtlCol="0" anchor="ctr" wrap="square" lIns="109728" rIns="109728" tIns="54864" bIns="54864"/>
-          <a:lstStyle/>
-          <a:p>
-            <a:pPr algn="ctr">
-              <a:spcAft>
-                <a:spcPts val="0"/>
-              </a:spcAft>
-            </a:pPr>
-            <a:r>
-              <a:rPr sz="1200" b="1">
-                <a:solidFill>
-                  <a:srgbClr val="002060"/>
-                </a:solidFill>
-                <a:latin typeface="Arial"/>
-              </a:rPr>
-              <a:t>Mood decision: instant keyword tool in-call, plus Jev decision model (6 mood questions, ~0.5 s) to label real calls and check the tool</a:t>
+              <a:t>One main hook plus a backup per seller. Every number comes from the seller's data.</a:t>
             </a:r>
           </a:p>
         </p:txBody>
@@ -15981,7 +16767,7 @@
           <a:lstStyle/>
           <a:p>
             <a:r>
-              <a:t>Mid-Call: Same-Turn Adaptation</a:t>
+              <a:t>One Call: Start, Mid-Call, End, Improve</a:t>
             </a:r>
           </a:p>
         </p:txBody>
@@ -15994,21 +16780,19 @@
         </p:nvSpPr>
         <p:spPr>
           <a:xfrm>
-            <a:off x="566928" y="1371600"/>
-            <a:ext cx="4754880" cy="621792"/>
+            <a:off x="502920" y="1463040"/>
+            <a:ext cx="2606040" cy="914400"/>
           </a:xfrm>
           <a:prstGeom prst="roundRect">
             <a:avLst>
-              <a:gd name="adj" fmla="val 40000"/>
+              <a:gd name="adj" fmla="val 6000"/>
             </a:avLst>
           </a:prstGeom>
           <a:solidFill>
-            <a:srgbClr val="EEF2F8"/>
-          </a:solidFill>
-          <a:ln w="12700">
-            <a:solidFill>
-              <a:srgbClr val="595959"/>
-            </a:solidFill>
+            <a:srgbClr val="2EA896"/>
+          </a:solidFill>
+          <a:ln>
+            <a:noFill/>
           </a:ln>
           <a:effectLst/>
         </p:spPr>
@@ -16030,43 +16814,62 @@
           <a:bodyPr rtlCol="0" anchor="ctr" wrap="square" lIns="109728" rIns="109728" tIns="54864" bIns="54864"/>
           <a:lstStyle/>
           <a:p>
-            <a:pPr algn="l">
-              <a:spcAft>
-                <a:spcPts val="0"/>
+            <a:pPr algn="ctr">
+              <a:spcAft>
+                <a:spcPts val="100"/>
               </a:spcAft>
             </a:pPr>
             <a:r>
-              <a:rPr sz="1400" b="0">
-                <a:solidFill>
-                  <a:srgbClr val="262626"/>
+              <a:rPr sz="1800" b="1">
+                <a:solidFill>
+                  <a:srgbClr val="FFFFFF"/>
                 </a:solidFill>
                 <a:latin typeface="Arial"/>
               </a:rPr>
-              <a:t>“Nahi chahiye”</a:t>
-            </a:r>
-          </a:p>
-        </p:txBody>
-      </p:sp>
-      <p:sp>
-        <p:nvSpPr>
-          <p:cNvPr id="4" name="Right Arrow 3"/>
+              <a:t>START</a:t>
+            </a:r>
+          </a:p>
+          <a:p>
+            <a:pPr algn="ctr">
+              <a:spcAft>
+                <a:spcPts val="0"/>
+              </a:spcAft>
+            </a:pPr>
+            <a:r>
+              <a:rPr sz="1200" b="0">
+                <a:solidFill>
+                  <a:srgbClr val="FFFFFF"/>
+                </a:solidFill>
+                <a:latin typeface="Arial"/>
+              </a:rPr>
+              <a:t>Persona is set</a:t>
+            </a:r>
+          </a:p>
+        </p:txBody>
+      </p:sp>
+      <p:sp>
+        <p:nvSpPr>
+          <p:cNvPr id="4" name="Rounded Rectangle 3"/>
           <p:cNvSpPr/>
           <p:nvPr/>
         </p:nvSpPr>
         <p:spPr>
           <a:xfrm>
-            <a:off x="5440680" y="1499616"/>
-            <a:ext cx="457200" cy="365760"/>
-          </a:xfrm>
-          <a:prstGeom prst="rightArrow">
-            <a:avLst/>
-          </a:prstGeom>
-          <a:solidFill>
-            <a:srgbClr val="E08A00"/>
+            <a:off x="502920" y="2468880"/>
+            <a:ext cx="2606040" cy="1920240"/>
+          </a:xfrm>
+          <a:prstGeom prst="roundRect">
+            <a:avLst>
+              <a:gd name="adj" fmla="val 6000"/>
+            </a:avLst>
+          </a:prstGeom>
+          <a:solidFill>
+            <a:srgbClr val="EEF2F8"/>
           </a:solidFill>
           <a:ln>
             <a:noFill/>
           </a:ln>
+          <a:effectLst/>
         </p:spPr>
         <p:style>
           <a:lnRef idx="1">
@@ -16083,36 +16886,81 @@
           </a:fontRef>
         </p:style>
         <p:txBody>
-          <a:bodyPr rtlCol="0" anchor="ctr"/>
+          <a:bodyPr rtlCol="0" anchor="t" wrap="square" lIns="109728" rIns="109728" tIns="54864" bIns="54864"/>
           <a:lstStyle/>
           <a:p>
-            <a:pPr algn="ctr"/>
-          </a:p>
-        </p:txBody>
-      </p:sp>
-      <p:sp>
-        <p:nvSpPr>
-          <p:cNvPr id="5" name="Rounded Rectangle 4"/>
+            <a:pPr algn="l" marL="182880" indent="-164592">
+              <a:spcAft>
+                <a:spcPts val="600"/>
+              </a:spcAft>
+              <a:buChar char="•"/>
+            </a:pPr>
+            <a:r>
+              <a:rPr sz="1300" b="0">
+                <a:solidFill>
+                  <a:srgbClr val="262626"/>
+                </a:solidFill>
+                <a:latin typeface="Arial"/>
+              </a:rPr>
+              <a:t>Voice, pace, pitch</a:t>
+            </a:r>
+          </a:p>
+          <a:p>
+            <a:pPr algn="l" marL="182880" indent="-164592">
+              <a:spcAft>
+                <a:spcPts val="600"/>
+              </a:spcAft>
+              <a:buChar char="•"/>
+            </a:pPr>
+            <a:r>
+              <a:rPr sz="1300" b="0">
+                <a:solidFill>
+                  <a:srgbClr val="262626"/>
+                </a:solidFill>
+                <a:latin typeface="Arial"/>
+              </a:rPr>
+              <a:t>Start language</a:t>
+            </a:r>
+          </a:p>
+          <a:p>
+            <a:pPr algn="l" marL="182880" indent="-164592">
+              <a:spcAft>
+                <a:spcPts val="600"/>
+              </a:spcAft>
+              <a:buChar char="•"/>
+            </a:pPr>
+            <a:r>
+              <a:rPr sz="1300" b="0">
+                <a:solidFill>
+                  <a:srgbClr val="262626"/>
+                </a:solidFill>
+                <a:latin typeface="Arial"/>
+              </a:rPr>
+              <a:t>Opening line and hook</a:t>
+            </a:r>
+          </a:p>
+        </p:txBody>
+      </p:sp>
+      <p:sp>
+        <p:nvSpPr>
+          <p:cNvPr id="5" name="Right Arrow 4"/>
           <p:cNvSpPr/>
           <p:nvPr/>
         </p:nvSpPr>
         <p:spPr>
           <a:xfrm>
-            <a:off x="6035040" y="1371600"/>
-            <a:ext cx="5577840" cy="621792"/>
-          </a:xfrm>
-          <a:prstGeom prst="roundRect">
-            <a:avLst>
-              <a:gd name="adj" fmla="val 40000"/>
-            </a:avLst>
-          </a:prstGeom>
-          <a:solidFill>
-            <a:srgbClr val="E08A00"/>
+            <a:off x="3136391" y="1737360"/>
+            <a:ext cx="292608" cy="365760"/>
+          </a:xfrm>
+          <a:prstGeom prst="rightArrow">
+            <a:avLst/>
+          </a:prstGeom>
+          <a:solidFill>
+            <a:srgbClr val="595959"/>
           </a:solidFill>
           <a:ln>
             <a:noFill/>
           </a:ln>
-          <a:effectLst/>
         </p:spPr>
         <p:style>
           <a:lnRef idx="1">
@@ -16129,23 +16977,10 @@
           </a:fontRef>
         </p:style>
         <p:txBody>
-          <a:bodyPr rtlCol="0" anchor="ctr" wrap="square" lIns="109728" rIns="109728" tIns="54864" bIns="54864"/>
+          <a:bodyPr rtlCol="0" anchor="ctr"/>
           <a:lstStyle/>
           <a:p>
-            <a:pPr algn="l">
-              <a:spcAft>
-                <a:spcPts val="0"/>
-              </a:spcAft>
-            </a:pPr>
-            <a:r>
-              <a:rPr sz="1400" b="1">
-                <a:solidFill>
-                  <a:srgbClr val="FFFFFF"/>
-                </a:solidFill>
-                <a:latin typeface="Arial"/>
-              </a:rPr>
-              <a:t>Stays on the line, restates the hook</a:t>
-            </a:r>
+            <a:pPr algn="ctr"/>
           </a:p>
         </p:txBody>
       </p:sp>
@@ -16157,21 +16992,19 @@
         </p:nvSpPr>
         <p:spPr>
           <a:xfrm>
-            <a:off x="566928" y="2130552"/>
-            <a:ext cx="4754880" cy="621792"/>
+            <a:off x="3429000" y="1463040"/>
+            <a:ext cx="2606040" cy="914400"/>
           </a:xfrm>
           <a:prstGeom prst="roundRect">
             <a:avLst>
-              <a:gd name="adj" fmla="val 40000"/>
+              <a:gd name="adj" fmla="val 6000"/>
             </a:avLst>
           </a:prstGeom>
           <a:solidFill>
-            <a:srgbClr val="EEF2F8"/>
-          </a:solidFill>
-          <a:ln w="12700">
-            <a:solidFill>
-              <a:srgbClr val="595959"/>
-            </a:solidFill>
+            <a:srgbClr val="002060"/>
+          </a:solidFill>
+          <a:ln>
+            <a:noFill/>
           </a:ln>
           <a:effectLst/>
         </p:spPr>
@@ -16193,43 +17026,62 @@
           <a:bodyPr rtlCol="0" anchor="ctr" wrap="square" lIns="109728" rIns="109728" tIns="54864" bIns="54864"/>
           <a:lstStyle/>
           <a:p>
-            <a:pPr algn="l">
-              <a:spcAft>
-                <a:spcPts val="0"/>
+            <a:pPr algn="ctr">
+              <a:spcAft>
+                <a:spcPts val="100"/>
               </a:spcAft>
             </a:pPr>
             <a:r>
-              <a:rPr sz="1400" b="0">
-                <a:solidFill>
-                  <a:srgbClr val="262626"/>
+              <a:rPr sz="1800" b="1">
+                <a:solidFill>
+                  <a:srgbClr val="FFFFFF"/>
                 </a:solidFill>
                 <a:latin typeface="Arial"/>
               </a:rPr>
-              <a:t>“I'm busy right now”</a:t>
-            </a:r>
-          </a:p>
-        </p:txBody>
-      </p:sp>
-      <p:sp>
-        <p:nvSpPr>
-          <p:cNvPr id="7" name="Right Arrow 6"/>
+              <a:t>MID-CALL</a:t>
+            </a:r>
+          </a:p>
+          <a:p>
+            <a:pPr algn="ctr">
+              <a:spcAft>
+                <a:spcPts val="0"/>
+              </a:spcAft>
+            </a:pPr>
+            <a:r>
+              <a:rPr sz="1200" b="0">
+                <a:solidFill>
+                  <a:srgbClr val="FFFFFF"/>
+                </a:solidFill>
+                <a:latin typeface="Arial"/>
+              </a:rPr>
+              <a:t>It listens every turn</a:t>
+            </a:r>
+          </a:p>
+        </p:txBody>
+      </p:sp>
+      <p:sp>
+        <p:nvSpPr>
+          <p:cNvPr id="7" name="Rounded Rectangle 6"/>
           <p:cNvSpPr/>
           <p:nvPr/>
         </p:nvSpPr>
         <p:spPr>
           <a:xfrm>
-            <a:off x="5440680" y="2258568"/>
-            <a:ext cx="457200" cy="365760"/>
-          </a:xfrm>
-          <a:prstGeom prst="rightArrow">
-            <a:avLst/>
-          </a:prstGeom>
-          <a:solidFill>
-            <a:srgbClr val="002060"/>
+            <a:off x="3429000" y="2468880"/>
+            <a:ext cx="2606040" cy="1920240"/>
+          </a:xfrm>
+          <a:prstGeom prst="roundRect">
+            <a:avLst>
+              <a:gd name="adj" fmla="val 6000"/>
+            </a:avLst>
+          </a:prstGeom>
+          <a:solidFill>
+            <a:srgbClr val="EEF2F8"/>
           </a:solidFill>
           <a:ln>
             <a:noFill/>
           </a:ln>
+          <a:effectLst/>
         </p:spPr>
         <p:style>
           <a:lnRef idx="1">
@@ -16246,36 +17098,98 @@
           </a:fontRef>
         </p:style>
         <p:txBody>
-          <a:bodyPr rtlCol="0" anchor="ctr"/>
+          <a:bodyPr rtlCol="0" anchor="t" wrap="square" lIns="109728" rIns="109728" tIns="54864" bIns="54864"/>
           <a:lstStyle/>
           <a:p>
-            <a:pPr algn="ctr"/>
-          </a:p>
-        </p:txBody>
-      </p:sp>
-      <p:sp>
-        <p:nvSpPr>
-          <p:cNvPr id="8" name="Rounded Rectangle 7"/>
+            <a:pPr algn="l" marL="182880" indent="-164592">
+              <a:spcAft>
+                <a:spcPts val="600"/>
+              </a:spcAft>
+              <a:buChar char="•"/>
+            </a:pPr>
+            <a:r>
+              <a:rPr sz="1300" b="0">
+                <a:solidFill>
+                  <a:srgbClr val="262626"/>
+                </a:solidFill>
+                <a:latin typeface="Arial"/>
+              </a:rPr>
+              <a:t>Rushed: shorter</a:t>
+            </a:r>
+          </a:p>
+          <a:p>
+            <a:pPr algn="l" marL="182880" indent="-164592">
+              <a:spcAft>
+                <a:spcPts val="600"/>
+              </a:spcAft>
+              <a:buChar char="•"/>
+            </a:pPr>
+            <a:r>
+              <a:rPr sz="1300" b="0">
+                <a:solidFill>
+                  <a:srgbClr val="262626"/>
+                </a:solidFill>
+                <a:latin typeface="Arial"/>
+              </a:rPr>
+              <a:t>Confused: simpler</a:t>
+            </a:r>
+          </a:p>
+          <a:p>
+            <a:pPr algn="l" marL="182880" indent="-164592">
+              <a:spcAft>
+                <a:spcPts val="600"/>
+              </a:spcAft>
+              <a:buChar char="•"/>
+            </a:pPr>
+            <a:r>
+              <a:rPr sz="1300" b="0">
+                <a:solidFill>
+                  <a:srgbClr val="262626"/>
+                </a:solidFill>
+                <a:latin typeface="Arial"/>
+              </a:rPr>
+              <a:t>Irritated: apologises</a:t>
+            </a:r>
+          </a:p>
+          <a:p>
+            <a:pPr algn="l" marL="182880" indent="-164592">
+              <a:spcAft>
+                <a:spcPts val="600"/>
+              </a:spcAft>
+              <a:buChar char="•"/>
+            </a:pPr>
+            <a:r>
+              <a:rPr sz="1300" b="0">
+                <a:solidFill>
+                  <a:srgbClr val="262626"/>
+                </a:solidFill>
+                <a:latin typeface="Arial"/>
+              </a:rPr>
+              <a:t>Language switch: follows</a:t>
+            </a:r>
+          </a:p>
+        </p:txBody>
+      </p:sp>
+      <p:sp>
+        <p:nvSpPr>
+          <p:cNvPr id="8" name="Right Arrow 7"/>
           <p:cNvSpPr/>
           <p:nvPr/>
         </p:nvSpPr>
         <p:spPr>
           <a:xfrm>
-            <a:off x="6035040" y="2130552"/>
-            <a:ext cx="5577840" cy="621792"/>
-          </a:xfrm>
-          <a:prstGeom prst="roundRect">
-            <a:avLst>
-              <a:gd name="adj" fmla="val 40000"/>
-            </a:avLst>
-          </a:prstGeom>
-          <a:solidFill>
-            <a:srgbClr val="002060"/>
+            <a:off x="6062472" y="1737360"/>
+            <a:ext cx="292608" cy="365760"/>
+          </a:xfrm>
+          <a:prstGeom prst="rightArrow">
+            <a:avLst/>
+          </a:prstGeom>
+          <a:solidFill>
+            <a:srgbClr val="595959"/>
           </a:solidFill>
           <a:ln>
             <a:noFill/>
           </a:ln>
-          <a:effectLst/>
         </p:spPr>
         <p:style>
           <a:lnRef idx="1">
@@ -16292,23 +17206,10 @@
           </a:fontRef>
         </p:style>
         <p:txBody>
-          <a:bodyPr rtlCol="0" anchor="ctr" wrap="square" lIns="109728" rIns="109728" tIns="54864" bIns="54864"/>
+          <a:bodyPr rtlCol="0" anchor="ctr"/>
           <a:lstStyle/>
           <a:p>
-            <a:pPr algn="l">
-              <a:spcAft>
-                <a:spcPts val="0"/>
-              </a:spcAft>
-            </a:pPr>
-            <a:r>
-              <a:rPr sz="1400" b="1">
-                <a:solidFill>
-                  <a:srgbClr val="FFFFFF"/>
-                </a:solidFill>
-                <a:latin typeface="Arial"/>
-              </a:rPr>
-              <a:t>One short sentence, offers a callback</a:t>
-            </a:r>
+            <a:pPr algn="ctr"/>
           </a:p>
         </p:txBody>
       </p:sp>
@@ -16320,21 +17221,19 @@
         </p:nvSpPr>
         <p:spPr>
           <a:xfrm>
-            <a:off x="566928" y="2889504"/>
-            <a:ext cx="4754880" cy="621792"/>
+            <a:off x="6355080" y="1463040"/>
+            <a:ext cx="2606040" cy="914400"/>
           </a:xfrm>
           <a:prstGeom prst="roundRect">
             <a:avLst>
-              <a:gd name="adj" fmla="val 40000"/>
+              <a:gd name="adj" fmla="val 6000"/>
             </a:avLst>
           </a:prstGeom>
           <a:solidFill>
-            <a:srgbClr val="EEF2F8"/>
-          </a:solidFill>
-          <a:ln w="12700">
-            <a:solidFill>
-              <a:srgbClr val="595959"/>
-            </a:solidFill>
+            <a:srgbClr val="C00000"/>
+          </a:solidFill>
+          <a:ln>
+            <a:noFill/>
           </a:ln>
           <a:effectLst/>
         </p:spPr>
@@ -16356,43 +17255,62 @@
           <a:bodyPr rtlCol="0" anchor="ctr" wrap="square" lIns="109728" rIns="109728" tIns="54864" bIns="54864"/>
           <a:lstStyle/>
           <a:p>
-            <a:pPr algn="l">
-              <a:spcAft>
-                <a:spcPts val="0"/>
+            <a:pPr algn="ctr">
+              <a:spcAft>
+                <a:spcPts val="100"/>
               </a:spcAft>
             </a:pPr>
             <a:r>
-              <a:rPr sz="1400" b="0">
-                <a:solidFill>
-                  <a:srgbClr val="262626"/>
+              <a:rPr sz="1800" b="1">
+                <a:solidFill>
+                  <a:srgbClr val="FFFFFF"/>
                 </a:solidFill>
                 <a:latin typeface="Arial"/>
               </a:rPr>
-              <a:t>“Samajh nahi aaya”</a:t>
-            </a:r>
-          </a:p>
-        </p:txBody>
-      </p:sp>
-      <p:sp>
-        <p:nvSpPr>
-          <p:cNvPr id="10" name="Right Arrow 9"/>
+              <a:t>END</a:t>
+            </a:r>
+          </a:p>
+          <a:p>
+            <a:pPr algn="ctr">
+              <a:spcAft>
+                <a:spcPts val="0"/>
+              </a:spcAft>
+            </a:pPr>
+            <a:r>
+              <a:rPr sz="1200" b="0">
+                <a:solidFill>
+                  <a:srgbClr val="FFFFFF"/>
+                </a:solidFill>
+                <a:latin typeface="Arial"/>
+              </a:rPr>
+              <a:t>Meeting booked</a:t>
+            </a:r>
+          </a:p>
+        </p:txBody>
+      </p:sp>
+      <p:sp>
+        <p:nvSpPr>
+          <p:cNvPr id="10" name="Rounded Rectangle 9"/>
           <p:cNvSpPr/>
           <p:nvPr/>
         </p:nvSpPr>
         <p:spPr>
           <a:xfrm>
-            <a:off x="5440680" y="3017520"/>
-            <a:ext cx="457200" cy="365760"/>
-          </a:xfrm>
-          <a:prstGeom prst="rightArrow">
-            <a:avLst/>
-          </a:prstGeom>
-          <a:solidFill>
-            <a:srgbClr val="2EA896"/>
+            <a:off x="6355080" y="2468880"/>
+            <a:ext cx="2606040" cy="1920240"/>
+          </a:xfrm>
+          <a:prstGeom prst="roundRect">
+            <a:avLst>
+              <a:gd name="adj" fmla="val 6000"/>
+            </a:avLst>
+          </a:prstGeom>
+          <a:solidFill>
+            <a:srgbClr val="EEF2F8"/>
           </a:solidFill>
           <a:ln>
             <a:noFill/>
           </a:ln>
+          <a:effectLst/>
         </p:spPr>
         <p:style>
           <a:lnRef idx="1">
@@ -16409,36 +17327,98 @@
           </a:fontRef>
         </p:style>
         <p:txBody>
-          <a:bodyPr rtlCol="0" anchor="ctr"/>
+          <a:bodyPr rtlCol="0" anchor="t" wrap="square" lIns="109728" rIns="109728" tIns="54864" bIns="54864"/>
           <a:lstStyle/>
           <a:p>
-            <a:pPr algn="ctr"/>
-          </a:p>
-        </p:txBody>
-      </p:sp>
-      <p:sp>
-        <p:nvSpPr>
-          <p:cNvPr id="11" name="Rounded Rectangle 10"/>
+            <a:pPr algn="l" marL="182880" indent="-164592">
+              <a:spcAft>
+                <a:spcPts val="600"/>
+              </a:spcAft>
+              <a:buChar char="•"/>
+            </a:pPr>
+            <a:r>
+              <a:rPr sz="1300" b="0">
+                <a:solidFill>
+                  <a:srgbClr val="262626"/>
+                </a:solidFill>
+                <a:latin typeface="Arial"/>
+              </a:rPr>
+              <a:t>Day and time agreed</a:t>
+            </a:r>
+          </a:p>
+          <a:p>
+            <a:pPr algn="l" marL="182880" indent="-164592">
+              <a:spcAft>
+                <a:spcPts val="600"/>
+              </a:spcAft>
+              <a:buChar char="•"/>
+            </a:pPr>
+            <a:r>
+              <a:rPr sz="1300" b="0">
+                <a:solidFill>
+                  <a:srgbClr val="262626"/>
+                </a:solidFill>
+                <a:latin typeface="Arial"/>
+              </a:rPr>
+              <a:t>With the sales handler, or our executive</a:t>
+            </a:r>
+          </a:p>
+          <a:p>
+            <a:pPr algn="l" marL="182880" indent="-164592">
+              <a:spcAft>
+                <a:spcPts val="600"/>
+              </a:spcAft>
+              <a:buChar char="•"/>
+            </a:pPr>
+            <a:r>
+              <a:rPr sz="1300" b="0">
+                <a:solidFill>
+                  <a:srgbClr val="262626"/>
+                </a:solidFill>
+                <a:latin typeface="Arial"/>
+              </a:rPr>
+              <a:t>Then: anything else?</a:t>
+            </a:r>
+          </a:p>
+          <a:p>
+            <a:pPr algn="l" marL="182880" indent="-164592">
+              <a:spcAft>
+                <a:spcPts val="600"/>
+              </a:spcAft>
+              <a:buChar char="•"/>
+            </a:pPr>
+            <a:r>
+              <a:rPr sz="1300" b="0">
+                <a:solidFill>
+                  <a:srgbClr val="262626"/>
+                </a:solidFill>
+                <a:latin typeface="Arial"/>
+              </a:rPr>
+              <a:t>Or a callback</a:t>
+            </a:r>
+          </a:p>
+        </p:txBody>
+      </p:sp>
+      <p:sp>
+        <p:nvSpPr>
+          <p:cNvPr id="11" name="Right Arrow 10"/>
           <p:cNvSpPr/>
           <p:nvPr/>
         </p:nvSpPr>
         <p:spPr>
           <a:xfrm>
-            <a:off x="6035040" y="2889504"/>
-            <a:ext cx="5577840" cy="621792"/>
-          </a:xfrm>
-          <a:prstGeom prst="roundRect">
-            <a:avLst>
-              <a:gd name="adj" fmla="val 40000"/>
-            </a:avLst>
-          </a:prstGeom>
-          <a:solidFill>
-            <a:srgbClr val="2EA896"/>
+            <a:off x="8988552" y="1737360"/>
+            <a:ext cx="292608" cy="365760"/>
+          </a:xfrm>
+          <a:prstGeom prst="rightArrow">
+            <a:avLst/>
+          </a:prstGeom>
+          <a:solidFill>
+            <a:srgbClr val="595959"/>
           </a:solidFill>
           <a:ln>
             <a:noFill/>
           </a:ln>
-          <a:effectLst/>
         </p:spPr>
         <p:style>
           <a:lnRef idx="1">
@@ -16455,23 +17435,10 @@
           </a:fontRef>
         </p:style>
         <p:txBody>
-          <a:bodyPr rtlCol="0" anchor="ctr" wrap="square" lIns="109728" rIns="109728" tIns="54864" bIns="54864"/>
+          <a:bodyPr rtlCol="0" anchor="ctr"/>
           <a:lstStyle/>
           <a:p>
-            <a:pPr algn="l">
-              <a:spcAft>
-                <a:spcPts val="0"/>
-              </a:spcAft>
-            </a:pPr>
-            <a:r>
-              <a:rPr sz="1400" b="1">
-                <a:solidFill>
-                  <a:srgbClr val="FFFFFF"/>
-                </a:solidFill>
-                <a:latin typeface="Arial"/>
-              </a:rPr>
-              <a:t>One idea, simple short phrases</a:t>
-            </a:r>
+            <a:pPr algn="ctr"/>
           </a:p>
         </p:txBody>
       </p:sp>
@@ -16483,21 +17450,19 @@
         </p:nvSpPr>
         <p:spPr>
           <a:xfrm>
-            <a:off x="566928" y="3648456"/>
-            <a:ext cx="4754880" cy="621792"/>
+            <a:off x="9281160" y="1463040"/>
+            <a:ext cx="2606040" cy="914400"/>
           </a:xfrm>
           <a:prstGeom prst="roundRect">
             <a:avLst>
-              <a:gd name="adj" fmla="val 40000"/>
+              <a:gd name="adj" fmla="val 6000"/>
             </a:avLst>
           </a:prstGeom>
           <a:solidFill>
-            <a:srgbClr val="EEF2F8"/>
-          </a:solidFill>
-          <a:ln w="12700">
-            <a:solidFill>
-              <a:srgbClr val="595959"/>
-            </a:solidFill>
+            <a:srgbClr val="5B3E96"/>
+          </a:solidFill>
+          <a:ln>
+            <a:noFill/>
           </a:ln>
           <a:effectLst/>
         </p:spPr>
@@ -16519,43 +17484,62 @@
           <a:bodyPr rtlCol="0" anchor="ctr" wrap="square" lIns="109728" rIns="109728" tIns="54864" bIns="54864"/>
           <a:lstStyle/>
           <a:p>
-            <a:pPr algn="l">
-              <a:spcAft>
-                <a:spcPts val="0"/>
+            <a:pPr algn="ctr">
+              <a:spcAft>
+                <a:spcPts val="100"/>
               </a:spcAft>
             </a:pPr>
             <a:r>
-              <a:rPr sz="1400" b="0">
-                <a:solidFill>
-                  <a:srgbClr val="262626"/>
+              <a:rPr sz="1800" b="1">
+                <a:solidFill>
+                  <a:srgbClr val="FFFFFF"/>
                 </a:solidFill>
                 <a:latin typeface="Arial"/>
               </a:rPr>
-              <a:t>“Kitni baar call karoge!”</a:t>
-            </a:r>
-          </a:p>
-        </p:txBody>
-      </p:sp>
-      <p:sp>
-        <p:nvSpPr>
-          <p:cNvPr id="13" name="Right Arrow 12"/>
+              <a:t>IMPROVE</a:t>
+            </a:r>
+          </a:p>
+          <a:p>
+            <a:pPr algn="ctr">
+              <a:spcAft>
+                <a:spcPts val="0"/>
+              </a:spcAft>
+            </a:pPr>
+            <a:r>
+              <a:rPr sz="1200" b="0">
+                <a:solidFill>
+                  <a:srgbClr val="FFFFFF"/>
+                </a:solidFill>
+                <a:latin typeface="Arial"/>
+              </a:rPr>
+              <a:t>Every call teaches</a:t>
+            </a:r>
+          </a:p>
+        </p:txBody>
+      </p:sp>
+      <p:sp>
+        <p:nvSpPr>
+          <p:cNvPr id="13" name="Rounded Rectangle 12"/>
           <p:cNvSpPr/>
           <p:nvPr/>
         </p:nvSpPr>
         <p:spPr>
           <a:xfrm>
-            <a:off x="5440680" y="3776472"/>
-            <a:ext cx="457200" cy="365760"/>
-          </a:xfrm>
-          <a:prstGeom prst="rightArrow">
-            <a:avLst/>
-          </a:prstGeom>
-          <a:solidFill>
-            <a:srgbClr val="C00000"/>
+            <a:off x="9281160" y="2468880"/>
+            <a:ext cx="2606040" cy="1920240"/>
+          </a:xfrm>
+          <a:prstGeom prst="roundRect">
+            <a:avLst>
+              <a:gd name="adj" fmla="val 6000"/>
+            </a:avLst>
+          </a:prstGeom>
+          <a:solidFill>
+            <a:srgbClr val="EEF2F8"/>
           </a:solidFill>
           <a:ln>
             <a:noFill/>
           </a:ln>
+          <a:effectLst/>
         </p:spPr>
         <p:style>
           <a:lnRef idx="1">
@@ -16572,36 +17556,81 @@
           </a:fontRef>
         </p:style>
         <p:txBody>
-          <a:bodyPr rtlCol="0" anchor="ctr"/>
+          <a:bodyPr rtlCol="0" anchor="t" wrap="square" lIns="109728" rIns="109728" tIns="54864" bIns="54864"/>
           <a:lstStyle/>
           <a:p>
-            <a:pPr algn="ctr"/>
-          </a:p>
-        </p:txBody>
-      </p:sp>
-      <p:sp>
-        <p:nvSpPr>
-          <p:cNvPr id="14" name="Rounded Rectangle 13"/>
+            <a:pPr algn="l" marL="182880" indent="-164592">
+              <a:spcAft>
+                <a:spcPts val="600"/>
+              </a:spcAft>
+              <a:buChar char="•"/>
+            </a:pPr>
+            <a:r>
+              <a:rPr sz="1300" b="0">
+                <a:solidFill>
+                  <a:srgbClr val="262626"/>
+                </a:solidFill>
+                <a:latin typeface="Arial"/>
+              </a:rPr>
+              <a:t>Review the call, rule checks R1-R6</a:t>
+            </a:r>
+          </a:p>
+          <a:p>
+            <a:pPr algn="l" marL="182880" indent="-164592">
+              <a:spcAft>
+                <a:spcPts val="600"/>
+              </a:spcAft>
+              <a:buChar char="•"/>
+            </a:pPr>
+            <a:r>
+              <a:rPr sz="1300" b="0">
+                <a:solidFill>
+                  <a:srgbClr val="262626"/>
+                </a:solidFill>
+                <a:latin typeface="Arial"/>
+              </a:rPr>
+              <a:t>Score persona and hook</a:t>
+            </a:r>
+          </a:p>
+          <a:p>
+            <a:pPr algn="l" marL="182880" indent="-164592">
+              <a:spcAft>
+                <a:spcPts val="600"/>
+              </a:spcAft>
+              <a:buChar char="•"/>
+            </a:pPr>
+            <a:r>
+              <a:rPr sz="1300" b="0">
+                <a:solidFill>
+                  <a:srgbClr val="262626"/>
+                </a:solidFill>
+                <a:latin typeface="Arial"/>
+              </a:rPr>
+              <a:t>Better pick next time</a:t>
+            </a:r>
+          </a:p>
+        </p:txBody>
+      </p:sp>
+      <p:sp>
+        <p:nvSpPr>
+          <p:cNvPr id="14" name="Left Arrow 13"/>
           <p:cNvSpPr/>
           <p:nvPr/>
         </p:nvSpPr>
         <p:spPr>
           <a:xfrm>
-            <a:off x="6035040" y="3648456"/>
-            <a:ext cx="5577840" cy="621792"/>
-          </a:xfrm>
-          <a:prstGeom prst="roundRect">
-            <a:avLst>
-              <a:gd name="adj" fmla="val 40000"/>
-            </a:avLst>
-          </a:prstGeom>
-          <a:solidFill>
-            <a:srgbClr val="C00000"/>
+            <a:off x="1463040" y="4754880"/>
+            <a:ext cx="9144000" cy="548640"/>
+          </a:xfrm>
+          <a:prstGeom prst="leftArrow">
+            <a:avLst/>
+          </a:prstGeom>
+          <a:solidFill>
+            <a:srgbClr val="B9A7DB"/>
           </a:solidFill>
           <a:ln>
             <a:noFill/>
           </a:ln>
-          <a:effectLst/>
         </p:spPr>
         <p:style>
           <a:lnRef idx="1">
@@ -16618,10 +17647,36 @@
           </a:fontRef>
         </p:style>
         <p:txBody>
-          <a:bodyPr rtlCol="0" anchor="ctr" wrap="square" lIns="109728" rIns="109728" tIns="54864" bIns="54864"/>
+          <a:bodyPr rtlCol="0" anchor="ctr"/>
           <a:lstStyle/>
           <a:p>
-            <a:pPr algn="l">
+            <a:pPr algn="ctr"/>
+          </a:p>
+        </p:txBody>
+      </p:sp>
+      <p:sp>
+        <p:nvSpPr>
+          <p:cNvPr id="15" name="TextBox 14"/>
+          <p:cNvSpPr txBox="1"/>
+          <p:nvPr/>
+        </p:nvSpPr>
+        <p:spPr>
+          <a:xfrm>
+            <a:off x="2377440" y="4846320"/>
+            <a:ext cx="7315200" cy="365760"/>
+          </a:xfrm>
+          <a:prstGeom prst="rect">
+            <a:avLst/>
+          </a:prstGeom>
+          <a:noFill/>
+        </p:spPr>
+        <p:txBody>
+          <a:bodyPr wrap="square">
+            <a:spAutoFit/>
+          </a:bodyPr>
+          <a:lstStyle/>
+          <a:p>
+            <a:pPr algn="ctr">
               <a:spcAft>
                 <a:spcPts val="0"/>
               </a:spcAft>
@@ -16629,37 +17684,37 @@
             <a:r>
               <a:rPr sz="1400" b="1">
                 <a:solidFill>
-                  <a:srgbClr val="FFFFFF"/>
+                  <a:srgbClr val="5B3E96"/>
                 </a:solidFill>
                 <a:latin typeface="Arial"/>
               </a:rPr>
-              <a:t>Brief apology, stops the pitch</a:t>
-            </a:r>
-          </a:p>
-        </p:txBody>
-      </p:sp>
-      <p:sp>
-        <p:nvSpPr>
-          <p:cNvPr id="15" name="Rounded Rectangle 14"/>
+              <a:t>The improvement loop feeds the next call's persona and hook</a:t>
+            </a:r>
+          </a:p>
+        </p:txBody>
+      </p:sp>
+      <p:sp>
+        <p:nvSpPr>
+          <p:cNvPr id="16" name="Rounded Rectangle 15"/>
           <p:cNvSpPr/>
           <p:nvPr/>
         </p:nvSpPr>
         <p:spPr>
           <a:xfrm>
-            <a:off x="566928" y="4407408"/>
-            <a:ext cx="4754880" cy="621792"/>
+            <a:off x="502920" y="5440680"/>
+            <a:ext cx="11338560" cy="594360"/>
           </a:xfrm>
           <a:prstGeom prst="roundRect">
             <a:avLst>
-              <a:gd name="adj" fmla="val 40000"/>
+              <a:gd name="adj" fmla="val 30000"/>
             </a:avLst>
           </a:prstGeom>
           <a:solidFill>
-            <a:srgbClr val="EEF2F8"/>
+            <a:srgbClr val="FFFFFF"/>
           </a:solidFill>
           <a:ln w="12700">
             <a:solidFill>
-              <a:srgbClr val="595959"/>
+              <a:srgbClr val="2EA896"/>
             </a:solidFill>
           </a:ln>
           <a:effectLst/>
@@ -16682,362 +17737,19 @@
           <a:bodyPr rtlCol="0" anchor="ctr" wrap="square" lIns="109728" rIns="109728" tIns="54864" bIns="54864"/>
           <a:lstStyle/>
           <a:p>
-            <a:pPr algn="l">
+            <a:pPr algn="ctr">
               <a:spcAft>
                 <a:spcPts val="0"/>
               </a:spcAft>
             </a:pPr>
             <a:r>
-              <a:rPr sz="1400" b="0">
-                <a:solidFill>
-                  <a:srgbClr val="262626"/>
+              <a:rPr sz="1200" b="1">
+                <a:solidFill>
+                  <a:srgbClr val="002060"/>
                 </a:solidFill>
                 <a:latin typeface="Arial"/>
               </a:rPr>
-              <a:t>Speaks Marathi, then Hindi</a:t>
-            </a:r>
-          </a:p>
-        </p:txBody>
-      </p:sp>
-      <p:sp>
-        <p:nvSpPr>
-          <p:cNvPr id="16" name="Right Arrow 15"/>
-          <p:cNvSpPr/>
-          <p:nvPr/>
-        </p:nvSpPr>
-        <p:spPr>
-          <a:xfrm>
-            <a:off x="5440680" y="4535424"/>
-            <a:ext cx="457200" cy="365760"/>
-          </a:xfrm>
-          <a:prstGeom prst="rightArrow">
-            <a:avLst/>
-          </a:prstGeom>
-          <a:solidFill>
-            <a:srgbClr val="5B3E96"/>
-          </a:solidFill>
-          <a:ln>
-            <a:noFill/>
-          </a:ln>
-        </p:spPr>
-        <p:style>
-          <a:lnRef idx="1">
-            <a:schemeClr val="accent1"/>
-          </a:lnRef>
-          <a:fillRef idx="3">
-            <a:schemeClr val="accent1"/>
-          </a:fillRef>
-          <a:effectRef idx="2">
-            <a:schemeClr val="accent1"/>
-          </a:effectRef>
-          <a:fontRef idx="minor">
-            <a:schemeClr val="lt1"/>
-          </a:fontRef>
-        </p:style>
-        <p:txBody>
-          <a:bodyPr rtlCol="0" anchor="ctr"/>
-          <a:lstStyle/>
-          <a:p>
-            <a:pPr algn="ctr"/>
-          </a:p>
-        </p:txBody>
-      </p:sp>
-      <p:sp>
-        <p:nvSpPr>
-          <p:cNvPr id="17" name="Rounded Rectangle 16"/>
-          <p:cNvSpPr/>
-          <p:nvPr/>
-        </p:nvSpPr>
-        <p:spPr>
-          <a:xfrm>
-            <a:off x="6035040" y="4407408"/>
-            <a:ext cx="5577840" cy="621792"/>
-          </a:xfrm>
-          <a:prstGeom prst="roundRect">
-            <a:avLst>
-              <a:gd name="adj" fmla="val 40000"/>
-            </a:avLst>
-          </a:prstGeom>
-          <a:solidFill>
-            <a:srgbClr val="5B3E96"/>
-          </a:solidFill>
-          <a:ln>
-            <a:noFill/>
-          </a:ln>
-          <a:effectLst/>
-        </p:spPr>
-        <p:style>
-          <a:lnRef idx="1">
-            <a:schemeClr val="accent1"/>
-          </a:lnRef>
-          <a:fillRef idx="3">
-            <a:schemeClr val="accent1"/>
-          </a:fillRef>
-          <a:effectRef idx="2">
-            <a:schemeClr val="accent1"/>
-          </a:effectRef>
-          <a:fontRef idx="minor">
-            <a:schemeClr val="lt1"/>
-          </a:fontRef>
-        </p:style>
-        <p:txBody>
-          <a:bodyPr rtlCol="0" anchor="ctr" wrap="square" lIns="109728" rIns="109728" tIns="54864" bIns="54864"/>
-          <a:lstStyle/>
-          <a:p>
-            <a:pPr algn="l">
-              <a:spcAft>
-                <a:spcPts val="0"/>
-              </a:spcAft>
-            </a:pPr>
-            <a:r>
-              <a:rPr sz="1400" b="1">
-                <a:solidFill>
-                  <a:srgbClr val="FFFFFF"/>
-                </a:solidFill>
-                <a:latin typeface="Arial"/>
-              </a:rPr>
-              <a:t>Replies in the seller's language</a:t>
-            </a:r>
-          </a:p>
-        </p:txBody>
-      </p:sp>
-      <p:sp>
-        <p:nvSpPr>
-          <p:cNvPr id="18" name="Rounded Rectangle 17"/>
-          <p:cNvSpPr/>
-          <p:nvPr/>
-        </p:nvSpPr>
-        <p:spPr>
-          <a:xfrm>
-            <a:off x="566928" y="5166359"/>
-            <a:ext cx="4754880" cy="621792"/>
-          </a:xfrm>
-          <a:prstGeom prst="roundRect">
-            <a:avLst>
-              <a:gd name="adj" fmla="val 40000"/>
-            </a:avLst>
-          </a:prstGeom>
-          <a:solidFill>
-            <a:srgbClr val="EEF2F8"/>
-          </a:solidFill>
-          <a:ln w="12700">
-            <a:solidFill>
-              <a:srgbClr val="595959"/>
-            </a:solidFill>
-          </a:ln>
-          <a:effectLst/>
-        </p:spPr>
-        <p:style>
-          <a:lnRef idx="1">
-            <a:schemeClr val="accent1"/>
-          </a:lnRef>
-          <a:fillRef idx="3">
-            <a:schemeClr val="accent1"/>
-          </a:fillRef>
-          <a:effectRef idx="2">
-            <a:schemeClr val="accent1"/>
-          </a:effectRef>
-          <a:fontRef idx="minor">
-            <a:schemeClr val="lt1"/>
-          </a:fontRef>
-        </p:style>
-        <p:txBody>
-          <a:bodyPr rtlCol="0" anchor="ctr" wrap="square" lIns="109728" rIns="109728" tIns="54864" bIns="54864"/>
-          <a:lstStyle/>
-          <a:p>
-            <a:pPr algn="l">
-              <a:spcAft>
-                <a:spcPts val="0"/>
-              </a:spcAft>
-            </a:pPr>
-            <a:r>
-              <a:rPr sz="1400" b="0">
-                <a:solidFill>
-                  <a:srgbClr val="262626"/>
-                </a:solidFill>
-                <a:latin typeface="Arial"/>
-              </a:rPr>
-              <a:t>“Who handles my account?”</a:t>
-            </a:r>
-          </a:p>
-        </p:txBody>
-      </p:sp>
-      <p:sp>
-        <p:nvSpPr>
-          <p:cNvPr id="19" name="Right Arrow 18"/>
-          <p:cNvSpPr/>
-          <p:nvPr/>
-        </p:nvSpPr>
-        <p:spPr>
-          <a:xfrm>
-            <a:off x="5440680" y="5294375"/>
-            <a:ext cx="457200" cy="365760"/>
-          </a:xfrm>
-          <a:prstGeom prst="rightArrow">
-            <a:avLst/>
-          </a:prstGeom>
-          <a:solidFill>
-            <a:srgbClr val="1B6B5E"/>
-          </a:solidFill>
-          <a:ln>
-            <a:noFill/>
-          </a:ln>
-        </p:spPr>
-        <p:style>
-          <a:lnRef idx="1">
-            <a:schemeClr val="accent1"/>
-          </a:lnRef>
-          <a:fillRef idx="3">
-            <a:schemeClr val="accent1"/>
-          </a:fillRef>
-          <a:effectRef idx="2">
-            <a:schemeClr val="accent1"/>
-          </a:effectRef>
-          <a:fontRef idx="minor">
-            <a:schemeClr val="lt1"/>
-          </a:fontRef>
-        </p:style>
-        <p:txBody>
-          <a:bodyPr rtlCol="0" anchor="ctr"/>
-          <a:lstStyle/>
-          <a:p>
-            <a:pPr algn="ctr"/>
-          </a:p>
-        </p:txBody>
-      </p:sp>
-      <p:sp>
-        <p:nvSpPr>
-          <p:cNvPr id="20" name="Rounded Rectangle 19"/>
-          <p:cNvSpPr/>
-          <p:nvPr/>
-        </p:nvSpPr>
-        <p:spPr>
-          <a:xfrm>
-            <a:off x="6035040" y="5166359"/>
-            <a:ext cx="5577840" cy="621792"/>
-          </a:xfrm>
-          <a:prstGeom prst="roundRect">
-            <a:avLst>
-              <a:gd name="adj" fmla="val 40000"/>
-            </a:avLst>
-          </a:prstGeom>
-          <a:solidFill>
-            <a:srgbClr val="1B6B5E"/>
-          </a:solidFill>
-          <a:ln>
-            <a:noFill/>
-          </a:ln>
-          <a:effectLst/>
-        </p:spPr>
-        <p:style>
-          <a:lnRef idx="1">
-            <a:schemeClr val="accent1"/>
-          </a:lnRef>
-          <a:fillRef idx="3">
-            <a:schemeClr val="accent1"/>
-          </a:fillRef>
-          <a:effectRef idx="2">
-            <a:schemeClr val="accent1"/>
-          </a:effectRef>
-          <a:fontRef idx="minor">
-            <a:schemeClr val="lt1"/>
-          </a:fontRef>
-        </p:style>
-        <p:txBody>
-          <a:bodyPr rtlCol="0" anchor="ctr" wrap="square" lIns="109728" rIns="109728" tIns="54864" bIns="54864"/>
-          <a:lstStyle/>
-          <a:p>
-            <a:pPr algn="l">
-              <a:spcAft>
-                <a:spcPts val="0"/>
-              </a:spcAft>
-            </a:pPr>
-            <a:r>
-              <a:rPr sz="1400" b="1">
-                <a:solidFill>
-                  <a:srgbClr val="FFFFFF"/>
-                </a:solidFill>
-                <a:latin typeface="Arial"/>
-              </a:rPr>
-              <a:t>Names the handler and books with them; a team if none</a:t>
-            </a:r>
-          </a:p>
-        </p:txBody>
-      </p:sp>
-      <p:sp>
-        <p:nvSpPr>
-          <p:cNvPr id="21" name="TextBox 20"/>
-          <p:cNvSpPr txBox="1"/>
-          <p:nvPr/>
-        </p:nvSpPr>
-        <p:spPr>
-          <a:xfrm>
-            <a:off x="566928" y="5943600"/>
-            <a:ext cx="5486400" cy="274320"/>
-          </a:xfrm>
-          <a:prstGeom prst="rect">
-            <a:avLst/>
-          </a:prstGeom>
-          <a:noFill/>
-        </p:spPr>
-        <p:txBody>
-          <a:bodyPr wrap="square">
-            <a:spAutoFit/>
-          </a:bodyPr>
-          <a:lstStyle/>
-          <a:p>
-            <a:pPr algn="l">
-              <a:spcAft>
-                <a:spcPts val="0"/>
-              </a:spcAft>
-            </a:pPr>
-            <a:r>
-              <a:rPr sz="1100" b="1">
-                <a:solidFill>
-                  <a:srgbClr val="595959"/>
-                </a:solidFill>
-                <a:latin typeface="Arial"/>
-              </a:rPr>
-              <a:t>SELLER SAYS</a:t>
-            </a:r>
-          </a:p>
-        </p:txBody>
-      </p:sp>
-      <p:sp>
-        <p:nvSpPr>
-          <p:cNvPr id="22" name="TextBox 21"/>
-          <p:cNvSpPr txBox="1"/>
-          <p:nvPr/>
-        </p:nvSpPr>
-        <p:spPr>
-          <a:xfrm>
-            <a:off x="6035040" y="5943600"/>
-            <a:ext cx="5486400" cy="274320"/>
-          </a:xfrm>
-          <a:prstGeom prst="rect">
-            <a:avLst/>
-          </a:prstGeom>
-          <a:noFill/>
-        </p:spPr>
-        <p:txBody>
-          <a:bodyPr wrap="square">
-            <a:spAutoFit/>
-          </a:bodyPr>
-          <a:lstStyle/>
-          <a:p>
-            <a:pPr algn="l">
-              <a:spcAft>
-                <a:spcPts val="0"/>
-              </a:spcAft>
-            </a:pPr>
-            <a:r>
-              <a:rPr sz="1100" b="1">
-                <a:solidFill>
-                  <a:srgbClr val="002060"/>
-                </a:solidFill>
-                <a:latin typeface="Arial"/>
-              </a:rPr>
-              <a:t>VANI DOES</a:t>
+              <a:t>Mood decision: instant keyword tool in-call, plus Jev decision model (6 mood questions, ~0.5 s) to label real calls and check the tool</a:t>
             </a:r>
           </a:p>
         </p:txBody>
@@ -17076,7 +17788,7 @@
           <a:lstStyle/>
           <a:p>
             <a:r>
-              <a:t>Our Architecture</a:t>
+              <a:t>Mid-Call: Same-Turn Adaptation</a:t>
             </a:r>
           </a:p>
         </p:txBody>
@@ -17089,19 +17801,21 @@
         </p:nvSpPr>
         <p:spPr>
           <a:xfrm>
-            <a:off x="502920" y="1463040"/>
-            <a:ext cx="2514600" cy="1417320"/>
+            <a:off x="566928" y="1371600"/>
+            <a:ext cx="4754880" cy="621792"/>
           </a:xfrm>
           <a:prstGeom prst="roundRect">
             <a:avLst>
-              <a:gd name="adj" fmla="val 6000"/>
+              <a:gd name="adj" fmla="val 40000"/>
             </a:avLst>
           </a:prstGeom>
           <a:solidFill>
-            <a:srgbClr val="002060"/>
-          </a:solidFill>
-          <a:ln>
-            <a:noFill/>
+            <a:srgbClr val="EEF2F8"/>
+          </a:solidFill>
+          <a:ln w="12700">
+            <a:solidFill>
+              <a:srgbClr val="595959"/>
+            </a:solidFill>
           </a:ln>
           <a:effectLst/>
         </p:spPr>
@@ -17125,33 +17839,17 @@
           <a:p>
             <a:pPr algn="l">
               <a:spcAft>
-                <a:spcPts val="300"/>
+                <a:spcPts val="0"/>
               </a:spcAft>
             </a:pPr>
             <a:r>
-              <a:rPr sz="1500" b="1">
-                <a:solidFill>
-                  <a:srgbClr val="FFFFFF"/>
+              <a:rPr sz="1400" b="0">
+                <a:solidFill>
+                  <a:srgbClr val="262626"/>
                 </a:solidFill>
                 <a:latin typeface="Arial"/>
               </a:rPr>
-              <a:t>Seller data</a:t>
-            </a:r>
-          </a:p>
-          <a:p>
-            <a:pPr algn="l">
-              <a:spcAft>
-                <a:spcPts val="0"/>
-              </a:spcAft>
-            </a:pPr>
-            <a:r>
-              <a:rPr sz="1200" b="0">
-                <a:solidFill>
-                  <a:srgbClr val="FFFFFF"/>
-                </a:solidFill>
-                <a:latin typeface="Arial"/>
-              </a:rPr>
-              <a:t>files, APIs, buy-lead database</a:t>
+              <a:t>“Nahi chahiye”</a:t>
             </a:r>
           </a:p>
         </p:txBody>
@@ -17164,14 +17862,14 @@
         </p:nvSpPr>
         <p:spPr>
           <a:xfrm>
-            <a:off x="3044952" y="1965960"/>
-            <a:ext cx="347472" cy="365760"/>
+            <a:off x="5440680" y="1499616"/>
+            <a:ext cx="457200" cy="365760"/>
           </a:xfrm>
           <a:prstGeom prst="rightArrow">
             <a:avLst/>
           </a:prstGeom>
           <a:solidFill>
-            <a:srgbClr val="595959"/>
+            <a:srgbClr val="E08A00"/>
           </a:solidFill>
           <a:ln>
             <a:noFill/>
@@ -17207,16 +17905,16 @@
         </p:nvSpPr>
         <p:spPr>
           <a:xfrm>
-            <a:off x="3429000" y="1463040"/>
-            <a:ext cx="2514600" cy="1417320"/>
+            <a:off x="6035040" y="1371600"/>
+            <a:ext cx="5577840" cy="621792"/>
           </a:xfrm>
           <a:prstGeom prst="roundRect">
             <a:avLst>
-              <a:gd name="adj" fmla="val 6000"/>
+              <a:gd name="adj" fmla="val 40000"/>
             </a:avLst>
           </a:prstGeom>
           <a:solidFill>
-            <a:srgbClr val="002060"/>
+            <a:srgbClr val="E08A00"/>
           </a:solidFill>
           <a:ln>
             <a:noFill/>
@@ -17243,57 +17941,46 @@
           <a:p>
             <a:pPr algn="l">
               <a:spcAft>
-                <a:spcPts val="300"/>
+                <a:spcPts val="0"/>
               </a:spcAft>
             </a:pPr>
             <a:r>
-              <a:rPr sz="1500" b="1">
+              <a:rPr sz="1400" b="1">
                 <a:solidFill>
                   <a:srgbClr val="FFFFFF"/>
                 </a:solidFill>
                 <a:latin typeface="Arial"/>
               </a:rPr>
-              <a:t>Context builder</a:t>
-            </a:r>
-          </a:p>
-          <a:p>
-            <a:pPr algn="l">
-              <a:spcAft>
-                <a:spcPts val="0"/>
-              </a:spcAft>
-            </a:pPr>
-            <a:r>
-              <a:rPr sz="1200" b="0">
-                <a:solidFill>
-                  <a:srgbClr val="FFFFFF"/>
-                </a:solidFill>
-                <a:latin typeface="Arial"/>
-              </a:rPr>
-              <a:t>one folder per seller</a:t>
-            </a:r>
-          </a:p>
-        </p:txBody>
-      </p:sp>
-      <p:sp>
-        <p:nvSpPr>
-          <p:cNvPr id="6" name="Right Arrow 5"/>
+              <a:t>Stays on the line, restates the hook</a:t>
+            </a:r>
+          </a:p>
+        </p:txBody>
+      </p:sp>
+      <p:sp>
+        <p:nvSpPr>
+          <p:cNvPr id="6" name="Rounded Rectangle 5"/>
           <p:cNvSpPr/>
           <p:nvPr/>
         </p:nvSpPr>
         <p:spPr>
           <a:xfrm>
-            <a:off x="5971031" y="1965960"/>
-            <a:ext cx="347472" cy="365760"/>
-          </a:xfrm>
-          <a:prstGeom prst="rightArrow">
-            <a:avLst/>
-          </a:prstGeom>
-          <a:solidFill>
-            <a:srgbClr val="595959"/>
-          </a:solidFill>
-          <a:ln>
-            <a:noFill/>
+            <a:off x="566928" y="2130552"/>
+            <a:ext cx="4754880" cy="621792"/>
+          </a:xfrm>
+          <a:prstGeom prst="roundRect">
+            <a:avLst>
+              <a:gd name="adj" fmla="val 40000"/>
+            </a:avLst>
+          </a:prstGeom>
+          <a:solidFill>
+            <a:srgbClr val="EEF2F8"/>
+          </a:solidFill>
+          <a:ln w="12700">
+            <a:solidFill>
+              <a:srgbClr val="595959"/>
+            </a:solidFill>
           </a:ln>
+          <a:effectLst/>
         </p:spPr>
         <p:style>
           <a:lnRef idx="1">
@@ -17310,28 +17997,39 @@
           </a:fontRef>
         </p:style>
         <p:txBody>
-          <a:bodyPr rtlCol="0" anchor="ctr"/>
+          <a:bodyPr rtlCol="0" anchor="ctr" wrap="square" lIns="109728" rIns="109728" tIns="54864" bIns="54864"/>
           <a:lstStyle/>
           <a:p>
-            <a:pPr algn="ctr"/>
-          </a:p>
-        </p:txBody>
-      </p:sp>
-      <p:sp>
-        <p:nvSpPr>
-          <p:cNvPr id="7" name="Rounded Rectangle 6"/>
+            <a:pPr algn="l">
+              <a:spcAft>
+                <a:spcPts val="0"/>
+              </a:spcAft>
+            </a:pPr>
+            <a:r>
+              <a:rPr sz="1400" b="0">
+                <a:solidFill>
+                  <a:srgbClr val="262626"/>
+                </a:solidFill>
+                <a:latin typeface="Arial"/>
+              </a:rPr>
+              <a:t>“I'm busy right now”</a:t>
+            </a:r>
+          </a:p>
+        </p:txBody>
+      </p:sp>
+      <p:sp>
+        <p:nvSpPr>
+          <p:cNvPr id="7" name="Right Arrow 6"/>
           <p:cNvSpPr/>
           <p:nvPr/>
         </p:nvSpPr>
         <p:spPr>
           <a:xfrm>
-            <a:off x="6355080" y="1463040"/>
-            <a:ext cx="2514600" cy="1417320"/>
-          </a:xfrm>
-          <a:prstGeom prst="roundRect">
-            <a:avLst>
-              <a:gd name="adj" fmla="val 6000"/>
-            </a:avLst>
+            <a:off x="5440680" y="2258568"/>
+            <a:ext cx="457200" cy="365760"/>
+          </a:xfrm>
+          <a:prstGeom prst="rightArrow">
+            <a:avLst/>
           </a:prstGeom>
           <a:solidFill>
             <a:srgbClr val="002060"/>
@@ -17339,7 +18037,6 @@
           <a:ln>
             <a:noFill/>
           </a:ln>
-          <a:effectLst/>
         </p:spPr>
         <p:style>
           <a:lnRef idx="1">
@@ -17356,62 +18053,36 @@
           </a:fontRef>
         </p:style>
         <p:txBody>
-          <a:bodyPr rtlCol="0" anchor="ctr" wrap="square" lIns="109728" rIns="109728" tIns="54864" bIns="54864"/>
+          <a:bodyPr rtlCol="0" anchor="ctr"/>
           <a:lstStyle/>
           <a:p>
-            <a:pPr algn="l">
-              <a:spcAft>
-                <a:spcPts val="300"/>
-              </a:spcAft>
-            </a:pPr>
-            <a:r>
-              <a:rPr sz="1500" b="1">
-                <a:solidFill>
-                  <a:srgbClr val="FFFFFF"/>
-                </a:solidFill>
-                <a:latin typeface="Arial"/>
-              </a:rPr>
-              <a:t>Safe export</a:t>
-            </a:r>
-          </a:p>
-          <a:p>
-            <a:pPr algn="l">
-              <a:spcAft>
-                <a:spcPts val="0"/>
-              </a:spcAft>
-            </a:pPr>
-            <a:r>
-              <a:rPr sz="1200" b="0">
-                <a:solidFill>
-                  <a:srgbClr val="FFFFFF"/>
-                </a:solidFill>
-                <a:latin typeface="Arial"/>
-              </a:rPr>
-              <a:t>names become tokens</a:t>
-            </a:r>
-          </a:p>
-        </p:txBody>
-      </p:sp>
-      <p:sp>
-        <p:nvSpPr>
-          <p:cNvPr id="8" name="Right Arrow 7"/>
+            <a:pPr algn="ctr"/>
+          </a:p>
+        </p:txBody>
+      </p:sp>
+      <p:sp>
+        <p:nvSpPr>
+          <p:cNvPr id="8" name="Rounded Rectangle 7"/>
           <p:cNvSpPr/>
           <p:nvPr/>
         </p:nvSpPr>
         <p:spPr>
           <a:xfrm>
-            <a:off x="8897112" y="1965960"/>
-            <a:ext cx="347472" cy="365760"/>
-          </a:xfrm>
-          <a:prstGeom prst="rightArrow">
-            <a:avLst/>
-          </a:prstGeom>
-          <a:solidFill>
-            <a:srgbClr val="595959"/>
+            <a:off x="6035040" y="2130552"/>
+            <a:ext cx="5577840" cy="621792"/>
+          </a:xfrm>
+          <a:prstGeom prst="roundRect">
+            <a:avLst>
+              <a:gd name="adj" fmla="val 40000"/>
+            </a:avLst>
+          </a:prstGeom>
+          <a:solidFill>
+            <a:srgbClr val="002060"/>
           </a:solidFill>
           <a:ln>
             <a:noFill/>
           </a:ln>
+          <a:effectLst/>
         </p:spPr>
         <p:style>
           <a:lnRef idx="1">
@@ -17428,10 +18099,23 @@
           </a:fontRef>
         </p:style>
         <p:txBody>
-          <a:bodyPr rtlCol="0" anchor="ctr"/>
+          <a:bodyPr rtlCol="0" anchor="ctr" wrap="square" lIns="109728" rIns="109728" tIns="54864" bIns="54864"/>
           <a:lstStyle/>
           <a:p>
-            <a:pPr algn="ctr"/>
+            <a:pPr algn="l">
+              <a:spcAft>
+                <a:spcPts val="0"/>
+              </a:spcAft>
+            </a:pPr>
+            <a:r>
+              <a:rPr sz="1400" b="1">
+                <a:solidFill>
+                  <a:srgbClr val="FFFFFF"/>
+                </a:solidFill>
+                <a:latin typeface="Arial"/>
+              </a:rPr>
+              <a:t>One short sentence, offers a callback</a:t>
+            </a:r>
           </a:p>
         </p:txBody>
       </p:sp>
@@ -17443,19 +18127,21 @@
         </p:nvSpPr>
         <p:spPr>
           <a:xfrm>
-            <a:off x="9281160" y="1463040"/>
-            <a:ext cx="2514600" cy="1417320"/>
+            <a:off x="566928" y="2889504"/>
+            <a:ext cx="4754880" cy="621792"/>
           </a:xfrm>
           <a:prstGeom prst="roundRect">
             <a:avLst>
-              <a:gd name="adj" fmla="val 6000"/>
+              <a:gd name="adj" fmla="val 40000"/>
             </a:avLst>
           </a:prstGeom>
           <a:solidFill>
-            <a:srgbClr val="C00000"/>
-          </a:solidFill>
-          <a:ln>
-            <a:noFill/>
+            <a:srgbClr val="EEF2F8"/>
+          </a:solidFill>
+          <a:ln w="12700">
+            <a:solidFill>
+              <a:srgbClr val="595959"/>
+            </a:solidFill>
           </a:ln>
           <a:effectLst/>
         </p:spPr>
@@ -17479,52 +18165,34 @@
           <a:p>
             <a:pPr algn="l">
               <a:spcAft>
-                <a:spcPts val="300"/>
+                <a:spcPts val="0"/>
               </a:spcAft>
             </a:pPr>
             <a:r>
-              <a:rPr sz="1500" b="1">
-                <a:solidFill>
-                  <a:srgbClr val="FFFFFF"/>
+              <a:rPr sz="1400" b="0">
+                <a:solidFill>
+                  <a:srgbClr val="262626"/>
                 </a:solidFill>
                 <a:latin typeface="Arial"/>
               </a:rPr>
-              <a:t>Persona agent</a:t>
-            </a:r>
-          </a:p>
-          <a:p>
-            <a:pPr algn="l">
-              <a:spcAft>
-                <a:spcPts val="0"/>
-              </a:spcAft>
-            </a:pPr>
-            <a:r>
-              <a:rPr sz="1200" b="0">
-                <a:solidFill>
-                  <a:srgbClr val="FFFFFF"/>
-                </a:solidFill>
-                <a:latin typeface="Arial"/>
-              </a:rPr>
-              <a:t>Claude in a sandbox, every choice cited</a:t>
-            </a:r>
-          </a:p>
-        </p:txBody>
-      </p:sp>
-      <p:sp>
-        <p:nvSpPr>
-          <p:cNvPr id="10" name="Rounded Rectangle 9"/>
+              <a:t>“Samajh nahi aaya”</a:t>
+            </a:r>
+          </a:p>
+        </p:txBody>
+      </p:sp>
+      <p:sp>
+        <p:nvSpPr>
+          <p:cNvPr id="10" name="Right Arrow 9"/>
           <p:cNvSpPr/>
           <p:nvPr/>
         </p:nvSpPr>
         <p:spPr>
           <a:xfrm>
-            <a:off x="9281160" y="3291840"/>
-            <a:ext cx="2514600" cy="1417320"/>
-          </a:xfrm>
-          <a:prstGeom prst="roundRect">
-            <a:avLst>
-              <a:gd name="adj" fmla="val 6000"/>
-            </a:avLst>
+            <a:off x="5440680" y="3017520"/>
+            <a:ext cx="457200" cy="365760"/>
+          </a:xfrm>
+          <a:prstGeom prst="rightArrow">
+            <a:avLst/>
           </a:prstGeom>
           <a:solidFill>
             <a:srgbClr val="2EA896"/>
@@ -17532,7 +18200,6 @@
           <a:ln>
             <a:noFill/>
           </a:ln>
-          <a:effectLst/>
         </p:spPr>
         <p:style>
           <a:lnRef idx="1">
@@ -17549,62 +18216,36 @@
           </a:fontRef>
         </p:style>
         <p:txBody>
-          <a:bodyPr rtlCol="0" anchor="ctr" wrap="square" lIns="109728" rIns="109728" tIns="54864" bIns="54864"/>
+          <a:bodyPr rtlCol="0" anchor="ctr"/>
           <a:lstStyle/>
           <a:p>
-            <a:pPr algn="l">
-              <a:spcAft>
-                <a:spcPts val="300"/>
-              </a:spcAft>
-            </a:pPr>
-            <a:r>
-              <a:rPr sz="1500" b="1">
-                <a:solidFill>
-                  <a:srgbClr val="FFFFFF"/>
-                </a:solidFill>
-                <a:latin typeface="Arial"/>
-              </a:rPr>
-              <a:t>Sarvam voice agent</a:t>
-            </a:r>
-          </a:p>
-          <a:p>
-            <a:pPr algn="l">
-              <a:spcAft>
-                <a:spcPts val="0"/>
-              </a:spcAft>
-            </a:pPr>
-            <a:r>
-              <a:rPr sz="1200" b="0">
-                <a:solidFill>
-                  <a:srgbClr val="FFFFFF"/>
-                </a:solidFill>
-                <a:latin typeface="Arial"/>
-              </a:rPr>
-              <a:t>voice, pace, language, opening</a:t>
-            </a:r>
-          </a:p>
-        </p:txBody>
-      </p:sp>
-      <p:sp>
-        <p:nvSpPr>
-          <p:cNvPr id="11" name="Left Arrow 10"/>
+            <a:pPr algn="ctr"/>
+          </a:p>
+        </p:txBody>
+      </p:sp>
+      <p:sp>
+        <p:nvSpPr>
+          <p:cNvPr id="11" name="Rounded Rectangle 10"/>
           <p:cNvSpPr/>
           <p:nvPr/>
         </p:nvSpPr>
         <p:spPr>
           <a:xfrm>
-            <a:off x="8887968" y="3794760"/>
-            <a:ext cx="347472" cy="365760"/>
-          </a:xfrm>
-          <a:prstGeom prst="leftArrow">
-            <a:avLst/>
-          </a:prstGeom>
-          <a:solidFill>
-            <a:srgbClr val="595959"/>
+            <a:off x="6035040" y="2889504"/>
+            <a:ext cx="5577840" cy="621792"/>
+          </a:xfrm>
+          <a:prstGeom prst="roundRect">
+            <a:avLst>
+              <a:gd name="adj" fmla="val 40000"/>
+            </a:avLst>
+          </a:prstGeom>
+          <a:solidFill>
+            <a:srgbClr val="2EA896"/>
           </a:solidFill>
           <a:ln>
             <a:noFill/>
           </a:ln>
+          <a:effectLst/>
         </p:spPr>
         <p:style>
           <a:lnRef idx="1">
@@ -17621,10 +18262,23 @@
           </a:fontRef>
         </p:style>
         <p:txBody>
-          <a:bodyPr rtlCol="0" anchor="ctr"/>
+          <a:bodyPr rtlCol="0" anchor="ctr" wrap="square" lIns="109728" rIns="109728" tIns="54864" bIns="54864"/>
           <a:lstStyle/>
           <a:p>
-            <a:pPr algn="ctr"/>
+            <a:pPr algn="l">
+              <a:spcAft>
+                <a:spcPts val="0"/>
+              </a:spcAft>
+            </a:pPr>
+            <a:r>
+              <a:rPr sz="1400" b="1">
+                <a:solidFill>
+                  <a:srgbClr val="FFFFFF"/>
+                </a:solidFill>
+                <a:latin typeface="Arial"/>
+              </a:rPr>
+              <a:t>One idea, simple short phrases</a:t>
+            </a:r>
           </a:p>
         </p:txBody>
       </p:sp>
@@ -17636,19 +18290,21 @@
         </p:nvSpPr>
         <p:spPr>
           <a:xfrm>
-            <a:off x="6355080" y="3291840"/>
-            <a:ext cx="2514600" cy="1417320"/>
+            <a:off x="566928" y="3648456"/>
+            <a:ext cx="4754880" cy="621792"/>
           </a:xfrm>
           <a:prstGeom prst="roundRect">
             <a:avLst>
-              <a:gd name="adj" fmla="val 6000"/>
+              <a:gd name="adj" fmla="val 40000"/>
             </a:avLst>
           </a:prstGeom>
           <a:solidFill>
-            <a:srgbClr val="2EA896"/>
-          </a:solidFill>
-          <a:ln>
-            <a:noFill/>
+            <a:srgbClr val="EEF2F8"/>
+          </a:solidFill>
+          <a:ln w="12700">
+            <a:solidFill>
+              <a:srgbClr val="595959"/>
+            </a:solidFill>
           </a:ln>
           <a:effectLst/>
         </p:spPr>
@@ -17672,53 +18328,37 @@
           <a:p>
             <a:pPr algn="l">
               <a:spcAft>
-                <a:spcPts val="300"/>
+                <a:spcPts val="0"/>
               </a:spcAft>
             </a:pPr>
             <a:r>
-              <a:rPr sz="1500" b="1">
-                <a:solidFill>
-                  <a:srgbClr val="FFFFFF"/>
+              <a:rPr sz="1400" b="0">
+                <a:solidFill>
+                  <a:srgbClr val="262626"/>
                 </a:solidFill>
                 <a:latin typeface="Arial"/>
               </a:rPr>
-              <a:t>Live adaptation</a:t>
-            </a:r>
-          </a:p>
-          <a:p>
-            <a:pPr algn="l">
-              <a:spcAft>
-                <a:spcPts val="0"/>
-              </a:spcAft>
-            </a:pPr>
-            <a:r>
-              <a:rPr sz="1200" b="0">
-                <a:solidFill>
-                  <a:srgbClr val="FFFFFF"/>
-                </a:solidFill>
-                <a:latin typeface="Arial"/>
-              </a:rPr>
-              <a:t>mood to directive each turn</a:t>
-            </a:r>
-          </a:p>
-        </p:txBody>
-      </p:sp>
-      <p:sp>
-        <p:nvSpPr>
-          <p:cNvPr id="13" name="Left Arrow 12"/>
+              <a:t>“Kitni baar call karoge!”</a:t>
+            </a:r>
+          </a:p>
+        </p:txBody>
+      </p:sp>
+      <p:sp>
+        <p:nvSpPr>
+          <p:cNvPr id="13" name="Right Arrow 12"/>
           <p:cNvSpPr/>
           <p:nvPr/>
         </p:nvSpPr>
         <p:spPr>
           <a:xfrm>
-            <a:off x="5961888" y="3794760"/>
-            <a:ext cx="347472" cy="365760"/>
-          </a:xfrm>
-          <a:prstGeom prst="leftArrow">
+            <a:off x="5440680" y="3776472"/>
+            <a:ext cx="457200" cy="365760"/>
+          </a:xfrm>
+          <a:prstGeom prst="rightArrow">
             <a:avLst/>
           </a:prstGeom>
           <a:solidFill>
-            <a:srgbClr val="595959"/>
+            <a:srgbClr val="C00000"/>
           </a:solidFill>
           <a:ln>
             <a:noFill/>
@@ -17754,16 +18394,16 @@
         </p:nvSpPr>
         <p:spPr>
           <a:xfrm>
-            <a:off x="3429000" y="3291840"/>
-            <a:ext cx="2514600" cy="1417320"/>
+            <a:off x="6035040" y="3648456"/>
+            <a:ext cx="5577840" cy="621792"/>
           </a:xfrm>
           <a:prstGeom prst="roundRect">
             <a:avLst>
-              <a:gd name="adj" fmla="val 6000"/>
+              <a:gd name="adj" fmla="val 40000"/>
             </a:avLst>
           </a:prstGeom>
           <a:solidFill>
-            <a:srgbClr val="5B3E96"/>
+            <a:srgbClr val="C00000"/>
           </a:solidFill>
           <a:ln>
             <a:noFill/>
@@ -17790,57 +18430,46 @@
           <a:p>
             <a:pPr algn="l">
               <a:spcAft>
-                <a:spcPts val="300"/>
+                <a:spcPts val="0"/>
               </a:spcAft>
             </a:pPr>
             <a:r>
-              <a:rPr sz="1500" b="1">
+              <a:rPr sz="1400" b="1">
                 <a:solidFill>
                   <a:srgbClr val="FFFFFF"/>
                 </a:solidFill>
                 <a:latin typeface="Arial"/>
               </a:rPr>
-              <a:t>Call review</a:t>
-            </a:r>
-          </a:p>
-          <a:p>
-            <a:pPr algn="l">
-              <a:spcAft>
-                <a:spcPts val="0"/>
-              </a:spcAft>
-            </a:pPr>
-            <a:r>
-              <a:rPr sz="1200" b="0">
-                <a:solidFill>
-                  <a:srgbClr val="FFFFFF"/>
-                </a:solidFill>
-                <a:latin typeface="Arial"/>
-              </a:rPr>
-              <a:t>Claude checks fit and rules</a:t>
-            </a:r>
-          </a:p>
-        </p:txBody>
-      </p:sp>
-      <p:sp>
-        <p:nvSpPr>
-          <p:cNvPr id="15" name="Left Arrow 14"/>
+              <a:t>Brief apology, stops the pitch</a:t>
+            </a:r>
+          </a:p>
+        </p:txBody>
+      </p:sp>
+      <p:sp>
+        <p:nvSpPr>
+          <p:cNvPr id="15" name="Rounded Rectangle 14"/>
           <p:cNvSpPr/>
           <p:nvPr/>
         </p:nvSpPr>
         <p:spPr>
           <a:xfrm>
-            <a:off x="3035808" y="3794760"/>
-            <a:ext cx="347472" cy="365760"/>
-          </a:xfrm>
-          <a:prstGeom prst="leftArrow">
-            <a:avLst/>
-          </a:prstGeom>
-          <a:solidFill>
-            <a:srgbClr val="595959"/>
-          </a:solidFill>
-          <a:ln>
-            <a:noFill/>
+            <a:off x="566928" y="4407408"/>
+            <a:ext cx="4754880" cy="621792"/>
+          </a:xfrm>
+          <a:prstGeom prst="roundRect">
+            <a:avLst>
+              <a:gd name="adj" fmla="val 40000"/>
+            </a:avLst>
+          </a:prstGeom>
+          <a:solidFill>
+            <a:srgbClr val="EEF2F8"/>
+          </a:solidFill>
+          <a:ln w="12700">
+            <a:solidFill>
+              <a:srgbClr val="595959"/>
+            </a:solidFill>
           </a:ln>
+          <a:effectLst/>
         </p:spPr>
         <p:style>
           <a:lnRef idx="1">
@@ -17857,28 +18486,39 @@
           </a:fontRef>
         </p:style>
         <p:txBody>
-          <a:bodyPr rtlCol="0" anchor="ctr"/>
+          <a:bodyPr rtlCol="0" anchor="ctr" wrap="square" lIns="109728" rIns="109728" tIns="54864" bIns="54864"/>
           <a:lstStyle/>
           <a:p>
-            <a:pPr algn="ctr"/>
-          </a:p>
-        </p:txBody>
-      </p:sp>
-      <p:sp>
-        <p:nvSpPr>
-          <p:cNvPr id="16" name="Rounded Rectangle 15"/>
+            <a:pPr algn="l">
+              <a:spcAft>
+                <a:spcPts val="0"/>
+              </a:spcAft>
+            </a:pPr>
+            <a:r>
+              <a:rPr sz="1400" b="0">
+                <a:solidFill>
+                  <a:srgbClr val="262626"/>
+                </a:solidFill>
+                <a:latin typeface="Arial"/>
+              </a:rPr>
+              <a:t>Speaks Marathi, then Hindi</a:t>
+            </a:r>
+          </a:p>
+        </p:txBody>
+      </p:sp>
+      <p:sp>
+        <p:nvSpPr>
+          <p:cNvPr id="16" name="Right Arrow 15"/>
           <p:cNvSpPr/>
           <p:nvPr/>
         </p:nvSpPr>
         <p:spPr>
           <a:xfrm>
-            <a:off x="502920" y="3291840"/>
-            <a:ext cx="2514600" cy="1417320"/>
-          </a:xfrm>
-          <a:prstGeom prst="roundRect">
-            <a:avLst>
-              <a:gd name="adj" fmla="val 6000"/>
-            </a:avLst>
+            <a:off x="5440680" y="4535424"/>
+            <a:ext cx="457200" cy="365760"/>
+          </a:xfrm>
+          <a:prstGeom prst="rightArrow">
+            <a:avLst/>
           </a:prstGeom>
           <a:solidFill>
             <a:srgbClr val="5B3E96"/>
@@ -17886,7 +18526,6 @@
           <a:ln>
             <a:noFill/>
           </a:ln>
-          <a:effectLst/>
         </p:spPr>
         <p:style>
           <a:lnRef idx="1">
@@ -17903,62 +18542,36 @@
           </a:fontRef>
         </p:style>
         <p:txBody>
-          <a:bodyPr rtlCol="0" anchor="ctr" wrap="square" lIns="109728" rIns="109728" tIns="54864" bIns="54864"/>
+          <a:bodyPr rtlCol="0" anchor="ctr"/>
           <a:lstStyle/>
           <a:p>
-            <a:pPr algn="l">
-              <a:spcAft>
-                <a:spcPts val="300"/>
-              </a:spcAft>
-            </a:pPr>
-            <a:r>
-              <a:rPr sz="1500" b="1">
-                <a:solidFill>
-                  <a:srgbClr val="FFFFFF"/>
-                </a:solidFill>
-                <a:latin typeface="Arial"/>
-              </a:rPr>
-              <a:t>Learning loops</a:t>
-            </a:r>
-          </a:p>
-          <a:p>
-            <a:pPr algn="l">
-              <a:spcAft>
-                <a:spcPts val="0"/>
-              </a:spcAft>
-            </a:pPr>
-            <a:r>
-              <a:rPr sz="1200" b="0">
-                <a:solidFill>
-                  <a:srgbClr val="FFFFFF"/>
-                </a:solidFill>
-                <a:latin typeface="Arial"/>
-              </a:rPr>
-              <a:t>better persona and hook next call</a:t>
-            </a:r>
-          </a:p>
-        </p:txBody>
-      </p:sp>
-      <p:sp>
-        <p:nvSpPr>
-          <p:cNvPr id="17" name="Down Arrow 16"/>
+            <a:pPr algn="ctr"/>
+          </a:p>
+        </p:txBody>
+      </p:sp>
+      <p:sp>
+        <p:nvSpPr>
+          <p:cNvPr id="17" name="Rounded Rectangle 16"/>
           <p:cNvSpPr/>
           <p:nvPr/>
         </p:nvSpPr>
         <p:spPr>
           <a:xfrm>
-            <a:off x="10012680" y="2926080"/>
-            <a:ext cx="365760" cy="347472"/>
-          </a:xfrm>
-          <a:prstGeom prst="downArrow">
-            <a:avLst/>
-          </a:prstGeom>
-          <a:solidFill>
-            <a:srgbClr val="595959"/>
+            <a:off x="6035040" y="4407408"/>
+            <a:ext cx="5577840" cy="621792"/>
+          </a:xfrm>
+          <a:prstGeom prst="roundRect">
+            <a:avLst>
+              <a:gd name="adj" fmla="val 40000"/>
+            </a:avLst>
+          </a:prstGeom>
+          <a:solidFill>
+            <a:srgbClr val="5B3E96"/>
           </a:solidFill>
           <a:ln>
             <a:noFill/>
           </a:ln>
+          <a:effectLst/>
         </p:spPr>
         <p:style>
           <a:lnRef idx="1">
@@ -17975,10 +18588,23 @@
           </a:fontRef>
         </p:style>
         <p:txBody>
-          <a:bodyPr rtlCol="0" anchor="ctr"/>
+          <a:bodyPr rtlCol="0" anchor="ctr" wrap="square" lIns="109728" rIns="109728" tIns="54864" bIns="54864"/>
           <a:lstStyle/>
           <a:p>
-            <a:pPr algn="ctr"/>
+            <a:pPr algn="l">
+              <a:spcAft>
+                <a:spcPts val="0"/>
+              </a:spcAft>
+            </a:pPr>
+            <a:r>
+              <a:rPr sz="1400" b="1">
+                <a:solidFill>
+                  <a:srgbClr val="FFFFFF"/>
+                </a:solidFill>
+                <a:latin typeface="Arial"/>
+              </a:rPr>
+              <a:t>Replies in the seller's language</a:t>
+            </a:r>
           </a:p>
         </p:txBody>
       </p:sp>
@@ -17990,12 +18616,12 @@
         </p:nvSpPr>
         <p:spPr>
           <a:xfrm>
-            <a:off x="502920" y="5212080"/>
-            <a:ext cx="11338560" cy="731520"/>
+            <a:off x="566928" y="5166359"/>
+            <a:ext cx="4754880" cy="621792"/>
           </a:xfrm>
           <a:prstGeom prst="roundRect">
             <a:avLst>
-              <a:gd name="adj" fmla="val 6000"/>
+              <a:gd name="adj" fmla="val 40000"/>
             </a:avLst>
           </a:prstGeom>
           <a:solidFill>
@@ -18003,7 +18629,7 @@
           </a:solidFill>
           <a:ln w="12700">
             <a:solidFill>
-              <a:srgbClr val="002060"/>
+              <a:srgbClr val="595959"/>
             </a:solidFill>
           </a:ln>
           <a:effectLst/>
@@ -18026,19 +18652,199 @@
           <a:bodyPr rtlCol="0" anchor="ctr" wrap="square" lIns="109728" rIns="109728" tIns="54864" bIns="54864"/>
           <a:lstStyle/>
           <a:p>
-            <a:pPr algn="ctr">
+            <a:pPr algn="l">
               <a:spcAft>
                 <a:spcPts val="0"/>
               </a:spcAft>
             </a:pPr>
             <a:r>
-              <a:rPr sz="1300" b="1">
+              <a:rPr sz="1400" b="0">
+                <a:solidFill>
+                  <a:srgbClr val="262626"/>
+                </a:solidFill>
+                <a:latin typeface="Arial"/>
+              </a:rPr>
+              <a:t>“Who handles my account?”</a:t>
+            </a:r>
+          </a:p>
+        </p:txBody>
+      </p:sp>
+      <p:sp>
+        <p:nvSpPr>
+          <p:cNvPr id="19" name="Right Arrow 18"/>
+          <p:cNvSpPr/>
+          <p:nvPr/>
+        </p:nvSpPr>
+        <p:spPr>
+          <a:xfrm>
+            <a:off x="5440680" y="5294375"/>
+            <a:ext cx="457200" cy="365760"/>
+          </a:xfrm>
+          <a:prstGeom prst="rightArrow">
+            <a:avLst/>
+          </a:prstGeom>
+          <a:solidFill>
+            <a:srgbClr val="1B6B5E"/>
+          </a:solidFill>
+          <a:ln>
+            <a:noFill/>
+          </a:ln>
+        </p:spPr>
+        <p:style>
+          <a:lnRef idx="1">
+            <a:schemeClr val="accent1"/>
+          </a:lnRef>
+          <a:fillRef idx="3">
+            <a:schemeClr val="accent1"/>
+          </a:fillRef>
+          <a:effectRef idx="2">
+            <a:schemeClr val="accent1"/>
+          </a:effectRef>
+          <a:fontRef idx="minor">
+            <a:schemeClr val="lt1"/>
+          </a:fontRef>
+        </p:style>
+        <p:txBody>
+          <a:bodyPr rtlCol="0" anchor="ctr"/>
+          <a:lstStyle/>
+          <a:p>
+            <a:pPr algn="ctr"/>
+          </a:p>
+        </p:txBody>
+      </p:sp>
+      <p:sp>
+        <p:nvSpPr>
+          <p:cNvPr id="20" name="Rounded Rectangle 19"/>
+          <p:cNvSpPr/>
+          <p:nvPr/>
+        </p:nvSpPr>
+        <p:spPr>
+          <a:xfrm>
+            <a:off x="6035040" y="5166359"/>
+            <a:ext cx="5577840" cy="621792"/>
+          </a:xfrm>
+          <a:prstGeom prst="roundRect">
+            <a:avLst>
+              <a:gd name="adj" fmla="val 40000"/>
+            </a:avLst>
+          </a:prstGeom>
+          <a:solidFill>
+            <a:srgbClr val="1B6B5E"/>
+          </a:solidFill>
+          <a:ln>
+            <a:noFill/>
+          </a:ln>
+          <a:effectLst/>
+        </p:spPr>
+        <p:style>
+          <a:lnRef idx="1">
+            <a:schemeClr val="accent1"/>
+          </a:lnRef>
+          <a:fillRef idx="3">
+            <a:schemeClr val="accent1"/>
+          </a:fillRef>
+          <a:effectRef idx="2">
+            <a:schemeClr val="accent1"/>
+          </a:effectRef>
+          <a:fontRef idx="minor">
+            <a:schemeClr val="lt1"/>
+          </a:fontRef>
+        </p:style>
+        <p:txBody>
+          <a:bodyPr rtlCol="0" anchor="ctr" wrap="square" lIns="109728" rIns="109728" tIns="54864" bIns="54864"/>
+          <a:lstStyle/>
+          <a:p>
+            <a:pPr algn="l">
+              <a:spcAft>
+                <a:spcPts val="0"/>
+              </a:spcAft>
+            </a:pPr>
+            <a:r>
+              <a:rPr sz="1400" b="1">
+                <a:solidFill>
+                  <a:srgbClr val="FFFFFF"/>
+                </a:solidFill>
+                <a:latin typeface="Arial"/>
+              </a:rPr>
+              <a:t>Names the handler and books with them; a team if none</a:t>
+            </a:r>
+          </a:p>
+        </p:txBody>
+      </p:sp>
+      <p:sp>
+        <p:nvSpPr>
+          <p:cNvPr id="21" name="TextBox 20"/>
+          <p:cNvSpPr txBox="1"/>
+          <p:nvPr/>
+        </p:nvSpPr>
+        <p:spPr>
+          <a:xfrm>
+            <a:off x="566928" y="5943600"/>
+            <a:ext cx="5486400" cy="274320"/>
+          </a:xfrm>
+          <a:prstGeom prst="rect">
+            <a:avLst/>
+          </a:prstGeom>
+          <a:noFill/>
+        </p:spPr>
+        <p:txBody>
+          <a:bodyPr wrap="square">
+            <a:spAutoFit/>
+          </a:bodyPr>
+          <a:lstStyle/>
+          <a:p>
+            <a:pPr algn="l">
+              <a:spcAft>
+                <a:spcPts val="0"/>
+              </a:spcAft>
+            </a:pPr>
+            <a:r>
+              <a:rPr sz="1100" b="1">
+                <a:solidFill>
+                  <a:srgbClr val="595959"/>
+                </a:solidFill>
+                <a:latin typeface="Arial"/>
+              </a:rPr>
+              <a:t>SELLER SAYS</a:t>
+            </a:r>
+          </a:p>
+        </p:txBody>
+      </p:sp>
+      <p:sp>
+        <p:nvSpPr>
+          <p:cNvPr id="22" name="TextBox 21"/>
+          <p:cNvSpPr txBox="1"/>
+          <p:nvPr/>
+        </p:nvSpPr>
+        <p:spPr>
+          <a:xfrm>
+            <a:off x="6035040" y="5943600"/>
+            <a:ext cx="5486400" cy="274320"/>
+          </a:xfrm>
+          <a:prstGeom prst="rect">
+            <a:avLst/>
+          </a:prstGeom>
+          <a:noFill/>
+        </p:spPr>
+        <p:txBody>
+          <a:bodyPr wrap="square">
+            <a:spAutoFit/>
+          </a:bodyPr>
+          <a:lstStyle/>
+          <a:p>
+            <a:pPr algn="l">
+              <a:spcAft>
+                <a:spcPts val="0"/>
+              </a:spcAft>
+            </a:pPr>
+            <a:r>
+              <a:rPr sz="1100" b="1">
                 <a:solidFill>
                   <a:srgbClr val="002060"/>
                 </a:solidFill>
                 <a:latin typeface="Arial"/>
               </a:rPr>
-              <a:t>Safety rails: never AI, bot or manager; never claims to be human  |  numbers only from verified facts  |  names stay tokens in the sandbox  |  no price on the call</a:t>
+              <a:t>VANI DOES</a:t>
             </a:r>
           </a:p>
         </p:txBody>
@@ -18077,7 +18883,7 @@
           <a:lstStyle/>
           <a:p>
             <a:r>
-              <a:t>Future Goals</a:t>
+              <a:t>Mood Engine: Two Layers</a:t>
             </a:r>
           </a:p>
         </p:txBody>
@@ -18090,19 +18896,21 @@
         </p:nvSpPr>
         <p:spPr>
           <a:xfrm>
-            <a:off x="566928" y="1463040"/>
-            <a:ext cx="5212080" cy="1371600"/>
+            <a:off x="502920" y="2743200"/>
+            <a:ext cx="2103120" cy="1097280"/>
           </a:xfrm>
           <a:prstGeom prst="roundRect">
             <a:avLst>
-              <a:gd name="adj" fmla="val 6000"/>
+              <a:gd name="adj" fmla="val 40000"/>
             </a:avLst>
           </a:prstGeom>
           <a:solidFill>
-            <a:srgbClr val="C00000"/>
-          </a:solidFill>
-          <a:ln>
-            <a:noFill/>
+            <a:srgbClr val="EEF2F8"/>
+          </a:solidFill>
+          <a:ln w="12700">
+            <a:solidFill>
+              <a:srgbClr val="595959"/>
+            </a:solidFill>
           </a:ln>
           <a:effectLst/>
         </p:spPr>
@@ -18130,13 +18938,13 @@
               </a:spcAft>
             </a:pPr>
             <a:r>
-              <a:rPr sz="1700" b="1">
-                <a:solidFill>
-                  <a:srgbClr val="FFFFFF"/>
+              <a:rPr sz="1500" b="1">
+                <a:solidFill>
+                  <a:srgbClr val="002060"/>
                 </a:solidFill>
                 <a:latin typeface="Arial"/>
               </a:rPr>
-              <a:t>NOW: Meeting arrangement</a:t>
+              <a:t>Seller turn</a:t>
             </a:r>
           </a:p>
           <a:p>
@@ -18146,13 +18954,13 @@
               </a:spcAft>
             </a:pPr>
             <a:r>
-              <a:rPr sz="1300" b="0">
-                <a:solidFill>
-                  <a:srgbClr val="FFFFFF"/>
+              <a:rPr sz="1100" b="0">
+                <a:solidFill>
+                  <a:srgbClr val="595959"/>
                 </a:solidFill>
                 <a:latin typeface="Arial"/>
               </a:rPr>
-              <a:t>Right persona and hook, live adaptation</a:t>
+              <a:t>what was just said</a:t>
             </a:r>
           </a:p>
         </p:txBody>
@@ -18165,14 +18973,14 @@
         </p:nvSpPr>
         <p:spPr>
           <a:xfrm>
-            <a:off x="5852160" y="1920240"/>
-            <a:ext cx="457200" cy="411480"/>
+            <a:off x="2651760" y="1965960"/>
+            <a:ext cx="457200" cy="365760"/>
           </a:xfrm>
           <a:prstGeom prst="rightArrow">
             <a:avLst/>
           </a:prstGeom>
           <a:solidFill>
-            <a:srgbClr val="595959"/>
+            <a:srgbClr val="2EA896"/>
           </a:solidFill>
           <a:ln>
             <a:noFill/>
@@ -18202,19 +19010,17 @@
       </p:sp>
       <p:sp>
         <p:nvSpPr>
-          <p:cNvPr id="5" name="Rounded Rectangle 4"/>
+          <p:cNvPr id="5" name="Right Arrow 4"/>
           <p:cNvSpPr/>
           <p:nvPr/>
         </p:nvSpPr>
         <p:spPr>
           <a:xfrm>
-            <a:off x="6400800" y="1463040"/>
-            <a:ext cx="5212080" cy="1371600"/>
-          </a:xfrm>
-          <a:prstGeom prst="roundRect">
-            <a:avLst>
-              <a:gd name="adj" fmla="val 6000"/>
-            </a:avLst>
+            <a:off x="2651760" y="4069080"/>
+            <a:ext cx="457200" cy="365760"/>
+          </a:xfrm>
+          <a:prstGeom prst="rightArrow">
+            <a:avLst/>
           </a:prstGeom>
           <a:solidFill>
             <a:srgbClr val="002060"/>
@@ -18222,7 +19028,6 @@
           <a:ln>
             <a:noFill/>
           </a:ln>
-          <a:effectLst/>
         </p:spPr>
         <p:style>
           <a:lnRef idx="1">
@@ -18239,91 +19044,23 @@
           </a:fontRef>
         </p:style>
         <p:txBody>
-          <a:bodyPr rtlCol="0" anchor="ctr" wrap="square" lIns="109728" rIns="109728" tIns="54864" bIns="54864"/>
+          <a:bodyPr rtlCol="0" anchor="ctr"/>
           <a:lstStyle/>
           <a:p>
-            <a:pPr algn="ctr">
-              <a:spcAft>
-                <a:spcPts val="200"/>
-              </a:spcAft>
-            </a:pPr>
-            <a:r>
-              <a:rPr sz="1700" b="1">
-                <a:solidFill>
-                  <a:srgbClr val="FFFFFF"/>
-                </a:solidFill>
-                <a:latin typeface="Arial"/>
-              </a:rPr>
-              <a:t>NEXT: Seller enrichment</a:t>
-            </a:r>
-          </a:p>
-          <a:p>
-            <a:pPr algn="ctr">
-              <a:spcAft>
-                <a:spcPts val="0"/>
-              </a:spcAft>
-            </a:pPr>
-            <a:r>
-              <a:rPr sz="1300" b="0">
-                <a:solidFill>
-                  <a:srgbClr val="FFFFFF"/>
-                </a:solidFill>
-                <a:latin typeface="Arial"/>
-              </a:rPr>
-              <a:t>Catalogue improvement and suggestions</a:t>
-            </a:r>
-          </a:p>
-        </p:txBody>
-      </p:sp>
-      <p:sp>
-        <p:nvSpPr>
-          <p:cNvPr id="6" name="TextBox 5"/>
-          <p:cNvSpPr txBox="1"/>
-          <p:nvPr/>
-        </p:nvSpPr>
-        <p:spPr>
-          <a:xfrm>
-            <a:off x="566928" y="3154680"/>
-            <a:ext cx="10972800" cy="365760"/>
-          </a:xfrm>
-          <a:prstGeom prst="rect">
-            <a:avLst/>
-          </a:prstGeom>
-          <a:noFill/>
-        </p:spPr>
-        <p:txBody>
-          <a:bodyPr wrap="square">
-            <a:spAutoFit/>
-          </a:bodyPr>
-          <a:lstStyle/>
-          <a:p>
-            <a:pPr algn="l">
-              <a:spcAft>
-                <a:spcPts val="0"/>
-              </a:spcAft>
-            </a:pPr>
-            <a:r>
-              <a:rPr sz="1600" b="1">
-                <a:solidFill>
-                  <a:srgbClr val="5B3E96"/>
-                </a:solidFill>
-                <a:latin typeface="Arial"/>
-              </a:rPr>
-              <a:t>Personalise further, per seller</a:t>
-            </a:r>
-          </a:p>
-        </p:txBody>
-      </p:sp>
-      <p:sp>
-        <p:nvSpPr>
-          <p:cNvPr id="7" name="Rounded Rectangle 6"/>
+            <a:pPr algn="ctr"/>
+          </a:p>
+        </p:txBody>
+      </p:sp>
+      <p:sp>
+        <p:nvSpPr>
+          <p:cNvPr id="6" name="Rounded Rectangle 5"/>
           <p:cNvSpPr/>
           <p:nvPr/>
         </p:nvSpPr>
         <p:spPr>
           <a:xfrm>
-            <a:off x="566928" y="3611880"/>
-            <a:ext cx="3566160" cy="1828800"/>
+            <a:off x="3200400" y="1371600"/>
+            <a:ext cx="4480560" cy="1737360"/>
           </a:xfrm>
           <a:prstGeom prst="roundRect">
             <a:avLst>
@@ -18331,12 +19068,10 @@
             </a:avLst>
           </a:prstGeom>
           <a:solidFill>
-            <a:srgbClr val="FFFFFF"/>
-          </a:solidFill>
-          <a:ln w="12700">
-            <a:solidFill>
-              <a:srgbClr val="2EA896"/>
-            </a:solidFill>
+            <a:srgbClr val="2EA896"/>
+          </a:solidFill>
+          <a:ln>
+            <a:noFill/>
           </a:ln>
           <a:effectLst/>
         </p:spPr>
@@ -18355,7 +19090,7 @@
           </a:fontRef>
         </p:style>
         <p:txBody>
-          <a:bodyPr rtlCol="0" anchor="ctr" wrap="square" lIns="1005840" rIns="109728" tIns="54864" bIns="54864"/>
+          <a:bodyPr rtlCol="0" anchor="ctr" wrap="square" lIns="109728" rIns="109728" tIns="54864" bIns="54864"/>
           <a:lstStyle/>
           <a:p>
             <a:pPr algn="l">
@@ -18364,53 +19099,72 @@
               </a:spcAft>
             </a:pPr>
             <a:r>
-              <a:rPr sz="1600" b="1">
-                <a:solidFill>
-                  <a:srgbClr val="2EA896"/>
+              <a:rPr sz="1700" b="1">
+                <a:solidFill>
+                  <a:srgbClr val="FFFFFF"/>
                 </a:solidFill>
                 <a:latin typeface="Arial"/>
               </a:rPr>
-              <a:t>Objective per seller</a:t>
+              <a:t>Keyword tool: instant</a:t>
             </a:r>
           </a:p>
           <a:p>
             <a:pPr algn="l">
               <a:spcAft>
-                <a:spcPts val="0"/>
+                <a:spcPts val="200"/>
               </a:spcAft>
             </a:pPr>
             <a:r>
-              <a:rPr sz="1300" b="0">
-                <a:solidFill>
-                  <a:srgbClr val="262626"/>
+              <a:rPr sz="1200" b="0">
+                <a:solidFill>
+                  <a:srgbClr val="FFFFFF"/>
                 </a:solidFill>
                 <a:latin typeface="Arial"/>
               </a:rPr>
-              <a:t>Meeting, enrichment or NPS</a:t>
-            </a:r>
-          </a:p>
-        </p:txBody>
-      </p:sp>
-      <p:sp>
-        <p:nvSpPr>
-          <p:cNvPr id="8" name="Oval 7"/>
+              <a:t>Reads Hindi, Hinglish, Marathi, Telugu and more</a:t>
+            </a:r>
+          </a:p>
+          <a:p>
+            <a:pPr algn="l">
+              <a:spcAft>
+                <a:spcPts val="0"/>
+              </a:spcAft>
+            </a:pPr>
+            <a:r>
+              <a:rPr sz="1200" b="0">
+                <a:solidFill>
+                  <a:srgbClr val="FFFFFF"/>
+                </a:solidFill>
+                <a:latin typeface="Arial"/>
+              </a:rPr>
+              <a:t>Under 1 ms, same-turn directive</a:t>
+            </a:r>
+          </a:p>
+        </p:txBody>
+      </p:sp>
+      <p:sp>
+        <p:nvSpPr>
+          <p:cNvPr id="7" name="Rounded Rectangle 6"/>
           <p:cNvSpPr/>
           <p:nvPr/>
         </p:nvSpPr>
         <p:spPr>
           <a:xfrm>
-            <a:off x="749808" y="3794760"/>
-            <a:ext cx="640080" cy="640080"/>
-          </a:xfrm>
-          <a:prstGeom prst="ellipse">
-            <a:avLst/>
-          </a:prstGeom>
-          <a:solidFill>
-            <a:srgbClr val="2EA896"/>
+            <a:off x="3200400" y="3474720"/>
+            <a:ext cx="4480560" cy="1737360"/>
+          </a:xfrm>
+          <a:prstGeom prst="roundRect">
+            <a:avLst>
+              <a:gd name="adj" fmla="val 6000"/>
+            </a:avLst>
+          </a:prstGeom>
+          <a:solidFill>
+            <a:srgbClr val="002060"/>
           </a:solidFill>
           <a:ln>
             <a:noFill/>
           </a:ln>
+          <a:effectLst/>
         </p:spPr>
         <p:style>
           <a:lnRef idx="1">
@@ -18427,51 +19181,78 @@
           </a:fontRef>
         </p:style>
         <p:txBody>
-          <a:bodyPr rtlCol="0" anchor="ctr" lIns="0" rIns="0" tIns="0" bIns="0"/>
+          <a:bodyPr rtlCol="0" anchor="ctr" wrap="square" lIns="109728" rIns="109728" tIns="54864" bIns="54864"/>
           <a:lstStyle/>
           <a:p>
-            <a:pPr algn="ctr">
-              <a:spcAft>
-                <a:spcPts val="0"/>
+            <a:pPr algn="l">
+              <a:spcAft>
+                <a:spcPts val="300"/>
               </a:spcAft>
             </a:pPr>
             <a:r>
-              <a:rPr sz="2000" b="1">
+              <a:rPr sz="1700" b="1">
                 <a:solidFill>
                   <a:srgbClr val="FFFFFF"/>
                 </a:solidFill>
                 <a:latin typeface="Arial"/>
               </a:rPr>
-              <a:t>1</a:t>
-            </a:r>
-          </a:p>
-        </p:txBody>
-      </p:sp>
-      <p:sp>
-        <p:nvSpPr>
-          <p:cNvPr id="9" name="Rounded Rectangle 8"/>
+              <a:t>Jev decision model</a:t>
+            </a:r>
+          </a:p>
+          <a:p>
+            <a:pPr algn="l">
+              <a:spcAft>
+                <a:spcPts val="200"/>
+              </a:spcAft>
+            </a:pPr>
+            <a:r>
+              <a:rPr sz="1200" b="0">
+                <a:solidFill>
+                  <a:srgbClr val="FFFFFF"/>
+                </a:solidFill>
+                <a:latin typeface="Arial"/>
+              </a:rPr>
+              <a:t>6 mood questions at once: rushed, frustrated, confused, bot, interested, language</a:t>
+            </a:r>
+          </a:p>
+          <a:p>
+            <a:pPr algn="l">
+              <a:spcAft>
+                <a:spcPts val="0"/>
+              </a:spcAft>
+            </a:pPr>
+            <a:r>
+              <a:rPr sz="1200" b="0">
+                <a:solidFill>
+                  <a:srgbClr val="FFFFFF"/>
+                </a:solidFill>
+                <a:latin typeface="Arial"/>
+              </a:rPr>
+              <a:t>About 0.5 s; 49 of 51 correct in tests</a:t>
+            </a:r>
+          </a:p>
+        </p:txBody>
+      </p:sp>
+      <p:sp>
+        <p:nvSpPr>
+          <p:cNvPr id="8" name="Right Arrow 7"/>
           <p:cNvSpPr/>
           <p:nvPr/>
         </p:nvSpPr>
         <p:spPr>
           <a:xfrm>
-            <a:off x="4407408" y="3611880"/>
-            <a:ext cx="3566160" cy="1828800"/>
-          </a:xfrm>
-          <a:prstGeom prst="roundRect">
-            <a:avLst>
-              <a:gd name="adj" fmla="val 6000"/>
-            </a:avLst>
-          </a:prstGeom>
-          <a:solidFill>
-            <a:srgbClr val="FFFFFF"/>
-          </a:solidFill>
-          <a:ln w="12700">
-            <a:solidFill>
-              <a:srgbClr val="E08A00"/>
-            </a:solidFill>
+            <a:off x="7772400" y="2011680"/>
+            <a:ext cx="457200" cy="365760"/>
+          </a:xfrm>
+          <a:prstGeom prst="rightArrow">
+            <a:avLst/>
+          </a:prstGeom>
+          <a:solidFill>
+            <a:srgbClr val="2EA896"/>
+          </a:solidFill>
+          <a:ln>
+            <a:noFill/>
           </a:ln>
-          <a:effectLst/>
         </p:spPr>
         <p:style>
           <a:lnRef idx="1">
@@ -18488,58 +19269,29 @@
           </a:fontRef>
         </p:style>
         <p:txBody>
-          <a:bodyPr rtlCol="0" anchor="ctr" wrap="square" lIns="1005840" rIns="109728" tIns="54864" bIns="54864"/>
+          <a:bodyPr rtlCol="0" anchor="ctr"/>
           <a:lstStyle/>
           <a:p>
-            <a:pPr algn="l">
-              <a:spcAft>
-                <a:spcPts val="300"/>
-              </a:spcAft>
-            </a:pPr>
-            <a:r>
-              <a:rPr sz="1600" b="1">
-                <a:solidFill>
-                  <a:srgbClr val="E08A00"/>
-                </a:solidFill>
-                <a:latin typeface="Arial"/>
-              </a:rPr>
-              <a:t>Preferred call time</a:t>
-            </a:r>
-          </a:p>
-          <a:p>
-            <a:pPr algn="l">
-              <a:spcAft>
-                <a:spcPts val="0"/>
-              </a:spcAft>
-            </a:pPr>
-            <a:r>
-              <a:rPr sz="1300" b="0">
-                <a:solidFill>
-                  <a:srgbClr val="262626"/>
-                </a:solidFill>
-                <a:latin typeface="Arial"/>
-              </a:rPr>
-              <a:t>More calls answered</a:t>
-            </a:r>
-          </a:p>
-        </p:txBody>
-      </p:sp>
-      <p:sp>
-        <p:nvSpPr>
-          <p:cNvPr id="10" name="Oval 9"/>
+            <a:pPr algn="ctr"/>
+          </a:p>
+        </p:txBody>
+      </p:sp>
+      <p:sp>
+        <p:nvSpPr>
+          <p:cNvPr id="9" name="Right Arrow 8"/>
           <p:cNvSpPr/>
           <p:nvPr/>
         </p:nvSpPr>
         <p:spPr>
           <a:xfrm>
-            <a:off x="4590288" y="3794760"/>
-            <a:ext cx="640080" cy="640080"/>
-          </a:xfrm>
-          <a:prstGeom prst="ellipse">
+            <a:off x="7772400" y="4114800"/>
+            <a:ext cx="457200" cy="365760"/>
+          </a:xfrm>
+          <a:prstGeom prst="rightArrow">
             <a:avLst/>
           </a:prstGeom>
           <a:solidFill>
-            <a:srgbClr val="E08A00"/>
+            <a:srgbClr val="002060"/>
           </a:solidFill>
           <a:ln>
             <a:noFill/>
@@ -18560,36 +19312,23 @@
           </a:fontRef>
         </p:style>
         <p:txBody>
-          <a:bodyPr rtlCol="0" anchor="ctr" lIns="0" rIns="0" tIns="0" bIns="0"/>
+          <a:bodyPr rtlCol="0" anchor="ctr"/>
           <a:lstStyle/>
           <a:p>
-            <a:pPr algn="ctr">
-              <a:spcAft>
-                <a:spcPts val="0"/>
-              </a:spcAft>
-            </a:pPr>
-            <a:r>
-              <a:rPr sz="2000" b="1">
-                <a:solidFill>
-                  <a:srgbClr val="FFFFFF"/>
-                </a:solidFill>
-                <a:latin typeface="Arial"/>
-              </a:rPr>
-              <a:t>2</a:t>
-            </a:r>
-          </a:p>
-        </p:txBody>
-      </p:sp>
-      <p:sp>
-        <p:nvSpPr>
-          <p:cNvPr id="11" name="Rounded Rectangle 10"/>
+            <a:pPr algn="ctr"/>
+          </a:p>
+        </p:txBody>
+      </p:sp>
+      <p:sp>
+        <p:nvSpPr>
+          <p:cNvPr id="10" name="Rounded Rectangle 9"/>
           <p:cNvSpPr/>
           <p:nvPr/>
         </p:nvSpPr>
         <p:spPr>
           <a:xfrm>
-            <a:off x="8247888" y="3611880"/>
-            <a:ext cx="3566160" cy="1828800"/>
+            <a:off x="8321040" y="2377440"/>
+            <a:ext cx="3383280" cy="2194560"/>
           </a:xfrm>
           <a:prstGeom prst="roundRect">
             <a:avLst>
@@ -18597,7 +19336,98 @@
             </a:avLst>
           </a:prstGeom>
           <a:solidFill>
-            <a:srgbClr val="FFFFFF"/>
+            <a:srgbClr val="C00000"/>
+          </a:solidFill>
+          <a:ln>
+            <a:noFill/>
+          </a:ln>
+          <a:effectLst/>
+        </p:spPr>
+        <p:style>
+          <a:lnRef idx="1">
+            <a:schemeClr val="accent1"/>
+          </a:lnRef>
+          <a:fillRef idx="3">
+            <a:schemeClr val="accent1"/>
+          </a:fillRef>
+          <a:effectRef idx="2">
+            <a:schemeClr val="accent1"/>
+          </a:effectRef>
+          <a:fontRef idx="minor">
+            <a:schemeClr val="lt1"/>
+          </a:fontRef>
+        </p:style>
+        <p:txBody>
+          <a:bodyPr rtlCol="0" anchor="ctr" wrap="square" lIns="109728" rIns="109728" tIns="54864" bIns="54864"/>
+          <a:lstStyle/>
+          <a:p>
+            <a:pPr algn="ctr">
+              <a:spcAft>
+                <a:spcPts val="400"/>
+              </a:spcAft>
+            </a:pPr>
+            <a:r>
+              <a:rPr sz="1600" b="1">
+                <a:solidFill>
+                  <a:srgbClr val="FFFFFF"/>
+                </a:solidFill>
+                <a:latin typeface="Arial"/>
+              </a:rPr>
+              <a:t>MODE + DIRECTIVE</a:t>
+            </a:r>
+          </a:p>
+          <a:p>
+            <a:pPr algn="ctr">
+              <a:spcAft>
+                <a:spcPts val="400"/>
+              </a:spcAft>
+            </a:pPr>
+            <a:r>
+              <a:rPr sz="1100" b="0">
+                <a:solidFill>
+                  <a:srgbClr val="FFFFFF"/>
+                </a:solidFill>
+                <a:latin typeface="Arial"/>
+              </a:rPr>
+              <a:t>rushed, confused, frustrated, interested, language switch, opt-out</a:t>
+            </a:r>
+          </a:p>
+          <a:p>
+            <a:pPr algn="ctr">
+              <a:spcAft>
+                <a:spcPts val="0"/>
+              </a:spcAft>
+            </a:pPr>
+            <a:r>
+              <a:rPr sz="1200" b="1">
+                <a:solidFill>
+                  <a:srgbClr val="FFFFFF"/>
+                </a:solidFill>
+                <a:latin typeface="Arial"/>
+              </a:rPr>
+              <a:t>VANI changes how it speaks</a:t>
+            </a:r>
+          </a:p>
+        </p:txBody>
+      </p:sp>
+      <p:sp>
+        <p:nvSpPr>
+          <p:cNvPr id="11" name="Rounded Rectangle 10"/>
+          <p:cNvSpPr/>
+          <p:nvPr/>
+        </p:nvSpPr>
+        <p:spPr>
+          <a:xfrm>
+            <a:off x="502920" y="5440680"/>
+            <a:ext cx="11338560" cy="548640"/>
+          </a:xfrm>
+          <a:prstGeom prst="roundRect">
+            <a:avLst>
+              <a:gd name="adj" fmla="val 30000"/>
+            </a:avLst>
+          </a:prstGeom>
+          <a:solidFill>
+            <a:srgbClr val="EEF2F8"/>
           </a:solidFill>
           <a:ln w="12700">
             <a:solidFill>
@@ -18621,94 +19451,22 @@
           </a:fontRef>
         </p:style>
         <p:txBody>
-          <a:bodyPr rtlCol="0" anchor="ctr" wrap="square" lIns="1005840" rIns="109728" tIns="54864" bIns="54864"/>
+          <a:bodyPr rtlCol="0" anchor="ctr" wrap="square" lIns="109728" rIns="109728" tIns="54864" bIns="54864"/>
           <a:lstStyle/>
           <a:p>
-            <a:pPr algn="l">
-              <a:spcAft>
-                <a:spcPts val="300"/>
+            <a:pPr algn="ctr">
+              <a:spcAft>
+                <a:spcPts val="0"/>
               </a:spcAft>
             </a:pPr>
             <a:r>
-              <a:rPr sz="1600" b="1">
+              <a:rPr sz="1300" b="1">
                 <a:solidFill>
                   <a:srgbClr val="5B3E96"/>
                 </a:solidFill>
                 <a:latin typeface="Arial"/>
               </a:rPr>
-              <a:t>Preferred language</a:t>
-            </a:r>
-          </a:p>
-          <a:p>
-            <a:pPr algn="l">
-              <a:spcAft>
-                <a:spcPts val="0"/>
-              </a:spcAft>
-            </a:pPr>
-            <a:r>
-              <a:rPr sz="1300" b="0">
-                <a:solidFill>
-                  <a:srgbClr val="262626"/>
-                </a:solidFill>
-                <a:latin typeface="Arial"/>
-              </a:rPr>
-              <a:t>Suggested from the seller's data</a:t>
-            </a:r>
-          </a:p>
-        </p:txBody>
-      </p:sp>
-      <p:sp>
-        <p:nvSpPr>
-          <p:cNvPr id="12" name="Oval 11"/>
-          <p:cNvSpPr/>
-          <p:nvPr/>
-        </p:nvSpPr>
-        <p:spPr>
-          <a:xfrm>
-            <a:off x="8430767" y="3794760"/>
-            <a:ext cx="640080" cy="640080"/>
-          </a:xfrm>
-          <a:prstGeom prst="ellipse">
-            <a:avLst/>
-          </a:prstGeom>
-          <a:solidFill>
-            <a:srgbClr val="5B3E96"/>
-          </a:solidFill>
-          <a:ln>
-            <a:noFill/>
-          </a:ln>
-        </p:spPr>
-        <p:style>
-          <a:lnRef idx="1">
-            <a:schemeClr val="accent1"/>
-          </a:lnRef>
-          <a:fillRef idx="3">
-            <a:schemeClr val="accent1"/>
-          </a:fillRef>
-          <a:effectRef idx="2">
-            <a:schemeClr val="accent1"/>
-          </a:effectRef>
-          <a:fontRef idx="minor">
-            <a:schemeClr val="lt1"/>
-          </a:fontRef>
-        </p:style>
-        <p:txBody>
-          <a:bodyPr rtlCol="0" anchor="ctr" lIns="0" rIns="0" tIns="0" bIns="0"/>
-          <a:lstStyle/>
-          <a:p>
-            <a:pPr algn="ctr">
-              <a:spcAft>
-                <a:spcPts val="0"/>
-              </a:spcAft>
-            </a:pPr>
-            <a:r>
-              <a:rPr sz="2000" b="1">
-                <a:solidFill>
-                  <a:srgbClr val="FFFFFF"/>
-                </a:solidFill>
-                <a:latin typeface="Arial"/>
-              </a:rPr>
-              <a:t>3</a:t>
+              <a:t>Jev also labels real calls: it scores and improves the keyword tool between runs</a:t>
             </a:r>
           </a:p>
         </p:txBody>
@@ -18722,6 +19480,2423 @@
 </file>
 
 <file path=ppt/slides/slide18.xml><?xml version="1.0" encoding="utf-8"?>
+<p:sld xmlns:a="http://schemas.openxmlformats.org/drawingml/2006/main" xmlns:p="http://schemas.openxmlformats.org/presentationml/2006/main" xmlns:r="http://schemas.openxmlformats.org/officeDocument/2006/relationships">
+  <p:cSld>
+    <p:spTree>
+      <p:nvGrpSpPr>
+        <p:cNvPr id="1" name=""/>
+        <p:cNvGrpSpPr/>
+        <p:nvPr/>
+      </p:nvGrpSpPr>
+      <p:grpSpPr/>
+      <p:sp>
+        <p:nvSpPr>
+          <p:cNvPr id="2" name="Title 1"/>
+          <p:cNvSpPr>
+            <a:spLocks noGrp="1"/>
+          </p:cNvSpPr>
+          <p:nvPr>
+            <p:ph type="title"/>
+          </p:nvPr>
+        </p:nvSpPr>
+        <p:spPr/>
+        <p:txBody>
+          <a:bodyPr/>
+          <a:lstStyle/>
+          <a:p>
+            <a:r>
+              <a:t>The Improvement Loop</a:t>
+            </a:r>
+          </a:p>
+        </p:txBody>
+      </p:sp>
+      <p:sp>
+        <p:nvSpPr>
+          <p:cNvPr id="3" name="Rounded Rectangle 2"/>
+          <p:cNvSpPr/>
+          <p:nvPr/>
+        </p:nvSpPr>
+        <p:spPr>
+          <a:xfrm>
+            <a:off x="4754880" y="1371600"/>
+            <a:ext cx="2743200" cy="960120"/>
+          </a:xfrm>
+          <a:prstGeom prst="roundRect">
+            <a:avLst>
+              <a:gd name="adj" fmla="val 6000"/>
+            </a:avLst>
+          </a:prstGeom>
+          <a:solidFill>
+            <a:srgbClr val="2EA896"/>
+          </a:solidFill>
+          <a:ln>
+            <a:noFill/>
+          </a:ln>
+          <a:effectLst/>
+        </p:spPr>
+        <p:style>
+          <a:lnRef idx="1">
+            <a:schemeClr val="accent1"/>
+          </a:lnRef>
+          <a:fillRef idx="3">
+            <a:schemeClr val="accent1"/>
+          </a:fillRef>
+          <a:effectRef idx="2">
+            <a:schemeClr val="accent1"/>
+          </a:effectRef>
+          <a:fontRef idx="minor">
+            <a:schemeClr val="lt1"/>
+          </a:fontRef>
+        </p:style>
+        <p:txBody>
+          <a:bodyPr rtlCol="0" anchor="ctr" wrap="square" lIns="109728" rIns="109728" tIns="54864" bIns="54864"/>
+          <a:lstStyle/>
+          <a:p>
+            <a:pPr algn="ctr">
+              <a:spcAft>
+                <a:spcPts val="200"/>
+              </a:spcAft>
+            </a:pPr>
+            <a:r>
+              <a:rPr sz="1500" b="1">
+                <a:solidFill>
+                  <a:srgbClr val="FFFFFF"/>
+                </a:solidFill>
+                <a:latin typeface="Arial"/>
+              </a:rPr>
+              <a:t>1  CALL</a:t>
+            </a:r>
+          </a:p>
+          <a:p>
+            <a:pPr algn="ctr">
+              <a:spcAft>
+                <a:spcPts val="0"/>
+              </a:spcAft>
+            </a:pPr>
+            <a:r>
+              <a:rPr sz="1100" b="0">
+                <a:solidFill>
+                  <a:srgbClr val="FFFFFF"/>
+                </a:solidFill>
+                <a:latin typeface="Arial"/>
+              </a:rPr>
+              <a:t>persona set, live adaptation</a:t>
+            </a:r>
+          </a:p>
+        </p:txBody>
+      </p:sp>
+      <p:sp>
+        <p:nvSpPr>
+          <p:cNvPr id="4" name="Rounded Rectangle 3"/>
+          <p:cNvSpPr/>
+          <p:nvPr/>
+        </p:nvSpPr>
+        <p:spPr>
+          <a:xfrm>
+            <a:off x="8229600" y="2468880"/>
+            <a:ext cx="2743200" cy="960120"/>
+          </a:xfrm>
+          <a:prstGeom prst="roundRect">
+            <a:avLst>
+              <a:gd name="adj" fmla="val 6000"/>
+            </a:avLst>
+          </a:prstGeom>
+          <a:solidFill>
+            <a:srgbClr val="002060"/>
+          </a:solidFill>
+          <a:ln>
+            <a:noFill/>
+          </a:ln>
+          <a:effectLst/>
+        </p:spPr>
+        <p:style>
+          <a:lnRef idx="1">
+            <a:schemeClr val="accent1"/>
+          </a:lnRef>
+          <a:fillRef idx="3">
+            <a:schemeClr val="accent1"/>
+          </a:fillRef>
+          <a:effectRef idx="2">
+            <a:schemeClr val="accent1"/>
+          </a:effectRef>
+          <a:fontRef idx="minor">
+            <a:schemeClr val="lt1"/>
+          </a:fontRef>
+        </p:style>
+        <p:txBody>
+          <a:bodyPr rtlCol="0" anchor="ctr" wrap="square" lIns="109728" rIns="109728" tIns="54864" bIns="54864"/>
+          <a:lstStyle/>
+          <a:p>
+            <a:pPr algn="ctr">
+              <a:spcAft>
+                <a:spcPts val="200"/>
+              </a:spcAft>
+            </a:pPr>
+            <a:r>
+              <a:rPr sz="1500" b="1">
+                <a:solidFill>
+                  <a:srgbClr val="FFFFFF"/>
+                </a:solidFill>
+                <a:latin typeface="Arial"/>
+              </a:rPr>
+              <a:t>2  REVIEW</a:t>
+            </a:r>
+          </a:p>
+          <a:p>
+            <a:pPr algn="ctr">
+              <a:spcAft>
+                <a:spcPts val="0"/>
+              </a:spcAft>
+            </a:pPr>
+            <a:r>
+              <a:rPr sz="1100" b="0">
+                <a:solidFill>
+                  <a:srgbClr val="FFFFFF"/>
+                </a:solidFill>
+                <a:latin typeface="Arial"/>
+              </a:rPr>
+              <a:t>Claude + rule checks R1-R6</a:t>
+            </a:r>
+          </a:p>
+        </p:txBody>
+      </p:sp>
+      <p:sp>
+        <p:nvSpPr>
+          <p:cNvPr id="5" name="Rounded Rectangle 4"/>
+          <p:cNvSpPr/>
+          <p:nvPr/>
+        </p:nvSpPr>
+        <p:spPr>
+          <a:xfrm>
+            <a:off x="7406640" y="4297680"/>
+            <a:ext cx="2743200" cy="960120"/>
+          </a:xfrm>
+          <a:prstGeom prst="roundRect">
+            <a:avLst>
+              <a:gd name="adj" fmla="val 6000"/>
+            </a:avLst>
+          </a:prstGeom>
+          <a:solidFill>
+            <a:srgbClr val="1B6B5E"/>
+          </a:solidFill>
+          <a:ln>
+            <a:noFill/>
+          </a:ln>
+          <a:effectLst/>
+        </p:spPr>
+        <p:style>
+          <a:lnRef idx="1">
+            <a:schemeClr val="accent1"/>
+          </a:lnRef>
+          <a:fillRef idx="3">
+            <a:schemeClr val="accent1"/>
+          </a:fillRef>
+          <a:effectRef idx="2">
+            <a:schemeClr val="accent1"/>
+          </a:effectRef>
+          <a:fontRef idx="minor">
+            <a:schemeClr val="lt1"/>
+          </a:fontRef>
+        </p:style>
+        <p:txBody>
+          <a:bodyPr rtlCol="0" anchor="ctr" wrap="square" lIns="109728" rIns="109728" tIns="54864" bIns="54864"/>
+          <a:lstStyle/>
+          <a:p>
+            <a:pPr algn="ctr">
+              <a:spcAft>
+                <a:spcPts val="200"/>
+              </a:spcAft>
+            </a:pPr>
+            <a:r>
+              <a:rPr sz="1500" b="1">
+                <a:solidFill>
+                  <a:srgbClr val="FFFFFF"/>
+                </a:solidFill>
+                <a:latin typeface="Arial"/>
+              </a:rPr>
+              <a:t>3  LABEL</a:t>
+            </a:r>
+          </a:p>
+          <a:p>
+            <a:pPr algn="ctr">
+              <a:spcAft>
+                <a:spcPts val="0"/>
+              </a:spcAft>
+            </a:pPr>
+            <a:r>
+              <a:rPr sz="1100" b="0">
+                <a:solidFill>
+                  <a:srgbClr val="FFFFFF"/>
+                </a:solidFill>
+                <a:latin typeface="Arial"/>
+              </a:rPr>
+              <a:t>Jev labels real turns</a:t>
+            </a:r>
+          </a:p>
+        </p:txBody>
+      </p:sp>
+      <p:sp>
+        <p:nvSpPr>
+          <p:cNvPr id="6" name="Rounded Rectangle 5"/>
+          <p:cNvSpPr/>
+          <p:nvPr/>
+        </p:nvSpPr>
+        <p:spPr>
+          <a:xfrm>
+            <a:off x="2377440" y="4297680"/>
+            <a:ext cx="2743200" cy="960120"/>
+          </a:xfrm>
+          <a:prstGeom prst="roundRect">
+            <a:avLst>
+              <a:gd name="adj" fmla="val 6000"/>
+            </a:avLst>
+          </a:prstGeom>
+          <a:solidFill>
+            <a:srgbClr val="5B3E96"/>
+          </a:solidFill>
+          <a:ln>
+            <a:noFill/>
+          </a:ln>
+          <a:effectLst/>
+        </p:spPr>
+        <p:style>
+          <a:lnRef idx="1">
+            <a:schemeClr val="accent1"/>
+          </a:lnRef>
+          <a:fillRef idx="3">
+            <a:schemeClr val="accent1"/>
+          </a:fillRef>
+          <a:effectRef idx="2">
+            <a:schemeClr val="accent1"/>
+          </a:effectRef>
+          <a:fontRef idx="minor">
+            <a:schemeClr val="lt1"/>
+          </a:fontRef>
+        </p:style>
+        <p:txBody>
+          <a:bodyPr rtlCol="0" anchor="ctr" wrap="square" lIns="109728" rIns="109728" tIns="54864" bIns="54864"/>
+          <a:lstStyle/>
+          <a:p>
+            <a:pPr algn="ctr">
+              <a:spcAft>
+                <a:spcPts val="200"/>
+              </a:spcAft>
+            </a:pPr>
+            <a:r>
+              <a:rPr sz="1500" b="1">
+                <a:solidFill>
+                  <a:srgbClr val="FFFFFF"/>
+                </a:solidFill>
+                <a:latin typeface="Arial"/>
+              </a:rPr>
+              <a:t>4  SCORE</a:t>
+            </a:r>
+          </a:p>
+          <a:p>
+            <a:pPr algn="ctr">
+              <a:spcAft>
+                <a:spcPts val="0"/>
+              </a:spcAft>
+            </a:pPr>
+            <a:r>
+              <a:rPr sz="1100" b="0">
+                <a:solidFill>
+                  <a:srgbClr val="FFFFFF"/>
+                </a:solidFill>
+                <a:latin typeface="Arial"/>
+              </a:rPr>
+              <a:t>persona, hook, each field</a:t>
+            </a:r>
+          </a:p>
+        </p:txBody>
+      </p:sp>
+      <p:sp>
+        <p:nvSpPr>
+          <p:cNvPr id="7" name="Rounded Rectangle 6"/>
+          <p:cNvSpPr/>
+          <p:nvPr/>
+        </p:nvSpPr>
+        <p:spPr>
+          <a:xfrm>
+            <a:off x="1280160" y="2468880"/>
+            <a:ext cx="2743200" cy="960120"/>
+          </a:xfrm>
+          <a:prstGeom prst="roundRect">
+            <a:avLst>
+              <a:gd name="adj" fmla="val 6000"/>
+            </a:avLst>
+          </a:prstGeom>
+          <a:solidFill>
+            <a:srgbClr val="C00000"/>
+          </a:solidFill>
+          <a:ln>
+            <a:noFill/>
+          </a:ln>
+          <a:effectLst/>
+        </p:spPr>
+        <p:style>
+          <a:lnRef idx="1">
+            <a:schemeClr val="accent1"/>
+          </a:lnRef>
+          <a:fillRef idx="3">
+            <a:schemeClr val="accent1"/>
+          </a:fillRef>
+          <a:effectRef idx="2">
+            <a:schemeClr val="accent1"/>
+          </a:effectRef>
+          <a:fontRef idx="minor">
+            <a:schemeClr val="lt1"/>
+          </a:fontRef>
+        </p:style>
+        <p:txBody>
+          <a:bodyPr rtlCol="0" anchor="ctr" wrap="square" lIns="109728" rIns="109728" tIns="54864" bIns="54864"/>
+          <a:lstStyle/>
+          <a:p>
+            <a:pPr algn="ctr">
+              <a:spcAft>
+                <a:spcPts val="200"/>
+              </a:spcAft>
+            </a:pPr>
+            <a:r>
+              <a:rPr sz="1500" b="1">
+                <a:solidFill>
+                  <a:srgbClr val="FFFFFF"/>
+                </a:solidFill>
+                <a:latin typeface="Arial"/>
+              </a:rPr>
+              <a:t>5  UPDATE</a:t>
+            </a:r>
+          </a:p>
+          <a:p>
+            <a:pPr algn="ctr">
+              <a:spcAft>
+                <a:spcPts val="0"/>
+              </a:spcAft>
+            </a:pPr>
+            <a:r>
+              <a:rPr sz="1100" b="0">
+                <a:solidFill>
+                  <a:srgbClr val="FFFFFF"/>
+                </a:solidFill>
+                <a:latin typeface="Arial"/>
+              </a:rPr>
+              <a:t>scoreboards by seller segment</a:t>
+            </a:r>
+          </a:p>
+        </p:txBody>
+      </p:sp>
+      <p:sp>
+        <p:nvSpPr>
+          <p:cNvPr id="8" name="Right Arrow 7"/>
+          <p:cNvSpPr/>
+          <p:nvPr/>
+        </p:nvSpPr>
+        <p:spPr>
+          <a:xfrm>
+            <a:off x="7635240" y="1645920"/>
+            <a:ext cx="502920" cy="411480"/>
+          </a:xfrm>
+          <a:prstGeom prst="rightArrow">
+            <a:avLst/>
+          </a:prstGeom>
+          <a:solidFill>
+            <a:srgbClr val="595959"/>
+          </a:solidFill>
+          <a:ln>
+            <a:noFill/>
+          </a:ln>
+        </p:spPr>
+        <p:style>
+          <a:lnRef idx="1">
+            <a:schemeClr val="accent1"/>
+          </a:lnRef>
+          <a:fillRef idx="3">
+            <a:schemeClr val="accent1"/>
+          </a:fillRef>
+          <a:effectRef idx="2">
+            <a:schemeClr val="accent1"/>
+          </a:effectRef>
+          <a:fontRef idx="minor">
+            <a:schemeClr val="lt1"/>
+          </a:fontRef>
+        </p:style>
+        <p:txBody>
+          <a:bodyPr rtlCol="0" anchor="ctr"/>
+          <a:lstStyle/>
+          <a:p>
+            <a:pPr algn="ctr"/>
+          </a:p>
+        </p:txBody>
+      </p:sp>
+      <p:sp>
+        <p:nvSpPr>
+          <p:cNvPr id="9" name="Down Arrow 8"/>
+          <p:cNvSpPr/>
+          <p:nvPr/>
+        </p:nvSpPr>
+        <p:spPr>
+          <a:xfrm>
+            <a:off x="9326880" y="3520440"/>
+            <a:ext cx="411480" cy="640080"/>
+          </a:xfrm>
+          <a:prstGeom prst="downArrow">
+            <a:avLst/>
+          </a:prstGeom>
+          <a:solidFill>
+            <a:srgbClr val="595959"/>
+          </a:solidFill>
+          <a:ln>
+            <a:noFill/>
+          </a:ln>
+        </p:spPr>
+        <p:style>
+          <a:lnRef idx="1">
+            <a:schemeClr val="accent1"/>
+          </a:lnRef>
+          <a:fillRef idx="3">
+            <a:schemeClr val="accent1"/>
+          </a:fillRef>
+          <a:effectRef idx="2">
+            <a:schemeClr val="accent1"/>
+          </a:effectRef>
+          <a:fontRef idx="minor">
+            <a:schemeClr val="lt1"/>
+          </a:fontRef>
+        </p:style>
+        <p:txBody>
+          <a:bodyPr rtlCol="0" anchor="ctr"/>
+          <a:lstStyle/>
+          <a:p>
+            <a:pPr algn="ctr"/>
+          </a:p>
+        </p:txBody>
+      </p:sp>
+      <p:sp>
+        <p:nvSpPr>
+          <p:cNvPr id="10" name="Left Arrow 9"/>
+          <p:cNvSpPr/>
+          <p:nvPr/>
+        </p:nvSpPr>
+        <p:spPr>
+          <a:xfrm>
+            <a:off x="5577840" y="4572000"/>
+            <a:ext cx="1737360" cy="411480"/>
+          </a:xfrm>
+          <a:prstGeom prst="leftArrow">
+            <a:avLst/>
+          </a:prstGeom>
+          <a:solidFill>
+            <a:srgbClr val="595959"/>
+          </a:solidFill>
+          <a:ln>
+            <a:noFill/>
+          </a:ln>
+        </p:spPr>
+        <p:style>
+          <a:lnRef idx="1">
+            <a:schemeClr val="accent1"/>
+          </a:lnRef>
+          <a:fillRef idx="3">
+            <a:schemeClr val="accent1"/>
+          </a:fillRef>
+          <a:effectRef idx="2">
+            <a:schemeClr val="accent1"/>
+          </a:effectRef>
+          <a:fontRef idx="minor">
+            <a:schemeClr val="lt1"/>
+          </a:fontRef>
+        </p:style>
+        <p:txBody>
+          <a:bodyPr rtlCol="0" anchor="ctr"/>
+          <a:lstStyle/>
+          <a:p>
+            <a:pPr algn="ctr"/>
+          </a:p>
+        </p:txBody>
+      </p:sp>
+      <p:sp>
+        <p:nvSpPr>
+          <p:cNvPr id="11" name="Up Arrow 10"/>
+          <p:cNvSpPr/>
+          <p:nvPr/>
+        </p:nvSpPr>
+        <p:spPr>
+          <a:xfrm>
+            <a:off x="2651760" y="3520440"/>
+            <a:ext cx="411480" cy="640080"/>
+          </a:xfrm>
+          <a:prstGeom prst="upArrow">
+            <a:avLst/>
+          </a:prstGeom>
+          <a:solidFill>
+            <a:srgbClr val="595959"/>
+          </a:solidFill>
+          <a:ln>
+            <a:noFill/>
+          </a:ln>
+        </p:spPr>
+        <p:style>
+          <a:lnRef idx="1">
+            <a:schemeClr val="accent1"/>
+          </a:lnRef>
+          <a:fillRef idx="3">
+            <a:schemeClr val="accent1"/>
+          </a:fillRef>
+          <a:effectRef idx="2">
+            <a:schemeClr val="accent1"/>
+          </a:effectRef>
+          <a:fontRef idx="minor">
+            <a:schemeClr val="lt1"/>
+          </a:fontRef>
+        </p:style>
+        <p:txBody>
+          <a:bodyPr rtlCol="0" anchor="ctr"/>
+          <a:lstStyle/>
+          <a:p>
+            <a:pPr algn="ctr"/>
+          </a:p>
+        </p:txBody>
+      </p:sp>
+      <p:sp>
+        <p:nvSpPr>
+          <p:cNvPr id="12" name="Right Arrow 11"/>
+          <p:cNvSpPr/>
+          <p:nvPr/>
+        </p:nvSpPr>
+        <p:spPr>
+          <a:xfrm>
+            <a:off x="3931920" y="1645920"/>
+            <a:ext cx="731520" cy="411480"/>
+          </a:xfrm>
+          <a:prstGeom prst="rightArrow">
+            <a:avLst/>
+          </a:prstGeom>
+          <a:solidFill>
+            <a:srgbClr val="595959"/>
+          </a:solidFill>
+          <a:ln>
+            <a:noFill/>
+          </a:ln>
+        </p:spPr>
+        <p:style>
+          <a:lnRef idx="1">
+            <a:schemeClr val="accent1"/>
+          </a:lnRef>
+          <a:fillRef idx="3">
+            <a:schemeClr val="accent1"/>
+          </a:fillRef>
+          <a:effectRef idx="2">
+            <a:schemeClr val="accent1"/>
+          </a:effectRef>
+          <a:fontRef idx="minor">
+            <a:schemeClr val="lt1"/>
+          </a:fontRef>
+        </p:style>
+        <p:txBody>
+          <a:bodyPr rtlCol="0" anchor="ctr"/>
+          <a:lstStyle/>
+          <a:p>
+            <a:pPr algn="ctr"/>
+          </a:p>
+        </p:txBody>
+      </p:sp>
+      <p:sp>
+        <p:nvSpPr>
+          <p:cNvPr id="13" name="Oval 12"/>
+          <p:cNvSpPr/>
+          <p:nvPr/>
+        </p:nvSpPr>
+        <p:spPr>
+          <a:xfrm>
+            <a:off x="4709160" y="2697480"/>
+            <a:ext cx="1920240" cy="1920240"/>
+          </a:xfrm>
+          <a:prstGeom prst="ellipse">
+            <a:avLst/>
+          </a:prstGeom>
+          <a:solidFill>
+            <a:srgbClr val="EEF2F8"/>
+          </a:solidFill>
+          <a:ln>
+            <a:noFill/>
+          </a:ln>
+        </p:spPr>
+        <p:style>
+          <a:lnRef idx="1">
+            <a:schemeClr val="accent1"/>
+          </a:lnRef>
+          <a:fillRef idx="3">
+            <a:schemeClr val="accent1"/>
+          </a:fillRef>
+          <a:effectRef idx="2">
+            <a:schemeClr val="accent1"/>
+          </a:effectRef>
+          <a:fontRef idx="minor">
+            <a:schemeClr val="lt1"/>
+          </a:fontRef>
+        </p:style>
+        <p:txBody>
+          <a:bodyPr rtlCol="0" anchor="ctr" lIns="0" rIns="0" tIns="0" bIns="0"/>
+          <a:lstStyle/>
+          <a:p>
+            <a:pPr algn="ctr">
+              <a:spcAft>
+                <a:spcPts val="0"/>
+              </a:spcAft>
+            </a:pPr>
+            <a:r>
+              <a:rPr sz="1300" b="1">
+                <a:solidFill>
+                  <a:srgbClr val="002060"/>
+                </a:solidFill>
+                <a:latin typeface="Arial"/>
+              </a:rPr>
+              <a:t>Better persona and hook next call</a:t>
+            </a:r>
+          </a:p>
+        </p:txBody>
+      </p:sp>
+      <p:sp>
+        <p:nvSpPr>
+          <p:cNvPr id="14" name="Rounded Rectangle 13"/>
+          <p:cNvSpPr/>
+          <p:nvPr/>
+        </p:nvSpPr>
+        <p:spPr>
+          <a:xfrm>
+            <a:off x="502920" y="5486400"/>
+            <a:ext cx="11338560" cy="548640"/>
+          </a:xfrm>
+          <a:prstGeom prst="roundRect">
+            <a:avLst>
+              <a:gd name="adj" fmla="val 30000"/>
+            </a:avLst>
+          </a:prstGeom>
+          <a:solidFill>
+            <a:srgbClr val="FFFFFF"/>
+          </a:solidFill>
+          <a:ln w="12700">
+            <a:solidFill>
+              <a:srgbClr val="002060"/>
+            </a:solidFill>
+          </a:ln>
+          <a:effectLst/>
+        </p:spPr>
+        <p:style>
+          <a:lnRef idx="1">
+            <a:schemeClr val="accent1"/>
+          </a:lnRef>
+          <a:fillRef idx="3">
+            <a:schemeClr val="accent1"/>
+          </a:fillRef>
+          <a:effectRef idx="2">
+            <a:schemeClr val="accent1"/>
+          </a:effectRef>
+          <a:fontRef idx="minor">
+            <a:schemeClr val="lt1"/>
+          </a:fontRef>
+        </p:style>
+        <p:txBody>
+          <a:bodyPr rtlCol="0" anchor="ctr" wrap="square" lIns="109728" rIns="109728" tIns="54864" bIns="54864"/>
+          <a:lstStyle/>
+          <a:p>
+            <a:pPr algn="ctr">
+              <a:spcAft>
+                <a:spcPts val="0"/>
+              </a:spcAft>
+            </a:pPr>
+            <a:r>
+              <a:rPr sz="1100" b="1">
+                <a:solidFill>
+                  <a:srgbClr val="002060"/>
+                </a:solidFill>
+                <a:latin typeface="Arial"/>
+              </a:rPr>
+              <a:t>Tracked: uplift vs the control persona (15% of calls), meeting rate by reason type, keyword fixes only after a gold-set check and a human approval</a:t>
+            </a:r>
+          </a:p>
+        </p:txBody>
+      </p:sp>
+    </p:spTree>
+  </p:cSld>
+  <p:clrMapOvr>
+    <a:masterClrMapping/>
+  </p:clrMapOvr>
+</p:sld>
+</file>
+
+<file path=ppt/slides/slide19.xml><?xml version="1.0" encoding="utf-8"?>
+<p:sld xmlns:a="http://schemas.openxmlformats.org/drawingml/2006/main" xmlns:p="http://schemas.openxmlformats.org/presentationml/2006/main" xmlns:r="http://schemas.openxmlformats.org/officeDocument/2006/relationships">
+  <p:cSld>
+    <p:spTree>
+      <p:nvGrpSpPr>
+        <p:cNvPr id="1" name=""/>
+        <p:cNvGrpSpPr/>
+        <p:nvPr/>
+      </p:nvGrpSpPr>
+      <p:grpSpPr/>
+      <p:sp>
+        <p:nvSpPr>
+          <p:cNvPr id="2" name="Title 1"/>
+          <p:cNvSpPr>
+            <a:spLocks noGrp="1"/>
+          </p:cNvSpPr>
+          <p:nvPr>
+            <p:ph type="title"/>
+          </p:nvPr>
+        </p:nvSpPr>
+        <p:spPr/>
+        <p:txBody>
+          <a:bodyPr/>
+          <a:lstStyle/>
+          <a:p>
+            <a:r>
+              <a:t>Our Architecture</a:t>
+            </a:r>
+          </a:p>
+        </p:txBody>
+      </p:sp>
+      <p:sp>
+        <p:nvSpPr>
+          <p:cNvPr id="3" name="Rounded Rectangle 2"/>
+          <p:cNvSpPr/>
+          <p:nvPr/>
+        </p:nvSpPr>
+        <p:spPr>
+          <a:xfrm>
+            <a:off x="502920" y="1463040"/>
+            <a:ext cx="2514600" cy="1417320"/>
+          </a:xfrm>
+          <a:prstGeom prst="roundRect">
+            <a:avLst>
+              <a:gd name="adj" fmla="val 6000"/>
+            </a:avLst>
+          </a:prstGeom>
+          <a:solidFill>
+            <a:srgbClr val="002060"/>
+          </a:solidFill>
+          <a:ln>
+            <a:noFill/>
+          </a:ln>
+          <a:effectLst/>
+        </p:spPr>
+        <p:style>
+          <a:lnRef idx="1">
+            <a:schemeClr val="accent1"/>
+          </a:lnRef>
+          <a:fillRef idx="3">
+            <a:schemeClr val="accent1"/>
+          </a:fillRef>
+          <a:effectRef idx="2">
+            <a:schemeClr val="accent1"/>
+          </a:effectRef>
+          <a:fontRef idx="minor">
+            <a:schemeClr val="lt1"/>
+          </a:fontRef>
+        </p:style>
+        <p:txBody>
+          <a:bodyPr rtlCol="0" anchor="ctr" wrap="square" lIns="109728" rIns="109728" tIns="54864" bIns="54864"/>
+          <a:lstStyle/>
+          <a:p>
+            <a:pPr algn="l">
+              <a:spcAft>
+                <a:spcPts val="300"/>
+              </a:spcAft>
+            </a:pPr>
+            <a:r>
+              <a:rPr sz="1500" b="1">
+                <a:solidFill>
+                  <a:srgbClr val="FFFFFF"/>
+                </a:solidFill>
+                <a:latin typeface="Arial"/>
+              </a:rPr>
+              <a:t>Seller data</a:t>
+            </a:r>
+          </a:p>
+          <a:p>
+            <a:pPr algn="l">
+              <a:spcAft>
+                <a:spcPts val="0"/>
+              </a:spcAft>
+            </a:pPr>
+            <a:r>
+              <a:rPr sz="1200" b="0">
+                <a:solidFill>
+                  <a:srgbClr val="FFFFFF"/>
+                </a:solidFill>
+                <a:latin typeface="Arial"/>
+              </a:rPr>
+              <a:t>files, APIs, buy-lead database</a:t>
+            </a:r>
+          </a:p>
+        </p:txBody>
+      </p:sp>
+      <p:sp>
+        <p:nvSpPr>
+          <p:cNvPr id="4" name="Right Arrow 3"/>
+          <p:cNvSpPr/>
+          <p:nvPr/>
+        </p:nvSpPr>
+        <p:spPr>
+          <a:xfrm>
+            <a:off x="3044952" y="1965960"/>
+            <a:ext cx="347472" cy="365760"/>
+          </a:xfrm>
+          <a:prstGeom prst="rightArrow">
+            <a:avLst/>
+          </a:prstGeom>
+          <a:solidFill>
+            <a:srgbClr val="595959"/>
+          </a:solidFill>
+          <a:ln>
+            <a:noFill/>
+          </a:ln>
+        </p:spPr>
+        <p:style>
+          <a:lnRef idx="1">
+            <a:schemeClr val="accent1"/>
+          </a:lnRef>
+          <a:fillRef idx="3">
+            <a:schemeClr val="accent1"/>
+          </a:fillRef>
+          <a:effectRef idx="2">
+            <a:schemeClr val="accent1"/>
+          </a:effectRef>
+          <a:fontRef idx="minor">
+            <a:schemeClr val="lt1"/>
+          </a:fontRef>
+        </p:style>
+        <p:txBody>
+          <a:bodyPr rtlCol="0" anchor="ctr"/>
+          <a:lstStyle/>
+          <a:p>
+            <a:pPr algn="ctr"/>
+          </a:p>
+        </p:txBody>
+      </p:sp>
+      <p:sp>
+        <p:nvSpPr>
+          <p:cNvPr id="5" name="Rounded Rectangle 4"/>
+          <p:cNvSpPr/>
+          <p:nvPr/>
+        </p:nvSpPr>
+        <p:spPr>
+          <a:xfrm>
+            <a:off x="3429000" y="1463040"/>
+            <a:ext cx="2514600" cy="1417320"/>
+          </a:xfrm>
+          <a:prstGeom prst="roundRect">
+            <a:avLst>
+              <a:gd name="adj" fmla="val 6000"/>
+            </a:avLst>
+          </a:prstGeom>
+          <a:solidFill>
+            <a:srgbClr val="002060"/>
+          </a:solidFill>
+          <a:ln>
+            <a:noFill/>
+          </a:ln>
+          <a:effectLst/>
+        </p:spPr>
+        <p:style>
+          <a:lnRef idx="1">
+            <a:schemeClr val="accent1"/>
+          </a:lnRef>
+          <a:fillRef idx="3">
+            <a:schemeClr val="accent1"/>
+          </a:fillRef>
+          <a:effectRef idx="2">
+            <a:schemeClr val="accent1"/>
+          </a:effectRef>
+          <a:fontRef idx="minor">
+            <a:schemeClr val="lt1"/>
+          </a:fontRef>
+        </p:style>
+        <p:txBody>
+          <a:bodyPr rtlCol="0" anchor="ctr" wrap="square" lIns="109728" rIns="109728" tIns="54864" bIns="54864"/>
+          <a:lstStyle/>
+          <a:p>
+            <a:pPr algn="l">
+              <a:spcAft>
+                <a:spcPts val="300"/>
+              </a:spcAft>
+            </a:pPr>
+            <a:r>
+              <a:rPr sz="1500" b="1">
+                <a:solidFill>
+                  <a:srgbClr val="FFFFFF"/>
+                </a:solidFill>
+                <a:latin typeface="Arial"/>
+              </a:rPr>
+              <a:t>Context builder</a:t>
+            </a:r>
+          </a:p>
+          <a:p>
+            <a:pPr algn="l">
+              <a:spcAft>
+                <a:spcPts val="0"/>
+              </a:spcAft>
+            </a:pPr>
+            <a:r>
+              <a:rPr sz="1200" b="0">
+                <a:solidFill>
+                  <a:srgbClr val="FFFFFF"/>
+                </a:solidFill>
+                <a:latin typeface="Arial"/>
+              </a:rPr>
+              <a:t>one folder per seller</a:t>
+            </a:r>
+          </a:p>
+        </p:txBody>
+      </p:sp>
+      <p:sp>
+        <p:nvSpPr>
+          <p:cNvPr id="6" name="Right Arrow 5"/>
+          <p:cNvSpPr/>
+          <p:nvPr/>
+        </p:nvSpPr>
+        <p:spPr>
+          <a:xfrm>
+            <a:off x="5971031" y="1965960"/>
+            <a:ext cx="347472" cy="365760"/>
+          </a:xfrm>
+          <a:prstGeom prst="rightArrow">
+            <a:avLst/>
+          </a:prstGeom>
+          <a:solidFill>
+            <a:srgbClr val="595959"/>
+          </a:solidFill>
+          <a:ln>
+            <a:noFill/>
+          </a:ln>
+        </p:spPr>
+        <p:style>
+          <a:lnRef idx="1">
+            <a:schemeClr val="accent1"/>
+          </a:lnRef>
+          <a:fillRef idx="3">
+            <a:schemeClr val="accent1"/>
+          </a:fillRef>
+          <a:effectRef idx="2">
+            <a:schemeClr val="accent1"/>
+          </a:effectRef>
+          <a:fontRef idx="minor">
+            <a:schemeClr val="lt1"/>
+          </a:fontRef>
+        </p:style>
+        <p:txBody>
+          <a:bodyPr rtlCol="0" anchor="ctr"/>
+          <a:lstStyle/>
+          <a:p>
+            <a:pPr algn="ctr"/>
+          </a:p>
+        </p:txBody>
+      </p:sp>
+      <p:sp>
+        <p:nvSpPr>
+          <p:cNvPr id="7" name="Rounded Rectangle 6"/>
+          <p:cNvSpPr/>
+          <p:nvPr/>
+        </p:nvSpPr>
+        <p:spPr>
+          <a:xfrm>
+            <a:off x="6355080" y="1463040"/>
+            <a:ext cx="2514600" cy="1417320"/>
+          </a:xfrm>
+          <a:prstGeom prst="roundRect">
+            <a:avLst>
+              <a:gd name="adj" fmla="val 6000"/>
+            </a:avLst>
+          </a:prstGeom>
+          <a:solidFill>
+            <a:srgbClr val="002060"/>
+          </a:solidFill>
+          <a:ln>
+            <a:noFill/>
+          </a:ln>
+          <a:effectLst/>
+        </p:spPr>
+        <p:style>
+          <a:lnRef idx="1">
+            <a:schemeClr val="accent1"/>
+          </a:lnRef>
+          <a:fillRef idx="3">
+            <a:schemeClr val="accent1"/>
+          </a:fillRef>
+          <a:effectRef idx="2">
+            <a:schemeClr val="accent1"/>
+          </a:effectRef>
+          <a:fontRef idx="minor">
+            <a:schemeClr val="lt1"/>
+          </a:fontRef>
+        </p:style>
+        <p:txBody>
+          <a:bodyPr rtlCol="0" anchor="ctr" wrap="square" lIns="109728" rIns="109728" tIns="54864" bIns="54864"/>
+          <a:lstStyle/>
+          <a:p>
+            <a:pPr algn="l">
+              <a:spcAft>
+                <a:spcPts val="300"/>
+              </a:spcAft>
+            </a:pPr>
+            <a:r>
+              <a:rPr sz="1500" b="1">
+                <a:solidFill>
+                  <a:srgbClr val="FFFFFF"/>
+                </a:solidFill>
+                <a:latin typeface="Arial"/>
+              </a:rPr>
+              <a:t>Safe export</a:t>
+            </a:r>
+          </a:p>
+          <a:p>
+            <a:pPr algn="l">
+              <a:spcAft>
+                <a:spcPts val="0"/>
+              </a:spcAft>
+            </a:pPr>
+            <a:r>
+              <a:rPr sz="1200" b="0">
+                <a:solidFill>
+                  <a:srgbClr val="FFFFFF"/>
+                </a:solidFill>
+                <a:latin typeface="Arial"/>
+              </a:rPr>
+              <a:t>names become tokens</a:t>
+            </a:r>
+          </a:p>
+        </p:txBody>
+      </p:sp>
+      <p:sp>
+        <p:nvSpPr>
+          <p:cNvPr id="8" name="Right Arrow 7"/>
+          <p:cNvSpPr/>
+          <p:nvPr/>
+        </p:nvSpPr>
+        <p:spPr>
+          <a:xfrm>
+            <a:off x="8897112" y="1965960"/>
+            <a:ext cx="347472" cy="365760"/>
+          </a:xfrm>
+          <a:prstGeom prst="rightArrow">
+            <a:avLst/>
+          </a:prstGeom>
+          <a:solidFill>
+            <a:srgbClr val="595959"/>
+          </a:solidFill>
+          <a:ln>
+            <a:noFill/>
+          </a:ln>
+        </p:spPr>
+        <p:style>
+          <a:lnRef idx="1">
+            <a:schemeClr val="accent1"/>
+          </a:lnRef>
+          <a:fillRef idx="3">
+            <a:schemeClr val="accent1"/>
+          </a:fillRef>
+          <a:effectRef idx="2">
+            <a:schemeClr val="accent1"/>
+          </a:effectRef>
+          <a:fontRef idx="minor">
+            <a:schemeClr val="lt1"/>
+          </a:fontRef>
+        </p:style>
+        <p:txBody>
+          <a:bodyPr rtlCol="0" anchor="ctr"/>
+          <a:lstStyle/>
+          <a:p>
+            <a:pPr algn="ctr"/>
+          </a:p>
+        </p:txBody>
+      </p:sp>
+      <p:sp>
+        <p:nvSpPr>
+          <p:cNvPr id="9" name="Rounded Rectangle 8"/>
+          <p:cNvSpPr/>
+          <p:nvPr/>
+        </p:nvSpPr>
+        <p:spPr>
+          <a:xfrm>
+            <a:off x="9281160" y="1463040"/>
+            <a:ext cx="2514600" cy="1417320"/>
+          </a:xfrm>
+          <a:prstGeom prst="roundRect">
+            <a:avLst>
+              <a:gd name="adj" fmla="val 6000"/>
+            </a:avLst>
+          </a:prstGeom>
+          <a:solidFill>
+            <a:srgbClr val="C00000"/>
+          </a:solidFill>
+          <a:ln>
+            <a:noFill/>
+          </a:ln>
+          <a:effectLst/>
+        </p:spPr>
+        <p:style>
+          <a:lnRef idx="1">
+            <a:schemeClr val="accent1"/>
+          </a:lnRef>
+          <a:fillRef idx="3">
+            <a:schemeClr val="accent1"/>
+          </a:fillRef>
+          <a:effectRef idx="2">
+            <a:schemeClr val="accent1"/>
+          </a:effectRef>
+          <a:fontRef idx="minor">
+            <a:schemeClr val="lt1"/>
+          </a:fontRef>
+        </p:style>
+        <p:txBody>
+          <a:bodyPr rtlCol="0" anchor="ctr" wrap="square" lIns="109728" rIns="109728" tIns="54864" bIns="54864"/>
+          <a:lstStyle/>
+          <a:p>
+            <a:pPr algn="l">
+              <a:spcAft>
+                <a:spcPts val="300"/>
+              </a:spcAft>
+            </a:pPr>
+            <a:r>
+              <a:rPr sz="1500" b="1">
+                <a:solidFill>
+                  <a:srgbClr val="FFFFFF"/>
+                </a:solidFill>
+                <a:latin typeface="Arial"/>
+              </a:rPr>
+              <a:t>Persona agent</a:t>
+            </a:r>
+          </a:p>
+          <a:p>
+            <a:pPr algn="l">
+              <a:spcAft>
+                <a:spcPts val="0"/>
+              </a:spcAft>
+            </a:pPr>
+            <a:r>
+              <a:rPr sz="1200" b="0">
+                <a:solidFill>
+                  <a:srgbClr val="FFFFFF"/>
+                </a:solidFill>
+                <a:latin typeface="Arial"/>
+              </a:rPr>
+              <a:t>Claude in a sandbox, every choice cited</a:t>
+            </a:r>
+          </a:p>
+        </p:txBody>
+      </p:sp>
+      <p:sp>
+        <p:nvSpPr>
+          <p:cNvPr id="10" name="Rounded Rectangle 9"/>
+          <p:cNvSpPr/>
+          <p:nvPr/>
+        </p:nvSpPr>
+        <p:spPr>
+          <a:xfrm>
+            <a:off x="9281160" y="3291840"/>
+            <a:ext cx="2514600" cy="1417320"/>
+          </a:xfrm>
+          <a:prstGeom prst="roundRect">
+            <a:avLst>
+              <a:gd name="adj" fmla="val 6000"/>
+            </a:avLst>
+          </a:prstGeom>
+          <a:solidFill>
+            <a:srgbClr val="2EA896"/>
+          </a:solidFill>
+          <a:ln>
+            <a:noFill/>
+          </a:ln>
+          <a:effectLst/>
+        </p:spPr>
+        <p:style>
+          <a:lnRef idx="1">
+            <a:schemeClr val="accent1"/>
+          </a:lnRef>
+          <a:fillRef idx="3">
+            <a:schemeClr val="accent1"/>
+          </a:fillRef>
+          <a:effectRef idx="2">
+            <a:schemeClr val="accent1"/>
+          </a:effectRef>
+          <a:fontRef idx="minor">
+            <a:schemeClr val="lt1"/>
+          </a:fontRef>
+        </p:style>
+        <p:txBody>
+          <a:bodyPr rtlCol="0" anchor="ctr" wrap="square" lIns="109728" rIns="109728" tIns="54864" bIns="54864"/>
+          <a:lstStyle/>
+          <a:p>
+            <a:pPr algn="l">
+              <a:spcAft>
+                <a:spcPts val="300"/>
+              </a:spcAft>
+            </a:pPr>
+            <a:r>
+              <a:rPr sz="1500" b="1">
+                <a:solidFill>
+                  <a:srgbClr val="FFFFFF"/>
+                </a:solidFill>
+                <a:latin typeface="Arial"/>
+              </a:rPr>
+              <a:t>Sarvam voice agent</a:t>
+            </a:r>
+          </a:p>
+          <a:p>
+            <a:pPr algn="l">
+              <a:spcAft>
+                <a:spcPts val="0"/>
+              </a:spcAft>
+            </a:pPr>
+            <a:r>
+              <a:rPr sz="1200" b="0">
+                <a:solidFill>
+                  <a:srgbClr val="FFFFFF"/>
+                </a:solidFill>
+                <a:latin typeface="Arial"/>
+              </a:rPr>
+              <a:t>voice, pace, language, opening</a:t>
+            </a:r>
+          </a:p>
+        </p:txBody>
+      </p:sp>
+      <p:sp>
+        <p:nvSpPr>
+          <p:cNvPr id="11" name="Left Arrow 10"/>
+          <p:cNvSpPr/>
+          <p:nvPr/>
+        </p:nvSpPr>
+        <p:spPr>
+          <a:xfrm>
+            <a:off x="8887968" y="3794760"/>
+            <a:ext cx="347472" cy="365760"/>
+          </a:xfrm>
+          <a:prstGeom prst="leftArrow">
+            <a:avLst/>
+          </a:prstGeom>
+          <a:solidFill>
+            <a:srgbClr val="595959"/>
+          </a:solidFill>
+          <a:ln>
+            <a:noFill/>
+          </a:ln>
+        </p:spPr>
+        <p:style>
+          <a:lnRef idx="1">
+            <a:schemeClr val="accent1"/>
+          </a:lnRef>
+          <a:fillRef idx="3">
+            <a:schemeClr val="accent1"/>
+          </a:fillRef>
+          <a:effectRef idx="2">
+            <a:schemeClr val="accent1"/>
+          </a:effectRef>
+          <a:fontRef idx="minor">
+            <a:schemeClr val="lt1"/>
+          </a:fontRef>
+        </p:style>
+        <p:txBody>
+          <a:bodyPr rtlCol="0" anchor="ctr"/>
+          <a:lstStyle/>
+          <a:p>
+            <a:pPr algn="ctr"/>
+          </a:p>
+        </p:txBody>
+      </p:sp>
+      <p:sp>
+        <p:nvSpPr>
+          <p:cNvPr id="12" name="Rounded Rectangle 11"/>
+          <p:cNvSpPr/>
+          <p:nvPr/>
+        </p:nvSpPr>
+        <p:spPr>
+          <a:xfrm>
+            <a:off x="6355080" y="3291840"/>
+            <a:ext cx="2514600" cy="1417320"/>
+          </a:xfrm>
+          <a:prstGeom prst="roundRect">
+            <a:avLst>
+              <a:gd name="adj" fmla="val 6000"/>
+            </a:avLst>
+          </a:prstGeom>
+          <a:solidFill>
+            <a:srgbClr val="2EA896"/>
+          </a:solidFill>
+          <a:ln>
+            <a:noFill/>
+          </a:ln>
+          <a:effectLst/>
+        </p:spPr>
+        <p:style>
+          <a:lnRef idx="1">
+            <a:schemeClr val="accent1"/>
+          </a:lnRef>
+          <a:fillRef idx="3">
+            <a:schemeClr val="accent1"/>
+          </a:fillRef>
+          <a:effectRef idx="2">
+            <a:schemeClr val="accent1"/>
+          </a:effectRef>
+          <a:fontRef idx="minor">
+            <a:schemeClr val="lt1"/>
+          </a:fontRef>
+        </p:style>
+        <p:txBody>
+          <a:bodyPr rtlCol="0" anchor="ctr" wrap="square" lIns="109728" rIns="109728" tIns="54864" bIns="54864"/>
+          <a:lstStyle/>
+          <a:p>
+            <a:pPr algn="l">
+              <a:spcAft>
+                <a:spcPts val="300"/>
+              </a:spcAft>
+            </a:pPr>
+            <a:r>
+              <a:rPr sz="1500" b="1">
+                <a:solidFill>
+                  <a:srgbClr val="FFFFFF"/>
+                </a:solidFill>
+                <a:latin typeface="Arial"/>
+              </a:rPr>
+              <a:t>Live adaptation</a:t>
+            </a:r>
+          </a:p>
+          <a:p>
+            <a:pPr algn="l">
+              <a:spcAft>
+                <a:spcPts val="0"/>
+              </a:spcAft>
+            </a:pPr>
+            <a:r>
+              <a:rPr sz="1200" b="0">
+                <a:solidFill>
+                  <a:srgbClr val="FFFFFF"/>
+                </a:solidFill>
+                <a:latin typeface="Arial"/>
+              </a:rPr>
+              <a:t>mood to directive each turn</a:t>
+            </a:r>
+          </a:p>
+        </p:txBody>
+      </p:sp>
+      <p:sp>
+        <p:nvSpPr>
+          <p:cNvPr id="13" name="Left Arrow 12"/>
+          <p:cNvSpPr/>
+          <p:nvPr/>
+        </p:nvSpPr>
+        <p:spPr>
+          <a:xfrm>
+            <a:off x="5961888" y="3794760"/>
+            <a:ext cx="347472" cy="365760"/>
+          </a:xfrm>
+          <a:prstGeom prst="leftArrow">
+            <a:avLst/>
+          </a:prstGeom>
+          <a:solidFill>
+            <a:srgbClr val="595959"/>
+          </a:solidFill>
+          <a:ln>
+            <a:noFill/>
+          </a:ln>
+        </p:spPr>
+        <p:style>
+          <a:lnRef idx="1">
+            <a:schemeClr val="accent1"/>
+          </a:lnRef>
+          <a:fillRef idx="3">
+            <a:schemeClr val="accent1"/>
+          </a:fillRef>
+          <a:effectRef idx="2">
+            <a:schemeClr val="accent1"/>
+          </a:effectRef>
+          <a:fontRef idx="minor">
+            <a:schemeClr val="lt1"/>
+          </a:fontRef>
+        </p:style>
+        <p:txBody>
+          <a:bodyPr rtlCol="0" anchor="ctr"/>
+          <a:lstStyle/>
+          <a:p>
+            <a:pPr algn="ctr"/>
+          </a:p>
+        </p:txBody>
+      </p:sp>
+      <p:sp>
+        <p:nvSpPr>
+          <p:cNvPr id="14" name="Rounded Rectangle 13"/>
+          <p:cNvSpPr/>
+          <p:nvPr/>
+        </p:nvSpPr>
+        <p:spPr>
+          <a:xfrm>
+            <a:off x="3429000" y="3291840"/>
+            <a:ext cx="2514600" cy="1417320"/>
+          </a:xfrm>
+          <a:prstGeom prst="roundRect">
+            <a:avLst>
+              <a:gd name="adj" fmla="val 6000"/>
+            </a:avLst>
+          </a:prstGeom>
+          <a:solidFill>
+            <a:srgbClr val="5B3E96"/>
+          </a:solidFill>
+          <a:ln>
+            <a:noFill/>
+          </a:ln>
+          <a:effectLst/>
+        </p:spPr>
+        <p:style>
+          <a:lnRef idx="1">
+            <a:schemeClr val="accent1"/>
+          </a:lnRef>
+          <a:fillRef idx="3">
+            <a:schemeClr val="accent1"/>
+          </a:fillRef>
+          <a:effectRef idx="2">
+            <a:schemeClr val="accent1"/>
+          </a:effectRef>
+          <a:fontRef idx="minor">
+            <a:schemeClr val="lt1"/>
+          </a:fontRef>
+        </p:style>
+        <p:txBody>
+          <a:bodyPr rtlCol="0" anchor="ctr" wrap="square" lIns="109728" rIns="109728" tIns="54864" bIns="54864"/>
+          <a:lstStyle/>
+          <a:p>
+            <a:pPr algn="l">
+              <a:spcAft>
+                <a:spcPts val="300"/>
+              </a:spcAft>
+            </a:pPr>
+            <a:r>
+              <a:rPr sz="1500" b="1">
+                <a:solidFill>
+                  <a:srgbClr val="FFFFFF"/>
+                </a:solidFill>
+                <a:latin typeface="Arial"/>
+              </a:rPr>
+              <a:t>Call review</a:t>
+            </a:r>
+          </a:p>
+          <a:p>
+            <a:pPr algn="l">
+              <a:spcAft>
+                <a:spcPts val="0"/>
+              </a:spcAft>
+            </a:pPr>
+            <a:r>
+              <a:rPr sz="1200" b="0">
+                <a:solidFill>
+                  <a:srgbClr val="FFFFFF"/>
+                </a:solidFill>
+                <a:latin typeface="Arial"/>
+              </a:rPr>
+              <a:t>Claude checks fit and rules</a:t>
+            </a:r>
+          </a:p>
+        </p:txBody>
+      </p:sp>
+      <p:sp>
+        <p:nvSpPr>
+          <p:cNvPr id="15" name="Left Arrow 14"/>
+          <p:cNvSpPr/>
+          <p:nvPr/>
+        </p:nvSpPr>
+        <p:spPr>
+          <a:xfrm>
+            <a:off x="3035808" y="3794760"/>
+            <a:ext cx="347472" cy="365760"/>
+          </a:xfrm>
+          <a:prstGeom prst="leftArrow">
+            <a:avLst/>
+          </a:prstGeom>
+          <a:solidFill>
+            <a:srgbClr val="595959"/>
+          </a:solidFill>
+          <a:ln>
+            <a:noFill/>
+          </a:ln>
+        </p:spPr>
+        <p:style>
+          <a:lnRef idx="1">
+            <a:schemeClr val="accent1"/>
+          </a:lnRef>
+          <a:fillRef idx="3">
+            <a:schemeClr val="accent1"/>
+          </a:fillRef>
+          <a:effectRef idx="2">
+            <a:schemeClr val="accent1"/>
+          </a:effectRef>
+          <a:fontRef idx="minor">
+            <a:schemeClr val="lt1"/>
+          </a:fontRef>
+        </p:style>
+        <p:txBody>
+          <a:bodyPr rtlCol="0" anchor="ctr"/>
+          <a:lstStyle/>
+          <a:p>
+            <a:pPr algn="ctr"/>
+          </a:p>
+        </p:txBody>
+      </p:sp>
+      <p:sp>
+        <p:nvSpPr>
+          <p:cNvPr id="16" name="Rounded Rectangle 15"/>
+          <p:cNvSpPr/>
+          <p:nvPr/>
+        </p:nvSpPr>
+        <p:spPr>
+          <a:xfrm>
+            <a:off x="502920" y="3291840"/>
+            <a:ext cx="2514600" cy="1417320"/>
+          </a:xfrm>
+          <a:prstGeom prst="roundRect">
+            <a:avLst>
+              <a:gd name="adj" fmla="val 6000"/>
+            </a:avLst>
+          </a:prstGeom>
+          <a:solidFill>
+            <a:srgbClr val="5B3E96"/>
+          </a:solidFill>
+          <a:ln>
+            <a:noFill/>
+          </a:ln>
+          <a:effectLst/>
+        </p:spPr>
+        <p:style>
+          <a:lnRef idx="1">
+            <a:schemeClr val="accent1"/>
+          </a:lnRef>
+          <a:fillRef idx="3">
+            <a:schemeClr val="accent1"/>
+          </a:fillRef>
+          <a:effectRef idx="2">
+            <a:schemeClr val="accent1"/>
+          </a:effectRef>
+          <a:fontRef idx="minor">
+            <a:schemeClr val="lt1"/>
+          </a:fontRef>
+        </p:style>
+        <p:txBody>
+          <a:bodyPr rtlCol="0" anchor="ctr" wrap="square" lIns="109728" rIns="109728" tIns="54864" bIns="54864"/>
+          <a:lstStyle/>
+          <a:p>
+            <a:pPr algn="l">
+              <a:spcAft>
+                <a:spcPts val="300"/>
+              </a:spcAft>
+            </a:pPr>
+            <a:r>
+              <a:rPr sz="1500" b="1">
+                <a:solidFill>
+                  <a:srgbClr val="FFFFFF"/>
+                </a:solidFill>
+                <a:latin typeface="Arial"/>
+              </a:rPr>
+              <a:t>Learning loops</a:t>
+            </a:r>
+          </a:p>
+          <a:p>
+            <a:pPr algn="l">
+              <a:spcAft>
+                <a:spcPts val="0"/>
+              </a:spcAft>
+            </a:pPr>
+            <a:r>
+              <a:rPr sz="1200" b="0">
+                <a:solidFill>
+                  <a:srgbClr val="FFFFFF"/>
+                </a:solidFill>
+                <a:latin typeface="Arial"/>
+              </a:rPr>
+              <a:t>better persona and hook next call</a:t>
+            </a:r>
+          </a:p>
+        </p:txBody>
+      </p:sp>
+      <p:sp>
+        <p:nvSpPr>
+          <p:cNvPr id="17" name="Down Arrow 16"/>
+          <p:cNvSpPr/>
+          <p:nvPr/>
+        </p:nvSpPr>
+        <p:spPr>
+          <a:xfrm>
+            <a:off x="10012680" y="2926080"/>
+            <a:ext cx="365760" cy="347472"/>
+          </a:xfrm>
+          <a:prstGeom prst="downArrow">
+            <a:avLst/>
+          </a:prstGeom>
+          <a:solidFill>
+            <a:srgbClr val="595959"/>
+          </a:solidFill>
+          <a:ln>
+            <a:noFill/>
+          </a:ln>
+        </p:spPr>
+        <p:style>
+          <a:lnRef idx="1">
+            <a:schemeClr val="accent1"/>
+          </a:lnRef>
+          <a:fillRef idx="3">
+            <a:schemeClr val="accent1"/>
+          </a:fillRef>
+          <a:effectRef idx="2">
+            <a:schemeClr val="accent1"/>
+          </a:effectRef>
+          <a:fontRef idx="minor">
+            <a:schemeClr val="lt1"/>
+          </a:fontRef>
+        </p:style>
+        <p:txBody>
+          <a:bodyPr rtlCol="0" anchor="ctr"/>
+          <a:lstStyle/>
+          <a:p>
+            <a:pPr algn="ctr"/>
+          </a:p>
+        </p:txBody>
+      </p:sp>
+      <p:sp>
+        <p:nvSpPr>
+          <p:cNvPr id="18" name="Rounded Rectangle 17"/>
+          <p:cNvSpPr/>
+          <p:nvPr/>
+        </p:nvSpPr>
+        <p:spPr>
+          <a:xfrm>
+            <a:off x="502920" y="5212080"/>
+            <a:ext cx="11338560" cy="731520"/>
+          </a:xfrm>
+          <a:prstGeom prst="roundRect">
+            <a:avLst>
+              <a:gd name="adj" fmla="val 6000"/>
+            </a:avLst>
+          </a:prstGeom>
+          <a:solidFill>
+            <a:srgbClr val="EEF2F8"/>
+          </a:solidFill>
+          <a:ln w="12700">
+            <a:solidFill>
+              <a:srgbClr val="002060"/>
+            </a:solidFill>
+          </a:ln>
+          <a:effectLst/>
+        </p:spPr>
+        <p:style>
+          <a:lnRef idx="1">
+            <a:schemeClr val="accent1"/>
+          </a:lnRef>
+          <a:fillRef idx="3">
+            <a:schemeClr val="accent1"/>
+          </a:fillRef>
+          <a:effectRef idx="2">
+            <a:schemeClr val="accent1"/>
+          </a:effectRef>
+          <a:fontRef idx="minor">
+            <a:schemeClr val="lt1"/>
+          </a:fontRef>
+        </p:style>
+        <p:txBody>
+          <a:bodyPr rtlCol="0" anchor="ctr" wrap="square" lIns="109728" rIns="109728" tIns="54864" bIns="54864"/>
+          <a:lstStyle/>
+          <a:p>
+            <a:pPr algn="ctr">
+              <a:spcAft>
+                <a:spcPts val="0"/>
+              </a:spcAft>
+            </a:pPr>
+            <a:r>
+              <a:rPr sz="1300" b="1">
+                <a:solidFill>
+                  <a:srgbClr val="002060"/>
+                </a:solidFill>
+                <a:latin typeface="Arial"/>
+              </a:rPr>
+              <a:t>Safety rails: never AI, bot or manager; never claims to be human  |  numbers only from verified facts  |  names stay tokens in the sandbox  |  no price on the call</a:t>
+            </a:r>
+          </a:p>
+        </p:txBody>
+      </p:sp>
+    </p:spTree>
+  </p:cSld>
+  <p:clrMapOvr>
+    <a:masterClrMapping/>
+  </p:clrMapOvr>
+</p:sld>
+</file>
+
+<file path=ppt/slides/slide20.xml><?xml version="1.0" encoding="utf-8"?>
+<p:sld xmlns:a="http://schemas.openxmlformats.org/drawingml/2006/main" xmlns:p="http://schemas.openxmlformats.org/presentationml/2006/main" xmlns:r="http://schemas.openxmlformats.org/officeDocument/2006/relationships">
+  <p:cSld>
+    <p:spTree>
+      <p:nvGrpSpPr>
+        <p:cNvPr id="1" name=""/>
+        <p:cNvGrpSpPr/>
+        <p:nvPr/>
+      </p:nvGrpSpPr>
+      <p:grpSpPr/>
+      <p:sp>
+        <p:nvSpPr>
+          <p:cNvPr id="2" name="Title 1"/>
+          <p:cNvSpPr>
+            <a:spLocks noGrp="1"/>
+          </p:cNvSpPr>
+          <p:nvPr>
+            <p:ph type="title"/>
+          </p:nvPr>
+        </p:nvSpPr>
+        <p:spPr/>
+        <p:txBody>
+          <a:bodyPr/>
+          <a:lstStyle/>
+          <a:p>
+            <a:r>
+              <a:t>Future Goals</a:t>
+            </a:r>
+          </a:p>
+        </p:txBody>
+      </p:sp>
+      <p:sp>
+        <p:nvSpPr>
+          <p:cNvPr id="3" name="Rounded Rectangle 2"/>
+          <p:cNvSpPr/>
+          <p:nvPr/>
+        </p:nvSpPr>
+        <p:spPr>
+          <a:xfrm>
+            <a:off x="566928" y="1463040"/>
+            <a:ext cx="5212080" cy="1371600"/>
+          </a:xfrm>
+          <a:prstGeom prst="roundRect">
+            <a:avLst>
+              <a:gd name="adj" fmla="val 6000"/>
+            </a:avLst>
+          </a:prstGeom>
+          <a:solidFill>
+            <a:srgbClr val="C00000"/>
+          </a:solidFill>
+          <a:ln>
+            <a:noFill/>
+          </a:ln>
+          <a:effectLst/>
+        </p:spPr>
+        <p:style>
+          <a:lnRef idx="1">
+            <a:schemeClr val="accent1"/>
+          </a:lnRef>
+          <a:fillRef idx="3">
+            <a:schemeClr val="accent1"/>
+          </a:fillRef>
+          <a:effectRef idx="2">
+            <a:schemeClr val="accent1"/>
+          </a:effectRef>
+          <a:fontRef idx="minor">
+            <a:schemeClr val="lt1"/>
+          </a:fontRef>
+        </p:style>
+        <p:txBody>
+          <a:bodyPr rtlCol="0" anchor="ctr" wrap="square" lIns="109728" rIns="109728" tIns="54864" bIns="54864"/>
+          <a:lstStyle/>
+          <a:p>
+            <a:pPr algn="ctr">
+              <a:spcAft>
+                <a:spcPts val="200"/>
+              </a:spcAft>
+            </a:pPr>
+            <a:r>
+              <a:rPr sz="1700" b="1">
+                <a:solidFill>
+                  <a:srgbClr val="FFFFFF"/>
+                </a:solidFill>
+                <a:latin typeface="Arial"/>
+              </a:rPr>
+              <a:t>NOW: Meeting arrangement</a:t>
+            </a:r>
+          </a:p>
+          <a:p>
+            <a:pPr algn="ctr">
+              <a:spcAft>
+                <a:spcPts val="0"/>
+              </a:spcAft>
+            </a:pPr>
+            <a:r>
+              <a:rPr sz="1300" b="0">
+                <a:solidFill>
+                  <a:srgbClr val="FFFFFF"/>
+                </a:solidFill>
+                <a:latin typeface="Arial"/>
+              </a:rPr>
+              <a:t>Right persona and hook, live adaptation</a:t>
+            </a:r>
+          </a:p>
+        </p:txBody>
+      </p:sp>
+      <p:sp>
+        <p:nvSpPr>
+          <p:cNvPr id="4" name="Right Arrow 3"/>
+          <p:cNvSpPr/>
+          <p:nvPr/>
+        </p:nvSpPr>
+        <p:spPr>
+          <a:xfrm>
+            <a:off x="5852160" y="1920240"/>
+            <a:ext cx="457200" cy="411480"/>
+          </a:xfrm>
+          <a:prstGeom prst="rightArrow">
+            <a:avLst/>
+          </a:prstGeom>
+          <a:solidFill>
+            <a:srgbClr val="595959"/>
+          </a:solidFill>
+          <a:ln>
+            <a:noFill/>
+          </a:ln>
+        </p:spPr>
+        <p:style>
+          <a:lnRef idx="1">
+            <a:schemeClr val="accent1"/>
+          </a:lnRef>
+          <a:fillRef idx="3">
+            <a:schemeClr val="accent1"/>
+          </a:fillRef>
+          <a:effectRef idx="2">
+            <a:schemeClr val="accent1"/>
+          </a:effectRef>
+          <a:fontRef idx="minor">
+            <a:schemeClr val="lt1"/>
+          </a:fontRef>
+        </p:style>
+        <p:txBody>
+          <a:bodyPr rtlCol="0" anchor="ctr"/>
+          <a:lstStyle/>
+          <a:p>
+            <a:pPr algn="ctr"/>
+          </a:p>
+        </p:txBody>
+      </p:sp>
+      <p:sp>
+        <p:nvSpPr>
+          <p:cNvPr id="5" name="Rounded Rectangle 4"/>
+          <p:cNvSpPr/>
+          <p:nvPr/>
+        </p:nvSpPr>
+        <p:spPr>
+          <a:xfrm>
+            <a:off x="6400800" y="1463040"/>
+            <a:ext cx="5212080" cy="1371600"/>
+          </a:xfrm>
+          <a:prstGeom prst="roundRect">
+            <a:avLst>
+              <a:gd name="adj" fmla="val 6000"/>
+            </a:avLst>
+          </a:prstGeom>
+          <a:solidFill>
+            <a:srgbClr val="002060"/>
+          </a:solidFill>
+          <a:ln>
+            <a:noFill/>
+          </a:ln>
+          <a:effectLst/>
+        </p:spPr>
+        <p:style>
+          <a:lnRef idx="1">
+            <a:schemeClr val="accent1"/>
+          </a:lnRef>
+          <a:fillRef idx="3">
+            <a:schemeClr val="accent1"/>
+          </a:fillRef>
+          <a:effectRef idx="2">
+            <a:schemeClr val="accent1"/>
+          </a:effectRef>
+          <a:fontRef idx="minor">
+            <a:schemeClr val="lt1"/>
+          </a:fontRef>
+        </p:style>
+        <p:txBody>
+          <a:bodyPr rtlCol="0" anchor="ctr" wrap="square" lIns="109728" rIns="109728" tIns="54864" bIns="54864"/>
+          <a:lstStyle/>
+          <a:p>
+            <a:pPr algn="ctr">
+              <a:spcAft>
+                <a:spcPts val="200"/>
+              </a:spcAft>
+            </a:pPr>
+            <a:r>
+              <a:rPr sz="1700" b="1">
+                <a:solidFill>
+                  <a:srgbClr val="FFFFFF"/>
+                </a:solidFill>
+                <a:latin typeface="Arial"/>
+              </a:rPr>
+              <a:t>NEXT: Seller enrichment</a:t>
+            </a:r>
+          </a:p>
+          <a:p>
+            <a:pPr algn="ctr">
+              <a:spcAft>
+                <a:spcPts val="0"/>
+              </a:spcAft>
+            </a:pPr>
+            <a:r>
+              <a:rPr sz="1300" b="0">
+                <a:solidFill>
+                  <a:srgbClr val="FFFFFF"/>
+                </a:solidFill>
+                <a:latin typeface="Arial"/>
+              </a:rPr>
+              <a:t>Catalogue improvement and suggestions</a:t>
+            </a:r>
+          </a:p>
+        </p:txBody>
+      </p:sp>
+      <p:sp>
+        <p:nvSpPr>
+          <p:cNvPr id="6" name="TextBox 5"/>
+          <p:cNvSpPr txBox="1"/>
+          <p:nvPr/>
+        </p:nvSpPr>
+        <p:spPr>
+          <a:xfrm>
+            <a:off x="566928" y="3154680"/>
+            <a:ext cx="10972800" cy="365760"/>
+          </a:xfrm>
+          <a:prstGeom prst="rect">
+            <a:avLst/>
+          </a:prstGeom>
+          <a:noFill/>
+        </p:spPr>
+        <p:txBody>
+          <a:bodyPr wrap="square">
+            <a:spAutoFit/>
+          </a:bodyPr>
+          <a:lstStyle/>
+          <a:p>
+            <a:pPr algn="l">
+              <a:spcAft>
+                <a:spcPts val="0"/>
+              </a:spcAft>
+            </a:pPr>
+            <a:r>
+              <a:rPr sz="1600" b="1">
+                <a:solidFill>
+                  <a:srgbClr val="5B3E96"/>
+                </a:solidFill>
+                <a:latin typeface="Arial"/>
+              </a:rPr>
+              <a:t>Personalise further, per seller</a:t>
+            </a:r>
+          </a:p>
+        </p:txBody>
+      </p:sp>
+      <p:sp>
+        <p:nvSpPr>
+          <p:cNvPr id="7" name="Rounded Rectangle 6"/>
+          <p:cNvSpPr/>
+          <p:nvPr/>
+        </p:nvSpPr>
+        <p:spPr>
+          <a:xfrm>
+            <a:off x="566928" y="3611880"/>
+            <a:ext cx="3566160" cy="1828800"/>
+          </a:xfrm>
+          <a:prstGeom prst="roundRect">
+            <a:avLst>
+              <a:gd name="adj" fmla="val 6000"/>
+            </a:avLst>
+          </a:prstGeom>
+          <a:solidFill>
+            <a:srgbClr val="FFFFFF"/>
+          </a:solidFill>
+          <a:ln w="12700">
+            <a:solidFill>
+              <a:srgbClr val="2EA896"/>
+            </a:solidFill>
+          </a:ln>
+          <a:effectLst/>
+        </p:spPr>
+        <p:style>
+          <a:lnRef idx="1">
+            <a:schemeClr val="accent1"/>
+          </a:lnRef>
+          <a:fillRef idx="3">
+            <a:schemeClr val="accent1"/>
+          </a:fillRef>
+          <a:effectRef idx="2">
+            <a:schemeClr val="accent1"/>
+          </a:effectRef>
+          <a:fontRef idx="minor">
+            <a:schemeClr val="lt1"/>
+          </a:fontRef>
+        </p:style>
+        <p:txBody>
+          <a:bodyPr rtlCol="0" anchor="ctr" wrap="square" lIns="1005840" rIns="109728" tIns="54864" bIns="54864"/>
+          <a:lstStyle/>
+          <a:p>
+            <a:pPr algn="l">
+              <a:spcAft>
+                <a:spcPts val="300"/>
+              </a:spcAft>
+            </a:pPr>
+            <a:r>
+              <a:rPr sz="1600" b="1">
+                <a:solidFill>
+                  <a:srgbClr val="2EA896"/>
+                </a:solidFill>
+                <a:latin typeface="Arial"/>
+              </a:rPr>
+              <a:t>Objective per seller</a:t>
+            </a:r>
+          </a:p>
+          <a:p>
+            <a:pPr algn="l">
+              <a:spcAft>
+                <a:spcPts val="0"/>
+              </a:spcAft>
+            </a:pPr>
+            <a:r>
+              <a:rPr sz="1300" b="0">
+                <a:solidFill>
+                  <a:srgbClr val="262626"/>
+                </a:solidFill>
+                <a:latin typeface="Arial"/>
+              </a:rPr>
+              <a:t>Meeting, enrichment or NPS</a:t>
+            </a:r>
+          </a:p>
+        </p:txBody>
+      </p:sp>
+      <p:sp>
+        <p:nvSpPr>
+          <p:cNvPr id="8" name="Oval 7"/>
+          <p:cNvSpPr/>
+          <p:nvPr/>
+        </p:nvSpPr>
+        <p:spPr>
+          <a:xfrm>
+            <a:off x="749808" y="3794760"/>
+            <a:ext cx="640080" cy="640080"/>
+          </a:xfrm>
+          <a:prstGeom prst="ellipse">
+            <a:avLst/>
+          </a:prstGeom>
+          <a:solidFill>
+            <a:srgbClr val="2EA896"/>
+          </a:solidFill>
+          <a:ln>
+            <a:noFill/>
+          </a:ln>
+        </p:spPr>
+        <p:style>
+          <a:lnRef idx="1">
+            <a:schemeClr val="accent1"/>
+          </a:lnRef>
+          <a:fillRef idx="3">
+            <a:schemeClr val="accent1"/>
+          </a:fillRef>
+          <a:effectRef idx="2">
+            <a:schemeClr val="accent1"/>
+          </a:effectRef>
+          <a:fontRef idx="minor">
+            <a:schemeClr val="lt1"/>
+          </a:fontRef>
+        </p:style>
+        <p:txBody>
+          <a:bodyPr rtlCol="0" anchor="ctr" lIns="0" rIns="0" tIns="0" bIns="0"/>
+          <a:lstStyle/>
+          <a:p>
+            <a:pPr algn="ctr">
+              <a:spcAft>
+                <a:spcPts val="0"/>
+              </a:spcAft>
+            </a:pPr>
+            <a:r>
+              <a:rPr sz="2000" b="1">
+                <a:solidFill>
+                  <a:srgbClr val="FFFFFF"/>
+                </a:solidFill>
+                <a:latin typeface="Arial"/>
+              </a:rPr>
+              <a:t>1</a:t>
+            </a:r>
+          </a:p>
+        </p:txBody>
+      </p:sp>
+      <p:sp>
+        <p:nvSpPr>
+          <p:cNvPr id="9" name="Rounded Rectangle 8"/>
+          <p:cNvSpPr/>
+          <p:nvPr/>
+        </p:nvSpPr>
+        <p:spPr>
+          <a:xfrm>
+            <a:off x="4407408" y="3611880"/>
+            <a:ext cx="3566160" cy="1828800"/>
+          </a:xfrm>
+          <a:prstGeom prst="roundRect">
+            <a:avLst>
+              <a:gd name="adj" fmla="val 6000"/>
+            </a:avLst>
+          </a:prstGeom>
+          <a:solidFill>
+            <a:srgbClr val="FFFFFF"/>
+          </a:solidFill>
+          <a:ln w="12700">
+            <a:solidFill>
+              <a:srgbClr val="E08A00"/>
+            </a:solidFill>
+          </a:ln>
+          <a:effectLst/>
+        </p:spPr>
+        <p:style>
+          <a:lnRef idx="1">
+            <a:schemeClr val="accent1"/>
+          </a:lnRef>
+          <a:fillRef idx="3">
+            <a:schemeClr val="accent1"/>
+          </a:fillRef>
+          <a:effectRef idx="2">
+            <a:schemeClr val="accent1"/>
+          </a:effectRef>
+          <a:fontRef idx="minor">
+            <a:schemeClr val="lt1"/>
+          </a:fontRef>
+        </p:style>
+        <p:txBody>
+          <a:bodyPr rtlCol="0" anchor="ctr" wrap="square" lIns="1005840" rIns="109728" tIns="54864" bIns="54864"/>
+          <a:lstStyle/>
+          <a:p>
+            <a:pPr algn="l">
+              <a:spcAft>
+                <a:spcPts val="300"/>
+              </a:spcAft>
+            </a:pPr>
+            <a:r>
+              <a:rPr sz="1600" b="1">
+                <a:solidFill>
+                  <a:srgbClr val="E08A00"/>
+                </a:solidFill>
+                <a:latin typeface="Arial"/>
+              </a:rPr>
+              <a:t>Preferred call time</a:t>
+            </a:r>
+          </a:p>
+          <a:p>
+            <a:pPr algn="l">
+              <a:spcAft>
+                <a:spcPts val="0"/>
+              </a:spcAft>
+            </a:pPr>
+            <a:r>
+              <a:rPr sz="1300" b="0">
+                <a:solidFill>
+                  <a:srgbClr val="262626"/>
+                </a:solidFill>
+                <a:latin typeface="Arial"/>
+              </a:rPr>
+              <a:t>More calls answered</a:t>
+            </a:r>
+          </a:p>
+        </p:txBody>
+      </p:sp>
+      <p:sp>
+        <p:nvSpPr>
+          <p:cNvPr id="10" name="Oval 9"/>
+          <p:cNvSpPr/>
+          <p:nvPr/>
+        </p:nvSpPr>
+        <p:spPr>
+          <a:xfrm>
+            <a:off x="4590288" y="3794760"/>
+            <a:ext cx="640080" cy="640080"/>
+          </a:xfrm>
+          <a:prstGeom prst="ellipse">
+            <a:avLst/>
+          </a:prstGeom>
+          <a:solidFill>
+            <a:srgbClr val="E08A00"/>
+          </a:solidFill>
+          <a:ln>
+            <a:noFill/>
+          </a:ln>
+        </p:spPr>
+        <p:style>
+          <a:lnRef idx="1">
+            <a:schemeClr val="accent1"/>
+          </a:lnRef>
+          <a:fillRef idx="3">
+            <a:schemeClr val="accent1"/>
+          </a:fillRef>
+          <a:effectRef idx="2">
+            <a:schemeClr val="accent1"/>
+          </a:effectRef>
+          <a:fontRef idx="minor">
+            <a:schemeClr val="lt1"/>
+          </a:fontRef>
+        </p:style>
+        <p:txBody>
+          <a:bodyPr rtlCol="0" anchor="ctr" lIns="0" rIns="0" tIns="0" bIns="0"/>
+          <a:lstStyle/>
+          <a:p>
+            <a:pPr algn="ctr">
+              <a:spcAft>
+                <a:spcPts val="0"/>
+              </a:spcAft>
+            </a:pPr>
+            <a:r>
+              <a:rPr sz="2000" b="1">
+                <a:solidFill>
+                  <a:srgbClr val="FFFFFF"/>
+                </a:solidFill>
+                <a:latin typeface="Arial"/>
+              </a:rPr>
+              <a:t>2</a:t>
+            </a:r>
+          </a:p>
+        </p:txBody>
+      </p:sp>
+      <p:sp>
+        <p:nvSpPr>
+          <p:cNvPr id="11" name="Rounded Rectangle 10"/>
+          <p:cNvSpPr/>
+          <p:nvPr/>
+        </p:nvSpPr>
+        <p:spPr>
+          <a:xfrm>
+            <a:off x="8247888" y="3611880"/>
+            <a:ext cx="3566160" cy="1828800"/>
+          </a:xfrm>
+          <a:prstGeom prst="roundRect">
+            <a:avLst>
+              <a:gd name="adj" fmla="val 6000"/>
+            </a:avLst>
+          </a:prstGeom>
+          <a:solidFill>
+            <a:srgbClr val="FFFFFF"/>
+          </a:solidFill>
+          <a:ln w="12700">
+            <a:solidFill>
+              <a:srgbClr val="5B3E96"/>
+            </a:solidFill>
+          </a:ln>
+          <a:effectLst/>
+        </p:spPr>
+        <p:style>
+          <a:lnRef idx="1">
+            <a:schemeClr val="accent1"/>
+          </a:lnRef>
+          <a:fillRef idx="3">
+            <a:schemeClr val="accent1"/>
+          </a:fillRef>
+          <a:effectRef idx="2">
+            <a:schemeClr val="accent1"/>
+          </a:effectRef>
+          <a:fontRef idx="minor">
+            <a:schemeClr val="lt1"/>
+          </a:fontRef>
+        </p:style>
+        <p:txBody>
+          <a:bodyPr rtlCol="0" anchor="ctr" wrap="square" lIns="1005840" rIns="109728" tIns="54864" bIns="54864"/>
+          <a:lstStyle/>
+          <a:p>
+            <a:pPr algn="l">
+              <a:spcAft>
+                <a:spcPts val="300"/>
+              </a:spcAft>
+            </a:pPr>
+            <a:r>
+              <a:rPr sz="1600" b="1">
+                <a:solidFill>
+                  <a:srgbClr val="5B3E96"/>
+                </a:solidFill>
+                <a:latin typeface="Arial"/>
+              </a:rPr>
+              <a:t>Preferred language</a:t>
+            </a:r>
+          </a:p>
+          <a:p>
+            <a:pPr algn="l">
+              <a:spcAft>
+                <a:spcPts val="0"/>
+              </a:spcAft>
+            </a:pPr>
+            <a:r>
+              <a:rPr sz="1300" b="0">
+                <a:solidFill>
+                  <a:srgbClr val="262626"/>
+                </a:solidFill>
+                <a:latin typeface="Arial"/>
+              </a:rPr>
+              <a:t>Suggested from the seller's data</a:t>
+            </a:r>
+          </a:p>
+        </p:txBody>
+      </p:sp>
+      <p:sp>
+        <p:nvSpPr>
+          <p:cNvPr id="12" name="Oval 11"/>
+          <p:cNvSpPr/>
+          <p:nvPr/>
+        </p:nvSpPr>
+        <p:spPr>
+          <a:xfrm>
+            <a:off x="8430767" y="3794760"/>
+            <a:ext cx="640080" cy="640080"/>
+          </a:xfrm>
+          <a:prstGeom prst="ellipse">
+            <a:avLst/>
+          </a:prstGeom>
+          <a:solidFill>
+            <a:srgbClr val="5B3E96"/>
+          </a:solidFill>
+          <a:ln>
+            <a:noFill/>
+          </a:ln>
+        </p:spPr>
+        <p:style>
+          <a:lnRef idx="1">
+            <a:schemeClr val="accent1"/>
+          </a:lnRef>
+          <a:fillRef idx="3">
+            <a:schemeClr val="accent1"/>
+          </a:fillRef>
+          <a:effectRef idx="2">
+            <a:schemeClr val="accent1"/>
+          </a:effectRef>
+          <a:fontRef idx="minor">
+            <a:schemeClr val="lt1"/>
+          </a:fontRef>
+        </p:style>
+        <p:txBody>
+          <a:bodyPr rtlCol="0" anchor="ctr" lIns="0" rIns="0" tIns="0" bIns="0"/>
+          <a:lstStyle/>
+          <a:p>
+            <a:pPr algn="ctr">
+              <a:spcAft>
+                <a:spcPts val="0"/>
+              </a:spcAft>
+            </a:pPr>
+            <a:r>
+              <a:rPr sz="2000" b="1">
+                <a:solidFill>
+                  <a:srgbClr val="FFFFFF"/>
+                </a:solidFill>
+                <a:latin typeface="Arial"/>
+              </a:rPr>
+              <a:t>3</a:t>
+            </a:r>
+          </a:p>
+        </p:txBody>
+      </p:sp>
+    </p:spTree>
+  </p:cSld>
+  <p:clrMapOvr>
+    <a:masterClrMapping/>
+  </p:clrMapOvr>
+</p:sld>
+</file>
+
+<file path=ppt/slides/slide21.xml><?xml version="1.0" encoding="utf-8"?>
 <p:sld xmlns:a="http://schemas.openxmlformats.org/drawingml/2006/main" xmlns:p="http://schemas.openxmlformats.org/presentationml/2006/main" xmlns:r="http://schemas.openxmlformats.org/officeDocument/2006/relationships">
   <p:cSld>
     <p:spTree>

--- a/outputs/plans/VANI_Persona_Design_Deck_v2_visual.pptx
+++ b/outputs/plans/VANI_Persona_Design_Deck_v2_visual.pptx
@@ -1337,7 +1337,7 @@
           <a:lstStyle/>
           <a:p>
             <a:r>
-              <a:t>Examples of the live signal tool at work. Every seller turn is read; the tool returns a mode (rushed, frustrated, confused, interested, declined, bot question, opt-out, language switch; question and handler questions as one-turn overlays) and a directive. In scripted test calls every switch type fired on the same turn, including a language switch from Marathi to Hindi to English. A switch log row records: turn, utterance, from mode, to mode, cue, directive id, change made, reason, whether asking for the meeting is allowed, milliseconds. Honest limits: voice, pace and pitch cannot change mid-call (a Sarvam platform limit), tone changes through wording; the instant keyword classifier is a baseline with about 0.60 measured accuracy on a small reviewed set, presented as a measurement not a production figure. Jev (typesafe jev-1.13, a decision model reached through OpenRouter) judges mood with six questions (rushed, frustrated, confused, bot question, interested, language) in one request, about 0.5 s at the median; it was tested in live scripted calls through a relay, and it labels real call turns that score and improve the keyword tool between runs. Because its network round trip adds about 0.5 s to a spoken reply, in live calls it is used on fewer turns for now and the instant keyword tool answers first. Handler: with a handler name VANI says the name and books with that person; with a pool it says 'our IndiaMART team handles your account; the executive will introduce themselves when they call' and never a made-up name. 'Nahi chahiye' keeps the call open and restates the hook.</a:t>
+              <a:t>Examples of the live signal tool at work. Every seller turn is read; the tool returns a mode (rushed, frustrated, confused, interested, declined, bot question, opt-out, language switch; question and handler questions as one-turn overlays) and a directive. In scripted test calls every switch type fired on the same turn, including a language switch from Marathi to Hindi to English. A switch log row records: turn, utterance, from mode, to mode, cue, directive id, change made, reason, whether asking for the meeting is allowed, milliseconds. Honest limits: voice, pace and pitch cannot change mid-call (a Sarvam platform limit), tone changes through wording; the instant keyword classifier is a baseline with about 0.60 measured accuracy on a small reviewed set, presented as a measurement not a production figure. Jev (typesafe jev-1.13, a decision model reached through OpenRouter) judges mood with six questions (rushed, frustrated, confused, bot question, interested, language) in one request, about 0.5 s at the median; it was tested in live scripted calls through a relay, and it labels real call turns that score and improve the keyword tool between runs. In the live call the instant keyword tool decides, because the network round trip adds about 0.5 s to a spoken reply; Jev runs on real calls after the call. Handler: with a handler name VANI says the name and books with that person; with a pool it says 'our IndiaMART team handles your account; the executive will introduce themselves when they call' and never a made-up name. 'Nahi chahiye' keeps the call open and restates the hook.</a:t>
             </a:r>
           </a:p>
         </p:txBody>
@@ -1395,7 +1395,7 @@
           <a:lstStyle/>
           <a:p>
             <a:r>
-              <a:t>Two layers decide the seller's mood. Layer 1, the keyword tool, runs inside the Sarvam call on every seller turn in well under a millisecond, so the directive applies on the same turn; its measured accuracy is about 0.60 on a small reviewed set, presented as a measurement. Layer 2, Jev (typesafe jev-1.13, a decision model reached through OpenRouter), answers six yes/no mood questions in one request (rushed, frustrated, confused, bot question, interested, language) with a probability for each; about 0.5 s at the median, a tiny fraction of a cent per turn; 49 of 51 correct on a native-script test set and 10 of 10 on a tricky set; it catches cases the keywords miss, such as an irritated 'I am asking again, tell me the price or I hang up'. Jev labels real call turns, which scores and improves the keyword tool between runs (the gold set), and we tested it in live scripted calls through a relay. A web call adds about 0.5 s to a spoken reply, so in live calls it is used on fewer turns for now and the instant keyword tool answers first; a hybrid that asks Jev only on unclear turns within a strict time budget is the next step. We also evaluated a Sarvam chat model, a small trained classifier and fast hosted models, and measured their latency before choosing this design.</a:t>
+              <a:t>Two layers decide the seller's mood. Layer 1, the keyword tool, runs inside the Sarvam call on every seller turn in well under a millisecond, so the directive applies on the same turn; its measured accuracy is about 0.60 on a small reviewed set, presented as a measurement. Layer 2, Jev (typesafe jev-1.13, a decision model reached through OpenRouter), answers six yes/no mood questions in one request (rushed, frustrated, confused, bot question, interested, language) with a probability for each; about 0.5 s at the median, a tiny fraction of a cent per turn; 49 of 51 correct on a native-script test set and 10 of 10 on a tricky set; it catches cases the keywords miss, such as an irritated 'I am asking again, tell me the price or I hang up'. Jev labels real call turns, which scores and improves the keyword tool between runs (the gold set), and we tested it in live scripted calls through a relay. In the live call the instant keyword tool decides, because a web call to Jev adds about 0.5 s to a spoken reply; Jev runs on real calls after the call and was tested live through a relay. A hybrid that asks Jev only on unclear turns within a strict time budget is the next step. We also evaluated a Sarvam chat model, a small trained classifier and fast hosted models, and measured their latency before choosing this design.</a:t>
             </a:r>
           </a:p>
         </p:txBody>
@@ -19196,7 +19196,7 @@
                 </a:solidFill>
                 <a:latin typeface="Arial"/>
               </a:rPr>
-              <a:t>Jev decision model</a:t>
+              <a:t>Jev decision model: after the call</a:t>
             </a:r>
           </a:p>
           <a:p>
@@ -19212,7 +19212,7 @@
                 </a:solidFill>
                 <a:latin typeface="Arial"/>
               </a:rPr>
-              <a:t>6 mood questions at once: rushed, frustrated, confused, bot, interested, language</a:t>
+              <a:t>Judges the same turns on real calls: 6 mood questions at once</a:t>
             </a:r>
           </a:p>
           <a:p>
@@ -19228,7 +19228,7 @@
                 </a:solidFill>
                 <a:latin typeface="Arial"/>
               </a:rPr>
-              <a:t>About 0.5 s; 49 of 51 correct in tests</a:t>
+              <a:t>49 of 51 correct in tests; tested live via a relay</a:t>
             </a:r>
           </a:p>
         </p:txBody>
@@ -19327,8 +19327,8 @@
         </p:nvSpPr>
         <p:spPr>
           <a:xfrm>
-            <a:off x="8321040" y="2377440"/>
-            <a:ext cx="3383280" cy="2194560"/>
+            <a:off x="8321040" y="1371600"/>
+            <a:ext cx="3383280" cy="1737360"/>
           </a:xfrm>
           <a:prstGeom prst="roundRect">
             <a:avLst>
@@ -19389,7 +19389,7 @@
                 </a:solidFill>
                 <a:latin typeface="Arial"/>
               </a:rPr>
-              <a:t>rushed, confused, frustrated, interested, language switch, opt-out</a:t>
+              <a:t>in the call, same turn</a:t>
             </a:r>
           </a:p>
           <a:p>
@@ -19413,6 +19413,97 @@
       <p:sp>
         <p:nvSpPr>
           <p:cNvPr id="11" name="Rounded Rectangle 10"/>
+          <p:cNvSpPr/>
+          <p:nvPr/>
+        </p:nvSpPr>
+        <p:spPr>
+          <a:xfrm>
+            <a:off x="8321040" y="3474720"/>
+            <a:ext cx="3383280" cy="1737360"/>
+          </a:xfrm>
+          <a:prstGeom prst="roundRect">
+            <a:avLst>
+              <a:gd name="adj" fmla="val 6000"/>
+            </a:avLst>
+          </a:prstGeom>
+          <a:solidFill>
+            <a:srgbClr val="5B3E96"/>
+          </a:solidFill>
+          <a:ln>
+            <a:noFill/>
+          </a:ln>
+          <a:effectLst/>
+        </p:spPr>
+        <p:style>
+          <a:lnRef idx="1">
+            <a:schemeClr val="accent1"/>
+          </a:lnRef>
+          <a:fillRef idx="3">
+            <a:schemeClr val="accent1"/>
+          </a:fillRef>
+          <a:effectRef idx="2">
+            <a:schemeClr val="accent1"/>
+          </a:effectRef>
+          <a:fontRef idx="minor">
+            <a:schemeClr val="lt1"/>
+          </a:fontRef>
+        </p:style>
+        <p:txBody>
+          <a:bodyPr rtlCol="0" anchor="ctr" wrap="square" lIns="109728" rIns="109728" tIns="54864" bIns="54864"/>
+          <a:lstStyle/>
+          <a:p>
+            <a:pPr algn="ctr">
+              <a:spcAft>
+                <a:spcPts val="400"/>
+              </a:spcAft>
+            </a:pPr>
+            <a:r>
+              <a:rPr sz="1600" b="1">
+                <a:solidFill>
+                  <a:srgbClr val="FFFFFF"/>
+                </a:solidFill>
+                <a:latin typeface="Arial"/>
+              </a:rPr>
+              <a:t>LABELS</a:t>
+            </a:r>
+          </a:p>
+          <a:p>
+            <a:pPr algn="ctr">
+              <a:spcAft>
+                <a:spcPts val="400"/>
+              </a:spcAft>
+            </a:pPr>
+            <a:r>
+              <a:rPr sz="1100" b="0">
+                <a:solidFill>
+                  <a:srgbClr val="FFFFFF"/>
+                </a:solidFill>
+                <a:latin typeface="Arial"/>
+              </a:rPr>
+              <a:t>after the call</a:t>
+            </a:r>
+          </a:p>
+          <a:p>
+            <a:pPr algn="ctr">
+              <a:spcAft>
+                <a:spcPts val="0"/>
+              </a:spcAft>
+            </a:pPr>
+            <a:r>
+              <a:rPr sz="1200" b="1">
+                <a:solidFill>
+                  <a:srgbClr val="FFFFFF"/>
+                </a:solidFill>
+                <a:latin typeface="Arial"/>
+              </a:rPr>
+              <a:t>score and improve the keyword tool</a:t>
+            </a:r>
+          </a:p>
+        </p:txBody>
+      </p:sp>
+      <p:sp>
+        <p:nvSpPr>
+          <p:cNvPr id="12" name="Rounded Rectangle 11"/>
           <p:cNvSpPr/>
           <p:nvPr/>
         </p:nvSpPr>
@@ -19466,7 +19557,7 @@
                 </a:solidFill>
                 <a:latin typeface="Arial"/>
               </a:rPr>
-              <a:t>Jev also labels real calls: it scores and improves the keyword tool between runs</a:t>
+              <a:t>Keyword tool answers in the call; Jev judges the same turns after the call and teaches it</a:t>
             </a:r>
           </a:p>
         </p:txBody>

--- a/outputs/plans/VANI_Persona_Design_Deck_v2_visual.pptx
+++ b/outputs/plans/VANI_Persona_Design_Deck_v2_visual.pptx
@@ -23,10 +23,22 @@
     <p:sldId id="274" r:id="rId28"/>
     <p:sldId id="275" r:id="rId29"/>
     <p:sldId id="276" r:id="rId30"/>
+    <p:sldId id="277" r:id="rId31"/>
+    <p:sldId id="278" r:id="rId32"/>
+    <p:sldId id="279" r:id="rId33"/>
     <p:sldId id="263" r:id="rId13"/>
   </p:sldIdLst>
   <p:sldSz cy="6858000" cx="12192000"/>
   <p:notesSz cx="6858000" cy="9144000"/>
+  <p:embeddedFontLst>
+    <p:embeddedFont>
+      <p:font typeface="Open Sans"/>
+      <p:regular r:id="rId14"/>
+      <p:bold r:id="rId15"/>
+      <p:italic r:id="rId16"/>
+      <p:boldItalic r:id="rId17"/>
+    </p:embeddedFont>
+  </p:embeddedFontLst>
   <p:defaultTextStyle>
     <a:defPPr lvl="0" marR="0" rtl="0" algn="l">
       <a:lnSpc>
@@ -1047,7 +1059,7 @@
           <a:lstStyle/>
           <a:p>
             <a:r>
-              <a:t>More than 50 data points per seller, in groups: identity (company, contact, designation; recorded gender only chooses the voice and is never said); location and language (city, state, GST state, onboarding cities, city tier, Hindi belt, languages heard on calls); business (plan free or paid, member since, turnover band, nature, profile text, company page); catalogue (top categories, product counts, quality score, products without photo or price, top five categories by active products); demand and money (buy leads bought, credits and lapse, rejection reasons, category value, seller order value, same-size peers, showcase leads, competitor list with plan); enquiries and channels; relationship (assigned sales handler, complaints, executive contact, do-not-call and frustration flags); past VANI calls with mood signals and objections. Size labels: below 40 lakh small, 40 lakh to 1.5 crore medium, 1.5 to 5 crore medium-high, 5 crore and above high. Plan: free is NSD, paid is CSD, TMW, KCD and other paid divisions.</a:t>
+              <a:t>For each seller we collect 62 data points from about 60 IndiaMART sources: their business, their catalogue gaps, live buy leads, their competitors, how past calls went. Each data point can give VANI a reason for the meeting. Before the model sees the data we remove all personal data: names become tokens, and phone, GST and PAN numbers never leave IndiaMART (a hard check refuses any export that still holds one; real names are put back only on the laptop, for the voice call). About 53 of the 62 data points are filled for an average seller; the count of sources is approximate. The groups: identity (company, contact, designation; recorded gender only chooses the voice and is never said); location and language (city, state, GST state, onboarding cities, city tier, Hindi belt, languages heard on calls); business (plan free or paid, member since, turnover band, nature, profile text, company page); catalogue (top categories, product counts, quality score, products without photo or price, top five categories by active products); demand and money (buy leads bought, credits and lapse, rejection reasons, category value, seller order value, same-size peers, showcase leads, competitor list with plan); enquiries and channels; relationship (assigned sales handler, complaints, executive contact, do-not-call and frustration flags); past VANI calls with mood signals and objections. Size labels: below 40 lakh small, 40 lakh to 1.5 crore medium, 1.5 to 5 crore medium-high, 5 crore and above high. Plan: free is NSD, paid is CSD, TMW, KCD and other paid divisions.</a:t>
             </a:r>
           </a:p>
         </p:txBody>
@@ -1279,7 +1291,7 @@
           <a:lstStyle/>
           <a:p>
             <a:r>
-              <a:t>START of call: the Sarvam voice agent's start tool applies the persona before the first word: voice, pace, pitch, the start language and the opening line; the persona and hook fill one fixed prompt through per-call variables. MID-CALL: a signal tool runs on every seller turn and returns the seller's mode and a directive that overrides the speaking style for that reply only (rushed: one short sentence and a callback; confused: one idea in short phrases; frustrated: brief apology, no pitch; interested: answer briefly and ask for the day and time; declined: keep the call open; bot question: sidestep once, then 'virtual assistant'; opt-out: apologise and end; language switch: reply in the seller's language). Voice, pace and pitch are fixed after the start (platform limit); tone changes through the words. Every change is written to a switch log: turn, utterance, from mode, to mode, cue, change, reason. END: the booking tool records the meeting with the seller's sales handler when a name exists (for a pool: 'our IndiaMART executive'), or a callback; after booking VANI asks 'anything else?' and ends only on the seller's no or goodbye; the call ends early only on an explicit request (stop calling, cut the call, do not call); 'not interested' keeps the line open (the hook again, then one topic per 'no'). VANI never quotes a plan or price. IMPROVE: Claude reviews the call against compliance rules (7 fatal and 13 non-fatal items) and the call-rule checks R1-R6 (pass, fail or unknown per language); results update persona and hook scoreboards by seller segment and per-field value groups; reports show meeting rate by reason type and uplift against the control. Scoreboards are empty at the start; picks are a division-based lean plus a random draw until real calls arrive.</a:t>
+              <a:t>VANI's persona and hook are not picked by a fixed rule table, where the same input always gives the same output. They are decided by an agent (Claude Opus 5.5 in an isolated Daytona sandbox) from the data of that one seller. The steps: scripts compute facts (traits, states, hook eligibility, guards) from the seller's 62 data points; the scoreboards give the top two personas by a weighted random draw (Thompson sampling; 15% of calls use the control persona P0 so uplift can be measured); the agent selects one persona as its base, then decides every field (voice gender, pace, pitch, language start, language mix, formality, sophistication, warmth, empathy, words per reply, hook, opening) and one main hook plus a backup. For each choice it must cite the seller's own words (file, id, an exact quote of at most 20 words); a single writer tool and a validator refuse anything uncited, a wrong value, or a number that is not a verified fact. The agent may change the drawn persona's values when the data says so; if it overrides the draw completely, the call is logged to a separate arm named COMPOSED. So two sellers with the same plan and size can get different personas and hooks. The eligibility of a hook and the guards (do-not-call, grievance, call fatigue) are computed by script, so the agent chooses inside safe limits.</a:t>
             </a:r>
           </a:p>
         </p:txBody>
@@ -1337,7 +1349,7 @@
           <a:lstStyle/>
           <a:p>
             <a:r>
-              <a:t>Examples of the live signal tool at work. Every seller turn is read; the tool returns a mode (rushed, frustrated, confused, interested, declined, bot question, opt-out, language switch; question and handler questions as one-turn overlays) and a directive. In scripted test calls every switch type fired on the same turn, including a language switch from Marathi to Hindi to English. A switch log row records: turn, utterance, from mode, to mode, cue, directive id, change made, reason, whether asking for the meeting is allowed, milliseconds. Honest limits: voice, pace and pitch cannot change mid-call (a Sarvam platform limit), tone changes through wording; the instant keyword classifier is a baseline with about 0.60 measured accuracy on a small reviewed set, presented as a measurement not a production figure. Jev (typesafe jev-1.13, a decision model reached through OpenRouter) judges mood with six questions (rushed, frustrated, confused, bot question, interested, language) in one request, about 0.5 s at the median; it was tested in live scripted calls through a relay, and it labels real call turns that score and improve the keyword tool between runs. In the live call the instant keyword tool decides, because the network round trip adds about 0.5 s to a spoken reply; Jev runs on real calls after the call. Handler: with a handler name VANI says the name and books with that person; with a pool it says 'our IndiaMART team handles your account; the executive will introduce themselves when they call' and never a made-up name. 'Nahi chahiye' keeps the call open and restates the hook.</a:t>
+              <a:t>The skill is the file that tells the agent how to design a persona for one seller; it is part of the design, not just the prompt. Steps: (1) read the seller's index and core files and the computed facts and prior; stop with no persona if the seller is do-not-call; (2) select a base persona from the scoreboard's top two; (3) search the seller's files for every field and every eligible hook with the probe command; (4) decide every field with a reason chosen in this order: seller evidence (an exact quote of at most 20 words from a hit of that field's probe); otherwise hierarchy data (what got meetings for similar sellers in earlier calls), used only when no hit is evidence and the prior has data, with a written reason for each top hit that was rejected; otherwise the selected persona's own value as changed by the state rules; (5) decide every eligible hook: a primary hook needs at least three cites from at least two files and a counter-evidence check, and money comes first when a live or recent order exists; (6) write the spoken text (opening, hook claim, call plan, objection playbook, verified facts); (7) finalize: the validator checks every decision and every number and writes the validated persona. The agent writes only through a single tool, so a persona written another way is rejected and no call is made.</a:t>
             </a:r>
           </a:p>
         </p:txBody>
@@ -1395,7 +1407,7 @@
           <a:lstStyle/>
           <a:p>
             <a:r>
-              <a:t>Two layers decide the seller's mood. Layer 1, the keyword tool, runs inside the Sarvam call on every seller turn in well under a millisecond, so the directive applies on the same turn; its measured accuracy is about 0.60 on a small reviewed set, presented as a measurement. Layer 2, Jev (typesafe jev-1.13, a decision model reached through OpenRouter), answers six yes/no mood questions in one request (rushed, frustrated, confused, bot question, interested, language) with a probability for each; about 0.5 s at the median, a tiny fraction of a cent per turn; 49 of 51 correct on a native-script test set and 10 of 10 on a tricky set; it catches cases the keywords miss, such as an irritated 'I am asking again, tell me the price or I hang up'. Jev labels real call turns, which scores and improves the keyword tool between runs (the gold set), and we tested it in live scripted calls through a relay. In the live call the instant keyword tool decides, because a web call to Jev adds about 0.5 s to a spoken reply; Jev runs on real calls after the call and was tested live through a relay. A hybrid that asks Jev only on unclear turns within a strict time budget is the next step. We also evaluated a Sarvam chat model, a small trained classifier and fast hosted models, and measured their latency before choosing this design.</a:t>
+              <a:t>START of call: the Sarvam voice agent's start tool applies the persona before the first word: voice, pace, pitch, the start language and the opening line; the persona and hook fill one fixed prompt through per-call variables. MID-CALL: a signal tool runs on every seller turn and returns the seller's mode and a directive that overrides the speaking style for that reply only (rushed: one short sentence and a callback; confused: one idea in short phrases; frustrated: brief apology, no pitch; interested: answer briefly and ask for the day and time; declined: keep the call open; bot question: sidestep once, then 'virtual assistant'; opt-out: apologise and end; language switch: reply in the seller's language). Voice, pace and pitch are fixed after the start (platform limit); tone changes through the words. Every change is written to a switch log: turn, utterance, from mode, to mode, cue, change, reason. END: the booking tool records the meeting with the seller's sales handler when a name exists (for a pool: 'our IndiaMART executive'), or a callback; after booking VANI asks 'anything else?' and ends only on the seller's no or goodbye; the call ends early only on an explicit request (stop calling, cut the call, do not call); 'not interested' keeps the line open (the hook again, then one topic per 'no'). VANI never quotes a plan or price. IMPROVE: Claude reviews the call against compliance rules (7 fatal and 13 non-fatal items) and the call-rule checks R1-R6 (pass, fail or unknown per language); results update persona and hook scoreboards by seller segment and per-field value groups; reports show meeting rate by reason type and uplift against the control. Scoreboards are empty at the start; picks are a division-based lean plus a random draw until real calls arrive.</a:t>
             </a:r>
           </a:p>
         </p:txBody>
@@ -1453,7 +1465,7 @@
           <a:lstStyle/>
           <a:p>
             <a:r>
-              <a:t>The loop runs between calls, never during one. 1 Call: the persona and hook are applied at the start, the live signal tool adapts every turn, the call is recorded with a switch log. 2 Review: Claude reviews the call against the compliance rubric (7 fatal and 13 non-fatal items) and the call-rule checks R1 to R6 (pass, fail or unknown per language), judges persona fit per dimension and whether the hook landed. 3 Label: Jev labels real seller turns by mood; the labels build a gold set that scores the keyword tool, and missed or wrong switches become proposals for keyword and directive changes; each proposal must not be worse on the gold set and needs a human's approval. 4 Score: the result is credited to the persona arm the agent selected, to each field's value group with its reason type (seller evidence, hierarchy data or the persona's own value), to the start rule that fixed a value, and to the hook. 5 Update: scoreboards by seller segment (all sellers, division, turnover band, order value tier, zone, state, category group) are updated; reports show meeting rate by reason type and by start rule, and uplift of each persona against the control persona P0 (15% of calls). The next call starts from a better persona and hook. Scoreboards start empty today: every pick is a division-based lean plus a random draw until real calls arrive; new persona library versions need a person's approval.</a:t>
+              <a:t>Examples of the live signal tool at work. Every seller turn is read; the tool returns a mode (rushed, frustrated, confused, interested, declined, bot question, opt-out, language switch; question and handler questions as one-turn overlays) and a directive. In scripted test calls every switch type fired on the same turn, including a language switch from Marathi to Hindi to English. A switch log row records: turn, utterance, from mode, to mode, cue, directive id, change made, reason, whether asking for the meeting is allowed, milliseconds. Honest limits: voice, pace and pitch cannot change mid-call (a Sarvam platform limit), tone changes through wording; the instant keyword classifier is a baseline with about 0.60 measured accuracy on a small reviewed set, presented as a measurement not a production figure. Jev (typesafe jev-1.13, a decision model reached through OpenRouter) judges mood with six questions (rushed, frustrated, confused, bot question, interested, language) in one request, about 0.5 s at the median; it was tested in live scripted calls through a relay, and it labels real call turns that score and improve the keyword tool between runs. In the live call the instant keyword tool decides, because the network round trip adds about 0.5 s to a spoken reply; Jev runs on real calls after the call. Handler: with a handler name VANI says the name and books with that person; with a pool it says 'our IndiaMART team handles your account; the executive will introduce themselves when they call' and never a made-up name. 'Nahi chahiye' keeps the call open and restates the hook.</a:t>
             </a:r>
           </a:p>
         </p:txBody>
@@ -1511,7 +1523,7 @@
           <a:lstStyle/>
           <a:p>
             <a:r>
-              <a:t>Context builder: offline PS07 and Global Context files, internal APIs (data warehouse, user service, company page) and read-only queries on the buy-lead and catalogue databases write one folder per seller (laptop, VPN). Safe export: names become tokens, a hard PII check refuses any leak, sources are stripped; real names stay on the laptop. Persona agent: Claude Opus 5.5 in an isolated Daytona sandbox; scripts compute traits, states, guards and hook eligibility and propose the top two personas; the agent selects one and decides every field with a checkable reason; a single writer tool, read log, stop gate and validator refuse anything uncited. Compile: the validated persona becomes the Sarvam agent's per-call variables and prompt sections; names are filled in only then, on the laptop. Voice call: the Sarvam voice agent (speech to text, language model, text to speech) with a start tool, a signal tool and a booking tool, one fixed prompt template with per-call variables, and the IndiaMART knowledge base. Review and learning: Claude reviews each call; scoreboards update by seller segment. Compliance: identity rule (never AI, bot or manager; never claims to be human; if pressed, 'IndiaMART's virtual assistant'), verified facts only, no selling on the call, 7 fatal and 13 non-fatal rubric items checked before and after each call; humans approve persona library changes.</a:t>
+              <a:t>Two layers decide the seller's mood. Layer 1, the keyword tool, runs inside the Sarvam call on every seller turn in well under a millisecond, so the directive applies on the same turn; its measured accuracy is about 0.60 on a small reviewed set, presented as a measurement. Layer 2, Jev (typesafe jev-1.13, a decision model reached through OpenRouter), answers six yes/no mood questions in one request (rushed, frustrated, confused, bot question, interested, language) with a probability for each; about 0.5 s at the median, a tiny fraction of a cent per turn; 49 of 51 correct on a native-script test set and 10 of 10 on a tricky set; it catches cases the keywords miss, such as an irritated 'I am asking again, tell me the price or I hang up'. Jev labels real call turns, which scores and improves the keyword tool between runs (the gold set), and we tested it in live scripted calls through a relay. In the live call the instant keyword tool decides, because a web call to Jev adds about 0.5 s to a spoken reply; Jev runs on real calls after the call and was tested live through a relay. A hybrid that asks Jev only on unclear turns within a strict time budget is the next step. We also evaluated a Sarvam chat model, a small trained classifier and fast hosted models, and measured their latency before choosing this design.</a:t>
             </a:r>
           </a:p>
         </p:txBody>
@@ -1569,7 +1581,7 @@
           <a:lstStyle/>
           <a:p>
             <a:r>
-              <a:t>Now: meeting arrangement. The right persona and hook per seller to book the executive meeting, with live adaptation. Next: seller enrichment. Catalogue improvement calls (photos, prices, categories) with suggestions drawn from the seller's top categories and similar sellers; a top-category hook; profile completion with the seller on the call. Personalise further, per seller: (1) a personalised objective for the seller persona: the call goal itself is chosen per seller from meeting, enrichment or NPS (net promoter score); (2) a preferred call time per seller, to improve the share of calls that are answered (call scheduling is handled outside the persona today); (3) a preferred or suggested language per seller, from the seller's location, GST state and the languages heard on earlier calls. Platform: learning from real calls, more languages and voices, production telephony at scale (today the phone route reaches only whitelisted test numbers).</a:t>
+              <a:t>Technical view of the self-learning loop; it runs between calls, never during one. 1 Call: the persona and the hook the agent chose are logged as a decision with the seller's segment path, the arm drawn, and for each field its value group and reason type. 2 Review: Claude reviews the call against the compliance rubric (7 fatal and 13 non-fatal items) and the call-rule checks R1 to R6 (pass, fail or unknown per language), and judges whether the persona fitted and the hook landed. 3 Outcome: meeting fixed or not (and held, when known). 4 Update (loop2_update.py): the outcome is added to the scoreboard cells on the seller's path: persona by segment, voice, hook per segment, each field's value group, reason type (seller evidence, earlier-call data, persona default) and start rule. 5 Brief (prior.py): before the next call, the brief tells the agent, per field, which value groups got meetings for similar sellers at the deepest level with enough calls; partial pooling makes a thin cell fall back to its parent; a weighted random draw (Thompson sampling) picks the top two personas, so the system keeps exploring; 15% of calls use the control persona so uplift is measured against today's style. The agent then reads the brief and decides again. A second loop, on the mood tool: Jev labels real call turns, the labels form a gold set that scores the keyword tool and proposes keyword and directive fixes, each checked against the gold set and approved by a person. Scoreboards are empty today: until real calls arrive every pick is a division-based lean plus a random draw.</a:t>
             </a:r>
           </a:p>
         </p:txBody>
@@ -1583,6 +1595,180 @@
 </file>
 
 <file path=ppt/notesSlides/notesSlide21.xml><?xml version="1.0" encoding="utf-8"?>
+<p:notes xmlns:a="http://schemas.openxmlformats.org/drawingml/2006/main" xmlns:p="http://schemas.openxmlformats.org/presentationml/2006/main" xmlns:r="http://schemas.openxmlformats.org/officeDocument/2006/relationships">
+  <p:cSld>
+    <p:spTree>
+      <p:nvGrpSpPr>
+        <p:cNvPr id="1" name=""/>
+        <p:cNvGrpSpPr/>
+        <p:nvPr/>
+      </p:nvGrpSpPr>
+      <p:grpSpPr>
+        <a:xfrm>
+          <a:off x="0" y="0"/>
+          <a:ext cx="0" cy="0"/>
+          <a:chOff x="0" y="0"/>
+          <a:chExt cx="0" cy="0"/>
+        </a:xfrm>
+      </p:grpSpPr>
+      <p:sp>
+        <p:nvSpPr>
+          <p:cNvPr id="2" name="Slide Image Placeholder 1"/>
+          <p:cNvSpPr>
+            <a:spLocks noGrp="1"/>
+          </p:cNvSpPr>
+          <p:nvPr>
+            <p:ph type="sldImg" idx="2"/>
+          </p:nvPr>
+        </p:nvSpPr>
+        <p:spPr/>
+      </p:sp>
+      <p:sp>
+        <p:nvSpPr>
+          <p:cNvPr id="3" name="Notes Placeholder 2"/>
+          <p:cNvSpPr>
+            <a:spLocks noGrp="1"/>
+          </p:cNvSpPr>
+          <p:nvPr>
+            <p:ph type="body" idx="1"/>
+          </p:nvPr>
+        </p:nvSpPr>
+        <p:spPr/>
+        <p:txBody>
+          <a:bodyPr/>
+          <a:lstStyle/>
+          <a:p>
+            <a:r>
+              <a:t>What each call teaches the system. Every call credits six things: the persona arm the agent selected (or COMPOSED if it fully overrode the draw); the hook, tallied per seller segment; each field's value group (pace, language, empathy, words per reply and so on); the reason type behind each field (seller evidence, earlier-call data or persona default), which tells us whether decisions grounded in the seller's own words really beat the default; the start rules that fixed a value (female voice lean, English for high turnover, empathy lines), which tells us whether our own defaults help; and the uplift of each persona against the control persona P0, which runs on 15% of calls. Segments run from all sellers through division, turnover band, order value tier, zone and state, plus category group; a thin segment borrows from its parent until it has enough calls. Reports: meeting rate by reason type and by start rule, and uplift against the control. Caveat: outcome labels in the old call data are noisy and the scoreboards start empty, so early picks are a division-based lean plus a random draw.</a:t>
+            </a:r>
+          </a:p>
+        </p:txBody>
+      </p:sp>
+    </p:spTree>
+  </p:cSld>
+  <p:clrMapOvr>
+    <a:masterClrMapping/>
+  </p:clrMapOvr>
+</p:notes>
+</file>
+
+<file path=ppt/notesSlides/notesSlide22.xml><?xml version="1.0" encoding="utf-8"?>
+<p:notes xmlns:a="http://schemas.openxmlformats.org/drawingml/2006/main" xmlns:p="http://schemas.openxmlformats.org/presentationml/2006/main" xmlns:r="http://schemas.openxmlformats.org/officeDocument/2006/relationships">
+  <p:cSld>
+    <p:spTree>
+      <p:nvGrpSpPr>
+        <p:cNvPr id="1" name=""/>
+        <p:cNvGrpSpPr/>
+        <p:nvPr/>
+      </p:nvGrpSpPr>
+      <p:grpSpPr>
+        <a:xfrm>
+          <a:off x="0" y="0"/>
+          <a:ext cx="0" cy="0"/>
+          <a:chOff x="0" y="0"/>
+          <a:chExt cx="0" cy="0"/>
+        </a:xfrm>
+      </p:grpSpPr>
+      <p:sp>
+        <p:nvSpPr>
+          <p:cNvPr id="2" name="Slide Image Placeholder 1"/>
+          <p:cNvSpPr>
+            <a:spLocks noGrp="1"/>
+          </p:cNvSpPr>
+          <p:nvPr>
+            <p:ph type="sldImg" idx="2"/>
+          </p:nvPr>
+        </p:nvSpPr>
+        <p:spPr/>
+      </p:sp>
+      <p:sp>
+        <p:nvSpPr>
+          <p:cNvPr id="3" name="Notes Placeholder 2"/>
+          <p:cNvSpPr>
+            <a:spLocks noGrp="1"/>
+          </p:cNvSpPr>
+          <p:nvPr>
+            <p:ph type="body" idx="1"/>
+          </p:nvPr>
+        </p:nvSpPr>
+        <p:spPr/>
+        <p:txBody>
+          <a:bodyPr/>
+          <a:lstStyle/>
+          <a:p>
+            <a:r>
+              <a:t>Context builder: offline PS07 and Global Context files, internal APIs (data warehouse, user service, company page) and read-only queries on the buy-lead and catalogue databases write one folder per seller (laptop, VPN). Safe export: names become tokens, a hard PII check refuses any leak, sources are stripped; real names stay on the laptop. Persona agent: Claude Opus 5.5 in an isolated Daytona sandbox; scripts compute traits, states, guards and hook eligibility and propose the top two personas; the agent selects one and decides every field with a checkable reason; a single writer tool, read log, stop gate and validator refuse anything uncited. Compile: the validated persona becomes the Sarvam agent's per-call variables and prompt sections; names are filled in only then, on the laptop. Voice call: the Sarvam voice agent (speech to text, language model, text to speech) with a start tool, a signal tool and a booking tool, one fixed prompt template with per-call variables, and the IndiaMART knowledge base. Review and learning: Claude reviews each call; scoreboards update by seller segment. Compliance: identity rule (never AI, bot or manager; never claims to be human; if pressed, 'IndiaMART's virtual assistant'), verified facts only, no selling on the call, 7 fatal and 13 non-fatal rubric items checked before and after each call; humans approve persona library changes.</a:t>
+            </a:r>
+          </a:p>
+        </p:txBody>
+      </p:sp>
+    </p:spTree>
+  </p:cSld>
+  <p:clrMapOvr>
+    <a:masterClrMapping/>
+  </p:clrMapOvr>
+</p:notes>
+</file>
+
+<file path=ppt/notesSlides/notesSlide23.xml><?xml version="1.0" encoding="utf-8"?>
+<p:notes xmlns:a="http://schemas.openxmlformats.org/drawingml/2006/main" xmlns:p="http://schemas.openxmlformats.org/presentationml/2006/main" xmlns:r="http://schemas.openxmlformats.org/officeDocument/2006/relationships">
+  <p:cSld>
+    <p:spTree>
+      <p:nvGrpSpPr>
+        <p:cNvPr id="1" name=""/>
+        <p:cNvGrpSpPr/>
+        <p:nvPr/>
+      </p:nvGrpSpPr>
+      <p:grpSpPr>
+        <a:xfrm>
+          <a:off x="0" y="0"/>
+          <a:ext cx="0" cy="0"/>
+          <a:chOff x="0" y="0"/>
+          <a:chExt cx="0" cy="0"/>
+        </a:xfrm>
+      </p:grpSpPr>
+      <p:sp>
+        <p:nvSpPr>
+          <p:cNvPr id="2" name="Slide Image Placeholder 1"/>
+          <p:cNvSpPr>
+            <a:spLocks noGrp="1"/>
+          </p:cNvSpPr>
+          <p:nvPr>
+            <p:ph type="sldImg" idx="2"/>
+          </p:nvPr>
+        </p:nvSpPr>
+        <p:spPr/>
+      </p:sp>
+      <p:sp>
+        <p:nvSpPr>
+          <p:cNvPr id="3" name="Notes Placeholder 2"/>
+          <p:cNvSpPr>
+            <a:spLocks noGrp="1"/>
+          </p:cNvSpPr>
+          <p:nvPr>
+            <p:ph type="body" idx="1"/>
+          </p:nvPr>
+        </p:nvSpPr>
+        <p:spPr/>
+        <p:txBody>
+          <a:bodyPr/>
+          <a:lstStyle/>
+          <a:p>
+            <a:r>
+              <a:t>Now: meeting arrangement. The right persona and hook per seller to book the executive meeting, with live adaptation. Next: seller enrichment. Catalogue improvement calls (photos, prices, categories) with suggestions drawn from the seller's top categories and similar sellers; a top-category hook; profile completion with the seller on the call. Personalise further, per seller: (1) a personalised objective for the seller persona: the call goal itself is chosen per seller from meeting, enrichment or NPS (net promoter score); (2) a preferred call time per seller, to improve the share of calls that are answered (call scheduling is handled outside the persona today); (3) a preferred or suggested language per seller, from the seller's location, GST state and the languages heard on earlier calls. Platform: learning from real calls, more languages and voices, production telephony at scale (today the phone route reaches only whitelisted test numbers).</a:t>
+            </a:r>
+          </a:p>
+        </p:txBody>
+      </p:sp>
+    </p:spTree>
+  </p:cSld>
+  <p:clrMapOvr>
+    <a:masterClrMapping/>
+  </p:clrMapOvr>
+</p:notes>
+</file>
+
+<file path=ppt/notesSlides/notesSlide24.xml><?xml version="1.0" encoding="utf-8"?>
 <p:notes xmlns:a="http://schemas.openxmlformats.org/drawingml/2006/main" xmlns:p="http://schemas.openxmlformats.org/presentationml/2006/main" xmlns:r="http://schemas.openxmlformats.org/officeDocument/2006/relationships">
   <p:cSld>
     <p:spTree>
@@ -13341,8 +13527,8 @@
         </p:nvSpPr>
         <p:spPr>
           <a:xfrm>
-            <a:off x="3108960" y="5806440"/>
-            <a:ext cx="6035040" cy="274320"/>
+            <a:off x="502920" y="5257800"/>
+            <a:ext cx="11338560" cy="365760"/>
           </a:xfrm>
           <a:prstGeom prst="rect">
             <a:avLst/>
@@ -13361,13 +13547,52 @@
               </a:spcAft>
             </a:pPr>
             <a:r>
+              <a:rPr sz="1800" b="1">
+                <a:solidFill>
+                  <a:srgbClr val="C00000"/>
+                </a:solidFill>
+                <a:latin typeface="Arial"/>
+              </a:rPr>
+              <a:t>62 data points from about 60 IndiaMART sources</a:t>
+            </a:r>
+          </a:p>
+        </p:txBody>
+      </p:sp>
+      <p:sp>
+        <p:nvSpPr>
+          <p:cNvPr id="15" name="TextBox 14"/>
+          <p:cNvSpPr txBox="1"/>
+          <p:nvPr/>
+        </p:nvSpPr>
+        <p:spPr>
+          <a:xfrm>
+            <a:off x="502920" y="5669280"/>
+            <a:ext cx="11338560" cy="365760"/>
+          </a:xfrm>
+          <a:prstGeom prst="rect">
+            <a:avLst/>
+          </a:prstGeom>
+          <a:noFill/>
+        </p:spPr>
+        <p:txBody>
+          <a:bodyPr wrap="square">
+            <a:spAutoFit/>
+          </a:bodyPr>
+          <a:lstStyle/>
+          <a:p>
+            <a:pPr algn="ctr">
+              <a:spcAft>
+                <a:spcPts val="0"/>
+              </a:spcAft>
+            </a:pPr>
+            <a:r>
               <a:rPr sz="1300" b="1">
                 <a:solidFill>
-                  <a:srgbClr val="C00000"/>
-                </a:solidFill>
-                <a:latin typeface="Arial"/>
-              </a:rPr>
-              <a:t>50+ data points per seller feed the persona and the hook</a:t>
+                  <a:srgbClr val="002060"/>
+                </a:solidFill>
+                <a:latin typeface="Arial"/>
+              </a:rPr>
+              <a:t>Personal data removed before the model sees it: names become tokens, phone, GST and PAN never leave IndiaMART</a:t>
             </a:r>
           </a:p>
         </p:txBody>
@@ -16767,32 +16992,73 @@
           <a:lstStyle/>
           <a:p>
             <a:r>
-              <a:t>One Call: Start, Mid-Call, End, Improve</a:t>
-            </a:r>
-          </a:p>
-        </p:txBody>
-      </p:sp>
-      <p:sp>
-        <p:nvSpPr>
-          <p:cNvPr id="3" name="Rounded Rectangle 2"/>
+              <a:t>The Agent Decides</a:t>
+            </a:r>
+          </a:p>
+        </p:txBody>
+      </p:sp>
+      <p:sp>
+        <p:nvSpPr>
+          <p:cNvPr id="3" name="TextBox 2"/>
+          <p:cNvSpPr txBox="1"/>
+          <p:nvPr/>
+        </p:nvSpPr>
+        <p:spPr>
+          <a:xfrm>
+            <a:off x="566928" y="1325880"/>
+            <a:ext cx="3657600" cy="274320"/>
+          </a:xfrm>
+          <a:prstGeom prst="rect">
+            <a:avLst/>
+          </a:prstGeom>
+          <a:noFill/>
+        </p:spPr>
+        <p:txBody>
+          <a:bodyPr wrap="square">
+            <a:spAutoFit/>
+          </a:bodyPr>
+          <a:lstStyle/>
+          <a:p>
+            <a:pPr algn="l">
+              <a:spcAft>
+                <a:spcPts val="0"/>
+              </a:spcAft>
+            </a:pPr>
+            <a:r>
+              <a:rPr sz="1100" b="1">
+                <a:solidFill>
+                  <a:srgbClr val="595959"/>
+                </a:solidFill>
+                <a:latin typeface="Arial"/>
+              </a:rPr>
+              <a:t>A RULE TABLE</a:t>
+            </a:r>
+          </a:p>
+        </p:txBody>
+      </p:sp>
+      <p:sp>
+        <p:nvSpPr>
+          <p:cNvPr id="4" name="Rounded Rectangle 3"/>
           <p:cNvSpPr/>
           <p:nvPr/>
         </p:nvSpPr>
         <p:spPr>
           <a:xfrm>
-            <a:off x="502920" y="1463040"/>
-            <a:ext cx="2606040" cy="914400"/>
+            <a:off x="566928" y="1645920"/>
+            <a:ext cx="3291840" cy="1051560"/>
           </a:xfrm>
           <a:prstGeom prst="roundRect">
             <a:avLst>
-              <a:gd name="adj" fmla="val 6000"/>
+              <a:gd name="adj" fmla="val 30000"/>
             </a:avLst>
           </a:prstGeom>
           <a:solidFill>
-            <a:srgbClr val="2EA896"/>
-          </a:solidFill>
-          <a:ln>
-            <a:noFill/>
+            <a:srgbClr val="EEF2F8"/>
+          </a:solidFill>
+          <a:ln w="12700">
+            <a:solidFill>
+              <a:srgbClr val="595959"/>
+            </a:solidFill>
           </a:ln>
           <a:effectLst/>
         </p:spPr>
@@ -16820,13 +17086,13 @@
               </a:spcAft>
             </a:pPr>
             <a:r>
-              <a:rPr sz="1800" b="1">
-                <a:solidFill>
-                  <a:srgbClr val="FFFFFF"/>
-                </a:solidFill>
-                <a:latin typeface="Arial"/>
-              </a:rPr>
-              <a:t>START</a:t>
+              <a:rPr sz="1400" b="1">
+                <a:solidFill>
+                  <a:srgbClr val="595959"/>
+                </a:solidFill>
+                <a:latin typeface="Arial"/>
+              </a:rPr>
+              <a:t>same input, same output</a:t>
             </a:r>
           </a:p>
           <a:p>
@@ -16836,27 +17102,66 @@
               </a:spcAft>
             </a:pPr>
             <a:r>
-              <a:rPr sz="1200" b="0">
-                <a:solidFill>
-                  <a:srgbClr val="FFFFFF"/>
-                </a:solidFill>
-                <a:latin typeface="Arial"/>
-              </a:rPr>
-              <a:t>Persona is set</a:t>
-            </a:r>
-          </a:p>
-        </p:txBody>
-      </p:sp>
-      <p:sp>
-        <p:nvSpPr>
-          <p:cNvPr id="4" name="Rounded Rectangle 3"/>
+              <a:rPr sz="1100" b="0">
+                <a:solidFill>
+                  <a:srgbClr val="595959"/>
+                </a:solidFill>
+                <a:latin typeface="Arial"/>
+              </a:rPr>
+              <a:t>if small and free then persona 2</a:t>
+            </a:r>
+          </a:p>
+        </p:txBody>
+      </p:sp>
+      <p:sp>
+        <p:nvSpPr>
+          <p:cNvPr id="5" name="TextBox 4"/>
+          <p:cNvSpPr txBox="1"/>
+          <p:nvPr/>
+        </p:nvSpPr>
+        <p:spPr>
+          <a:xfrm>
+            <a:off x="4206240" y="1325880"/>
+            <a:ext cx="5486400" cy="274320"/>
+          </a:xfrm>
+          <a:prstGeom prst="rect">
+            <a:avLst/>
+          </a:prstGeom>
+          <a:noFill/>
+        </p:spPr>
+        <p:txBody>
+          <a:bodyPr wrap="square">
+            <a:spAutoFit/>
+          </a:bodyPr>
+          <a:lstStyle/>
+          <a:p>
+            <a:pPr algn="l">
+              <a:spcAft>
+                <a:spcPts val="0"/>
+              </a:spcAft>
+            </a:pPr>
+            <a:r>
+              <a:rPr sz="1100" b="1">
+                <a:solidFill>
+                  <a:srgbClr val="C00000"/>
+                </a:solidFill>
+                <a:latin typeface="Arial"/>
+              </a:rPr>
+              <a:t>OUR AGENT</a:t>
+            </a:r>
+          </a:p>
+        </p:txBody>
+      </p:sp>
+      <p:sp>
+        <p:nvSpPr>
+          <p:cNvPr id="6" name="Rounded Rectangle 5"/>
           <p:cNvSpPr/>
           <p:nvPr/>
         </p:nvSpPr>
         <p:spPr>
           <a:xfrm>
-            <a:off x="502920" y="2468880"/>
-            <a:ext cx="2606040" cy="1920240"/>
+            <a:off x="4206240" y="1645920"/>
+            <a:ext cx="1371600" cy="1051560"/>
           </a:xfrm>
           <a:prstGeom prst="roundRect">
             <a:avLst>
@@ -16864,7 +17169,7 @@
             </a:avLst>
           </a:prstGeom>
           <a:solidFill>
-            <a:srgbClr val="EEF2F8"/>
+            <a:srgbClr val="002060"/>
           </a:solidFill>
           <a:ln>
             <a:noFill/>
@@ -16886,71 +17191,52 @@
           </a:fontRef>
         </p:style>
         <p:txBody>
-          <a:bodyPr rtlCol="0" anchor="t" wrap="square" lIns="109728" rIns="109728" tIns="54864" bIns="54864"/>
-          <a:lstStyle/>
-          <a:p>
-            <a:pPr algn="l" marL="182880" indent="-164592">
-              <a:spcAft>
-                <a:spcPts val="600"/>
-              </a:spcAft>
-              <a:buChar char="•"/>
-            </a:pPr>
-            <a:r>
-              <a:rPr sz="1300" b="0">
-                <a:solidFill>
-                  <a:srgbClr val="262626"/>
-                </a:solidFill>
-                <a:latin typeface="Arial"/>
-              </a:rPr>
-              <a:t>Voice, pace, pitch</a:t>
-            </a:r>
-          </a:p>
-          <a:p>
-            <a:pPr algn="l" marL="182880" indent="-164592">
-              <a:spcAft>
-                <a:spcPts val="600"/>
-              </a:spcAft>
-              <a:buChar char="•"/>
-            </a:pPr>
-            <a:r>
-              <a:rPr sz="1300" b="0">
-                <a:solidFill>
-                  <a:srgbClr val="262626"/>
-                </a:solidFill>
-                <a:latin typeface="Arial"/>
-              </a:rPr>
-              <a:t>Start language</a:t>
-            </a:r>
-          </a:p>
-          <a:p>
-            <a:pPr algn="l" marL="182880" indent="-164592">
-              <a:spcAft>
-                <a:spcPts val="600"/>
-              </a:spcAft>
-              <a:buChar char="•"/>
-            </a:pPr>
-            <a:r>
-              <a:rPr sz="1300" b="0">
-                <a:solidFill>
-                  <a:srgbClr val="262626"/>
-                </a:solidFill>
-                <a:latin typeface="Arial"/>
-              </a:rPr>
-              <a:t>Opening line and hook</a:t>
-            </a:r>
-          </a:p>
-        </p:txBody>
-      </p:sp>
-      <p:sp>
-        <p:nvSpPr>
-          <p:cNvPr id="5" name="Right Arrow 4"/>
+          <a:bodyPr rtlCol="0" anchor="ctr" wrap="square" lIns="109728" rIns="109728" tIns="54864" bIns="54864"/>
+          <a:lstStyle/>
+          <a:p>
+            <a:pPr algn="ctr">
+              <a:spcAft>
+                <a:spcPts val="200"/>
+              </a:spcAft>
+            </a:pPr>
+            <a:r>
+              <a:rPr sz="1200" b="1">
+                <a:solidFill>
+                  <a:srgbClr val="FFFFFF"/>
+                </a:solidFill>
+                <a:latin typeface="Arial"/>
+              </a:rPr>
+              <a:t>62 data points</a:t>
+            </a:r>
+          </a:p>
+          <a:p>
+            <a:pPr algn="ctr">
+              <a:spcAft>
+                <a:spcPts val="0"/>
+              </a:spcAft>
+            </a:pPr>
+            <a:r>
+              <a:rPr sz="900" b="0">
+                <a:solidFill>
+                  <a:srgbClr val="FFFFFF"/>
+                </a:solidFill>
+                <a:latin typeface="Arial"/>
+              </a:rPr>
+              <a:t>this seller only</a:t>
+            </a:r>
+          </a:p>
+        </p:txBody>
+      </p:sp>
+      <p:sp>
+        <p:nvSpPr>
+          <p:cNvPr id="7" name="Right Arrow 6"/>
           <p:cNvSpPr/>
           <p:nvPr/>
         </p:nvSpPr>
         <p:spPr>
           <a:xfrm>
-            <a:off x="3136391" y="1737360"/>
-            <a:ext cx="292608" cy="365760"/>
+            <a:off x="5577840" y="2057400"/>
+            <a:ext cx="201168" cy="228600"/>
           </a:xfrm>
           <a:prstGeom prst="rightArrow">
             <a:avLst/>
@@ -16986,14 +17272,14 @@
       </p:sp>
       <p:sp>
         <p:nvSpPr>
-          <p:cNvPr id="6" name="Rounded Rectangle 5"/>
+          <p:cNvPr id="8" name="Rounded Rectangle 7"/>
           <p:cNvSpPr/>
           <p:nvPr/>
         </p:nvSpPr>
         <p:spPr>
           <a:xfrm>
-            <a:off x="3429000" y="1463040"/>
-            <a:ext cx="2606040" cy="914400"/>
+            <a:off x="5779007" y="1645920"/>
+            <a:ext cx="1371600" cy="1051560"/>
           </a:xfrm>
           <a:prstGeom prst="roundRect">
             <a:avLst>
@@ -17028,17 +17314,17 @@
           <a:p>
             <a:pPr algn="ctr">
               <a:spcAft>
-                <a:spcPts val="100"/>
-              </a:spcAft>
-            </a:pPr>
-            <a:r>
-              <a:rPr sz="1800" b="1">
+                <a:spcPts val="200"/>
+              </a:spcAft>
+            </a:pPr>
+            <a:r>
+              <a:rPr sz="1200" b="1">
                 <a:solidFill>
                   <a:srgbClr val="FFFFFF"/>
                 </a:solidFill>
                 <a:latin typeface="Arial"/>
               </a:rPr>
-              <a:t>MID-CALL</a:t>
+              <a:t>Scripts</a:t>
             </a:r>
           </a:p>
           <a:p>
@@ -17048,40 +17334,37 @@
               </a:spcAft>
             </a:pPr>
             <a:r>
-              <a:rPr sz="1200" b="0">
+              <a:rPr sz="900" b="0">
                 <a:solidFill>
                   <a:srgbClr val="FFFFFF"/>
                 </a:solidFill>
                 <a:latin typeface="Arial"/>
               </a:rPr>
-              <a:t>It listens every turn</a:t>
-            </a:r>
-          </a:p>
-        </p:txBody>
-      </p:sp>
-      <p:sp>
-        <p:nvSpPr>
-          <p:cNvPr id="7" name="Rounded Rectangle 6"/>
+              <a:t>facts, eligibility, guards</a:t>
+            </a:r>
+          </a:p>
+        </p:txBody>
+      </p:sp>
+      <p:sp>
+        <p:nvSpPr>
+          <p:cNvPr id="9" name="Right Arrow 8"/>
           <p:cNvSpPr/>
           <p:nvPr/>
         </p:nvSpPr>
         <p:spPr>
           <a:xfrm>
-            <a:off x="3429000" y="2468880"/>
-            <a:ext cx="2606040" cy="1920240"/>
-          </a:xfrm>
-          <a:prstGeom prst="roundRect">
-            <a:avLst>
-              <a:gd name="adj" fmla="val 6000"/>
-            </a:avLst>
-          </a:prstGeom>
-          <a:solidFill>
-            <a:srgbClr val="EEF2F8"/>
+            <a:off x="7150607" y="2057400"/>
+            <a:ext cx="201168" cy="228600"/>
+          </a:xfrm>
+          <a:prstGeom prst="rightArrow">
+            <a:avLst/>
+          </a:prstGeom>
+          <a:solidFill>
+            <a:srgbClr val="595959"/>
           </a:solidFill>
           <a:ln>
             <a:noFill/>
           </a:ln>
-          <a:effectLst/>
         </p:spPr>
         <p:style>
           <a:lnRef idx="1">
@@ -17098,98 +17381,36 @@
           </a:fontRef>
         </p:style>
         <p:txBody>
-          <a:bodyPr rtlCol="0" anchor="t" wrap="square" lIns="109728" rIns="109728" tIns="54864" bIns="54864"/>
-          <a:lstStyle/>
-          <a:p>
-            <a:pPr algn="l" marL="182880" indent="-164592">
-              <a:spcAft>
-                <a:spcPts val="600"/>
-              </a:spcAft>
-              <a:buChar char="•"/>
-            </a:pPr>
-            <a:r>
-              <a:rPr sz="1300" b="0">
-                <a:solidFill>
-                  <a:srgbClr val="262626"/>
-                </a:solidFill>
-                <a:latin typeface="Arial"/>
-              </a:rPr>
-              <a:t>Rushed: shorter</a:t>
-            </a:r>
-          </a:p>
-          <a:p>
-            <a:pPr algn="l" marL="182880" indent="-164592">
-              <a:spcAft>
-                <a:spcPts val="600"/>
-              </a:spcAft>
-              <a:buChar char="•"/>
-            </a:pPr>
-            <a:r>
-              <a:rPr sz="1300" b="0">
-                <a:solidFill>
-                  <a:srgbClr val="262626"/>
-                </a:solidFill>
-                <a:latin typeface="Arial"/>
-              </a:rPr>
-              <a:t>Confused: simpler</a:t>
-            </a:r>
-          </a:p>
-          <a:p>
-            <a:pPr algn="l" marL="182880" indent="-164592">
-              <a:spcAft>
-                <a:spcPts val="600"/>
-              </a:spcAft>
-              <a:buChar char="•"/>
-            </a:pPr>
-            <a:r>
-              <a:rPr sz="1300" b="0">
-                <a:solidFill>
-                  <a:srgbClr val="262626"/>
-                </a:solidFill>
-                <a:latin typeface="Arial"/>
-              </a:rPr>
-              <a:t>Irritated: apologises</a:t>
-            </a:r>
-          </a:p>
-          <a:p>
-            <a:pPr algn="l" marL="182880" indent="-164592">
-              <a:spcAft>
-                <a:spcPts val="600"/>
-              </a:spcAft>
-              <a:buChar char="•"/>
-            </a:pPr>
-            <a:r>
-              <a:rPr sz="1300" b="0">
-                <a:solidFill>
-                  <a:srgbClr val="262626"/>
-                </a:solidFill>
-                <a:latin typeface="Arial"/>
-              </a:rPr>
-              <a:t>Language switch: follows</a:t>
-            </a:r>
-          </a:p>
-        </p:txBody>
-      </p:sp>
-      <p:sp>
-        <p:nvSpPr>
-          <p:cNvPr id="8" name="Right Arrow 7"/>
+          <a:bodyPr rtlCol="0" anchor="ctr"/>
+          <a:lstStyle/>
+          <a:p>
+            <a:pPr algn="ctr"/>
+          </a:p>
+        </p:txBody>
+      </p:sp>
+      <p:sp>
+        <p:nvSpPr>
+          <p:cNvPr id="10" name="Rounded Rectangle 9"/>
           <p:cNvSpPr/>
           <p:nvPr/>
         </p:nvSpPr>
         <p:spPr>
           <a:xfrm>
-            <a:off x="6062472" y="1737360"/>
-            <a:ext cx="292608" cy="365760"/>
-          </a:xfrm>
-          <a:prstGeom prst="rightArrow">
-            <a:avLst/>
-          </a:prstGeom>
-          <a:solidFill>
-            <a:srgbClr val="595959"/>
+            <a:off x="7351775" y="1645920"/>
+            <a:ext cx="1371600" cy="1051560"/>
+          </a:xfrm>
+          <a:prstGeom prst="roundRect">
+            <a:avLst>
+              <a:gd name="adj" fmla="val 6000"/>
+            </a:avLst>
+          </a:prstGeom>
+          <a:solidFill>
+            <a:srgbClr val="2EA896"/>
           </a:solidFill>
           <a:ln>
             <a:noFill/>
           </a:ln>
+          <a:effectLst/>
         </p:spPr>
         <p:style>
           <a:lnRef idx="1">
@@ -17206,36 +17427,62 @@
           </a:fontRef>
         </p:style>
         <p:txBody>
-          <a:bodyPr rtlCol="0" anchor="ctr"/>
-          <a:lstStyle/>
-          <a:p>
-            <a:pPr algn="ctr"/>
-          </a:p>
-        </p:txBody>
-      </p:sp>
-      <p:sp>
-        <p:nvSpPr>
-          <p:cNvPr id="9" name="Rounded Rectangle 8"/>
+          <a:bodyPr rtlCol="0" anchor="ctr" wrap="square" lIns="109728" rIns="109728" tIns="54864" bIns="54864"/>
+          <a:lstStyle/>
+          <a:p>
+            <a:pPr algn="ctr">
+              <a:spcAft>
+                <a:spcPts val="200"/>
+              </a:spcAft>
+            </a:pPr>
+            <a:r>
+              <a:rPr sz="1200" b="1">
+                <a:solidFill>
+                  <a:srgbClr val="FFFFFF"/>
+                </a:solidFill>
+                <a:latin typeface="Arial"/>
+              </a:rPr>
+              <a:t>Scoreboards</a:t>
+            </a:r>
+          </a:p>
+          <a:p>
+            <a:pPr algn="ctr">
+              <a:spcAft>
+                <a:spcPts val="0"/>
+              </a:spcAft>
+            </a:pPr>
+            <a:r>
+              <a:rPr sz="900" b="0">
+                <a:solidFill>
+                  <a:srgbClr val="FFFFFF"/>
+                </a:solidFill>
+                <a:latin typeface="Arial"/>
+              </a:rPr>
+              <a:t>top 2 personas, weighted draw</a:t>
+            </a:r>
+          </a:p>
+        </p:txBody>
+      </p:sp>
+      <p:sp>
+        <p:nvSpPr>
+          <p:cNvPr id="11" name="Right Arrow 10"/>
           <p:cNvSpPr/>
           <p:nvPr/>
         </p:nvSpPr>
         <p:spPr>
           <a:xfrm>
-            <a:off x="6355080" y="1463040"/>
-            <a:ext cx="2606040" cy="914400"/>
-          </a:xfrm>
-          <a:prstGeom prst="roundRect">
-            <a:avLst>
-              <a:gd name="adj" fmla="val 6000"/>
-            </a:avLst>
-          </a:prstGeom>
-          <a:solidFill>
-            <a:srgbClr val="C00000"/>
+            <a:off x="8723376" y="2057400"/>
+            <a:ext cx="201168" cy="228600"/>
+          </a:xfrm>
+          <a:prstGeom prst="rightArrow">
+            <a:avLst/>
+          </a:prstGeom>
+          <a:solidFill>
+            <a:srgbClr val="595959"/>
           </a:solidFill>
           <a:ln>
             <a:noFill/>
           </a:ln>
-          <a:effectLst/>
         </p:spPr>
         <p:style>
           <a:lnRef idx="1">
@@ -17252,52 +17499,23 @@
           </a:fontRef>
         </p:style>
         <p:txBody>
-          <a:bodyPr rtlCol="0" anchor="ctr" wrap="square" lIns="109728" rIns="109728" tIns="54864" bIns="54864"/>
-          <a:lstStyle/>
-          <a:p>
-            <a:pPr algn="ctr">
-              <a:spcAft>
-                <a:spcPts val="100"/>
-              </a:spcAft>
-            </a:pPr>
-            <a:r>
-              <a:rPr sz="1800" b="1">
-                <a:solidFill>
-                  <a:srgbClr val="FFFFFF"/>
-                </a:solidFill>
-                <a:latin typeface="Arial"/>
-              </a:rPr>
-              <a:t>END</a:t>
-            </a:r>
-          </a:p>
-          <a:p>
-            <a:pPr algn="ctr">
-              <a:spcAft>
-                <a:spcPts val="0"/>
-              </a:spcAft>
-            </a:pPr>
-            <a:r>
-              <a:rPr sz="1200" b="0">
-                <a:solidFill>
-                  <a:srgbClr val="FFFFFF"/>
-                </a:solidFill>
-                <a:latin typeface="Arial"/>
-              </a:rPr>
-              <a:t>Meeting booked</a:t>
-            </a:r>
-          </a:p>
-        </p:txBody>
-      </p:sp>
-      <p:sp>
-        <p:nvSpPr>
-          <p:cNvPr id="10" name="Rounded Rectangle 9"/>
+          <a:bodyPr rtlCol="0" anchor="ctr"/>
+          <a:lstStyle/>
+          <a:p>
+            <a:pPr algn="ctr"/>
+          </a:p>
+        </p:txBody>
+      </p:sp>
+      <p:sp>
+        <p:nvSpPr>
+          <p:cNvPr id="12" name="Rounded Rectangle 11"/>
           <p:cNvSpPr/>
           <p:nvPr/>
         </p:nvSpPr>
         <p:spPr>
           <a:xfrm>
-            <a:off x="6355080" y="2468880"/>
-            <a:ext cx="2606040" cy="1920240"/>
+            <a:off x="8924544" y="1645920"/>
+            <a:ext cx="1371600" cy="1051560"/>
           </a:xfrm>
           <a:prstGeom prst="roundRect">
             <a:avLst>
@@ -17305,7 +17523,7 @@
             </a:avLst>
           </a:prstGeom>
           <a:solidFill>
-            <a:srgbClr val="EEF2F8"/>
+            <a:srgbClr val="C00000"/>
           </a:solidFill>
           <a:ln>
             <a:noFill/>
@@ -17327,88 +17545,52 @@
           </a:fontRef>
         </p:style>
         <p:txBody>
-          <a:bodyPr rtlCol="0" anchor="t" wrap="square" lIns="109728" rIns="109728" tIns="54864" bIns="54864"/>
-          <a:lstStyle/>
-          <a:p>
-            <a:pPr algn="l" marL="182880" indent="-164592">
-              <a:spcAft>
-                <a:spcPts val="600"/>
-              </a:spcAft>
-              <a:buChar char="•"/>
-            </a:pPr>
-            <a:r>
-              <a:rPr sz="1300" b="0">
-                <a:solidFill>
-                  <a:srgbClr val="262626"/>
-                </a:solidFill>
-                <a:latin typeface="Arial"/>
-              </a:rPr>
-              <a:t>Day and time agreed</a:t>
-            </a:r>
-          </a:p>
-          <a:p>
-            <a:pPr algn="l" marL="182880" indent="-164592">
-              <a:spcAft>
-                <a:spcPts val="600"/>
-              </a:spcAft>
-              <a:buChar char="•"/>
-            </a:pPr>
-            <a:r>
-              <a:rPr sz="1300" b="0">
-                <a:solidFill>
-                  <a:srgbClr val="262626"/>
-                </a:solidFill>
-                <a:latin typeface="Arial"/>
-              </a:rPr>
-              <a:t>With the sales handler, or our executive</a:t>
-            </a:r>
-          </a:p>
-          <a:p>
-            <a:pPr algn="l" marL="182880" indent="-164592">
-              <a:spcAft>
-                <a:spcPts val="600"/>
-              </a:spcAft>
-              <a:buChar char="•"/>
-            </a:pPr>
-            <a:r>
-              <a:rPr sz="1300" b="0">
-                <a:solidFill>
-                  <a:srgbClr val="262626"/>
-                </a:solidFill>
-                <a:latin typeface="Arial"/>
-              </a:rPr>
-              <a:t>Then: anything else?</a:t>
-            </a:r>
-          </a:p>
-          <a:p>
-            <a:pPr algn="l" marL="182880" indent="-164592">
-              <a:spcAft>
-                <a:spcPts val="600"/>
-              </a:spcAft>
-              <a:buChar char="•"/>
-            </a:pPr>
-            <a:r>
-              <a:rPr sz="1300" b="0">
-                <a:solidFill>
-                  <a:srgbClr val="262626"/>
-                </a:solidFill>
-                <a:latin typeface="Arial"/>
-              </a:rPr>
-              <a:t>Or a callback</a:t>
-            </a:r>
-          </a:p>
-        </p:txBody>
-      </p:sp>
-      <p:sp>
-        <p:nvSpPr>
-          <p:cNvPr id="11" name="Right Arrow 10"/>
+          <a:bodyPr rtlCol="0" anchor="ctr" wrap="square" lIns="109728" rIns="109728" tIns="54864" bIns="54864"/>
+          <a:lstStyle/>
+          <a:p>
+            <a:pPr algn="ctr">
+              <a:spcAft>
+                <a:spcPts val="200"/>
+              </a:spcAft>
+            </a:pPr>
+            <a:r>
+              <a:rPr sz="1200" b="1">
+                <a:solidFill>
+                  <a:srgbClr val="FFFFFF"/>
+                </a:solidFill>
+                <a:latin typeface="Arial"/>
+              </a:rPr>
+              <a:t>Agent judges</a:t>
+            </a:r>
+          </a:p>
+          <a:p>
+            <a:pPr algn="ctr">
+              <a:spcAft>
+                <a:spcPts val="0"/>
+              </a:spcAft>
+            </a:pPr>
+            <a:r>
+              <a:rPr sz="900" b="0">
+                <a:solidFill>
+                  <a:srgbClr val="FFFFFF"/>
+                </a:solidFill>
+                <a:latin typeface="Arial"/>
+              </a:rPr>
+              <a:t>persona, hook, 12 fields</a:t>
+            </a:r>
+          </a:p>
+        </p:txBody>
+      </p:sp>
+      <p:sp>
+        <p:nvSpPr>
+          <p:cNvPr id="13" name="Right Arrow 12"/>
           <p:cNvSpPr/>
           <p:nvPr/>
         </p:nvSpPr>
         <p:spPr>
           <a:xfrm>
-            <a:off x="8988552" y="1737360"/>
-            <a:ext cx="292608" cy="365760"/>
+            <a:off x="10296144" y="2057400"/>
+            <a:ext cx="201168" cy="228600"/>
           </a:xfrm>
           <a:prstGeom prst="rightArrow">
             <a:avLst/>
@@ -17444,14 +17626,14 @@
       </p:sp>
       <p:sp>
         <p:nvSpPr>
-          <p:cNvPr id="12" name="Rounded Rectangle 11"/>
+          <p:cNvPr id="14" name="Rounded Rectangle 13"/>
           <p:cNvSpPr/>
           <p:nvPr/>
         </p:nvSpPr>
         <p:spPr>
           <a:xfrm>
-            <a:off x="9281160" y="1463040"/>
-            <a:ext cx="2606040" cy="914400"/>
+            <a:off x="10497312" y="1645920"/>
+            <a:ext cx="1371600" cy="1051560"/>
           </a:xfrm>
           <a:prstGeom prst="roundRect">
             <a:avLst>
@@ -17486,17 +17668,17 @@
           <a:p>
             <a:pPr algn="ctr">
               <a:spcAft>
-                <a:spcPts val="100"/>
-              </a:spcAft>
-            </a:pPr>
-            <a:r>
-              <a:rPr sz="1800" b="1">
+                <a:spcPts val="200"/>
+              </a:spcAft>
+            </a:pPr>
+            <a:r>
+              <a:rPr sz="1200" b="1">
                 <a:solidFill>
                   <a:srgbClr val="FFFFFF"/>
                 </a:solidFill>
                 <a:latin typeface="Arial"/>
               </a:rPr>
-              <a:t>IMPROVE</a:t>
+              <a:t>Validator</a:t>
             </a:r>
           </a:p>
           <a:p>
@@ -17506,40 +17688,37 @@
               </a:spcAft>
             </a:pPr>
             <a:r>
-              <a:rPr sz="1200" b="0">
+              <a:rPr sz="900" b="0">
                 <a:solidFill>
                   <a:srgbClr val="FFFFFF"/>
                 </a:solidFill>
                 <a:latin typeface="Arial"/>
               </a:rPr>
-              <a:t>Every call teaches</a:t>
-            </a:r>
-          </a:p>
-        </p:txBody>
-      </p:sp>
-      <p:sp>
-        <p:nvSpPr>
-          <p:cNvPr id="13" name="Rounded Rectangle 12"/>
+              <a:t>refuses anything uncited</a:t>
+            </a:r>
+          </a:p>
+        </p:txBody>
+      </p:sp>
+      <p:sp>
+        <p:nvSpPr>
+          <p:cNvPr id="15" name="Oval 14"/>
           <p:cNvSpPr/>
           <p:nvPr/>
         </p:nvSpPr>
         <p:spPr>
           <a:xfrm>
-            <a:off x="9281160" y="2468880"/>
-            <a:ext cx="2606040" cy="1920240"/>
-          </a:xfrm>
-          <a:prstGeom prst="roundRect">
-            <a:avLst>
-              <a:gd name="adj" fmla="val 6000"/>
-            </a:avLst>
-          </a:prstGeom>
-          <a:solidFill>
-            <a:srgbClr val="EEF2F8"/>
+            <a:off x="4892040" y="3154680"/>
+            <a:ext cx="2377440" cy="2377440"/>
+          </a:xfrm>
+          <a:prstGeom prst="ellipse">
+            <a:avLst/>
+          </a:prstGeom>
+          <a:solidFill>
+            <a:srgbClr val="C00000"/>
           </a:solidFill>
           <a:ln>
             <a:noFill/>
           </a:ln>
-          <a:effectLst/>
         </p:spPr>
         <p:style>
           <a:lnRef idx="1">
@@ -17556,81 +17735,49 @@
           </a:fontRef>
         </p:style>
         <p:txBody>
-          <a:bodyPr rtlCol="0" anchor="t" wrap="square" lIns="109728" rIns="109728" tIns="54864" bIns="54864"/>
-          <a:lstStyle/>
-          <a:p>
-            <a:pPr algn="l" marL="182880" indent="-164592">
-              <a:spcAft>
-                <a:spcPts val="600"/>
-              </a:spcAft>
-              <a:buChar char="•"/>
-            </a:pPr>
-            <a:r>
-              <a:rPr sz="1300" b="0">
-                <a:solidFill>
-                  <a:srgbClr val="262626"/>
-                </a:solidFill>
-                <a:latin typeface="Arial"/>
-              </a:rPr>
-              <a:t>Review the call, rule checks R1-R6</a:t>
-            </a:r>
-          </a:p>
-          <a:p>
-            <a:pPr algn="l" marL="182880" indent="-164592">
-              <a:spcAft>
-                <a:spcPts val="600"/>
-              </a:spcAft>
-              <a:buChar char="•"/>
-            </a:pPr>
-            <a:r>
-              <a:rPr sz="1300" b="0">
-                <a:solidFill>
-                  <a:srgbClr val="262626"/>
-                </a:solidFill>
-                <a:latin typeface="Arial"/>
-              </a:rPr>
-              <a:t>Score persona and hook</a:t>
-            </a:r>
-          </a:p>
-          <a:p>
-            <a:pPr algn="l" marL="182880" indent="-164592">
-              <a:spcAft>
-                <a:spcPts val="600"/>
-              </a:spcAft>
-              <a:buChar char="•"/>
-            </a:pPr>
-            <a:r>
-              <a:rPr sz="1300" b="0">
-                <a:solidFill>
-                  <a:srgbClr val="262626"/>
-                </a:solidFill>
-                <a:latin typeface="Arial"/>
-              </a:rPr>
-              <a:t>Better pick next time</a:t>
-            </a:r>
-          </a:p>
-        </p:txBody>
-      </p:sp>
-      <p:sp>
-        <p:nvSpPr>
-          <p:cNvPr id="14" name="Left Arrow 13"/>
+          <a:bodyPr rtlCol="0" anchor="ctr" lIns="0" rIns="0" tIns="0" bIns="0"/>
+          <a:lstStyle/>
+          <a:p>
+            <a:pPr algn="ctr">
+              <a:spcAft>
+                <a:spcPts val="0"/>
+              </a:spcAft>
+            </a:pPr>
+            <a:r>
+              <a:rPr sz="1600" b="1">
+                <a:solidFill>
+                  <a:srgbClr val="FFFFFF"/>
+                </a:solidFill>
+                <a:latin typeface="Arial"/>
+              </a:rPr>
+              <a:t>Reads this seller's own words</a:t>
+            </a:r>
+          </a:p>
+        </p:txBody>
+      </p:sp>
+      <p:sp>
+        <p:nvSpPr>
+          <p:cNvPr id="16" name="Rounded Rectangle 15"/>
           <p:cNvSpPr/>
           <p:nvPr/>
         </p:nvSpPr>
         <p:spPr>
           <a:xfrm>
-            <a:off x="1463040" y="4754880"/>
-            <a:ext cx="9144000" cy="548640"/>
-          </a:xfrm>
-          <a:prstGeom prst="leftArrow">
-            <a:avLst/>
-          </a:prstGeom>
-          <a:solidFill>
-            <a:srgbClr val="B9A7DB"/>
+            <a:off x="566928" y="3200400"/>
+            <a:ext cx="3840480" cy="914400"/>
+          </a:xfrm>
+          <a:prstGeom prst="roundRect">
+            <a:avLst>
+              <a:gd name="adj" fmla="val 6000"/>
+            </a:avLst>
+          </a:prstGeom>
+          <a:solidFill>
+            <a:srgbClr val="002060"/>
           </a:solidFill>
           <a:ln>
             <a:noFill/>
           </a:ln>
+          <a:effectLst/>
         </p:spPr>
         <p:style>
           <a:lnRef idx="1">
@@ -17647,75 +17794,63 @@
           </a:fontRef>
         </p:style>
         <p:txBody>
-          <a:bodyPr rtlCol="0" anchor="ctr"/>
-          <a:lstStyle/>
-          <a:p>
-            <a:pPr algn="ctr"/>
-          </a:p>
-        </p:txBody>
-      </p:sp>
-      <p:sp>
-        <p:nvSpPr>
-          <p:cNvPr id="15" name="TextBox 14"/>
-          <p:cNvSpPr txBox="1"/>
-          <p:nvPr/>
-        </p:nvSpPr>
-        <p:spPr>
-          <a:xfrm>
-            <a:off x="2377440" y="4846320"/>
-            <a:ext cx="7315200" cy="365760"/>
-          </a:xfrm>
-          <a:prstGeom prst="rect">
-            <a:avLst/>
-          </a:prstGeom>
-          <a:noFill/>
-        </p:spPr>
-        <p:txBody>
-          <a:bodyPr wrap="square">
-            <a:spAutoFit/>
-          </a:bodyPr>
+          <a:bodyPr rtlCol="0" anchor="ctr" wrap="square" lIns="109728" rIns="109728" tIns="54864" bIns="54864"/>
           <a:lstStyle/>
           <a:p>
             <a:pPr algn="ctr">
               <a:spcAft>
-                <a:spcPts val="0"/>
+                <a:spcPts val="200"/>
               </a:spcAft>
             </a:pPr>
             <a:r>
               <a:rPr sz="1400" b="1">
                 <a:solidFill>
-                  <a:srgbClr val="5B3E96"/>
-                </a:solidFill>
-                <a:latin typeface="Arial"/>
-              </a:rPr>
-              <a:t>The improvement loop feeds the next call's persona and hook</a:t>
-            </a:r>
-          </a:p>
-        </p:txBody>
-      </p:sp>
-      <p:sp>
-        <p:nvSpPr>
-          <p:cNvPr id="16" name="Rounded Rectangle 15"/>
+                  <a:srgbClr val="FFFFFF"/>
+                </a:solidFill>
+                <a:latin typeface="Arial"/>
+              </a:rPr>
+              <a:t>Picks the persona</a:t>
+            </a:r>
+          </a:p>
+          <a:p>
+            <a:pPr algn="ctr">
+              <a:spcAft>
+                <a:spcPts val="0"/>
+              </a:spcAft>
+            </a:pPr>
+            <a:r>
+              <a:rPr sz="1100" b="0">
+                <a:solidFill>
+                  <a:srgbClr val="FFFFFF"/>
+                </a:solidFill>
+                <a:latin typeface="Arial"/>
+              </a:rPr>
+              <a:t>from the data, not a lookup</a:t>
+            </a:r>
+          </a:p>
+        </p:txBody>
+      </p:sp>
+      <p:sp>
+        <p:nvSpPr>
+          <p:cNvPr id="17" name="Rounded Rectangle 16"/>
           <p:cNvSpPr/>
           <p:nvPr/>
         </p:nvSpPr>
         <p:spPr>
           <a:xfrm>
-            <a:off x="502920" y="5440680"/>
-            <a:ext cx="11338560" cy="594360"/>
+            <a:off x="566928" y="4343400"/>
+            <a:ext cx="3840480" cy="914400"/>
           </a:xfrm>
           <a:prstGeom prst="roundRect">
             <a:avLst>
-              <a:gd name="adj" fmla="val 30000"/>
+              <a:gd name="adj" fmla="val 6000"/>
             </a:avLst>
           </a:prstGeom>
           <a:solidFill>
-            <a:srgbClr val="FFFFFF"/>
-          </a:solidFill>
-          <a:ln w="12700">
-            <a:solidFill>
-              <a:srgbClr val="2EA896"/>
-            </a:solidFill>
+            <a:srgbClr val="2EA896"/>
+          </a:solidFill>
+          <a:ln>
+            <a:noFill/>
           </a:ln>
           <a:effectLst/>
         </p:spPr>
@@ -17739,6 +17874,233 @@
           <a:p>
             <a:pPr algn="ctr">
               <a:spcAft>
+                <a:spcPts val="200"/>
+              </a:spcAft>
+            </a:pPr>
+            <a:r>
+              <a:rPr sz="1400" b="1">
+                <a:solidFill>
+                  <a:srgbClr val="FFFFFF"/>
+                </a:solidFill>
+                <a:latin typeface="Arial"/>
+              </a:rPr>
+              <a:t>Picks the hook</a:t>
+            </a:r>
+          </a:p>
+          <a:p>
+            <a:pPr algn="ctr">
+              <a:spcAft>
+                <a:spcPts val="0"/>
+              </a:spcAft>
+            </a:pPr>
+            <a:r>
+              <a:rPr sz="1100" b="0">
+                <a:solidFill>
+                  <a:srgbClr val="FFFFFF"/>
+                </a:solidFill>
+                <a:latin typeface="Arial"/>
+              </a:rPr>
+              <a:t>one main, one backup</a:t>
+            </a:r>
+          </a:p>
+        </p:txBody>
+      </p:sp>
+      <p:sp>
+        <p:nvSpPr>
+          <p:cNvPr id="18" name="Rounded Rectangle 17"/>
+          <p:cNvSpPr/>
+          <p:nvPr/>
+        </p:nvSpPr>
+        <p:spPr>
+          <a:xfrm>
+            <a:off x="7772400" y="3200400"/>
+            <a:ext cx="3840480" cy="914400"/>
+          </a:xfrm>
+          <a:prstGeom prst="roundRect">
+            <a:avLst>
+              <a:gd name="adj" fmla="val 6000"/>
+            </a:avLst>
+          </a:prstGeom>
+          <a:solidFill>
+            <a:srgbClr val="5B3E96"/>
+          </a:solidFill>
+          <a:ln>
+            <a:noFill/>
+          </a:ln>
+          <a:effectLst/>
+        </p:spPr>
+        <p:style>
+          <a:lnRef idx="1">
+            <a:schemeClr val="accent1"/>
+          </a:lnRef>
+          <a:fillRef idx="3">
+            <a:schemeClr val="accent1"/>
+          </a:fillRef>
+          <a:effectRef idx="2">
+            <a:schemeClr val="accent1"/>
+          </a:effectRef>
+          <a:fontRef idx="minor">
+            <a:schemeClr val="lt1"/>
+          </a:fontRef>
+        </p:style>
+        <p:txBody>
+          <a:bodyPr rtlCol="0" anchor="ctr" wrap="square" lIns="109728" rIns="109728" tIns="54864" bIns="54864"/>
+          <a:lstStyle/>
+          <a:p>
+            <a:pPr algn="ctr">
+              <a:spcAft>
+                <a:spcPts val="200"/>
+              </a:spcAft>
+            </a:pPr>
+            <a:r>
+              <a:rPr sz="1400" b="1">
+                <a:solidFill>
+                  <a:srgbClr val="FFFFFF"/>
+                </a:solidFill>
+                <a:latin typeface="Arial"/>
+              </a:rPr>
+              <a:t>Cites the evidence</a:t>
+            </a:r>
+          </a:p>
+          <a:p>
+            <a:pPr algn="ctr">
+              <a:spcAft>
+                <a:spcPts val="0"/>
+              </a:spcAft>
+            </a:pPr>
+            <a:r>
+              <a:rPr sz="1100" b="0">
+                <a:solidFill>
+                  <a:srgbClr val="FFFFFF"/>
+                </a:solidFill>
+                <a:latin typeface="Arial"/>
+              </a:rPr>
+              <a:t>a quote for every choice</a:t>
+            </a:r>
+          </a:p>
+        </p:txBody>
+      </p:sp>
+      <p:sp>
+        <p:nvSpPr>
+          <p:cNvPr id="19" name="Rounded Rectangle 18"/>
+          <p:cNvSpPr/>
+          <p:nvPr/>
+        </p:nvSpPr>
+        <p:spPr>
+          <a:xfrm>
+            <a:off x="7772400" y="4343400"/>
+            <a:ext cx="3840480" cy="914400"/>
+          </a:xfrm>
+          <a:prstGeom prst="roundRect">
+            <a:avLst>
+              <a:gd name="adj" fmla="val 6000"/>
+            </a:avLst>
+          </a:prstGeom>
+          <a:solidFill>
+            <a:srgbClr val="E08A00"/>
+          </a:solidFill>
+          <a:ln>
+            <a:noFill/>
+          </a:ln>
+          <a:effectLst/>
+        </p:spPr>
+        <p:style>
+          <a:lnRef idx="1">
+            <a:schemeClr val="accent1"/>
+          </a:lnRef>
+          <a:fillRef idx="3">
+            <a:schemeClr val="accent1"/>
+          </a:fillRef>
+          <a:effectRef idx="2">
+            <a:schemeClr val="accent1"/>
+          </a:effectRef>
+          <a:fontRef idx="minor">
+            <a:schemeClr val="lt1"/>
+          </a:fontRef>
+        </p:style>
+        <p:txBody>
+          <a:bodyPr rtlCol="0" anchor="ctr" wrap="square" lIns="109728" rIns="109728" tIns="54864" bIns="54864"/>
+          <a:lstStyle/>
+          <a:p>
+            <a:pPr algn="ctr">
+              <a:spcAft>
+                <a:spcPts val="200"/>
+              </a:spcAft>
+            </a:pPr>
+            <a:r>
+              <a:rPr sz="1400" b="1">
+                <a:solidFill>
+                  <a:srgbClr val="FFFFFF"/>
+                </a:solidFill>
+                <a:latin typeface="Arial"/>
+              </a:rPr>
+              <a:t>Can override the draw</a:t>
+            </a:r>
+          </a:p>
+          <a:p>
+            <a:pPr algn="ctr">
+              <a:spcAft>
+                <a:spcPts val="0"/>
+              </a:spcAft>
+            </a:pPr>
+            <a:r>
+              <a:rPr sz="1100" b="0">
+                <a:solidFill>
+                  <a:srgbClr val="FFFFFF"/>
+                </a:solidFill>
+                <a:latin typeface="Arial"/>
+              </a:rPr>
+              <a:t>if the data says so</a:t>
+            </a:r>
+          </a:p>
+        </p:txBody>
+      </p:sp>
+      <p:sp>
+        <p:nvSpPr>
+          <p:cNvPr id="20" name="Rounded Rectangle 19"/>
+          <p:cNvSpPr/>
+          <p:nvPr/>
+        </p:nvSpPr>
+        <p:spPr>
+          <a:xfrm>
+            <a:off x="502920" y="5577840"/>
+            <a:ext cx="11338560" cy="502920"/>
+          </a:xfrm>
+          <a:prstGeom prst="roundRect">
+            <a:avLst>
+              <a:gd name="adj" fmla="val 30000"/>
+            </a:avLst>
+          </a:prstGeom>
+          <a:solidFill>
+            <a:srgbClr val="FFFFFF"/>
+          </a:solidFill>
+          <a:ln w="12700">
+            <a:solidFill>
+              <a:srgbClr val="002060"/>
+            </a:solidFill>
+          </a:ln>
+          <a:effectLst/>
+        </p:spPr>
+        <p:style>
+          <a:lnRef idx="1">
+            <a:schemeClr val="accent1"/>
+          </a:lnRef>
+          <a:fillRef idx="3">
+            <a:schemeClr val="accent1"/>
+          </a:fillRef>
+          <a:effectRef idx="2">
+            <a:schemeClr val="accent1"/>
+          </a:effectRef>
+          <a:fontRef idx="minor">
+            <a:schemeClr val="lt1"/>
+          </a:fontRef>
+        </p:style>
+        <p:txBody>
+          <a:bodyPr rtlCol="0" anchor="ctr" wrap="square" lIns="109728" rIns="109728" tIns="54864" bIns="54864"/>
+          <a:lstStyle/>
+          <a:p>
+            <a:pPr algn="ctr">
+              <a:spcAft>
                 <a:spcPts val="0"/>
               </a:spcAft>
             </a:pPr>
@@ -17749,7 +18111,7 @@
                 </a:solidFill>
                 <a:latin typeface="Arial"/>
               </a:rPr>
-              <a:t>Mood decision: instant keyword tool in-call, plus Jev decision model (6 mood questions, ~0.5 s) to label real calls and check the tool</a:t>
+              <a:t>Two sellers with the same plan can get different personas and hooks, because the agent reads what each one's data says</a:t>
             </a:r>
           </a:p>
         </p:txBody>
@@ -17788,34 +18150,71 @@
           <a:lstStyle/>
           <a:p>
             <a:r>
-              <a:t>Mid-Call: Same-Turn Adaptation</a:t>
-            </a:r>
-          </a:p>
-        </p:txBody>
-      </p:sp>
-      <p:sp>
-        <p:nvSpPr>
-          <p:cNvPr id="3" name="Rounded Rectangle 2"/>
+              <a:t>The Skill: How The Agent Decides</a:t>
+            </a:r>
+          </a:p>
+        </p:txBody>
+      </p:sp>
+      <p:sp>
+        <p:nvSpPr>
+          <p:cNvPr id="3" name="TextBox 2"/>
+          <p:cNvSpPr txBox="1"/>
+          <p:nvPr/>
+        </p:nvSpPr>
+        <p:spPr>
+          <a:xfrm>
+            <a:off x="566928" y="1325880"/>
+            <a:ext cx="7315200" cy="274320"/>
+          </a:xfrm>
+          <a:prstGeom prst="rect">
+            <a:avLst/>
+          </a:prstGeom>
+          <a:noFill/>
+        </p:spPr>
+        <p:txBody>
+          <a:bodyPr wrap="square">
+            <a:spAutoFit/>
+          </a:bodyPr>
+          <a:lstStyle/>
+          <a:p>
+            <a:pPr algn="l">
+              <a:spcAft>
+                <a:spcPts val="0"/>
+              </a:spcAft>
+            </a:pPr>
+            <a:r>
+              <a:rPr sz="1100" b="1">
+                <a:solidFill>
+                  <a:srgbClr val="595959"/>
+                </a:solidFill>
+                <a:latin typeface="Arial"/>
+              </a:rPr>
+              <a:t>FOR EVERY FIELD AND HOOK, THE AGENT CHOOSES A REASON IN THIS ORDER</a:t>
+            </a:r>
+          </a:p>
+        </p:txBody>
+      </p:sp>
+      <p:sp>
+        <p:nvSpPr>
+          <p:cNvPr id="4" name="Rounded Rectangle 3"/>
           <p:cNvSpPr/>
           <p:nvPr/>
         </p:nvSpPr>
         <p:spPr>
           <a:xfrm>
-            <a:off x="566928" y="1371600"/>
-            <a:ext cx="4754880" cy="621792"/>
+            <a:off x="566928" y="1691640"/>
+            <a:ext cx="3657600" cy="1371600"/>
           </a:xfrm>
           <a:prstGeom prst="roundRect">
             <a:avLst>
-              <a:gd name="adj" fmla="val 40000"/>
+              <a:gd name="adj" fmla="val 6000"/>
             </a:avLst>
           </a:prstGeom>
           <a:solidFill>
-            <a:srgbClr val="EEF2F8"/>
-          </a:solidFill>
-          <a:ln w="12700">
-            <a:solidFill>
-              <a:srgbClr val="595959"/>
-            </a:solidFill>
+            <a:srgbClr val="C00000"/>
+          </a:solidFill>
+          <a:ln>
+            <a:noFill/>
           </a:ln>
           <a:effectLst/>
         </p:spPr>
@@ -17834,42 +18233,58 @@
           </a:fontRef>
         </p:style>
         <p:txBody>
-          <a:bodyPr rtlCol="0" anchor="ctr" wrap="square" lIns="109728" rIns="109728" tIns="54864" bIns="54864"/>
+          <a:bodyPr rtlCol="0" anchor="ctr" wrap="square" lIns="868680" rIns="109728" tIns="54864" bIns="54864"/>
           <a:lstStyle/>
           <a:p>
             <a:pPr algn="l">
               <a:spcAft>
-                <a:spcPts val="0"/>
-              </a:spcAft>
-            </a:pPr>
-            <a:r>
-              <a:rPr sz="1400" b="0">
-                <a:solidFill>
-                  <a:srgbClr val="262626"/>
-                </a:solidFill>
-                <a:latin typeface="Arial"/>
-              </a:rPr>
-              <a:t>“Nahi chahiye”</a:t>
-            </a:r>
-          </a:p>
-        </p:txBody>
-      </p:sp>
-      <p:sp>
-        <p:nvSpPr>
-          <p:cNvPr id="4" name="Right Arrow 3"/>
+                <a:spcPts val="200"/>
+              </a:spcAft>
+            </a:pPr>
+            <a:r>
+              <a:rPr sz="1600" b="1">
+                <a:solidFill>
+                  <a:srgbClr val="FFFFFF"/>
+                </a:solidFill>
+                <a:latin typeface="Arial"/>
+              </a:rPr>
+              <a:t>Seller evidence</a:t>
+            </a:r>
+          </a:p>
+          <a:p>
+            <a:pPr algn="l">
+              <a:spcAft>
+                <a:spcPts val="0"/>
+              </a:spcAft>
+            </a:pPr>
+            <a:r>
+              <a:rPr sz="1100" b="0">
+                <a:solidFill>
+                  <a:srgbClr val="FFFFFF"/>
+                </a:solidFill>
+                <a:latin typeface="Arial"/>
+              </a:rPr>
+              <a:t>an exact quote from this seller's own data</a:t>
+            </a:r>
+          </a:p>
+        </p:txBody>
+      </p:sp>
+      <p:sp>
+        <p:nvSpPr>
+          <p:cNvPr id="5" name="Oval 4"/>
           <p:cNvSpPr/>
           <p:nvPr/>
         </p:nvSpPr>
         <p:spPr>
           <a:xfrm>
-            <a:off x="5440680" y="1499616"/>
-            <a:ext cx="457200" cy="365760"/>
-          </a:xfrm>
-          <a:prstGeom prst="rightArrow">
+            <a:off x="704088" y="1828800"/>
+            <a:ext cx="548640" cy="548640"/>
+          </a:xfrm>
+          <a:prstGeom prst="ellipse">
             <a:avLst/>
           </a:prstGeom>
           <a:solidFill>
-            <a:srgbClr val="E08A00"/>
+            <a:srgbClr val="FFFFFF"/>
           </a:solidFill>
           <a:ln>
             <a:noFill/>
@@ -17890,31 +18305,44 @@
           </a:fontRef>
         </p:style>
         <p:txBody>
-          <a:bodyPr rtlCol="0" anchor="ctr"/>
-          <a:lstStyle/>
-          <a:p>
-            <a:pPr algn="ctr"/>
-          </a:p>
-        </p:txBody>
-      </p:sp>
-      <p:sp>
-        <p:nvSpPr>
-          <p:cNvPr id="5" name="Rounded Rectangle 4"/>
+          <a:bodyPr rtlCol="0" anchor="ctr" lIns="0" rIns="0" tIns="0" bIns="0"/>
+          <a:lstStyle/>
+          <a:p>
+            <a:pPr algn="ctr">
+              <a:spcAft>
+                <a:spcPts val="0"/>
+              </a:spcAft>
+            </a:pPr>
+            <a:r>
+              <a:rPr sz="1600" b="1">
+                <a:solidFill>
+                  <a:srgbClr val="C00000"/>
+                </a:solidFill>
+                <a:latin typeface="Arial"/>
+              </a:rPr>
+              <a:t>1</a:t>
+            </a:r>
+          </a:p>
+        </p:txBody>
+      </p:sp>
+      <p:sp>
+        <p:nvSpPr>
+          <p:cNvPr id="6" name="Rounded Rectangle 5"/>
           <p:cNvSpPr/>
           <p:nvPr/>
         </p:nvSpPr>
         <p:spPr>
           <a:xfrm>
-            <a:off x="6035040" y="1371600"/>
-            <a:ext cx="5577840" cy="621792"/>
+            <a:off x="4343400" y="1691640"/>
+            <a:ext cx="3657600" cy="1371600"/>
           </a:xfrm>
           <a:prstGeom prst="roundRect">
             <a:avLst>
-              <a:gd name="adj" fmla="val 40000"/>
+              <a:gd name="adj" fmla="val 6000"/>
             </a:avLst>
           </a:prstGeom>
           <a:solidFill>
-            <a:srgbClr val="E08A00"/>
+            <a:srgbClr val="2EA896"/>
           </a:solidFill>
           <a:ln>
             <a:noFill/>
@@ -17936,51 +18364,62 @@
           </a:fontRef>
         </p:style>
         <p:txBody>
-          <a:bodyPr rtlCol="0" anchor="ctr" wrap="square" lIns="109728" rIns="109728" tIns="54864" bIns="54864"/>
+          <a:bodyPr rtlCol="0" anchor="ctr" wrap="square" lIns="868680" rIns="109728" tIns="54864" bIns="54864"/>
           <a:lstStyle/>
           <a:p>
             <a:pPr algn="l">
               <a:spcAft>
-                <a:spcPts val="0"/>
-              </a:spcAft>
-            </a:pPr>
-            <a:r>
-              <a:rPr sz="1400" b="1">
+                <a:spcPts val="200"/>
+              </a:spcAft>
+            </a:pPr>
+            <a:r>
+              <a:rPr sz="1600" b="1">
                 <a:solidFill>
                   <a:srgbClr val="FFFFFF"/>
                 </a:solidFill>
                 <a:latin typeface="Arial"/>
               </a:rPr>
-              <a:t>Stays on the line, restates the hook</a:t>
-            </a:r>
-          </a:p>
-        </p:txBody>
-      </p:sp>
-      <p:sp>
-        <p:nvSpPr>
-          <p:cNvPr id="6" name="Rounded Rectangle 5"/>
+              <a:t>Earlier calls</a:t>
+            </a:r>
+          </a:p>
+          <a:p>
+            <a:pPr algn="l">
+              <a:spcAft>
+                <a:spcPts val="0"/>
+              </a:spcAft>
+            </a:pPr>
+            <a:r>
+              <a:rPr sz="1100" b="0">
+                <a:solidFill>
+                  <a:srgbClr val="FFFFFF"/>
+                </a:solidFill>
+                <a:latin typeface="Arial"/>
+              </a:rPr>
+              <a:t>what got meetings for similar sellers, only if no evidence</a:t>
+            </a:r>
+          </a:p>
+        </p:txBody>
+      </p:sp>
+      <p:sp>
+        <p:nvSpPr>
+          <p:cNvPr id="7" name="Oval 6"/>
           <p:cNvSpPr/>
           <p:nvPr/>
         </p:nvSpPr>
         <p:spPr>
           <a:xfrm>
-            <a:off x="566928" y="2130552"/>
-            <a:ext cx="4754880" cy="621792"/>
-          </a:xfrm>
-          <a:prstGeom prst="roundRect">
-            <a:avLst>
-              <a:gd name="adj" fmla="val 40000"/>
-            </a:avLst>
-          </a:prstGeom>
-          <a:solidFill>
-            <a:srgbClr val="EEF2F8"/>
-          </a:solidFill>
-          <a:ln w="12700">
-            <a:solidFill>
-              <a:srgbClr val="595959"/>
-            </a:solidFill>
+            <a:off x="4480560" y="1828800"/>
+            <a:ext cx="548640" cy="548640"/>
+          </a:xfrm>
+          <a:prstGeom prst="ellipse">
+            <a:avLst/>
+          </a:prstGeom>
+          <a:solidFill>
+            <a:srgbClr val="FFFFFF"/>
+          </a:solidFill>
+          <a:ln>
+            <a:noFill/>
           </a:ln>
-          <a:effectLst/>
         </p:spPr>
         <p:style>
           <a:lnRef idx="1">
@@ -17997,46 +18436,49 @@
           </a:fontRef>
         </p:style>
         <p:txBody>
-          <a:bodyPr rtlCol="0" anchor="ctr" wrap="square" lIns="109728" rIns="109728" tIns="54864" bIns="54864"/>
-          <a:lstStyle/>
-          <a:p>
-            <a:pPr algn="l">
-              <a:spcAft>
-                <a:spcPts val="0"/>
-              </a:spcAft>
-            </a:pPr>
-            <a:r>
-              <a:rPr sz="1400" b="0">
-                <a:solidFill>
-                  <a:srgbClr val="262626"/>
-                </a:solidFill>
-                <a:latin typeface="Arial"/>
-              </a:rPr>
-              <a:t>“I'm busy right now”</a:t>
-            </a:r>
-          </a:p>
-        </p:txBody>
-      </p:sp>
-      <p:sp>
-        <p:nvSpPr>
-          <p:cNvPr id="7" name="Right Arrow 6"/>
+          <a:bodyPr rtlCol="0" anchor="ctr" lIns="0" rIns="0" tIns="0" bIns="0"/>
+          <a:lstStyle/>
+          <a:p>
+            <a:pPr algn="ctr">
+              <a:spcAft>
+                <a:spcPts val="0"/>
+              </a:spcAft>
+            </a:pPr>
+            <a:r>
+              <a:rPr sz="1600" b="1">
+                <a:solidFill>
+                  <a:srgbClr val="2EA896"/>
+                </a:solidFill>
+                <a:latin typeface="Arial"/>
+              </a:rPr>
+              <a:t>2</a:t>
+            </a:r>
+          </a:p>
+        </p:txBody>
+      </p:sp>
+      <p:sp>
+        <p:nvSpPr>
+          <p:cNvPr id="8" name="Rounded Rectangle 7"/>
           <p:cNvSpPr/>
           <p:nvPr/>
         </p:nvSpPr>
         <p:spPr>
           <a:xfrm>
-            <a:off x="5440680" y="2258568"/>
-            <a:ext cx="457200" cy="365760"/>
-          </a:xfrm>
-          <a:prstGeom prst="rightArrow">
-            <a:avLst/>
-          </a:prstGeom>
-          <a:solidFill>
-            <a:srgbClr val="002060"/>
+            <a:off x="8119872" y="1691640"/>
+            <a:ext cx="3657600" cy="1371600"/>
+          </a:xfrm>
+          <a:prstGeom prst="roundRect">
+            <a:avLst>
+              <a:gd name="adj" fmla="val 6000"/>
+            </a:avLst>
+          </a:prstGeom>
+          <a:solidFill>
+            <a:srgbClr val="595959"/>
           </a:solidFill>
           <a:ln>
             <a:noFill/>
           </a:ln>
+          <a:effectLst/>
         </p:spPr>
         <p:style>
           <a:lnRef idx="1">
@@ -18053,36 +18495,62 @@
           </a:fontRef>
         </p:style>
         <p:txBody>
-          <a:bodyPr rtlCol="0" anchor="ctr"/>
-          <a:lstStyle/>
-          <a:p>
-            <a:pPr algn="ctr"/>
-          </a:p>
-        </p:txBody>
-      </p:sp>
-      <p:sp>
-        <p:nvSpPr>
-          <p:cNvPr id="8" name="Rounded Rectangle 7"/>
+          <a:bodyPr rtlCol="0" anchor="ctr" wrap="square" lIns="868680" rIns="109728" tIns="54864" bIns="54864"/>
+          <a:lstStyle/>
+          <a:p>
+            <a:pPr algn="l">
+              <a:spcAft>
+                <a:spcPts val="200"/>
+              </a:spcAft>
+            </a:pPr>
+            <a:r>
+              <a:rPr sz="1600" b="1">
+                <a:solidFill>
+                  <a:srgbClr val="FFFFFF"/>
+                </a:solidFill>
+                <a:latin typeface="Arial"/>
+              </a:rPr>
+              <a:t>Persona default</a:t>
+            </a:r>
+          </a:p>
+          <a:p>
+            <a:pPr algn="l">
+              <a:spcAft>
+                <a:spcPts val="0"/>
+              </a:spcAft>
+            </a:pPr>
+            <a:r>
+              <a:rPr sz="1100" b="0">
+                <a:solidFill>
+                  <a:srgbClr val="FFFFFF"/>
+                </a:solidFill>
+                <a:latin typeface="Arial"/>
+              </a:rPr>
+              <a:t>the selected persona's own value</a:t>
+            </a:r>
+          </a:p>
+        </p:txBody>
+      </p:sp>
+      <p:sp>
+        <p:nvSpPr>
+          <p:cNvPr id="9" name="Oval 8"/>
           <p:cNvSpPr/>
           <p:nvPr/>
         </p:nvSpPr>
         <p:spPr>
           <a:xfrm>
-            <a:off x="6035040" y="2130552"/>
-            <a:ext cx="5577840" cy="621792"/>
-          </a:xfrm>
-          <a:prstGeom prst="roundRect">
-            <a:avLst>
-              <a:gd name="adj" fmla="val 40000"/>
-            </a:avLst>
-          </a:prstGeom>
-          <a:solidFill>
-            <a:srgbClr val="002060"/>
+            <a:off x="8257032" y="1828800"/>
+            <a:ext cx="548640" cy="548640"/>
+          </a:xfrm>
+          <a:prstGeom prst="ellipse">
+            <a:avLst/>
+          </a:prstGeom>
+          <a:solidFill>
+            <a:srgbClr val="FFFFFF"/>
           </a:solidFill>
           <a:ln>
             <a:noFill/>
           </a:ln>
-          <a:effectLst/>
         </p:spPr>
         <p:style>
           <a:lnRef idx="1">
@@ -18099,7 +18567,46 @@
           </a:fontRef>
         </p:style>
         <p:txBody>
-          <a:bodyPr rtlCol="0" anchor="ctr" wrap="square" lIns="109728" rIns="109728" tIns="54864" bIns="54864"/>
+          <a:bodyPr rtlCol="0" anchor="ctr" lIns="0" rIns="0" tIns="0" bIns="0"/>
+          <a:lstStyle/>
+          <a:p>
+            <a:pPr algn="ctr">
+              <a:spcAft>
+                <a:spcPts val="0"/>
+              </a:spcAft>
+            </a:pPr>
+            <a:r>
+              <a:rPr sz="1600" b="1">
+                <a:solidFill>
+                  <a:srgbClr val="595959"/>
+                </a:solidFill>
+                <a:latin typeface="Arial"/>
+              </a:rPr>
+              <a:t>3</a:t>
+            </a:r>
+          </a:p>
+        </p:txBody>
+      </p:sp>
+      <p:sp>
+        <p:nvSpPr>
+          <p:cNvPr id="10" name="TextBox 9"/>
+          <p:cNvSpPr txBox="1"/>
+          <p:nvPr/>
+        </p:nvSpPr>
+        <p:spPr>
+          <a:xfrm>
+            <a:off x="566928" y="3429000"/>
+            <a:ext cx="7315200" cy="274320"/>
+          </a:xfrm>
+          <a:prstGeom prst="rect">
+            <a:avLst/>
+          </a:prstGeom>
+          <a:noFill/>
+        </p:spPr>
+        <p:txBody>
+          <a:bodyPr wrap="square">
+            <a:spAutoFit/>
+          </a:bodyPr>
           <a:lstStyle/>
           <a:p>
             <a:pPr algn="l">
@@ -18108,31 +18615,31 @@
               </a:spcAft>
             </a:pPr>
             <a:r>
-              <a:rPr sz="1400" b="1">
-                <a:solidFill>
-                  <a:srgbClr val="FFFFFF"/>
-                </a:solidFill>
-                <a:latin typeface="Arial"/>
-              </a:rPr>
-              <a:t>One short sentence, offers a callback</a:t>
-            </a:r>
-          </a:p>
-        </p:txBody>
-      </p:sp>
-      <p:sp>
-        <p:nvSpPr>
-          <p:cNvPr id="9" name="Rounded Rectangle 8"/>
+              <a:rPr sz="1100" b="1">
+                <a:solidFill>
+                  <a:srgbClr val="595959"/>
+                </a:solidFill>
+                <a:latin typeface="Arial"/>
+              </a:rPr>
+              <a:t>THE SKILL, STEP BY STEP</a:t>
+            </a:r>
+          </a:p>
+        </p:txBody>
+      </p:sp>
+      <p:sp>
+        <p:nvSpPr>
+          <p:cNvPr id="11" name="Rounded Rectangle 10"/>
           <p:cNvSpPr/>
           <p:nvPr/>
         </p:nvSpPr>
         <p:spPr>
           <a:xfrm>
-            <a:off x="566928" y="2889504"/>
-            <a:ext cx="4754880" cy="621792"/>
+            <a:off x="566928" y="3794760"/>
+            <a:ext cx="1481328" cy="822960"/>
           </a:xfrm>
           <a:prstGeom prst="roundRect">
             <a:avLst>
-              <a:gd name="adj" fmla="val 40000"/>
+              <a:gd name="adj" fmla="val 30000"/>
             </a:avLst>
           </a:prstGeom>
           <a:solidFill>
@@ -18140,7 +18647,7 @@
           </a:solidFill>
           <a:ln w="12700">
             <a:solidFill>
-              <a:srgbClr val="595959"/>
+              <a:srgbClr val="002060"/>
             </a:solidFill>
           </a:ln>
           <a:effectLst/>
@@ -18163,39 +18670,39 @@
           <a:bodyPr rtlCol="0" anchor="ctr" wrap="square" lIns="109728" rIns="109728" tIns="54864" bIns="54864"/>
           <a:lstStyle/>
           <a:p>
-            <a:pPr algn="l">
-              <a:spcAft>
-                <a:spcPts val="0"/>
-              </a:spcAft>
-            </a:pPr>
-            <a:r>
-              <a:rPr sz="1400" b="0">
-                <a:solidFill>
-                  <a:srgbClr val="262626"/>
-                </a:solidFill>
-                <a:latin typeface="Arial"/>
-              </a:rPr>
-              <a:t>“Samajh nahi aaya”</a:t>
-            </a:r>
-          </a:p>
-        </p:txBody>
-      </p:sp>
-      <p:sp>
-        <p:nvSpPr>
-          <p:cNvPr id="10" name="Right Arrow 9"/>
+            <a:pPr algn="ctr">
+              <a:spcAft>
+                <a:spcPts val="0"/>
+              </a:spcAft>
+            </a:pPr>
+            <a:r>
+              <a:rPr sz="1200" b="1">
+                <a:solidFill>
+                  <a:srgbClr val="002060"/>
+                </a:solidFill>
+                <a:latin typeface="Arial"/>
+              </a:rPr>
+              <a:t>Read the seller</a:t>
+            </a:r>
+          </a:p>
+        </p:txBody>
+      </p:sp>
+      <p:sp>
+        <p:nvSpPr>
+          <p:cNvPr id="12" name="Right Arrow 11"/>
           <p:cNvSpPr/>
           <p:nvPr/>
         </p:nvSpPr>
         <p:spPr>
           <a:xfrm>
-            <a:off x="5440680" y="3017520"/>
-            <a:ext cx="457200" cy="365760"/>
+            <a:off x="2048256" y="4069080"/>
+            <a:ext cx="146304" cy="274320"/>
           </a:xfrm>
           <a:prstGeom prst="rightArrow">
             <a:avLst/>
           </a:prstGeom>
           <a:solidFill>
-            <a:srgbClr val="2EA896"/>
+            <a:srgbClr val="595959"/>
           </a:solidFill>
           <a:ln>
             <a:noFill/>
@@ -18225,25 +18732,27 @@
       </p:sp>
       <p:sp>
         <p:nvSpPr>
-          <p:cNvPr id="11" name="Rounded Rectangle 10"/>
+          <p:cNvPr id="13" name="Rounded Rectangle 12"/>
           <p:cNvSpPr/>
           <p:nvPr/>
         </p:nvSpPr>
         <p:spPr>
           <a:xfrm>
-            <a:off x="6035040" y="2889504"/>
-            <a:ext cx="5577840" cy="621792"/>
+            <a:off x="2194560" y="3794760"/>
+            <a:ext cx="1481328" cy="822960"/>
           </a:xfrm>
           <a:prstGeom prst="roundRect">
             <a:avLst>
-              <a:gd name="adj" fmla="val 40000"/>
+              <a:gd name="adj" fmla="val 30000"/>
             </a:avLst>
           </a:prstGeom>
           <a:solidFill>
-            <a:srgbClr val="2EA896"/>
-          </a:solidFill>
-          <a:ln>
-            <a:noFill/>
+            <a:srgbClr val="EEF2F8"/>
+          </a:solidFill>
+          <a:ln w="12700">
+            <a:solidFill>
+              <a:srgbClr val="002060"/>
+            </a:solidFill>
           </a:ln>
           <a:effectLst/>
         </p:spPr>
@@ -18265,48 +18774,43 @@
           <a:bodyPr rtlCol="0" anchor="ctr" wrap="square" lIns="109728" rIns="109728" tIns="54864" bIns="54864"/>
           <a:lstStyle/>
           <a:p>
-            <a:pPr algn="l">
-              <a:spcAft>
-                <a:spcPts val="0"/>
-              </a:spcAft>
-            </a:pPr>
-            <a:r>
-              <a:rPr sz="1400" b="1">
-                <a:solidFill>
-                  <a:srgbClr val="FFFFFF"/>
-                </a:solidFill>
-                <a:latin typeface="Arial"/>
-              </a:rPr>
-              <a:t>One idea, simple short phrases</a:t>
-            </a:r>
-          </a:p>
-        </p:txBody>
-      </p:sp>
-      <p:sp>
-        <p:nvSpPr>
-          <p:cNvPr id="12" name="Rounded Rectangle 11"/>
+            <a:pPr algn="ctr">
+              <a:spcAft>
+                <a:spcPts val="0"/>
+              </a:spcAft>
+            </a:pPr>
+            <a:r>
+              <a:rPr sz="1200" b="1">
+                <a:solidFill>
+                  <a:srgbClr val="002060"/>
+                </a:solidFill>
+                <a:latin typeface="Arial"/>
+              </a:rPr>
+              <a:t>Pick base persona</a:t>
+            </a:r>
+          </a:p>
+        </p:txBody>
+      </p:sp>
+      <p:sp>
+        <p:nvSpPr>
+          <p:cNvPr id="14" name="Right Arrow 13"/>
           <p:cNvSpPr/>
           <p:nvPr/>
         </p:nvSpPr>
         <p:spPr>
           <a:xfrm>
-            <a:off x="566928" y="3648456"/>
-            <a:ext cx="4754880" cy="621792"/>
-          </a:xfrm>
-          <a:prstGeom prst="roundRect">
-            <a:avLst>
-              <a:gd name="adj" fmla="val 40000"/>
-            </a:avLst>
-          </a:prstGeom>
-          <a:solidFill>
-            <a:srgbClr val="EEF2F8"/>
-          </a:solidFill>
-          <a:ln w="12700">
-            <a:solidFill>
-              <a:srgbClr val="595959"/>
-            </a:solidFill>
+            <a:off x="3675887" y="4069080"/>
+            <a:ext cx="146304" cy="274320"/>
+          </a:xfrm>
+          <a:prstGeom prst="rightArrow">
+            <a:avLst/>
+          </a:prstGeom>
+          <a:solidFill>
+            <a:srgbClr val="595959"/>
+          </a:solidFill>
+          <a:ln>
+            <a:noFill/>
           </a:ln>
-          <a:effectLst/>
         </p:spPr>
         <p:style>
           <a:lnRef idx="1">
@@ -18323,46 +18827,38 @@
           </a:fontRef>
         </p:style>
         <p:txBody>
-          <a:bodyPr rtlCol="0" anchor="ctr" wrap="square" lIns="109728" rIns="109728" tIns="54864" bIns="54864"/>
-          <a:lstStyle/>
-          <a:p>
-            <a:pPr algn="l">
-              <a:spcAft>
-                <a:spcPts val="0"/>
-              </a:spcAft>
-            </a:pPr>
-            <a:r>
-              <a:rPr sz="1400" b="0">
-                <a:solidFill>
-                  <a:srgbClr val="262626"/>
-                </a:solidFill>
-                <a:latin typeface="Arial"/>
-              </a:rPr>
-              <a:t>“Kitni baar call karoge!”</a:t>
-            </a:r>
-          </a:p>
-        </p:txBody>
-      </p:sp>
-      <p:sp>
-        <p:nvSpPr>
-          <p:cNvPr id="13" name="Right Arrow 12"/>
+          <a:bodyPr rtlCol="0" anchor="ctr"/>
+          <a:lstStyle/>
+          <a:p>
+            <a:pPr algn="ctr"/>
+          </a:p>
+        </p:txBody>
+      </p:sp>
+      <p:sp>
+        <p:nvSpPr>
+          <p:cNvPr id="15" name="Rounded Rectangle 14"/>
           <p:cNvSpPr/>
           <p:nvPr/>
         </p:nvSpPr>
         <p:spPr>
           <a:xfrm>
-            <a:off x="5440680" y="3776472"/>
-            <a:ext cx="457200" cy="365760"/>
-          </a:xfrm>
-          <a:prstGeom prst="rightArrow">
-            <a:avLst/>
-          </a:prstGeom>
-          <a:solidFill>
-            <a:srgbClr val="C00000"/>
-          </a:solidFill>
-          <a:ln>
-            <a:noFill/>
+            <a:off x="3822191" y="3794760"/>
+            <a:ext cx="1481328" cy="822960"/>
+          </a:xfrm>
+          <a:prstGeom prst="roundRect">
+            <a:avLst>
+              <a:gd name="adj" fmla="val 30000"/>
+            </a:avLst>
+          </a:prstGeom>
+          <a:solidFill>
+            <a:srgbClr val="EEF2F8"/>
+          </a:solidFill>
+          <a:ln w="12700">
+            <a:solidFill>
+              <a:srgbClr val="002060"/>
+            </a:solidFill>
           </a:ln>
+          <a:effectLst/>
         </p:spPr>
         <p:style>
           <a:lnRef idx="1">
@@ -18379,36 +18875,46 @@
           </a:fontRef>
         </p:style>
         <p:txBody>
-          <a:bodyPr rtlCol="0" anchor="ctr"/>
-          <a:lstStyle/>
-          <a:p>
-            <a:pPr algn="ctr"/>
-          </a:p>
-        </p:txBody>
-      </p:sp>
-      <p:sp>
-        <p:nvSpPr>
-          <p:cNvPr id="14" name="Rounded Rectangle 13"/>
+          <a:bodyPr rtlCol="0" anchor="ctr" wrap="square" lIns="109728" rIns="109728" tIns="54864" bIns="54864"/>
+          <a:lstStyle/>
+          <a:p>
+            <a:pPr algn="ctr">
+              <a:spcAft>
+                <a:spcPts val="0"/>
+              </a:spcAft>
+            </a:pPr>
+            <a:r>
+              <a:rPr sz="1200" b="1">
+                <a:solidFill>
+                  <a:srgbClr val="002060"/>
+                </a:solidFill>
+                <a:latin typeface="Arial"/>
+              </a:rPr>
+              <a:t>Search the files</a:t>
+            </a:r>
+          </a:p>
+        </p:txBody>
+      </p:sp>
+      <p:sp>
+        <p:nvSpPr>
+          <p:cNvPr id="16" name="Right Arrow 15"/>
           <p:cNvSpPr/>
           <p:nvPr/>
         </p:nvSpPr>
         <p:spPr>
           <a:xfrm>
-            <a:off x="6035040" y="3648456"/>
-            <a:ext cx="5577840" cy="621792"/>
-          </a:xfrm>
-          <a:prstGeom prst="roundRect">
-            <a:avLst>
-              <a:gd name="adj" fmla="val 40000"/>
-            </a:avLst>
-          </a:prstGeom>
-          <a:solidFill>
-            <a:srgbClr val="C00000"/>
+            <a:off x="5303520" y="4069080"/>
+            <a:ext cx="146304" cy="274320"/>
+          </a:xfrm>
+          <a:prstGeom prst="rightArrow">
+            <a:avLst/>
+          </a:prstGeom>
+          <a:solidFill>
+            <a:srgbClr val="595959"/>
           </a:solidFill>
           <a:ln>
             <a:noFill/>
           </a:ln>
-          <a:effectLst/>
         </p:spPr>
         <p:style>
           <a:lnRef idx="1">
@@ -18425,40 +18931,27 @@
           </a:fontRef>
         </p:style>
         <p:txBody>
-          <a:bodyPr rtlCol="0" anchor="ctr" wrap="square" lIns="109728" rIns="109728" tIns="54864" bIns="54864"/>
-          <a:lstStyle/>
-          <a:p>
-            <a:pPr algn="l">
-              <a:spcAft>
-                <a:spcPts val="0"/>
-              </a:spcAft>
-            </a:pPr>
-            <a:r>
-              <a:rPr sz="1400" b="1">
-                <a:solidFill>
-                  <a:srgbClr val="FFFFFF"/>
-                </a:solidFill>
-                <a:latin typeface="Arial"/>
-              </a:rPr>
-              <a:t>Brief apology, stops the pitch</a:t>
-            </a:r>
-          </a:p>
-        </p:txBody>
-      </p:sp>
-      <p:sp>
-        <p:nvSpPr>
-          <p:cNvPr id="15" name="Rounded Rectangle 14"/>
+          <a:bodyPr rtlCol="0" anchor="ctr"/>
+          <a:lstStyle/>
+          <a:p>
+            <a:pPr algn="ctr"/>
+          </a:p>
+        </p:txBody>
+      </p:sp>
+      <p:sp>
+        <p:nvSpPr>
+          <p:cNvPr id="17" name="Rounded Rectangle 16"/>
           <p:cNvSpPr/>
           <p:nvPr/>
         </p:nvSpPr>
         <p:spPr>
           <a:xfrm>
-            <a:off x="566928" y="4407408"/>
-            <a:ext cx="4754880" cy="621792"/>
+            <a:off x="5449824" y="3794760"/>
+            <a:ext cx="1481328" cy="822960"/>
           </a:xfrm>
           <a:prstGeom prst="roundRect">
             <a:avLst>
-              <a:gd name="adj" fmla="val 40000"/>
+              <a:gd name="adj" fmla="val 30000"/>
             </a:avLst>
           </a:prstGeom>
           <a:solidFill>
@@ -18466,7 +18959,7 @@
           </a:solidFill>
           <a:ln w="12700">
             <a:solidFill>
-              <a:srgbClr val="595959"/>
+              <a:srgbClr val="002060"/>
             </a:solidFill>
           </a:ln>
           <a:effectLst/>
@@ -18489,39 +18982,39 @@
           <a:bodyPr rtlCol="0" anchor="ctr" wrap="square" lIns="109728" rIns="109728" tIns="54864" bIns="54864"/>
           <a:lstStyle/>
           <a:p>
-            <a:pPr algn="l">
-              <a:spcAft>
-                <a:spcPts val="0"/>
-              </a:spcAft>
-            </a:pPr>
-            <a:r>
-              <a:rPr sz="1400" b="0">
-                <a:solidFill>
-                  <a:srgbClr val="262626"/>
-                </a:solidFill>
-                <a:latin typeface="Arial"/>
-              </a:rPr>
-              <a:t>Speaks Marathi, then Hindi</a:t>
-            </a:r>
-          </a:p>
-        </p:txBody>
-      </p:sp>
-      <p:sp>
-        <p:nvSpPr>
-          <p:cNvPr id="16" name="Right Arrow 15"/>
+            <a:pPr algn="ctr">
+              <a:spcAft>
+                <a:spcPts val="0"/>
+              </a:spcAft>
+            </a:pPr>
+            <a:r>
+              <a:rPr sz="1200" b="1">
+                <a:solidFill>
+                  <a:srgbClr val="002060"/>
+                </a:solidFill>
+                <a:latin typeface="Arial"/>
+              </a:rPr>
+              <a:t>Decide each field</a:t>
+            </a:r>
+          </a:p>
+        </p:txBody>
+      </p:sp>
+      <p:sp>
+        <p:nvSpPr>
+          <p:cNvPr id="18" name="Right Arrow 17"/>
           <p:cNvSpPr/>
           <p:nvPr/>
         </p:nvSpPr>
         <p:spPr>
           <a:xfrm>
-            <a:off x="5440680" y="4535424"/>
-            <a:ext cx="457200" cy="365760"/>
+            <a:off x="6931152" y="4069080"/>
+            <a:ext cx="146304" cy="274320"/>
           </a:xfrm>
           <a:prstGeom prst="rightArrow">
             <a:avLst/>
           </a:prstGeom>
           <a:solidFill>
-            <a:srgbClr val="5B3E96"/>
+            <a:srgbClr val="595959"/>
           </a:solidFill>
           <a:ln>
             <a:noFill/>
@@ -18551,25 +19044,27 @@
       </p:sp>
       <p:sp>
         <p:nvSpPr>
-          <p:cNvPr id="17" name="Rounded Rectangle 16"/>
+          <p:cNvPr id="19" name="Rounded Rectangle 18"/>
           <p:cNvSpPr/>
           <p:nvPr/>
         </p:nvSpPr>
         <p:spPr>
           <a:xfrm>
-            <a:off x="6035040" y="4407408"/>
-            <a:ext cx="5577840" cy="621792"/>
+            <a:off x="7077456" y="3794760"/>
+            <a:ext cx="1481328" cy="822960"/>
           </a:xfrm>
           <a:prstGeom prst="roundRect">
             <a:avLst>
-              <a:gd name="adj" fmla="val 40000"/>
+              <a:gd name="adj" fmla="val 30000"/>
             </a:avLst>
           </a:prstGeom>
           <a:solidFill>
-            <a:srgbClr val="5B3E96"/>
-          </a:solidFill>
-          <a:ln>
-            <a:noFill/>
+            <a:srgbClr val="EEF2F8"/>
+          </a:solidFill>
+          <a:ln w="12700">
+            <a:solidFill>
+              <a:srgbClr val="002060"/>
+            </a:solidFill>
           </a:ln>
           <a:effectLst/>
         </p:spPr>
@@ -18591,48 +19086,43 @@
           <a:bodyPr rtlCol="0" anchor="ctr" wrap="square" lIns="109728" rIns="109728" tIns="54864" bIns="54864"/>
           <a:lstStyle/>
           <a:p>
-            <a:pPr algn="l">
-              <a:spcAft>
-                <a:spcPts val="0"/>
-              </a:spcAft>
-            </a:pPr>
-            <a:r>
-              <a:rPr sz="1400" b="1">
-                <a:solidFill>
-                  <a:srgbClr val="FFFFFF"/>
-                </a:solidFill>
-                <a:latin typeface="Arial"/>
-              </a:rPr>
-              <a:t>Replies in the seller's language</a:t>
-            </a:r>
-          </a:p>
-        </p:txBody>
-      </p:sp>
-      <p:sp>
-        <p:nvSpPr>
-          <p:cNvPr id="18" name="Rounded Rectangle 17"/>
+            <a:pPr algn="ctr">
+              <a:spcAft>
+                <a:spcPts val="0"/>
+              </a:spcAft>
+            </a:pPr>
+            <a:r>
+              <a:rPr sz="1200" b="1">
+                <a:solidFill>
+                  <a:srgbClr val="002060"/>
+                </a:solidFill>
+                <a:latin typeface="Arial"/>
+              </a:rPr>
+              <a:t>Pick hook and backup</a:t>
+            </a:r>
+          </a:p>
+        </p:txBody>
+      </p:sp>
+      <p:sp>
+        <p:nvSpPr>
+          <p:cNvPr id="20" name="Right Arrow 19"/>
           <p:cNvSpPr/>
           <p:nvPr/>
         </p:nvSpPr>
         <p:spPr>
           <a:xfrm>
-            <a:off x="566928" y="5166359"/>
-            <a:ext cx="4754880" cy="621792"/>
-          </a:xfrm>
-          <a:prstGeom prst="roundRect">
-            <a:avLst>
-              <a:gd name="adj" fmla="val 40000"/>
-            </a:avLst>
-          </a:prstGeom>
-          <a:solidFill>
-            <a:srgbClr val="EEF2F8"/>
-          </a:solidFill>
-          <a:ln w="12700">
-            <a:solidFill>
-              <a:srgbClr val="595959"/>
-            </a:solidFill>
+            <a:off x="8558784" y="4069080"/>
+            <a:ext cx="146304" cy="274320"/>
+          </a:xfrm>
+          <a:prstGeom prst="rightArrow">
+            <a:avLst/>
+          </a:prstGeom>
+          <a:solidFill>
+            <a:srgbClr val="595959"/>
+          </a:solidFill>
+          <a:ln>
+            <a:noFill/>
           </a:ln>
-          <a:effectLst/>
         </p:spPr>
         <p:style>
           <a:lnRef idx="1">
@@ -18649,46 +19139,38 @@
           </a:fontRef>
         </p:style>
         <p:txBody>
-          <a:bodyPr rtlCol="0" anchor="ctr" wrap="square" lIns="109728" rIns="109728" tIns="54864" bIns="54864"/>
-          <a:lstStyle/>
-          <a:p>
-            <a:pPr algn="l">
-              <a:spcAft>
-                <a:spcPts val="0"/>
-              </a:spcAft>
-            </a:pPr>
-            <a:r>
-              <a:rPr sz="1400" b="0">
-                <a:solidFill>
-                  <a:srgbClr val="262626"/>
-                </a:solidFill>
-                <a:latin typeface="Arial"/>
-              </a:rPr>
-              <a:t>“Who handles my account?”</a:t>
-            </a:r>
-          </a:p>
-        </p:txBody>
-      </p:sp>
-      <p:sp>
-        <p:nvSpPr>
-          <p:cNvPr id="19" name="Right Arrow 18"/>
+          <a:bodyPr rtlCol="0" anchor="ctr"/>
+          <a:lstStyle/>
+          <a:p>
+            <a:pPr algn="ctr"/>
+          </a:p>
+        </p:txBody>
+      </p:sp>
+      <p:sp>
+        <p:nvSpPr>
+          <p:cNvPr id="21" name="Rounded Rectangle 20"/>
           <p:cNvSpPr/>
           <p:nvPr/>
         </p:nvSpPr>
         <p:spPr>
           <a:xfrm>
-            <a:off x="5440680" y="5294375"/>
-            <a:ext cx="457200" cy="365760"/>
-          </a:xfrm>
-          <a:prstGeom prst="rightArrow">
-            <a:avLst/>
-          </a:prstGeom>
-          <a:solidFill>
-            <a:srgbClr val="1B6B5E"/>
-          </a:solidFill>
-          <a:ln>
-            <a:noFill/>
+            <a:off x="8705088" y="3794760"/>
+            <a:ext cx="1481328" cy="822960"/>
+          </a:xfrm>
+          <a:prstGeom prst="roundRect">
+            <a:avLst>
+              <a:gd name="adj" fmla="val 30000"/>
+            </a:avLst>
+          </a:prstGeom>
+          <a:solidFill>
+            <a:srgbClr val="EEF2F8"/>
+          </a:solidFill>
+          <a:ln w="12700">
+            <a:solidFill>
+              <a:srgbClr val="002060"/>
+            </a:solidFill>
           </a:ln>
+          <a:effectLst/>
         </p:spPr>
         <p:style>
           <a:lnRef idx="1">
@@ -18705,36 +19187,46 @@
           </a:fontRef>
         </p:style>
         <p:txBody>
-          <a:bodyPr rtlCol="0" anchor="ctr"/>
-          <a:lstStyle/>
-          <a:p>
-            <a:pPr algn="ctr"/>
-          </a:p>
-        </p:txBody>
-      </p:sp>
-      <p:sp>
-        <p:nvSpPr>
-          <p:cNvPr id="20" name="Rounded Rectangle 19"/>
+          <a:bodyPr rtlCol="0" anchor="ctr" wrap="square" lIns="109728" rIns="109728" tIns="54864" bIns="54864"/>
+          <a:lstStyle/>
+          <a:p>
+            <a:pPr algn="ctr">
+              <a:spcAft>
+                <a:spcPts val="0"/>
+              </a:spcAft>
+            </a:pPr>
+            <a:r>
+              <a:rPr sz="1200" b="1">
+                <a:solidFill>
+                  <a:srgbClr val="002060"/>
+                </a:solidFill>
+                <a:latin typeface="Arial"/>
+              </a:rPr>
+              <a:t>Write the words</a:t>
+            </a:r>
+          </a:p>
+        </p:txBody>
+      </p:sp>
+      <p:sp>
+        <p:nvSpPr>
+          <p:cNvPr id="22" name="Right Arrow 21"/>
           <p:cNvSpPr/>
           <p:nvPr/>
         </p:nvSpPr>
         <p:spPr>
           <a:xfrm>
-            <a:off x="6035040" y="5166359"/>
-            <a:ext cx="5577840" cy="621792"/>
-          </a:xfrm>
-          <a:prstGeom prst="roundRect">
-            <a:avLst>
-              <a:gd name="adj" fmla="val 40000"/>
-            </a:avLst>
-          </a:prstGeom>
-          <a:solidFill>
-            <a:srgbClr val="1B6B5E"/>
+            <a:off x="10186416" y="4069080"/>
+            <a:ext cx="146304" cy="274320"/>
+          </a:xfrm>
+          <a:prstGeom prst="rightArrow">
+            <a:avLst/>
+          </a:prstGeom>
+          <a:solidFill>
+            <a:srgbClr val="595959"/>
           </a:solidFill>
           <a:ln>
             <a:noFill/>
           </a:ln>
-          <a:effectLst/>
         </p:spPr>
         <p:style>
           <a:lnRef idx="1">
@@ -18751,100 +19243,147 @@
           </a:fontRef>
         </p:style>
         <p:txBody>
+          <a:bodyPr rtlCol="0" anchor="ctr"/>
+          <a:lstStyle/>
+          <a:p>
+            <a:pPr algn="ctr"/>
+          </a:p>
+        </p:txBody>
+      </p:sp>
+      <p:sp>
+        <p:nvSpPr>
+          <p:cNvPr id="23" name="Rounded Rectangle 22"/>
+          <p:cNvSpPr/>
+          <p:nvPr/>
+        </p:nvSpPr>
+        <p:spPr>
+          <a:xfrm>
+            <a:off x="10332719" y="3794760"/>
+            <a:ext cx="1481328" cy="822960"/>
+          </a:xfrm>
+          <a:prstGeom prst="roundRect">
+            <a:avLst>
+              <a:gd name="adj" fmla="val 30000"/>
+            </a:avLst>
+          </a:prstGeom>
+          <a:solidFill>
+            <a:srgbClr val="EEF2F8"/>
+          </a:solidFill>
+          <a:ln w="12700">
+            <a:solidFill>
+              <a:srgbClr val="002060"/>
+            </a:solidFill>
+          </a:ln>
+          <a:effectLst/>
+        </p:spPr>
+        <p:style>
+          <a:lnRef idx="1">
+            <a:schemeClr val="accent1"/>
+          </a:lnRef>
+          <a:fillRef idx="3">
+            <a:schemeClr val="accent1"/>
+          </a:fillRef>
+          <a:effectRef idx="2">
+            <a:schemeClr val="accent1"/>
+          </a:effectRef>
+          <a:fontRef idx="minor">
+            <a:schemeClr val="lt1"/>
+          </a:fontRef>
+        </p:style>
+        <p:txBody>
           <a:bodyPr rtlCol="0" anchor="ctr" wrap="square" lIns="109728" rIns="109728" tIns="54864" bIns="54864"/>
           <a:lstStyle/>
           <a:p>
-            <a:pPr algn="l">
-              <a:spcAft>
-                <a:spcPts val="0"/>
-              </a:spcAft>
-            </a:pPr>
-            <a:r>
-              <a:rPr sz="1400" b="1">
-                <a:solidFill>
-                  <a:srgbClr val="FFFFFF"/>
-                </a:solidFill>
-                <a:latin typeface="Arial"/>
-              </a:rPr>
-              <a:t>Names the handler and books with them; a team if none</a:t>
-            </a:r>
-          </a:p>
-        </p:txBody>
-      </p:sp>
-      <p:sp>
-        <p:nvSpPr>
-          <p:cNvPr id="21" name="TextBox 20"/>
-          <p:cNvSpPr txBox="1"/>
+            <a:pPr algn="ctr">
+              <a:spcAft>
+                <a:spcPts val="0"/>
+              </a:spcAft>
+            </a:pPr>
+            <a:r>
+              <a:rPr sz="1200" b="1">
+                <a:solidFill>
+                  <a:srgbClr val="002060"/>
+                </a:solidFill>
+                <a:latin typeface="Arial"/>
+              </a:rPr>
+              <a:t>Finalize</a:t>
+            </a:r>
+          </a:p>
+        </p:txBody>
+      </p:sp>
+      <p:sp>
+        <p:nvSpPr>
+          <p:cNvPr id="24" name="Rounded Rectangle 23"/>
+          <p:cNvSpPr/>
           <p:nvPr/>
         </p:nvSpPr>
         <p:spPr>
           <a:xfrm>
-            <a:off x="566928" y="5943600"/>
-            <a:ext cx="5486400" cy="274320"/>
-          </a:xfrm>
-          <a:prstGeom prst="rect">
-            <a:avLst/>
-          </a:prstGeom>
-          <a:noFill/>
-        </p:spPr>
-        <p:txBody>
-          <a:bodyPr wrap="square">
-            <a:spAutoFit/>
-          </a:bodyPr>
-          <a:lstStyle/>
-          <a:p>
-            <a:pPr algn="l">
-              <a:spcAft>
-                <a:spcPts val="0"/>
-              </a:spcAft>
-            </a:pPr>
-            <a:r>
-              <a:rPr sz="1100" b="1">
-                <a:solidFill>
-                  <a:srgbClr val="595959"/>
-                </a:solidFill>
-                <a:latin typeface="Arial"/>
-              </a:rPr>
-              <a:t>SELLER SAYS</a:t>
-            </a:r>
-          </a:p>
-        </p:txBody>
-      </p:sp>
-      <p:sp>
-        <p:nvSpPr>
-          <p:cNvPr id="22" name="TextBox 21"/>
-          <p:cNvSpPr txBox="1"/>
-          <p:nvPr/>
-        </p:nvSpPr>
-        <p:spPr>
-          <a:xfrm>
-            <a:off x="6035040" y="5943600"/>
-            <a:ext cx="5486400" cy="274320"/>
-          </a:xfrm>
-          <a:prstGeom prst="rect">
-            <a:avLst/>
-          </a:prstGeom>
-          <a:noFill/>
-        </p:spPr>
-        <p:txBody>
-          <a:bodyPr wrap="square">
-            <a:spAutoFit/>
-          </a:bodyPr>
-          <a:lstStyle/>
-          <a:p>
-            <a:pPr algn="l">
-              <a:spcAft>
-                <a:spcPts val="0"/>
-              </a:spcAft>
-            </a:pPr>
-            <a:r>
-              <a:rPr sz="1100" b="1">
-                <a:solidFill>
-                  <a:srgbClr val="002060"/>
-                </a:solidFill>
-                <a:latin typeface="Arial"/>
-              </a:rPr>
-              <a:t>VANI DOES</a:t>
+            <a:off x="502920" y="4983480"/>
+            <a:ext cx="11338560" cy="868680"/>
+          </a:xfrm>
+          <a:prstGeom prst="roundRect">
+            <a:avLst>
+              <a:gd name="adj" fmla="val 30000"/>
+            </a:avLst>
+          </a:prstGeom>
+          <a:solidFill>
+            <a:srgbClr val="FFFFFF"/>
+          </a:solidFill>
+          <a:ln w="12700">
+            <a:solidFill>
+              <a:srgbClr val="5B3E96"/>
+            </a:solidFill>
+          </a:ln>
+          <a:effectLst/>
+        </p:spPr>
+        <p:style>
+          <a:lnRef idx="1">
+            <a:schemeClr val="accent1"/>
+          </a:lnRef>
+          <a:fillRef idx="3">
+            <a:schemeClr val="accent1"/>
+          </a:fillRef>
+          <a:effectRef idx="2">
+            <a:schemeClr val="accent1"/>
+          </a:effectRef>
+          <a:fontRef idx="minor">
+            <a:schemeClr val="lt1"/>
+          </a:fontRef>
+        </p:style>
+        <p:txBody>
+          <a:bodyPr rtlCol="0" anchor="ctr" wrap="square" lIns="109728" rIns="109728" tIns="54864" bIns="54864"/>
+          <a:lstStyle/>
+          <a:p>
+            <a:pPr algn="ctr">
+              <a:spcAft>
+                <a:spcPts val="300"/>
+              </a:spcAft>
+            </a:pPr>
+            <a:r>
+              <a:rPr sz="1300" b="1">
+                <a:solidFill>
+                  <a:srgbClr val="5B3E96"/>
+                </a:solidFill>
+                <a:latin typeface="Arial"/>
+              </a:rPr>
+              <a:t>The skill is a file the agent follows. A writer tool and validator enforce it: the agent cannot write a persona any other way</a:t>
+            </a:r>
+          </a:p>
+          <a:p>
+            <a:pPr algn="ctr">
+              <a:spcAft>
+                <a:spcPts val="0"/>
+              </a:spcAft>
+            </a:pPr>
+            <a:r>
+              <a:rPr sz="1100" b="0">
+                <a:solidFill>
+                  <a:srgbClr val="262626"/>
+                </a:solidFill>
+                <a:latin typeface="Arial"/>
+              </a:rPr>
+              <a:t>Searches come before decisions; every rejected hit needs a written reason</a:t>
             </a:r>
           </a:p>
         </p:txBody>
@@ -18883,7 +19422,7 @@
           <a:lstStyle/>
           <a:p>
             <a:r>
-              <a:t>Mood Engine: Two Layers</a:t>
+              <a:t>One Call: Start, Mid-Call, End, Improve</a:t>
             </a:r>
           </a:p>
         </p:txBody>
@@ -18896,21 +19435,19 @@
         </p:nvSpPr>
         <p:spPr>
           <a:xfrm>
-            <a:off x="502920" y="2743200"/>
-            <a:ext cx="2103120" cy="1097280"/>
+            <a:off x="502920" y="1463040"/>
+            <a:ext cx="2606040" cy="914400"/>
           </a:xfrm>
           <a:prstGeom prst="roundRect">
             <a:avLst>
-              <a:gd name="adj" fmla="val 40000"/>
+              <a:gd name="adj" fmla="val 6000"/>
             </a:avLst>
           </a:prstGeom>
           <a:solidFill>
-            <a:srgbClr val="EEF2F8"/>
-          </a:solidFill>
-          <a:ln w="12700">
-            <a:solidFill>
-              <a:srgbClr val="595959"/>
-            </a:solidFill>
+            <a:srgbClr val="2EA896"/>
+          </a:solidFill>
+          <a:ln>
+            <a:noFill/>
           </a:ln>
           <a:effectLst/>
         </p:spPr>
@@ -18934,17 +19471,17 @@
           <a:p>
             <a:pPr algn="ctr">
               <a:spcAft>
-                <a:spcPts val="200"/>
-              </a:spcAft>
-            </a:pPr>
-            <a:r>
-              <a:rPr sz="1500" b="1">
-                <a:solidFill>
-                  <a:srgbClr val="002060"/>
-                </a:solidFill>
-                <a:latin typeface="Arial"/>
-              </a:rPr>
-              <a:t>Seller turn</a:t>
+                <a:spcPts val="100"/>
+              </a:spcAft>
+            </a:pPr>
+            <a:r>
+              <a:rPr sz="1800" b="1">
+                <a:solidFill>
+                  <a:srgbClr val="FFFFFF"/>
+                </a:solidFill>
+                <a:latin typeface="Arial"/>
+              </a:rPr>
+              <a:t>START</a:t>
             </a:r>
           </a:p>
           <a:p>
@@ -18954,37 +19491,40 @@
               </a:spcAft>
             </a:pPr>
             <a:r>
-              <a:rPr sz="1100" b="0">
-                <a:solidFill>
-                  <a:srgbClr val="595959"/>
-                </a:solidFill>
-                <a:latin typeface="Arial"/>
-              </a:rPr>
-              <a:t>what was just said</a:t>
-            </a:r>
-          </a:p>
-        </p:txBody>
-      </p:sp>
-      <p:sp>
-        <p:nvSpPr>
-          <p:cNvPr id="4" name="Right Arrow 3"/>
+              <a:rPr sz="1200" b="0">
+                <a:solidFill>
+                  <a:srgbClr val="FFFFFF"/>
+                </a:solidFill>
+                <a:latin typeface="Arial"/>
+              </a:rPr>
+              <a:t>Persona is set</a:t>
+            </a:r>
+          </a:p>
+        </p:txBody>
+      </p:sp>
+      <p:sp>
+        <p:nvSpPr>
+          <p:cNvPr id="4" name="Rounded Rectangle 3"/>
           <p:cNvSpPr/>
           <p:nvPr/>
         </p:nvSpPr>
         <p:spPr>
           <a:xfrm>
-            <a:off x="2651760" y="1965960"/>
-            <a:ext cx="457200" cy="365760"/>
-          </a:xfrm>
-          <a:prstGeom prst="rightArrow">
-            <a:avLst/>
-          </a:prstGeom>
-          <a:solidFill>
-            <a:srgbClr val="2EA896"/>
+            <a:off x="502920" y="2468880"/>
+            <a:ext cx="2606040" cy="1920240"/>
+          </a:xfrm>
+          <a:prstGeom prst="roundRect">
+            <a:avLst>
+              <a:gd name="adj" fmla="val 6000"/>
+            </a:avLst>
+          </a:prstGeom>
+          <a:solidFill>
+            <a:srgbClr val="EEF2F8"/>
           </a:solidFill>
           <a:ln>
             <a:noFill/>
           </a:ln>
+          <a:effectLst/>
         </p:spPr>
         <p:style>
           <a:lnRef idx="1">
@@ -19001,10 +19541,58 @@
           </a:fontRef>
         </p:style>
         <p:txBody>
-          <a:bodyPr rtlCol="0" anchor="ctr"/>
-          <a:lstStyle/>
-          <a:p>
-            <a:pPr algn="ctr"/>
+          <a:bodyPr rtlCol="0" anchor="t" wrap="square" lIns="109728" rIns="109728" tIns="54864" bIns="54864"/>
+          <a:lstStyle/>
+          <a:p>
+            <a:pPr algn="l" marL="182880" indent="-164592">
+              <a:spcAft>
+                <a:spcPts val="600"/>
+              </a:spcAft>
+              <a:buChar char="•"/>
+            </a:pPr>
+            <a:r>
+              <a:rPr sz="1300" b="0">
+                <a:solidFill>
+                  <a:srgbClr val="262626"/>
+                </a:solidFill>
+                <a:latin typeface="Arial"/>
+              </a:rPr>
+              <a:t>Voice, pace, pitch</a:t>
+            </a:r>
+          </a:p>
+          <a:p>
+            <a:pPr algn="l" marL="182880" indent="-164592">
+              <a:spcAft>
+                <a:spcPts val="600"/>
+              </a:spcAft>
+              <a:buChar char="•"/>
+            </a:pPr>
+            <a:r>
+              <a:rPr sz="1300" b="0">
+                <a:solidFill>
+                  <a:srgbClr val="262626"/>
+                </a:solidFill>
+                <a:latin typeface="Arial"/>
+              </a:rPr>
+              <a:t>Start language</a:t>
+            </a:r>
+          </a:p>
+          <a:p>
+            <a:pPr algn="l" marL="182880" indent="-164592">
+              <a:spcAft>
+                <a:spcPts val="600"/>
+              </a:spcAft>
+              <a:buChar char="•"/>
+            </a:pPr>
+            <a:r>
+              <a:rPr sz="1300" b="0">
+                <a:solidFill>
+                  <a:srgbClr val="262626"/>
+                </a:solidFill>
+                <a:latin typeface="Arial"/>
+              </a:rPr>
+              <a:t>Opening line and hook</a:t>
+            </a:r>
           </a:p>
         </p:txBody>
       </p:sp>
@@ -19016,14 +19604,14 @@
         </p:nvSpPr>
         <p:spPr>
           <a:xfrm>
-            <a:off x="2651760" y="4069080"/>
-            <a:ext cx="457200" cy="365760"/>
+            <a:off x="3136391" y="1737360"/>
+            <a:ext cx="292608" cy="365760"/>
           </a:xfrm>
           <a:prstGeom prst="rightArrow">
             <a:avLst/>
           </a:prstGeom>
           <a:solidFill>
-            <a:srgbClr val="002060"/>
+            <a:srgbClr val="595959"/>
           </a:solidFill>
           <a:ln>
             <a:noFill/>
@@ -19059,8 +19647,8 @@
         </p:nvSpPr>
         <p:spPr>
           <a:xfrm>
-            <a:off x="3200400" y="1371600"/>
-            <a:ext cx="4480560" cy="1737360"/>
+            <a:off x="3429000" y="1463040"/>
+            <a:ext cx="2606040" cy="914400"/>
           </a:xfrm>
           <a:prstGeom prst="roundRect">
             <a:avLst>
@@ -19068,7 +19656,7 @@
             </a:avLst>
           </a:prstGeom>
           <a:solidFill>
-            <a:srgbClr val="2EA896"/>
+            <a:srgbClr val="002060"/>
           </a:solidFill>
           <a:ln>
             <a:noFill/>
@@ -19093,25 +19681,25 @@
           <a:bodyPr rtlCol="0" anchor="ctr" wrap="square" lIns="109728" rIns="109728" tIns="54864" bIns="54864"/>
           <a:lstStyle/>
           <a:p>
-            <a:pPr algn="l">
-              <a:spcAft>
-                <a:spcPts val="300"/>
-              </a:spcAft>
-            </a:pPr>
-            <a:r>
-              <a:rPr sz="1700" b="1">
+            <a:pPr algn="ctr">
+              <a:spcAft>
+                <a:spcPts val="100"/>
+              </a:spcAft>
+            </a:pPr>
+            <a:r>
+              <a:rPr sz="1800" b="1">
                 <a:solidFill>
                   <a:srgbClr val="FFFFFF"/>
                 </a:solidFill>
                 <a:latin typeface="Arial"/>
               </a:rPr>
-              <a:t>Keyword tool: instant</a:t>
-            </a:r>
-          </a:p>
-          <a:p>
-            <a:pPr algn="l">
-              <a:spcAft>
-                <a:spcPts val="200"/>
+              <a:t>MID-CALL</a:t>
+            </a:r>
+          </a:p>
+          <a:p>
+            <a:pPr algn="ctr">
+              <a:spcAft>
+                <a:spcPts val="0"/>
               </a:spcAft>
             </a:pPr>
             <a:r>
@@ -19121,23 +19709,7 @@
                 </a:solidFill>
                 <a:latin typeface="Arial"/>
               </a:rPr>
-              <a:t>Reads Hindi, Hinglish, Marathi, Telugu and more</a:t>
-            </a:r>
-          </a:p>
-          <a:p>
-            <a:pPr algn="l">
-              <a:spcAft>
-                <a:spcPts val="0"/>
-              </a:spcAft>
-            </a:pPr>
-            <a:r>
-              <a:rPr sz="1200" b="0">
-                <a:solidFill>
-                  <a:srgbClr val="FFFFFF"/>
-                </a:solidFill>
-                <a:latin typeface="Arial"/>
-              </a:rPr>
-              <a:t>Under 1 ms, same-turn directive</a:t>
+              <a:t>It listens every turn</a:t>
             </a:r>
           </a:p>
         </p:txBody>
@@ -19150,8 +19722,8 @@
         </p:nvSpPr>
         <p:spPr>
           <a:xfrm>
-            <a:off x="3200400" y="3474720"/>
-            <a:ext cx="4480560" cy="1737360"/>
+            <a:off x="3429000" y="2468880"/>
+            <a:ext cx="2606040" cy="1920240"/>
           </a:xfrm>
           <a:prstGeom prst="roundRect">
             <a:avLst>
@@ -19159,7 +19731,7 @@
             </a:avLst>
           </a:prstGeom>
           <a:solidFill>
-            <a:srgbClr val="002060"/>
+            <a:srgbClr val="EEF2F8"/>
           </a:solidFill>
           <a:ln>
             <a:noFill/>
@@ -19181,54 +19753,74 @@
           </a:fontRef>
         </p:style>
         <p:txBody>
-          <a:bodyPr rtlCol="0" anchor="ctr" wrap="square" lIns="109728" rIns="109728" tIns="54864" bIns="54864"/>
-          <a:lstStyle/>
-          <a:p>
-            <a:pPr algn="l">
-              <a:spcAft>
-                <a:spcPts val="300"/>
-              </a:spcAft>
-            </a:pPr>
-            <a:r>
-              <a:rPr sz="1700" b="1">
-                <a:solidFill>
-                  <a:srgbClr val="FFFFFF"/>
-                </a:solidFill>
-                <a:latin typeface="Arial"/>
-              </a:rPr>
-              <a:t>Jev decision model: after the call</a:t>
-            </a:r>
-          </a:p>
-          <a:p>
-            <a:pPr algn="l">
-              <a:spcAft>
-                <a:spcPts val="200"/>
-              </a:spcAft>
-            </a:pPr>
-            <a:r>
-              <a:rPr sz="1200" b="0">
-                <a:solidFill>
-                  <a:srgbClr val="FFFFFF"/>
-                </a:solidFill>
-                <a:latin typeface="Arial"/>
-              </a:rPr>
-              <a:t>Judges the same turns on real calls: 6 mood questions at once</a:t>
-            </a:r>
-          </a:p>
-          <a:p>
-            <a:pPr algn="l">
-              <a:spcAft>
-                <a:spcPts val="0"/>
-              </a:spcAft>
-            </a:pPr>
-            <a:r>
-              <a:rPr sz="1200" b="0">
-                <a:solidFill>
-                  <a:srgbClr val="FFFFFF"/>
-                </a:solidFill>
-                <a:latin typeface="Arial"/>
-              </a:rPr>
-              <a:t>49 of 51 correct in tests; tested live via a relay</a:t>
+          <a:bodyPr rtlCol="0" anchor="t" wrap="square" lIns="109728" rIns="109728" tIns="54864" bIns="54864"/>
+          <a:lstStyle/>
+          <a:p>
+            <a:pPr algn="l" marL="182880" indent="-164592">
+              <a:spcAft>
+                <a:spcPts val="600"/>
+              </a:spcAft>
+              <a:buChar char="•"/>
+            </a:pPr>
+            <a:r>
+              <a:rPr sz="1300" b="0">
+                <a:solidFill>
+                  <a:srgbClr val="262626"/>
+                </a:solidFill>
+                <a:latin typeface="Arial"/>
+              </a:rPr>
+              <a:t>Rushed: shorter</a:t>
+            </a:r>
+          </a:p>
+          <a:p>
+            <a:pPr algn="l" marL="182880" indent="-164592">
+              <a:spcAft>
+                <a:spcPts val="600"/>
+              </a:spcAft>
+              <a:buChar char="•"/>
+            </a:pPr>
+            <a:r>
+              <a:rPr sz="1300" b="0">
+                <a:solidFill>
+                  <a:srgbClr val="262626"/>
+                </a:solidFill>
+                <a:latin typeface="Arial"/>
+              </a:rPr>
+              <a:t>Confused: simpler</a:t>
+            </a:r>
+          </a:p>
+          <a:p>
+            <a:pPr algn="l" marL="182880" indent="-164592">
+              <a:spcAft>
+                <a:spcPts val="600"/>
+              </a:spcAft>
+              <a:buChar char="•"/>
+            </a:pPr>
+            <a:r>
+              <a:rPr sz="1300" b="0">
+                <a:solidFill>
+                  <a:srgbClr val="262626"/>
+                </a:solidFill>
+                <a:latin typeface="Arial"/>
+              </a:rPr>
+              <a:t>Irritated: apologises</a:t>
+            </a:r>
+          </a:p>
+          <a:p>
+            <a:pPr algn="l" marL="182880" indent="-164592">
+              <a:spcAft>
+                <a:spcPts val="600"/>
+              </a:spcAft>
+              <a:buChar char="•"/>
+            </a:pPr>
+            <a:r>
+              <a:rPr sz="1300" b="0">
+                <a:solidFill>
+                  <a:srgbClr val="262626"/>
+                </a:solidFill>
+                <a:latin typeface="Arial"/>
+              </a:rPr>
+              <a:t>Language switch: follows</a:t>
             </a:r>
           </a:p>
         </p:txBody>
@@ -19241,14 +19833,14 @@
         </p:nvSpPr>
         <p:spPr>
           <a:xfrm>
-            <a:off x="7772400" y="2011680"/>
-            <a:ext cx="457200" cy="365760"/>
+            <a:off x="6062472" y="1737360"/>
+            <a:ext cx="292608" cy="365760"/>
           </a:xfrm>
           <a:prstGeom prst="rightArrow">
             <a:avLst/>
           </a:prstGeom>
           <a:solidFill>
-            <a:srgbClr val="2EA896"/>
+            <a:srgbClr val="595959"/>
           </a:solidFill>
           <a:ln>
             <a:noFill/>
@@ -19278,24 +19870,27 @@
       </p:sp>
       <p:sp>
         <p:nvSpPr>
-          <p:cNvPr id="9" name="Right Arrow 8"/>
+          <p:cNvPr id="9" name="Rounded Rectangle 8"/>
           <p:cNvSpPr/>
           <p:nvPr/>
         </p:nvSpPr>
         <p:spPr>
           <a:xfrm>
-            <a:off x="7772400" y="4114800"/>
-            <a:ext cx="457200" cy="365760"/>
-          </a:xfrm>
-          <a:prstGeom prst="rightArrow">
-            <a:avLst/>
-          </a:prstGeom>
-          <a:solidFill>
-            <a:srgbClr val="002060"/>
+            <a:off x="6355080" y="1463040"/>
+            <a:ext cx="2606040" cy="914400"/>
+          </a:xfrm>
+          <a:prstGeom prst="roundRect">
+            <a:avLst>
+              <a:gd name="adj" fmla="val 6000"/>
+            </a:avLst>
+          </a:prstGeom>
+          <a:solidFill>
+            <a:srgbClr val="C00000"/>
           </a:solidFill>
           <a:ln>
             <a:noFill/>
           </a:ln>
+          <a:effectLst/>
         </p:spPr>
         <p:style>
           <a:lnRef idx="1">
@@ -19312,10 +19907,39 @@
           </a:fontRef>
         </p:style>
         <p:txBody>
-          <a:bodyPr rtlCol="0" anchor="ctr"/>
-          <a:lstStyle/>
-          <a:p>
-            <a:pPr algn="ctr"/>
+          <a:bodyPr rtlCol="0" anchor="ctr" wrap="square" lIns="109728" rIns="109728" tIns="54864" bIns="54864"/>
+          <a:lstStyle/>
+          <a:p>
+            <a:pPr algn="ctr">
+              <a:spcAft>
+                <a:spcPts val="100"/>
+              </a:spcAft>
+            </a:pPr>
+            <a:r>
+              <a:rPr sz="1800" b="1">
+                <a:solidFill>
+                  <a:srgbClr val="FFFFFF"/>
+                </a:solidFill>
+                <a:latin typeface="Arial"/>
+              </a:rPr>
+              <a:t>END</a:t>
+            </a:r>
+          </a:p>
+          <a:p>
+            <a:pPr algn="ctr">
+              <a:spcAft>
+                <a:spcPts val="0"/>
+              </a:spcAft>
+            </a:pPr>
+            <a:r>
+              <a:rPr sz="1200" b="0">
+                <a:solidFill>
+                  <a:srgbClr val="FFFFFF"/>
+                </a:solidFill>
+                <a:latin typeface="Arial"/>
+              </a:rPr>
+              <a:t>Meeting booked</a:t>
+            </a:r>
           </a:p>
         </p:txBody>
       </p:sp>
@@ -19327,8 +19951,8 @@
         </p:nvSpPr>
         <p:spPr>
           <a:xfrm>
-            <a:off x="8321040" y="1371600"/>
-            <a:ext cx="3383280" cy="1737360"/>
+            <a:off x="6355080" y="2468880"/>
+            <a:ext cx="2606040" cy="1920240"/>
           </a:xfrm>
           <a:prstGeom prst="roundRect">
             <a:avLst>
@@ -19336,7 +19960,7 @@
             </a:avLst>
           </a:prstGeom>
           <a:solidFill>
-            <a:srgbClr val="C00000"/>
+            <a:srgbClr val="EEF2F8"/>
           </a:solidFill>
           <a:ln>
             <a:noFill/>
@@ -19358,81 +19982,98 @@
           </a:fontRef>
         </p:style>
         <p:txBody>
-          <a:bodyPr rtlCol="0" anchor="ctr" wrap="square" lIns="109728" rIns="109728" tIns="54864" bIns="54864"/>
-          <a:lstStyle/>
-          <a:p>
-            <a:pPr algn="ctr">
-              <a:spcAft>
-                <a:spcPts val="400"/>
-              </a:spcAft>
-            </a:pPr>
-            <a:r>
-              <a:rPr sz="1600" b="1">
-                <a:solidFill>
-                  <a:srgbClr val="FFFFFF"/>
-                </a:solidFill>
-                <a:latin typeface="Arial"/>
-              </a:rPr>
-              <a:t>MODE + DIRECTIVE</a:t>
-            </a:r>
-          </a:p>
-          <a:p>
-            <a:pPr algn="ctr">
-              <a:spcAft>
-                <a:spcPts val="400"/>
-              </a:spcAft>
-            </a:pPr>
-            <a:r>
-              <a:rPr sz="1100" b="0">
-                <a:solidFill>
-                  <a:srgbClr val="FFFFFF"/>
-                </a:solidFill>
-                <a:latin typeface="Arial"/>
-              </a:rPr>
-              <a:t>in the call, same turn</a:t>
-            </a:r>
-          </a:p>
-          <a:p>
-            <a:pPr algn="ctr">
-              <a:spcAft>
-                <a:spcPts val="0"/>
-              </a:spcAft>
-            </a:pPr>
-            <a:r>
-              <a:rPr sz="1200" b="1">
-                <a:solidFill>
-                  <a:srgbClr val="FFFFFF"/>
-                </a:solidFill>
-                <a:latin typeface="Arial"/>
-              </a:rPr>
-              <a:t>VANI changes how it speaks</a:t>
-            </a:r>
-          </a:p>
-        </p:txBody>
-      </p:sp>
-      <p:sp>
-        <p:nvSpPr>
-          <p:cNvPr id="11" name="Rounded Rectangle 10"/>
+          <a:bodyPr rtlCol="0" anchor="t" wrap="square" lIns="109728" rIns="109728" tIns="54864" bIns="54864"/>
+          <a:lstStyle/>
+          <a:p>
+            <a:pPr algn="l" marL="182880" indent="-164592">
+              <a:spcAft>
+                <a:spcPts val="600"/>
+              </a:spcAft>
+              <a:buChar char="•"/>
+            </a:pPr>
+            <a:r>
+              <a:rPr sz="1300" b="0">
+                <a:solidFill>
+                  <a:srgbClr val="262626"/>
+                </a:solidFill>
+                <a:latin typeface="Arial"/>
+              </a:rPr>
+              <a:t>Day and time agreed</a:t>
+            </a:r>
+          </a:p>
+          <a:p>
+            <a:pPr algn="l" marL="182880" indent="-164592">
+              <a:spcAft>
+                <a:spcPts val="600"/>
+              </a:spcAft>
+              <a:buChar char="•"/>
+            </a:pPr>
+            <a:r>
+              <a:rPr sz="1300" b="0">
+                <a:solidFill>
+                  <a:srgbClr val="262626"/>
+                </a:solidFill>
+                <a:latin typeface="Arial"/>
+              </a:rPr>
+              <a:t>With the sales handler, or our executive</a:t>
+            </a:r>
+          </a:p>
+          <a:p>
+            <a:pPr algn="l" marL="182880" indent="-164592">
+              <a:spcAft>
+                <a:spcPts val="600"/>
+              </a:spcAft>
+              <a:buChar char="•"/>
+            </a:pPr>
+            <a:r>
+              <a:rPr sz="1300" b="0">
+                <a:solidFill>
+                  <a:srgbClr val="262626"/>
+                </a:solidFill>
+                <a:latin typeface="Arial"/>
+              </a:rPr>
+              <a:t>Then: anything else?</a:t>
+            </a:r>
+          </a:p>
+          <a:p>
+            <a:pPr algn="l" marL="182880" indent="-164592">
+              <a:spcAft>
+                <a:spcPts val="600"/>
+              </a:spcAft>
+              <a:buChar char="•"/>
+            </a:pPr>
+            <a:r>
+              <a:rPr sz="1300" b="0">
+                <a:solidFill>
+                  <a:srgbClr val="262626"/>
+                </a:solidFill>
+                <a:latin typeface="Arial"/>
+              </a:rPr>
+              <a:t>Or a callback</a:t>
+            </a:r>
+          </a:p>
+        </p:txBody>
+      </p:sp>
+      <p:sp>
+        <p:nvSpPr>
+          <p:cNvPr id="11" name="Right Arrow 10"/>
           <p:cNvSpPr/>
           <p:nvPr/>
         </p:nvSpPr>
         <p:spPr>
           <a:xfrm>
-            <a:off x="8321040" y="3474720"/>
-            <a:ext cx="3383280" cy="1737360"/>
-          </a:xfrm>
-          <a:prstGeom prst="roundRect">
-            <a:avLst>
-              <a:gd name="adj" fmla="val 6000"/>
-            </a:avLst>
-          </a:prstGeom>
-          <a:solidFill>
-            <a:srgbClr val="5B3E96"/>
+            <a:off x="8988552" y="1737360"/>
+            <a:ext cx="292608" cy="365760"/>
+          </a:xfrm>
+          <a:prstGeom prst="rightArrow">
+            <a:avLst/>
+          </a:prstGeom>
+          <a:solidFill>
+            <a:srgbClr val="595959"/>
           </a:solidFill>
           <a:ln>
             <a:noFill/>
           </a:ln>
-          <a:effectLst/>
         </p:spPr>
         <p:style>
           <a:lnRef idx="1">
@@ -19449,55 +20090,10 @@
           </a:fontRef>
         </p:style>
         <p:txBody>
-          <a:bodyPr rtlCol="0" anchor="ctr" wrap="square" lIns="109728" rIns="109728" tIns="54864" bIns="54864"/>
-          <a:lstStyle/>
-          <a:p>
-            <a:pPr algn="ctr">
-              <a:spcAft>
-                <a:spcPts val="400"/>
-              </a:spcAft>
-            </a:pPr>
-            <a:r>
-              <a:rPr sz="1600" b="1">
-                <a:solidFill>
-                  <a:srgbClr val="FFFFFF"/>
-                </a:solidFill>
-                <a:latin typeface="Arial"/>
-              </a:rPr>
-              <a:t>LABELS</a:t>
-            </a:r>
-          </a:p>
-          <a:p>
-            <a:pPr algn="ctr">
-              <a:spcAft>
-                <a:spcPts val="400"/>
-              </a:spcAft>
-            </a:pPr>
-            <a:r>
-              <a:rPr sz="1100" b="0">
-                <a:solidFill>
-                  <a:srgbClr val="FFFFFF"/>
-                </a:solidFill>
-                <a:latin typeface="Arial"/>
-              </a:rPr>
-              <a:t>after the call</a:t>
-            </a:r>
-          </a:p>
-          <a:p>
-            <a:pPr algn="ctr">
-              <a:spcAft>
-                <a:spcPts val="0"/>
-              </a:spcAft>
-            </a:pPr>
-            <a:r>
-              <a:rPr sz="1200" b="1">
-                <a:solidFill>
-                  <a:srgbClr val="FFFFFF"/>
-                </a:solidFill>
-                <a:latin typeface="Arial"/>
-              </a:rPr>
-              <a:t>score and improve the keyword tool</a:t>
-            </a:r>
+          <a:bodyPr rtlCol="0" anchor="ctr"/>
+          <a:lstStyle/>
+          <a:p>
+            <a:pPr algn="ctr"/>
           </a:p>
         </p:txBody>
       </p:sp>
@@ -19509,21 +20105,19 @@
         </p:nvSpPr>
         <p:spPr>
           <a:xfrm>
-            <a:off x="502920" y="5440680"/>
-            <a:ext cx="11338560" cy="548640"/>
+            <a:off x="9281160" y="1463040"/>
+            <a:ext cx="2606040" cy="914400"/>
           </a:xfrm>
           <a:prstGeom prst="roundRect">
             <a:avLst>
-              <a:gd name="adj" fmla="val 30000"/>
+              <a:gd name="adj" fmla="val 6000"/>
             </a:avLst>
           </a:prstGeom>
           <a:solidFill>
-            <a:srgbClr val="EEF2F8"/>
-          </a:solidFill>
-          <a:ln w="12700">
-            <a:solidFill>
-              <a:srgbClr val="5B3E96"/>
-            </a:solidFill>
+            <a:srgbClr val="5B3E96"/>
+          </a:solidFill>
+          <a:ln>
+            <a:noFill/>
           </a:ln>
           <a:effectLst/>
         </p:spPr>
@@ -19547,17 +20141,270 @@
           <a:p>
             <a:pPr algn="ctr">
               <a:spcAft>
-                <a:spcPts val="0"/>
-              </a:spcAft>
-            </a:pPr>
-            <a:r>
-              <a:rPr sz="1300" b="1">
+                <a:spcPts val="100"/>
+              </a:spcAft>
+            </a:pPr>
+            <a:r>
+              <a:rPr sz="1800" b="1">
+                <a:solidFill>
+                  <a:srgbClr val="FFFFFF"/>
+                </a:solidFill>
+                <a:latin typeface="Arial"/>
+              </a:rPr>
+              <a:t>IMPROVE</a:t>
+            </a:r>
+          </a:p>
+          <a:p>
+            <a:pPr algn="ctr">
+              <a:spcAft>
+                <a:spcPts val="0"/>
+              </a:spcAft>
+            </a:pPr>
+            <a:r>
+              <a:rPr sz="1200" b="0">
+                <a:solidFill>
+                  <a:srgbClr val="FFFFFF"/>
+                </a:solidFill>
+                <a:latin typeface="Arial"/>
+              </a:rPr>
+              <a:t>Every call teaches</a:t>
+            </a:r>
+          </a:p>
+        </p:txBody>
+      </p:sp>
+      <p:sp>
+        <p:nvSpPr>
+          <p:cNvPr id="13" name="Rounded Rectangle 12"/>
+          <p:cNvSpPr/>
+          <p:nvPr/>
+        </p:nvSpPr>
+        <p:spPr>
+          <a:xfrm>
+            <a:off x="9281160" y="2468880"/>
+            <a:ext cx="2606040" cy="1920240"/>
+          </a:xfrm>
+          <a:prstGeom prst="roundRect">
+            <a:avLst>
+              <a:gd name="adj" fmla="val 6000"/>
+            </a:avLst>
+          </a:prstGeom>
+          <a:solidFill>
+            <a:srgbClr val="EEF2F8"/>
+          </a:solidFill>
+          <a:ln>
+            <a:noFill/>
+          </a:ln>
+          <a:effectLst/>
+        </p:spPr>
+        <p:style>
+          <a:lnRef idx="1">
+            <a:schemeClr val="accent1"/>
+          </a:lnRef>
+          <a:fillRef idx="3">
+            <a:schemeClr val="accent1"/>
+          </a:fillRef>
+          <a:effectRef idx="2">
+            <a:schemeClr val="accent1"/>
+          </a:effectRef>
+          <a:fontRef idx="minor">
+            <a:schemeClr val="lt1"/>
+          </a:fontRef>
+        </p:style>
+        <p:txBody>
+          <a:bodyPr rtlCol="0" anchor="t" wrap="square" lIns="109728" rIns="109728" tIns="54864" bIns="54864"/>
+          <a:lstStyle/>
+          <a:p>
+            <a:pPr algn="l" marL="182880" indent="-164592">
+              <a:spcAft>
+                <a:spcPts val="600"/>
+              </a:spcAft>
+              <a:buChar char="•"/>
+            </a:pPr>
+            <a:r>
+              <a:rPr sz="1300" b="0">
+                <a:solidFill>
+                  <a:srgbClr val="262626"/>
+                </a:solidFill>
+                <a:latin typeface="Arial"/>
+              </a:rPr>
+              <a:t>Review the call, rule checks R1-R6</a:t>
+            </a:r>
+          </a:p>
+          <a:p>
+            <a:pPr algn="l" marL="182880" indent="-164592">
+              <a:spcAft>
+                <a:spcPts val="600"/>
+              </a:spcAft>
+              <a:buChar char="•"/>
+            </a:pPr>
+            <a:r>
+              <a:rPr sz="1300" b="0">
+                <a:solidFill>
+                  <a:srgbClr val="262626"/>
+                </a:solidFill>
+                <a:latin typeface="Arial"/>
+              </a:rPr>
+              <a:t>Score persona and hook</a:t>
+            </a:r>
+          </a:p>
+          <a:p>
+            <a:pPr algn="l" marL="182880" indent="-164592">
+              <a:spcAft>
+                <a:spcPts val="600"/>
+              </a:spcAft>
+              <a:buChar char="•"/>
+            </a:pPr>
+            <a:r>
+              <a:rPr sz="1300" b="0">
+                <a:solidFill>
+                  <a:srgbClr val="262626"/>
+                </a:solidFill>
+                <a:latin typeface="Arial"/>
+              </a:rPr>
+              <a:t>Better pick next time</a:t>
+            </a:r>
+          </a:p>
+        </p:txBody>
+      </p:sp>
+      <p:sp>
+        <p:nvSpPr>
+          <p:cNvPr id="14" name="Left Arrow 13"/>
+          <p:cNvSpPr/>
+          <p:nvPr/>
+        </p:nvSpPr>
+        <p:spPr>
+          <a:xfrm>
+            <a:off x="1463040" y="4754880"/>
+            <a:ext cx="9144000" cy="548640"/>
+          </a:xfrm>
+          <a:prstGeom prst="leftArrow">
+            <a:avLst/>
+          </a:prstGeom>
+          <a:solidFill>
+            <a:srgbClr val="B9A7DB"/>
+          </a:solidFill>
+          <a:ln>
+            <a:noFill/>
+          </a:ln>
+        </p:spPr>
+        <p:style>
+          <a:lnRef idx="1">
+            <a:schemeClr val="accent1"/>
+          </a:lnRef>
+          <a:fillRef idx="3">
+            <a:schemeClr val="accent1"/>
+          </a:fillRef>
+          <a:effectRef idx="2">
+            <a:schemeClr val="accent1"/>
+          </a:effectRef>
+          <a:fontRef idx="minor">
+            <a:schemeClr val="lt1"/>
+          </a:fontRef>
+        </p:style>
+        <p:txBody>
+          <a:bodyPr rtlCol="0" anchor="ctr"/>
+          <a:lstStyle/>
+          <a:p>
+            <a:pPr algn="ctr"/>
+          </a:p>
+        </p:txBody>
+      </p:sp>
+      <p:sp>
+        <p:nvSpPr>
+          <p:cNvPr id="15" name="TextBox 14"/>
+          <p:cNvSpPr txBox="1"/>
+          <p:nvPr/>
+        </p:nvSpPr>
+        <p:spPr>
+          <a:xfrm>
+            <a:off x="2377440" y="4846320"/>
+            <a:ext cx="7315200" cy="365760"/>
+          </a:xfrm>
+          <a:prstGeom prst="rect">
+            <a:avLst/>
+          </a:prstGeom>
+          <a:noFill/>
+        </p:spPr>
+        <p:txBody>
+          <a:bodyPr wrap="square">
+            <a:spAutoFit/>
+          </a:bodyPr>
+          <a:lstStyle/>
+          <a:p>
+            <a:pPr algn="ctr">
+              <a:spcAft>
+                <a:spcPts val="0"/>
+              </a:spcAft>
+            </a:pPr>
+            <a:r>
+              <a:rPr sz="1400" b="1">
                 <a:solidFill>
                   <a:srgbClr val="5B3E96"/>
                 </a:solidFill>
                 <a:latin typeface="Arial"/>
               </a:rPr>
-              <a:t>Keyword tool answers in the call; Jev judges the same turns after the call and teaches it</a:t>
+              <a:t>The improvement loop feeds the next call's persona and hook</a:t>
+            </a:r>
+          </a:p>
+        </p:txBody>
+      </p:sp>
+      <p:sp>
+        <p:nvSpPr>
+          <p:cNvPr id="16" name="Rounded Rectangle 15"/>
+          <p:cNvSpPr/>
+          <p:nvPr/>
+        </p:nvSpPr>
+        <p:spPr>
+          <a:xfrm>
+            <a:off x="502920" y="5440680"/>
+            <a:ext cx="11338560" cy="594360"/>
+          </a:xfrm>
+          <a:prstGeom prst="roundRect">
+            <a:avLst>
+              <a:gd name="adj" fmla="val 30000"/>
+            </a:avLst>
+          </a:prstGeom>
+          <a:solidFill>
+            <a:srgbClr val="FFFFFF"/>
+          </a:solidFill>
+          <a:ln w="12700">
+            <a:solidFill>
+              <a:srgbClr val="2EA896"/>
+            </a:solidFill>
+          </a:ln>
+          <a:effectLst/>
+        </p:spPr>
+        <p:style>
+          <a:lnRef idx="1">
+            <a:schemeClr val="accent1"/>
+          </a:lnRef>
+          <a:fillRef idx="3">
+            <a:schemeClr val="accent1"/>
+          </a:fillRef>
+          <a:effectRef idx="2">
+            <a:schemeClr val="accent1"/>
+          </a:effectRef>
+          <a:fontRef idx="minor">
+            <a:schemeClr val="lt1"/>
+          </a:fontRef>
+        </p:style>
+        <p:txBody>
+          <a:bodyPr rtlCol="0" anchor="ctr" wrap="square" lIns="109728" rIns="109728" tIns="54864" bIns="54864"/>
+          <a:lstStyle/>
+          <a:p>
+            <a:pPr algn="ctr">
+              <a:spcAft>
+                <a:spcPts val="0"/>
+              </a:spcAft>
+            </a:pPr>
+            <a:r>
+              <a:rPr sz="1200" b="1">
+                <a:solidFill>
+                  <a:srgbClr val="002060"/>
+                </a:solidFill>
+                <a:latin typeface="Arial"/>
+              </a:rPr>
+              <a:t>Mood decision: instant keyword tool in-call, plus Jev decision model (6 mood questions, ~0.5 s) to label real calls and check the tool</a:t>
             </a:r>
           </a:p>
         </p:txBody>
@@ -19596,7 +20443,7 @@
           <a:lstStyle/>
           <a:p>
             <a:r>
-              <a:t>The Improvement Loop</a:t>
+              <a:t>Mid-Call: Same-Turn Adaptation</a:t>
             </a:r>
           </a:p>
         </p:txBody>
@@ -19609,19 +20456,21 @@
         </p:nvSpPr>
         <p:spPr>
           <a:xfrm>
-            <a:off x="4754880" y="1371600"/>
-            <a:ext cx="2743200" cy="960120"/>
+            <a:off x="566928" y="1371600"/>
+            <a:ext cx="4754880" cy="621792"/>
           </a:xfrm>
           <a:prstGeom prst="roundRect">
             <a:avLst>
-              <a:gd name="adj" fmla="val 6000"/>
+              <a:gd name="adj" fmla="val 40000"/>
             </a:avLst>
           </a:prstGeom>
           <a:solidFill>
-            <a:srgbClr val="2EA896"/>
-          </a:solidFill>
-          <a:ln>
-            <a:noFill/>
+            <a:srgbClr val="EEF2F8"/>
+          </a:solidFill>
+          <a:ln w="12700">
+            <a:solidFill>
+              <a:srgbClr val="595959"/>
+            </a:solidFill>
           </a:ln>
           <a:effectLst/>
         </p:spPr>
@@ -19643,62 +20492,43 @@
           <a:bodyPr rtlCol="0" anchor="ctr" wrap="square" lIns="109728" rIns="109728" tIns="54864" bIns="54864"/>
           <a:lstStyle/>
           <a:p>
-            <a:pPr algn="ctr">
-              <a:spcAft>
-                <a:spcPts val="200"/>
-              </a:spcAft>
-            </a:pPr>
-            <a:r>
-              <a:rPr sz="1500" b="1">
-                <a:solidFill>
-                  <a:srgbClr val="FFFFFF"/>
-                </a:solidFill>
-                <a:latin typeface="Arial"/>
-              </a:rPr>
-              <a:t>1  CALL</a:t>
-            </a:r>
-          </a:p>
-          <a:p>
-            <a:pPr algn="ctr">
-              <a:spcAft>
-                <a:spcPts val="0"/>
-              </a:spcAft>
-            </a:pPr>
-            <a:r>
-              <a:rPr sz="1100" b="0">
-                <a:solidFill>
-                  <a:srgbClr val="FFFFFF"/>
-                </a:solidFill>
-                <a:latin typeface="Arial"/>
-              </a:rPr>
-              <a:t>persona set, live adaptation</a:t>
-            </a:r>
-          </a:p>
-        </p:txBody>
-      </p:sp>
-      <p:sp>
-        <p:nvSpPr>
-          <p:cNvPr id="4" name="Rounded Rectangle 3"/>
+            <a:pPr algn="l">
+              <a:spcAft>
+                <a:spcPts val="0"/>
+              </a:spcAft>
+            </a:pPr>
+            <a:r>
+              <a:rPr sz="1400" b="0">
+                <a:solidFill>
+                  <a:srgbClr val="262626"/>
+                </a:solidFill>
+                <a:latin typeface="Arial"/>
+              </a:rPr>
+              <a:t>“Nahi chahiye”</a:t>
+            </a:r>
+          </a:p>
+        </p:txBody>
+      </p:sp>
+      <p:sp>
+        <p:nvSpPr>
+          <p:cNvPr id="4" name="Right Arrow 3"/>
           <p:cNvSpPr/>
           <p:nvPr/>
         </p:nvSpPr>
         <p:spPr>
           <a:xfrm>
-            <a:off x="8229600" y="2468880"/>
-            <a:ext cx="2743200" cy="960120"/>
-          </a:xfrm>
-          <a:prstGeom prst="roundRect">
-            <a:avLst>
-              <a:gd name="adj" fmla="val 6000"/>
-            </a:avLst>
-          </a:prstGeom>
-          <a:solidFill>
-            <a:srgbClr val="002060"/>
+            <a:off x="5440680" y="1499616"/>
+            <a:ext cx="457200" cy="365760"/>
+          </a:xfrm>
+          <a:prstGeom prst="rightArrow">
+            <a:avLst/>
+          </a:prstGeom>
+          <a:solidFill>
+            <a:srgbClr val="E08A00"/>
           </a:solidFill>
           <a:ln>
             <a:noFill/>
           </a:ln>
-          <a:effectLst/>
         </p:spPr>
         <p:style>
           <a:lnRef idx="1">
@@ -19715,39 +20545,10 @@
           </a:fontRef>
         </p:style>
         <p:txBody>
-          <a:bodyPr rtlCol="0" anchor="ctr" wrap="square" lIns="109728" rIns="109728" tIns="54864" bIns="54864"/>
-          <a:lstStyle/>
-          <a:p>
-            <a:pPr algn="ctr">
-              <a:spcAft>
-                <a:spcPts val="200"/>
-              </a:spcAft>
-            </a:pPr>
-            <a:r>
-              <a:rPr sz="1500" b="1">
-                <a:solidFill>
-                  <a:srgbClr val="FFFFFF"/>
-                </a:solidFill>
-                <a:latin typeface="Arial"/>
-              </a:rPr>
-              <a:t>2  REVIEW</a:t>
-            </a:r>
-          </a:p>
-          <a:p>
-            <a:pPr algn="ctr">
-              <a:spcAft>
-                <a:spcPts val="0"/>
-              </a:spcAft>
-            </a:pPr>
-            <a:r>
-              <a:rPr sz="1100" b="0">
-                <a:solidFill>
-                  <a:srgbClr val="FFFFFF"/>
-                </a:solidFill>
-                <a:latin typeface="Arial"/>
-              </a:rPr>
-              <a:t>Claude + rule checks R1-R6</a:t>
-            </a:r>
+          <a:bodyPr rtlCol="0" anchor="ctr"/>
+          <a:lstStyle/>
+          <a:p>
+            <a:pPr algn="ctr"/>
           </a:p>
         </p:txBody>
       </p:sp>
@@ -19759,16 +20560,16 @@
         </p:nvSpPr>
         <p:spPr>
           <a:xfrm>
-            <a:off x="7406640" y="4297680"/>
-            <a:ext cx="2743200" cy="960120"/>
+            <a:off x="6035040" y="1371600"/>
+            <a:ext cx="5577840" cy="621792"/>
           </a:xfrm>
           <a:prstGeom prst="roundRect">
             <a:avLst>
-              <a:gd name="adj" fmla="val 6000"/>
+              <a:gd name="adj" fmla="val 40000"/>
             </a:avLst>
           </a:prstGeom>
           <a:solidFill>
-            <a:srgbClr val="1B6B5E"/>
+            <a:srgbClr val="E08A00"/>
           </a:solidFill>
           <a:ln>
             <a:noFill/>
@@ -19793,35 +20594,19 @@
           <a:bodyPr rtlCol="0" anchor="ctr" wrap="square" lIns="109728" rIns="109728" tIns="54864" bIns="54864"/>
           <a:lstStyle/>
           <a:p>
-            <a:pPr algn="ctr">
-              <a:spcAft>
-                <a:spcPts val="200"/>
-              </a:spcAft>
-            </a:pPr>
-            <a:r>
-              <a:rPr sz="1500" b="1">
+            <a:pPr algn="l">
+              <a:spcAft>
+                <a:spcPts val="0"/>
+              </a:spcAft>
+            </a:pPr>
+            <a:r>
+              <a:rPr sz="1400" b="1">
                 <a:solidFill>
                   <a:srgbClr val="FFFFFF"/>
                 </a:solidFill>
                 <a:latin typeface="Arial"/>
               </a:rPr>
-              <a:t>3  LABEL</a:t>
-            </a:r>
-          </a:p>
-          <a:p>
-            <a:pPr algn="ctr">
-              <a:spcAft>
-                <a:spcPts val="0"/>
-              </a:spcAft>
-            </a:pPr>
-            <a:r>
-              <a:rPr sz="1100" b="0">
-                <a:solidFill>
-                  <a:srgbClr val="FFFFFF"/>
-                </a:solidFill>
-                <a:latin typeface="Arial"/>
-              </a:rPr>
-              <a:t>Jev labels real turns</a:t>
+              <a:t>Stays on the line, restates the hook</a:t>
             </a:r>
           </a:p>
         </p:txBody>
@@ -19834,19 +20619,21 @@
         </p:nvSpPr>
         <p:spPr>
           <a:xfrm>
-            <a:off x="2377440" y="4297680"/>
-            <a:ext cx="2743200" cy="960120"/>
+            <a:off x="566928" y="2130552"/>
+            <a:ext cx="4754880" cy="621792"/>
           </a:xfrm>
           <a:prstGeom prst="roundRect">
             <a:avLst>
-              <a:gd name="adj" fmla="val 6000"/>
+              <a:gd name="adj" fmla="val 40000"/>
             </a:avLst>
           </a:prstGeom>
           <a:solidFill>
-            <a:srgbClr val="5B3E96"/>
-          </a:solidFill>
-          <a:ln>
-            <a:noFill/>
+            <a:srgbClr val="EEF2F8"/>
+          </a:solidFill>
+          <a:ln w="12700">
+            <a:solidFill>
+              <a:srgbClr val="595959"/>
+            </a:solidFill>
           </a:ln>
           <a:effectLst/>
         </p:spPr>
@@ -19868,62 +20655,43 @@
           <a:bodyPr rtlCol="0" anchor="ctr" wrap="square" lIns="109728" rIns="109728" tIns="54864" bIns="54864"/>
           <a:lstStyle/>
           <a:p>
-            <a:pPr algn="ctr">
-              <a:spcAft>
-                <a:spcPts val="200"/>
-              </a:spcAft>
-            </a:pPr>
-            <a:r>
-              <a:rPr sz="1500" b="1">
-                <a:solidFill>
-                  <a:srgbClr val="FFFFFF"/>
-                </a:solidFill>
-                <a:latin typeface="Arial"/>
-              </a:rPr>
-              <a:t>4  SCORE</a:t>
-            </a:r>
-          </a:p>
-          <a:p>
-            <a:pPr algn="ctr">
-              <a:spcAft>
-                <a:spcPts val="0"/>
-              </a:spcAft>
-            </a:pPr>
-            <a:r>
-              <a:rPr sz="1100" b="0">
-                <a:solidFill>
-                  <a:srgbClr val="FFFFFF"/>
-                </a:solidFill>
-                <a:latin typeface="Arial"/>
-              </a:rPr>
-              <a:t>persona, hook, each field</a:t>
-            </a:r>
-          </a:p>
-        </p:txBody>
-      </p:sp>
-      <p:sp>
-        <p:nvSpPr>
-          <p:cNvPr id="7" name="Rounded Rectangle 6"/>
+            <a:pPr algn="l">
+              <a:spcAft>
+                <a:spcPts val="0"/>
+              </a:spcAft>
+            </a:pPr>
+            <a:r>
+              <a:rPr sz="1400" b="0">
+                <a:solidFill>
+                  <a:srgbClr val="262626"/>
+                </a:solidFill>
+                <a:latin typeface="Arial"/>
+              </a:rPr>
+              <a:t>“I'm busy right now”</a:t>
+            </a:r>
+          </a:p>
+        </p:txBody>
+      </p:sp>
+      <p:sp>
+        <p:nvSpPr>
+          <p:cNvPr id="7" name="Right Arrow 6"/>
           <p:cNvSpPr/>
           <p:nvPr/>
         </p:nvSpPr>
         <p:spPr>
           <a:xfrm>
-            <a:off x="1280160" y="2468880"/>
-            <a:ext cx="2743200" cy="960120"/>
-          </a:xfrm>
-          <a:prstGeom prst="roundRect">
-            <a:avLst>
-              <a:gd name="adj" fmla="val 6000"/>
-            </a:avLst>
-          </a:prstGeom>
-          <a:solidFill>
-            <a:srgbClr val="C00000"/>
+            <a:off x="5440680" y="2258568"/>
+            <a:ext cx="457200" cy="365760"/>
+          </a:xfrm>
+          <a:prstGeom prst="rightArrow">
+            <a:avLst/>
+          </a:prstGeom>
+          <a:solidFill>
+            <a:srgbClr val="002060"/>
           </a:solidFill>
           <a:ln>
             <a:noFill/>
           </a:ln>
-          <a:effectLst/>
         </p:spPr>
         <p:style>
           <a:lnRef idx="1">
@@ -19940,62 +20708,36 @@
           </a:fontRef>
         </p:style>
         <p:txBody>
-          <a:bodyPr rtlCol="0" anchor="ctr" wrap="square" lIns="109728" rIns="109728" tIns="54864" bIns="54864"/>
-          <a:lstStyle/>
-          <a:p>
-            <a:pPr algn="ctr">
-              <a:spcAft>
-                <a:spcPts val="200"/>
-              </a:spcAft>
-            </a:pPr>
-            <a:r>
-              <a:rPr sz="1500" b="1">
-                <a:solidFill>
-                  <a:srgbClr val="FFFFFF"/>
-                </a:solidFill>
-                <a:latin typeface="Arial"/>
-              </a:rPr>
-              <a:t>5  UPDATE</a:t>
-            </a:r>
-          </a:p>
-          <a:p>
-            <a:pPr algn="ctr">
-              <a:spcAft>
-                <a:spcPts val="0"/>
-              </a:spcAft>
-            </a:pPr>
-            <a:r>
-              <a:rPr sz="1100" b="0">
-                <a:solidFill>
-                  <a:srgbClr val="FFFFFF"/>
-                </a:solidFill>
-                <a:latin typeface="Arial"/>
-              </a:rPr>
-              <a:t>scoreboards by seller segment</a:t>
-            </a:r>
-          </a:p>
-        </p:txBody>
-      </p:sp>
-      <p:sp>
-        <p:nvSpPr>
-          <p:cNvPr id="8" name="Right Arrow 7"/>
+          <a:bodyPr rtlCol="0" anchor="ctr"/>
+          <a:lstStyle/>
+          <a:p>
+            <a:pPr algn="ctr"/>
+          </a:p>
+        </p:txBody>
+      </p:sp>
+      <p:sp>
+        <p:nvSpPr>
+          <p:cNvPr id="8" name="Rounded Rectangle 7"/>
           <p:cNvSpPr/>
           <p:nvPr/>
         </p:nvSpPr>
         <p:spPr>
           <a:xfrm>
-            <a:off x="7635240" y="1645920"/>
-            <a:ext cx="502920" cy="411480"/>
-          </a:xfrm>
-          <a:prstGeom prst="rightArrow">
-            <a:avLst/>
-          </a:prstGeom>
-          <a:solidFill>
-            <a:srgbClr val="595959"/>
+            <a:off x="6035040" y="2130552"/>
+            <a:ext cx="5577840" cy="621792"/>
+          </a:xfrm>
+          <a:prstGeom prst="roundRect">
+            <a:avLst>
+              <a:gd name="adj" fmla="val 40000"/>
+            </a:avLst>
+          </a:prstGeom>
+          <a:solidFill>
+            <a:srgbClr val="002060"/>
           </a:solidFill>
           <a:ln>
             <a:noFill/>
           </a:ln>
+          <a:effectLst/>
         </p:spPr>
         <p:style>
           <a:lnRef idx="1">
@@ -20012,33 +20754,51 @@
           </a:fontRef>
         </p:style>
         <p:txBody>
-          <a:bodyPr rtlCol="0" anchor="ctr"/>
-          <a:lstStyle/>
-          <a:p>
-            <a:pPr algn="ctr"/>
-          </a:p>
-        </p:txBody>
-      </p:sp>
-      <p:sp>
-        <p:nvSpPr>
-          <p:cNvPr id="9" name="Down Arrow 8"/>
+          <a:bodyPr rtlCol="0" anchor="ctr" wrap="square" lIns="109728" rIns="109728" tIns="54864" bIns="54864"/>
+          <a:lstStyle/>
+          <a:p>
+            <a:pPr algn="l">
+              <a:spcAft>
+                <a:spcPts val="0"/>
+              </a:spcAft>
+            </a:pPr>
+            <a:r>
+              <a:rPr sz="1400" b="1">
+                <a:solidFill>
+                  <a:srgbClr val="FFFFFF"/>
+                </a:solidFill>
+                <a:latin typeface="Arial"/>
+              </a:rPr>
+              <a:t>One short sentence, offers a callback</a:t>
+            </a:r>
+          </a:p>
+        </p:txBody>
+      </p:sp>
+      <p:sp>
+        <p:nvSpPr>
+          <p:cNvPr id="9" name="Rounded Rectangle 8"/>
           <p:cNvSpPr/>
           <p:nvPr/>
         </p:nvSpPr>
         <p:spPr>
           <a:xfrm>
-            <a:off x="9326880" y="3520440"/>
-            <a:ext cx="411480" cy="640080"/>
-          </a:xfrm>
-          <a:prstGeom prst="downArrow">
-            <a:avLst/>
-          </a:prstGeom>
-          <a:solidFill>
-            <a:srgbClr val="595959"/>
-          </a:solidFill>
-          <a:ln>
-            <a:noFill/>
+            <a:off x="566928" y="2889504"/>
+            <a:ext cx="4754880" cy="621792"/>
+          </a:xfrm>
+          <a:prstGeom prst="roundRect">
+            <a:avLst>
+              <a:gd name="adj" fmla="val 40000"/>
+            </a:avLst>
+          </a:prstGeom>
+          <a:solidFill>
+            <a:srgbClr val="EEF2F8"/>
+          </a:solidFill>
+          <a:ln w="12700">
+            <a:solidFill>
+              <a:srgbClr val="595959"/>
+            </a:solidFill>
           </a:ln>
+          <a:effectLst/>
         </p:spPr>
         <p:style>
           <a:lnRef idx="1">
@@ -20055,29 +20815,42 @@
           </a:fontRef>
         </p:style>
         <p:txBody>
-          <a:bodyPr rtlCol="0" anchor="ctr"/>
-          <a:lstStyle/>
-          <a:p>
-            <a:pPr algn="ctr"/>
-          </a:p>
-        </p:txBody>
-      </p:sp>
-      <p:sp>
-        <p:nvSpPr>
-          <p:cNvPr id="10" name="Left Arrow 9"/>
+          <a:bodyPr rtlCol="0" anchor="ctr" wrap="square" lIns="109728" rIns="109728" tIns="54864" bIns="54864"/>
+          <a:lstStyle/>
+          <a:p>
+            <a:pPr algn="l">
+              <a:spcAft>
+                <a:spcPts val="0"/>
+              </a:spcAft>
+            </a:pPr>
+            <a:r>
+              <a:rPr sz="1400" b="0">
+                <a:solidFill>
+                  <a:srgbClr val="262626"/>
+                </a:solidFill>
+                <a:latin typeface="Arial"/>
+              </a:rPr>
+              <a:t>“Samajh nahi aaya”</a:t>
+            </a:r>
+          </a:p>
+        </p:txBody>
+      </p:sp>
+      <p:sp>
+        <p:nvSpPr>
+          <p:cNvPr id="10" name="Right Arrow 9"/>
           <p:cNvSpPr/>
           <p:nvPr/>
         </p:nvSpPr>
         <p:spPr>
           <a:xfrm>
-            <a:off x="5577840" y="4572000"/>
-            <a:ext cx="1737360" cy="411480"/>
-          </a:xfrm>
-          <a:prstGeom prst="leftArrow">
+            <a:off x="5440680" y="3017520"/>
+            <a:ext cx="457200" cy="365760"/>
+          </a:xfrm>
+          <a:prstGeom prst="rightArrow">
             <a:avLst/>
           </a:prstGeom>
           <a:solidFill>
-            <a:srgbClr val="595959"/>
+            <a:srgbClr val="2EA896"/>
           </a:solidFill>
           <a:ln>
             <a:noFill/>
@@ -20107,24 +20880,27 @@
       </p:sp>
       <p:sp>
         <p:nvSpPr>
-          <p:cNvPr id="11" name="Up Arrow 10"/>
+          <p:cNvPr id="11" name="Rounded Rectangle 10"/>
           <p:cNvSpPr/>
           <p:nvPr/>
         </p:nvSpPr>
         <p:spPr>
           <a:xfrm>
-            <a:off x="2651760" y="3520440"/>
-            <a:ext cx="411480" cy="640080"/>
-          </a:xfrm>
-          <a:prstGeom prst="upArrow">
-            <a:avLst/>
-          </a:prstGeom>
-          <a:solidFill>
-            <a:srgbClr val="595959"/>
+            <a:off x="6035040" y="2889504"/>
+            <a:ext cx="5577840" cy="621792"/>
+          </a:xfrm>
+          <a:prstGeom prst="roundRect">
+            <a:avLst>
+              <a:gd name="adj" fmla="val 40000"/>
+            </a:avLst>
+          </a:prstGeom>
+          <a:solidFill>
+            <a:srgbClr val="2EA896"/>
           </a:solidFill>
           <a:ln>
             <a:noFill/>
           </a:ln>
+          <a:effectLst/>
         </p:spPr>
         <p:style>
           <a:lnRef idx="1">
@@ -20141,33 +20917,51 @@
           </a:fontRef>
         </p:style>
         <p:txBody>
-          <a:bodyPr rtlCol="0" anchor="ctr"/>
-          <a:lstStyle/>
-          <a:p>
-            <a:pPr algn="ctr"/>
-          </a:p>
-        </p:txBody>
-      </p:sp>
-      <p:sp>
-        <p:nvSpPr>
-          <p:cNvPr id="12" name="Right Arrow 11"/>
+          <a:bodyPr rtlCol="0" anchor="ctr" wrap="square" lIns="109728" rIns="109728" tIns="54864" bIns="54864"/>
+          <a:lstStyle/>
+          <a:p>
+            <a:pPr algn="l">
+              <a:spcAft>
+                <a:spcPts val="0"/>
+              </a:spcAft>
+            </a:pPr>
+            <a:r>
+              <a:rPr sz="1400" b="1">
+                <a:solidFill>
+                  <a:srgbClr val="FFFFFF"/>
+                </a:solidFill>
+                <a:latin typeface="Arial"/>
+              </a:rPr>
+              <a:t>One idea, simple short phrases</a:t>
+            </a:r>
+          </a:p>
+        </p:txBody>
+      </p:sp>
+      <p:sp>
+        <p:nvSpPr>
+          <p:cNvPr id="12" name="Rounded Rectangle 11"/>
           <p:cNvSpPr/>
           <p:nvPr/>
         </p:nvSpPr>
         <p:spPr>
           <a:xfrm>
-            <a:off x="3931920" y="1645920"/>
-            <a:ext cx="731520" cy="411480"/>
-          </a:xfrm>
-          <a:prstGeom prst="rightArrow">
-            <a:avLst/>
-          </a:prstGeom>
-          <a:solidFill>
-            <a:srgbClr val="595959"/>
-          </a:solidFill>
-          <a:ln>
-            <a:noFill/>
+            <a:off x="566928" y="3648456"/>
+            <a:ext cx="4754880" cy="621792"/>
+          </a:xfrm>
+          <a:prstGeom prst="roundRect">
+            <a:avLst>
+              <a:gd name="adj" fmla="val 40000"/>
+            </a:avLst>
+          </a:prstGeom>
+          <a:solidFill>
+            <a:srgbClr val="EEF2F8"/>
+          </a:solidFill>
+          <a:ln w="12700">
+            <a:solidFill>
+              <a:srgbClr val="595959"/>
+            </a:solidFill>
           </a:ln>
+          <a:effectLst/>
         </p:spPr>
         <p:style>
           <a:lnRef idx="1">
@@ -20184,29 +20978,42 @@
           </a:fontRef>
         </p:style>
         <p:txBody>
-          <a:bodyPr rtlCol="0" anchor="ctr"/>
-          <a:lstStyle/>
-          <a:p>
-            <a:pPr algn="ctr"/>
-          </a:p>
-        </p:txBody>
-      </p:sp>
-      <p:sp>
-        <p:nvSpPr>
-          <p:cNvPr id="13" name="Oval 12"/>
+          <a:bodyPr rtlCol="0" anchor="ctr" wrap="square" lIns="109728" rIns="109728" tIns="54864" bIns="54864"/>
+          <a:lstStyle/>
+          <a:p>
+            <a:pPr algn="l">
+              <a:spcAft>
+                <a:spcPts val="0"/>
+              </a:spcAft>
+            </a:pPr>
+            <a:r>
+              <a:rPr sz="1400" b="0">
+                <a:solidFill>
+                  <a:srgbClr val="262626"/>
+                </a:solidFill>
+                <a:latin typeface="Arial"/>
+              </a:rPr>
+              <a:t>“Kitni baar call karoge!”</a:t>
+            </a:r>
+          </a:p>
+        </p:txBody>
+      </p:sp>
+      <p:sp>
+        <p:nvSpPr>
+          <p:cNvPr id="13" name="Right Arrow 12"/>
           <p:cNvSpPr/>
           <p:nvPr/>
         </p:nvSpPr>
         <p:spPr>
           <a:xfrm>
-            <a:off x="4709160" y="2697480"/>
-            <a:ext cx="1920240" cy="1920240"/>
-          </a:xfrm>
-          <a:prstGeom prst="ellipse">
+            <a:off x="5440680" y="3776472"/>
+            <a:ext cx="457200" cy="365760"/>
+          </a:xfrm>
+          <a:prstGeom prst="rightArrow">
             <a:avLst/>
           </a:prstGeom>
           <a:solidFill>
-            <a:srgbClr val="EEF2F8"/>
+            <a:srgbClr val="C00000"/>
           </a:solidFill>
           <a:ln>
             <a:noFill/>
@@ -20227,23 +21034,10 @@
           </a:fontRef>
         </p:style>
         <p:txBody>
-          <a:bodyPr rtlCol="0" anchor="ctr" lIns="0" rIns="0" tIns="0" bIns="0"/>
-          <a:lstStyle/>
-          <a:p>
-            <a:pPr algn="ctr">
-              <a:spcAft>
-                <a:spcPts val="0"/>
-              </a:spcAft>
-            </a:pPr>
-            <a:r>
-              <a:rPr sz="1300" b="1">
-                <a:solidFill>
-                  <a:srgbClr val="002060"/>
-                </a:solidFill>
-                <a:latin typeface="Arial"/>
-              </a:rPr>
-              <a:t>Better persona and hook next call</a:t>
-            </a:r>
+          <a:bodyPr rtlCol="0" anchor="ctr"/>
+          <a:lstStyle/>
+          <a:p>
+            <a:pPr algn="ctr"/>
           </a:p>
         </p:txBody>
       </p:sp>
@@ -20255,21 +21049,19 @@
         </p:nvSpPr>
         <p:spPr>
           <a:xfrm>
-            <a:off x="502920" y="5486400"/>
-            <a:ext cx="11338560" cy="548640"/>
+            <a:off x="6035040" y="3648456"/>
+            <a:ext cx="5577840" cy="621792"/>
           </a:xfrm>
           <a:prstGeom prst="roundRect">
             <a:avLst>
-              <a:gd name="adj" fmla="val 30000"/>
+              <a:gd name="adj" fmla="val 40000"/>
             </a:avLst>
           </a:prstGeom>
           <a:solidFill>
-            <a:srgbClr val="FFFFFF"/>
-          </a:solidFill>
-          <a:ln w="12700">
-            <a:solidFill>
-              <a:srgbClr val="002060"/>
-            </a:solidFill>
+            <a:srgbClr val="C00000"/>
+          </a:solidFill>
+          <a:ln>
+            <a:noFill/>
           </a:ln>
           <a:effectLst/>
         </p:spPr>
@@ -20291,7 +21083,372 @@
           <a:bodyPr rtlCol="0" anchor="ctr" wrap="square" lIns="109728" rIns="109728" tIns="54864" bIns="54864"/>
           <a:lstStyle/>
           <a:p>
-            <a:pPr algn="ctr">
+            <a:pPr algn="l">
+              <a:spcAft>
+                <a:spcPts val="0"/>
+              </a:spcAft>
+            </a:pPr>
+            <a:r>
+              <a:rPr sz="1400" b="1">
+                <a:solidFill>
+                  <a:srgbClr val="FFFFFF"/>
+                </a:solidFill>
+                <a:latin typeface="Arial"/>
+              </a:rPr>
+              <a:t>Brief apology, stops the pitch</a:t>
+            </a:r>
+          </a:p>
+        </p:txBody>
+      </p:sp>
+      <p:sp>
+        <p:nvSpPr>
+          <p:cNvPr id="15" name="Rounded Rectangle 14"/>
+          <p:cNvSpPr/>
+          <p:nvPr/>
+        </p:nvSpPr>
+        <p:spPr>
+          <a:xfrm>
+            <a:off x="566928" y="4407408"/>
+            <a:ext cx="4754880" cy="621792"/>
+          </a:xfrm>
+          <a:prstGeom prst="roundRect">
+            <a:avLst>
+              <a:gd name="adj" fmla="val 40000"/>
+            </a:avLst>
+          </a:prstGeom>
+          <a:solidFill>
+            <a:srgbClr val="EEF2F8"/>
+          </a:solidFill>
+          <a:ln w="12700">
+            <a:solidFill>
+              <a:srgbClr val="595959"/>
+            </a:solidFill>
+          </a:ln>
+          <a:effectLst/>
+        </p:spPr>
+        <p:style>
+          <a:lnRef idx="1">
+            <a:schemeClr val="accent1"/>
+          </a:lnRef>
+          <a:fillRef idx="3">
+            <a:schemeClr val="accent1"/>
+          </a:fillRef>
+          <a:effectRef idx="2">
+            <a:schemeClr val="accent1"/>
+          </a:effectRef>
+          <a:fontRef idx="minor">
+            <a:schemeClr val="lt1"/>
+          </a:fontRef>
+        </p:style>
+        <p:txBody>
+          <a:bodyPr rtlCol="0" anchor="ctr" wrap="square" lIns="109728" rIns="109728" tIns="54864" bIns="54864"/>
+          <a:lstStyle/>
+          <a:p>
+            <a:pPr algn="l">
+              <a:spcAft>
+                <a:spcPts val="0"/>
+              </a:spcAft>
+            </a:pPr>
+            <a:r>
+              <a:rPr sz="1400" b="0">
+                <a:solidFill>
+                  <a:srgbClr val="262626"/>
+                </a:solidFill>
+                <a:latin typeface="Arial"/>
+              </a:rPr>
+              <a:t>Speaks Marathi, then Hindi</a:t>
+            </a:r>
+          </a:p>
+        </p:txBody>
+      </p:sp>
+      <p:sp>
+        <p:nvSpPr>
+          <p:cNvPr id="16" name="Right Arrow 15"/>
+          <p:cNvSpPr/>
+          <p:nvPr/>
+        </p:nvSpPr>
+        <p:spPr>
+          <a:xfrm>
+            <a:off x="5440680" y="4535424"/>
+            <a:ext cx="457200" cy="365760"/>
+          </a:xfrm>
+          <a:prstGeom prst="rightArrow">
+            <a:avLst/>
+          </a:prstGeom>
+          <a:solidFill>
+            <a:srgbClr val="5B3E96"/>
+          </a:solidFill>
+          <a:ln>
+            <a:noFill/>
+          </a:ln>
+        </p:spPr>
+        <p:style>
+          <a:lnRef idx="1">
+            <a:schemeClr val="accent1"/>
+          </a:lnRef>
+          <a:fillRef idx="3">
+            <a:schemeClr val="accent1"/>
+          </a:fillRef>
+          <a:effectRef idx="2">
+            <a:schemeClr val="accent1"/>
+          </a:effectRef>
+          <a:fontRef idx="minor">
+            <a:schemeClr val="lt1"/>
+          </a:fontRef>
+        </p:style>
+        <p:txBody>
+          <a:bodyPr rtlCol="0" anchor="ctr"/>
+          <a:lstStyle/>
+          <a:p>
+            <a:pPr algn="ctr"/>
+          </a:p>
+        </p:txBody>
+      </p:sp>
+      <p:sp>
+        <p:nvSpPr>
+          <p:cNvPr id="17" name="Rounded Rectangle 16"/>
+          <p:cNvSpPr/>
+          <p:nvPr/>
+        </p:nvSpPr>
+        <p:spPr>
+          <a:xfrm>
+            <a:off x="6035040" y="4407408"/>
+            <a:ext cx="5577840" cy="621792"/>
+          </a:xfrm>
+          <a:prstGeom prst="roundRect">
+            <a:avLst>
+              <a:gd name="adj" fmla="val 40000"/>
+            </a:avLst>
+          </a:prstGeom>
+          <a:solidFill>
+            <a:srgbClr val="5B3E96"/>
+          </a:solidFill>
+          <a:ln>
+            <a:noFill/>
+          </a:ln>
+          <a:effectLst/>
+        </p:spPr>
+        <p:style>
+          <a:lnRef idx="1">
+            <a:schemeClr val="accent1"/>
+          </a:lnRef>
+          <a:fillRef idx="3">
+            <a:schemeClr val="accent1"/>
+          </a:fillRef>
+          <a:effectRef idx="2">
+            <a:schemeClr val="accent1"/>
+          </a:effectRef>
+          <a:fontRef idx="minor">
+            <a:schemeClr val="lt1"/>
+          </a:fontRef>
+        </p:style>
+        <p:txBody>
+          <a:bodyPr rtlCol="0" anchor="ctr" wrap="square" lIns="109728" rIns="109728" tIns="54864" bIns="54864"/>
+          <a:lstStyle/>
+          <a:p>
+            <a:pPr algn="l">
+              <a:spcAft>
+                <a:spcPts val="0"/>
+              </a:spcAft>
+            </a:pPr>
+            <a:r>
+              <a:rPr sz="1400" b="1">
+                <a:solidFill>
+                  <a:srgbClr val="FFFFFF"/>
+                </a:solidFill>
+                <a:latin typeface="Arial"/>
+              </a:rPr>
+              <a:t>Replies in the seller's language</a:t>
+            </a:r>
+          </a:p>
+        </p:txBody>
+      </p:sp>
+      <p:sp>
+        <p:nvSpPr>
+          <p:cNvPr id="18" name="Rounded Rectangle 17"/>
+          <p:cNvSpPr/>
+          <p:nvPr/>
+        </p:nvSpPr>
+        <p:spPr>
+          <a:xfrm>
+            <a:off x="566928" y="5166359"/>
+            <a:ext cx="4754880" cy="621792"/>
+          </a:xfrm>
+          <a:prstGeom prst="roundRect">
+            <a:avLst>
+              <a:gd name="adj" fmla="val 40000"/>
+            </a:avLst>
+          </a:prstGeom>
+          <a:solidFill>
+            <a:srgbClr val="EEF2F8"/>
+          </a:solidFill>
+          <a:ln w="12700">
+            <a:solidFill>
+              <a:srgbClr val="595959"/>
+            </a:solidFill>
+          </a:ln>
+          <a:effectLst/>
+        </p:spPr>
+        <p:style>
+          <a:lnRef idx="1">
+            <a:schemeClr val="accent1"/>
+          </a:lnRef>
+          <a:fillRef idx="3">
+            <a:schemeClr val="accent1"/>
+          </a:fillRef>
+          <a:effectRef idx="2">
+            <a:schemeClr val="accent1"/>
+          </a:effectRef>
+          <a:fontRef idx="minor">
+            <a:schemeClr val="lt1"/>
+          </a:fontRef>
+        </p:style>
+        <p:txBody>
+          <a:bodyPr rtlCol="0" anchor="ctr" wrap="square" lIns="109728" rIns="109728" tIns="54864" bIns="54864"/>
+          <a:lstStyle/>
+          <a:p>
+            <a:pPr algn="l">
+              <a:spcAft>
+                <a:spcPts val="0"/>
+              </a:spcAft>
+            </a:pPr>
+            <a:r>
+              <a:rPr sz="1400" b="0">
+                <a:solidFill>
+                  <a:srgbClr val="262626"/>
+                </a:solidFill>
+                <a:latin typeface="Arial"/>
+              </a:rPr>
+              <a:t>“Who handles my account?”</a:t>
+            </a:r>
+          </a:p>
+        </p:txBody>
+      </p:sp>
+      <p:sp>
+        <p:nvSpPr>
+          <p:cNvPr id="19" name="Right Arrow 18"/>
+          <p:cNvSpPr/>
+          <p:nvPr/>
+        </p:nvSpPr>
+        <p:spPr>
+          <a:xfrm>
+            <a:off x="5440680" y="5294375"/>
+            <a:ext cx="457200" cy="365760"/>
+          </a:xfrm>
+          <a:prstGeom prst="rightArrow">
+            <a:avLst/>
+          </a:prstGeom>
+          <a:solidFill>
+            <a:srgbClr val="1B6B5E"/>
+          </a:solidFill>
+          <a:ln>
+            <a:noFill/>
+          </a:ln>
+        </p:spPr>
+        <p:style>
+          <a:lnRef idx="1">
+            <a:schemeClr val="accent1"/>
+          </a:lnRef>
+          <a:fillRef idx="3">
+            <a:schemeClr val="accent1"/>
+          </a:fillRef>
+          <a:effectRef idx="2">
+            <a:schemeClr val="accent1"/>
+          </a:effectRef>
+          <a:fontRef idx="minor">
+            <a:schemeClr val="lt1"/>
+          </a:fontRef>
+        </p:style>
+        <p:txBody>
+          <a:bodyPr rtlCol="0" anchor="ctr"/>
+          <a:lstStyle/>
+          <a:p>
+            <a:pPr algn="ctr"/>
+          </a:p>
+        </p:txBody>
+      </p:sp>
+      <p:sp>
+        <p:nvSpPr>
+          <p:cNvPr id="20" name="Rounded Rectangle 19"/>
+          <p:cNvSpPr/>
+          <p:nvPr/>
+        </p:nvSpPr>
+        <p:spPr>
+          <a:xfrm>
+            <a:off x="6035040" y="5166359"/>
+            <a:ext cx="5577840" cy="621792"/>
+          </a:xfrm>
+          <a:prstGeom prst="roundRect">
+            <a:avLst>
+              <a:gd name="adj" fmla="val 40000"/>
+            </a:avLst>
+          </a:prstGeom>
+          <a:solidFill>
+            <a:srgbClr val="1B6B5E"/>
+          </a:solidFill>
+          <a:ln>
+            <a:noFill/>
+          </a:ln>
+          <a:effectLst/>
+        </p:spPr>
+        <p:style>
+          <a:lnRef idx="1">
+            <a:schemeClr val="accent1"/>
+          </a:lnRef>
+          <a:fillRef idx="3">
+            <a:schemeClr val="accent1"/>
+          </a:fillRef>
+          <a:effectRef idx="2">
+            <a:schemeClr val="accent1"/>
+          </a:effectRef>
+          <a:fontRef idx="minor">
+            <a:schemeClr val="lt1"/>
+          </a:fontRef>
+        </p:style>
+        <p:txBody>
+          <a:bodyPr rtlCol="0" anchor="ctr" wrap="square" lIns="109728" rIns="109728" tIns="54864" bIns="54864"/>
+          <a:lstStyle/>
+          <a:p>
+            <a:pPr algn="l">
+              <a:spcAft>
+                <a:spcPts val="0"/>
+              </a:spcAft>
+            </a:pPr>
+            <a:r>
+              <a:rPr sz="1400" b="1">
+                <a:solidFill>
+                  <a:srgbClr val="FFFFFF"/>
+                </a:solidFill>
+                <a:latin typeface="Arial"/>
+              </a:rPr>
+              <a:t>Names the handler and books with them; a team if none</a:t>
+            </a:r>
+          </a:p>
+        </p:txBody>
+      </p:sp>
+      <p:sp>
+        <p:nvSpPr>
+          <p:cNvPr id="21" name="TextBox 20"/>
+          <p:cNvSpPr txBox="1"/>
+          <p:nvPr/>
+        </p:nvSpPr>
+        <p:spPr>
+          <a:xfrm>
+            <a:off x="566928" y="5943600"/>
+            <a:ext cx="5486400" cy="274320"/>
+          </a:xfrm>
+          <a:prstGeom prst="rect">
+            <a:avLst/>
+          </a:prstGeom>
+          <a:noFill/>
+        </p:spPr>
+        <p:txBody>
+          <a:bodyPr wrap="square">
+            <a:spAutoFit/>
+          </a:bodyPr>
+          <a:lstStyle/>
+          <a:p>
+            <a:pPr algn="l">
               <a:spcAft>
                 <a:spcPts val="0"/>
               </a:spcAft>
@@ -20299,11 +21456,50 @@
             <a:r>
               <a:rPr sz="1100" b="1">
                 <a:solidFill>
+                  <a:srgbClr val="595959"/>
+                </a:solidFill>
+                <a:latin typeface="Arial"/>
+              </a:rPr>
+              <a:t>SELLER SAYS</a:t>
+            </a:r>
+          </a:p>
+        </p:txBody>
+      </p:sp>
+      <p:sp>
+        <p:nvSpPr>
+          <p:cNvPr id="22" name="TextBox 21"/>
+          <p:cNvSpPr txBox="1"/>
+          <p:nvPr/>
+        </p:nvSpPr>
+        <p:spPr>
+          <a:xfrm>
+            <a:off x="6035040" y="5943600"/>
+            <a:ext cx="5486400" cy="274320"/>
+          </a:xfrm>
+          <a:prstGeom prst="rect">
+            <a:avLst/>
+          </a:prstGeom>
+          <a:noFill/>
+        </p:spPr>
+        <p:txBody>
+          <a:bodyPr wrap="square">
+            <a:spAutoFit/>
+          </a:bodyPr>
+          <a:lstStyle/>
+          <a:p>
+            <a:pPr algn="l">
+              <a:spcAft>
+                <a:spcPts val="0"/>
+              </a:spcAft>
+            </a:pPr>
+            <a:r>
+              <a:rPr sz="1100" b="1">
+                <a:solidFill>
                   <a:srgbClr val="002060"/>
                 </a:solidFill>
                 <a:latin typeface="Arial"/>
               </a:rPr>
-              <a:t>Tracked: uplift vs the control persona (15% of calls), meeting rate by reason type, keyword fixes only after a gold-set check and a human approval</a:t>
+              <a:t>VANI DOES</a:t>
             </a:r>
           </a:p>
         </p:txBody>
@@ -20342,7 +21538,7 @@
           <a:lstStyle/>
           <a:p>
             <a:r>
-              <a:t>Our Architecture</a:t>
+              <a:t>Mood Engine: Two Layers</a:t>
             </a:r>
           </a:p>
         </p:txBody>
@@ -20355,19 +21551,21 @@
         </p:nvSpPr>
         <p:spPr>
           <a:xfrm>
-            <a:off x="502920" y="1463040"/>
-            <a:ext cx="2514600" cy="1417320"/>
+            <a:off x="502920" y="2743200"/>
+            <a:ext cx="2103120" cy="1097280"/>
           </a:xfrm>
           <a:prstGeom prst="roundRect">
             <a:avLst>
-              <a:gd name="adj" fmla="val 6000"/>
+              <a:gd name="adj" fmla="val 40000"/>
             </a:avLst>
           </a:prstGeom>
           <a:solidFill>
-            <a:srgbClr val="002060"/>
-          </a:solidFill>
-          <a:ln>
-            <a:noFill/>
+            <a:srgbClr val="EEF2F8"/>
+          </a:solidFill>
+          <a:ln w="12700">
+            <a:solidFill>
+              <a:srgbClr val="595959"/>
+            </a:solidFill>
           </a:ln>
           <a:effectLst/>
         </p:spPr>
@@ -20389,35 +21587,35 @@
           <a:bodyPr rtlCol="0" anchor="ctr" wrap="square" lIns="109728" rIns="109728" tIns="54864" bIns="54864"/>
           <a:lstStyle/>
           <a:p>
-            <a:pPr algn="l">
-              <a:spcAft>
-                <a:spcPts val="300"/>
+            <a:pPr algn="ctr">
+              <a:spcAft>
+                <a:spcPts val="200"/>
               </a:spcAft>
             </a:pPr>
             <a:r>
               <a:rPr sz="1500" b="1">
                 <a:solidFill>
-                  <a:srgbClr val="FFFFFF"/>
-                </a:solidFill>
-                <a:latin typeface="Arial"/>
-              </a:rPr>
-              <a:t>Seller data</a:t>
-            </a:r>
-          </a:p>
-          <a:p>
-            <a:pPr algn="l">
-              <a:spcAft>
-                <a:spcPts val="0"/>
-              </a:spcAft>
-            </a:pPr>
-            <a:r>
-              <a:rPr sz="1200" b="0">
-                <a:solidFill>
-                  <a:srgbClr val="FFFFFF"/>
-                </a:solidFill>
-                <a:latin typeface="Arial"/>
-              </a:rPr>
-              <a:t>files, APIs, buy-lead database</a:t>
+                  <a:srgbClr val="002060"/>
+                </a:solidFill>
+                <a:latin typeface="Arial"/>
+              </a:rPr>
+              <a:t>Seller turn</a:t>
+            </a:r>
+          </a:p>
+          <a:p>
+            <a:pPr algn="ctr">
+              <a:spcAft>
+                <a:spcPts val="0"/>
+              </a:spcAft>
+            </a:pPr>
+            <a:r>
+              <a:rPr sz="1100" b="0">
+                <a:solidFill>
+                  <a:srgbClr val="595959"/>
+                </a:solidFill>
+                <a:latin typeface="Arial"/>
+              </a:rPr>
+              <a:t>what was just said</a:t>
             </a:r>
           </a:p>
         </p:txBody>
@@ -20430,14 +21628,14 @@
         </p:nvSpPr>
         <p:spPr>
           <a:xfrm>
-            <a:off x="3044952" y="1965960"/>
-            <a:ext cx="347472" cy="365760"/>
+            <a:off x="2651760" y="1965960"/>
+            <a:ext cx="457200" cy="365760"/>
           </a:xfrm>
           <a:prstGeom prst="rightArrow">
             <a:avLst/>
           </a:prstGeom>
           <a:solidFill>
-            <a:srgbClr val="595959"/>
+            <a:srgbClr val="2EA896"/>
           </a:solidFill>
           <a:ln>
             <a:noFill/>
@@ -20467,19 +21665,17 @@
       </p:sp>
       <p:sp>
         <p:nvSpPr>
-          <p:cNvPr id="5" name="Rounded Rectangle 4"/>
+          <p:cNvPr id="5" name="Right Arrow 4"/>
           <p:cNvSpPr/>
           <p:nvPr/>
         </p:nvSpPr>
         <p:spPr>
           <a:xfrm>
-            <a:off x="3429000" y="1463040"/>
-            <a:ext cx="2514600" cy="1417320"/>
-          </a:xfrm>
-          <a:prstGeom prst="roundRect">
-            <a:avLst>
-              <a:gd name="adj" fmla="val 6000"/>
-            </a:avLst>
+            <a:off x="2651760" y="4069080"/>
+            <a:ext cx="457200" cy="365760"/>
+          </a:xfrm>
+          <a:prstGeom prst="rightArrow">
+            <a:avLst/>
           </a:prstGeom>
           <a:solidFill>
             <a:srgbClr val="002060"/>
@@ -20487,7 +21683,6 @@
           <a:ln>
             <a:noFill/>
           </a:ln>
-          <a:effectLst/>
         </p:spPr>
         <p:style>
           <a:lnRef idx="1">
@@ -20504,62 +21699,36 @@
           </a:fontRef>
         </p:style>
         <p:txBody>
-          <a:bodyPr rtlCol="0" anchor="ctr" wrap="square" lIns="109728" rIns="109728" tIns="54864" bIns="54864"/>
-          <a:lstStyle/>
-          <a:p>
-            <a:pPr algn="l">
-              <a:spcAft>
-                <a:spcPts val="300"/>
-              </a:spcAft>
-            </a:pPr>
-            <a:r>
-              <a:rPr sz="1500" b="1">
-                <a:solidFill>
-                  <a:srgbClr val="FFFFFF"/>
-                </a:solidFill>
-                <a:latin typeface="Arial"/>
-              </a:rPr>
-              <a:t>Context builder</a:t>
-            </a:r>
-          </a:p>
-          <a:p>
-            <a:pPr algn="l">
-              <a:spcAft>
-                <a:spcPts val="0"/>
-              </a:spcAft>
-            </a:pPr>
-            <a:r>
-              <a:rPr sz="1200" b="0">
-                <a:solidFill>
-                  <a:srgbClr val="FFFFFF"/>
-                </a:solidFill>
-                <a:latin typeface="Arial"/>
-              </a:rPr>
-              <a:t>one folder per seller</a:t>
-            </a:r>
-          </a:p>
-        </p:txBody>
-      </p:sp>
-      <p:sp>
-        <p:nvSpPr>
-          <p:cNvPr id="6" name="Right Arrow 5"/>
+          <a:bodyPr rtlCol="0" anchor="ctr"/>
+          <a:lstStyle/>
+          <a:p>
+            <a:pPr algn="ctr"/>
+          </a:p>
+        </p:txBody>
+      </p:sp>
+      <p:sp>
+        <p:nvSpPr>
+          <p:cNvPr id="6" name="Rounded Rectangle 5"/>
           <p:cNvSpPr/>
           <p:nvPr/>
         </p:nvSpPr>
         <p:spPr>
           <a:xfrm>
-            <a:off x="5971031" y="1965960"/>
-            <a:ext cx="347472" cy="365760"/>
-          </a:xfrm>
-          <a:prstGeom prst="rightArrow">
-            <a:avLst/>
-          </a:prstGeom>
-          <a:solidFill>
-            <a:srgbClr val="595959"/>
+            <a:off x="3200400" y="1371600"/>
+            <a:ext cx="4480560" cy="1737360"/>
+          </a:xfrm>
+          <a:prstGeom prst="roundRect">
+            <a:avLst>
+              <a:gd name="adj" fmla="val 6000"/>
+            </a:avLst>
+          </a:prstGeom>
+          <a:solidFill>
+            <a:srgbClr val="2EA896"/>
           </a:solidFill>
           <a:ln>
             <a:noFill/>
           </a:ln>
+          <a:effectLst/>
         </p:spPr>
         <p:style>
           <a:lnRef idx="1">
@@ -20576,10 +21745,55 @@
           </a:fontRef>
         </p:style>
         <p:txBody>
-          <a:bodyPr rtlCol="0" anchor="ctr"/>
-          <a:lstStyle/>
-          <a:p>
-            <a:pPr algn="ctr"/>
+          <a:bodyPr rtlCol="0" anchor="ctr" wrap="square" lIns="109728" rIns="109728" tIns="54864" bIns="54864"/>
+          <a:lstStyle/>
+          <a:p>
+            <a:pPr algn="l">
+              <a:spcAft>
+                <a:spcPts val="300"/>
+              </a:spcAft>
+            </a:pPr>
+            <a:r>
+              <a:rPr sz="1700" b="1">
+                <a:solidFill>
+                  <a:srgbClr val="FFFFFF"/>
+                </a:solidFill>
+                <a:latin typeface="Arial"/>
+              </a:rPr>
+              <a:t>Keyword tool: instant</a:t>
+            </a:r>
+          </a:p>
+          <a:p>
+            <a:pPr algn="l">
+              <a:spcAft>
+                <a:spcPts val="200"/>
+              </a:spcAft>
+            </a:pPr>
+            <a:r>
+              <a:rPr sz="1200" b="0">
+                <a:solidFill>
+                  <a:srgbClr val="FFFFFF"/>
+                </a:solidFill>
+                <a:latin typeface="Arial"/>
+              </a:rPr>
+              <a:t>Reads Hindi, Hinglish, Marathi, Telugu and more</a:t>
+            </a:r>
+          </a:p>
+          <a:p>
+            <a:pPr algn="l">
+              <a:spcAft>
+                <a:spcPts val="0"/>
+              </a:spcAft>
+            </a:pPr>
+            <a:r>
+              <a:rPr sz="1200" b="0">
+                <a:solidFill>
+                  <a:srgbClr val="FFFFFF"/>
+                </a:solidFill>
+                <a:latin typeface="Arial"/>
+              </a:rPr>
+              <a:t>Under 1 ms, same-turn directive</a:t>
+            </a:r>
           </a:p>
         </p:txBody>
       </p:sp>
@@ -20591,8 +21805,8 @@
         </p:nvSpPr>
         <p:spPr>
           <a:xfrm>
-            <a:off x="6355080" y="1463040"/>
-            <a:ext cx="2514600" cy="1417320"/>
+            <a:off x="3200400" y="3474720"/>
+            <a:ext cx="4480560" cy="1737360"/>
           </a:xfrm>
           <a:prstGeom prst="roundRect">
             <a:avLst>
@@ -20631,19 +21845,19 @@
               </a:spcAft>
             </a:pPr>
             <a:r>
-              <a:rPr sz="1500" b="1">
+              <a:rPr sz="1700" b="1">
                 <a:solidFill>
                   <a:srgbClr val="FFFFFF"/>
                 </a:solidFill>
                 <a:latin typeface="Arial"/>
               </a:rPr>
-              <a:t>Safe export</a:t>
+              <a:t>Jev decision model: after the call</a:t>
             </a:r>
           </a:p>
           <a:p>
             <a:pPr algn="l">
               <a:spcAft>
-                <a:spcPts val="0"/>
+                <a:spcPts val="200"/>
               </a:spcAft>
             </a:pPr>
             <a:r>
@@ -20653,7 +21867,23 @@
                 </a:solidFill>
                 <a:latin typeface="Arial"/>
               </a:rPr>
-              <a:t>names become tokens</a:t>
+              <a:t>Judges the same turns on real calls: 6 mood questions at once</a:t>
+            </a:r>
+          </a:p>
+          <a:p>
+            <a:pPr algn="l">
+              <a:spcAft>
+                <a:spcPts val="0"/>
+              </a:spcAft>
+            </a:pPr>
+            <a:r>
+              <a:rPr sz="1200" b="0">
+                <a:solidFill>
+                  <a:srgbClr val="FFFFFF"/>
+                </a:solidFill>
+                <a:latin typeface="Arial"/>
+              </a:rPr>
+              <a:t>49 of 51 correct in tests; tested live via a relay</a:t>
             </a:r>
           </a:p>
         </p:txBody>
@@ -20666,14 +21896,14 @@
         </p:nvSpPr>
         <p:spPr>
           <a:xfrm>
-            <a:off x="8897112" y="1965960"/>
-            <a:ext cx="347472" cy="365760"/>
+            <a:off x="7772400" y="2011680"/>
+            <a:ext cx="457200" cy="365760"/>
           </a:xfrm>
           <a:prstGeom prst="rightArrow">
             <a:avLst/>
           </a:prstGeom>
           <a:solidFill>
-            <a:srgbClr val="595959"/>
+            <a:srgbClr val="2EA896"/>
           </a:solidFill>
           <a:ln>
             <a:noFill/>
@@ -20703,27 +21933,24 @@
       </p:sp>
       <p:sp>
         <p:nvSpPr>
-          <p:cNvPr id="9" name="Rounded Rectangle 8"/>
+          <p:cNvPr id="9" name="Right Arrow 8"/>
           <p:cNvSpPr/>
           <p:nvPr/>
         </p:nvSpPr>
         <p:spPr>
           <a:xfrm>
-            <a:off x="9281160" y="1463040"/>
-            <a:ext cx="2514600" cy="1417320"/>
-          </a:xfrm>
-          <a:prstGeom prst="roundRect">
-            <a:avLst>
-              <a:gd name="adj" fmla="val 6000"/>
-            </a:avLst>
-          </a:prstGeom>
-          <a:solidFill>
-            <a:srgbClr val="C00000"/>
+            <a:off x="7772400" y="4114800"/>
+            <a:ext cx="457200" cy="365760"/>
+          </a:xfrm>
+          <a:prstGeom prst="rightArrow">
+            <a:avLst/>
+          </a:prstGeom>
+          <a:solidFill>
+            <a:srgbClr val="002060"/>
           </a:solidFill>
           <a:ln>
             <a:noFill/>
           </a:ln>
-          <a:effectLst/>
         </p:spPr>
         <p:style>
           <a:lnRef idx="1">
@@ -20740,39 +21967,10 @@
           </a:fontRef>
         </p:style>
         <p:txBody>
-          <a:bodyPr rtlCol="0" anchor="ctr" wrap="square" lIns="109728" rIns="109728" tIns="54864" bIns="54864"/>
-          <a:lstStyle/>
-          <a:p>
-            <a:pPr algn="l">
-              <a:spcAft>
-                <a:spcPts val="300"/>
-              </a:spcAft>
-            </a:pPr>
-            <a:r>
-              <a:rPr sz="1500" b="1">
-                <a:solidFill>
-                  <a:srgbClr val="FFFFFF"/>
-                </a:solidFill>
-                <a:latin typeface="Arial"/>
-              </a:rPr>
-              <a:t>Persona agent</a:t>
-            </a:r>
-          </a:p>
-          <a:p>
-            <a:pPr algn="l">
-              <a:spcAft>
-                <a:spcPts val="0"/>
-              </a:spcAft>
-            </a:pPr>
-            <a:r>
-              <a:rPr sz="1200" b="0">
-                <a:solidFill>
-                  <a:srgbClr val="FFFFFF"/>
-                </a:solidFill>
-                <a:latin typeface="Arial"/>
-              </a:rPr>
-              <a:t>Claude in a sandbox, every choice cited</a:t>
-            </a:r>
+          <a:bodyPr rtlCol="0" anchor="ctr"/>
+          <a:lstStyle/>
+          <a:p>
+            <a:pPr algn="ctr"/>
           </a:p>
         </p:txBody>
       </p:sp>
@@ -20784,8 +21982,8 @@
         </p:nvSpPr>
         <p:spPr>
           <a:xfrm>
-            <a:off x="9281160" y="3291840"/>
-            <a:ext cx="2514600" cy="1417320"/>
+            <a:off x="8321040" y="1371600"/>
+            <a:ext cx="3383280" cy="1737360"/>
           </a:xfrm>
           <a:prstGeom prst="roundRect">
             <a:avLst>
@@ -20793,7 +21991,7 @@
             </a:avLst>
           </a:prstGeom>
           <a:solidFill>
-            <a:srgbClr val="2EA896"/>
+            <a:srgbClr val="C00000"/>
           </a:solidFill>
           <a:ln>
             <a:noFill/>
@@ -20818,59 +22016,78 @@
           <a:bodyPr rtlCol="0" anchor="ctr" wrap="square" lIns="109728" rIns="109728" tIns="54864" bIns="54864"/>
           <a:lstStyle/>
           <a:p>
-            <a:pPr algn="l">
-              <a:spcAft>
-                <a:spcPts val="300"/>
-              </a:spcAft>
-            </a:pPr>
-            <a:r>
-              <a:rPr sz="1500" b="1">
+            <a:pPr algn="ctr">
+              <a:spcAft>
+                <a:spcPts val="400"/>
+              </a:spcAft>
+            </a:pPr>
+            <a:r>
+              <a:rPr sz="1600" b="1">
                 <a:solidFill>
                   <a:srgbClr val="FFFFFF"/>
                 </a:solidFill>
                 <a:latin typeface="Arial"/>
               </a:rPr>
-              <a:t>Sarvam voice agent</a:t>
-            </a:r>
-          </a:p>
-          <a:p>
-            <a:pPr algn="l">
-              <a:spcAft>
-                <a:spcPts val="0"/>
-              </a:spcAft>
-            </a:pPr>
-            <a:r>
-              <a:rPr sz="1200" b="0">
+              <a:t>MODE + DIRECTIVE</a:t>
+            </a:r>
+          </a:p>
+          <a:p>
+            <a:pPr algn="ctr">
+              <a:spcAft>
+                <a:spcPts val="400"/>
+              </a:spcAft>
+            </a:pPr>
+            <a:r>
+              <a:rPr sz="1100" b="0">
                 <a:solidFill>
                   <a:srgbClr val="FFFFFF"/>
                 </a:solidFill>
                 <a:latin typeface="Arial"/>
               </a:rPr>
-              <a:t>voice, pace, language, opening</a:t>
-            </a:r>
-          </a:p>
-        </p:txBody>
-      </p:sp>
-      <p:sp>
-        <p:nvSpPr>
-          <p:cNvPr id="11" name="Left Arrow 10"/>
+              <a:t>in the call, same turn</a:t>
+            </a:r>
+          </a:p>
+          <a:p>
+            <a:pPr algn="ctr">
+              <a:spcAft>
+                <a:spcPts val="0"/>
+              </a:spcAft>
+            </a:pPr>
+            <a:r>
+              <a:rPr sz="1200" b="1">
+                <a:solidFill>
+                  <a:srgbClr val="FFFFFF"/>
+                </a:solidFill>
+                <a:latin typeface="Arial"/>
+              </a:rPr>
+              <a:t>VANI changes how it speaks</a:t>
+            </a:r>
+          </a:p>
+        </p:txBody>
+      </p:sp>
+      <p:sp>
+        <p:nvSpPr>
+          <p:cNvPr id="11" name="Rounded Rectangle 10"/>
           <p:cNvSpPr/>
           <p:nvPr/>
         </p:nvSpPr>
         <p:spPr>
           <a:xfrm>
-            <a:off x="8887968" y="3794760"/>
-            <a:ext cx="347472" cy="365760"/>
-          </a:xfrm>
-          <a:prstGeom prst="leftArrow">
-            <a:avLst/>
-          </a:prstGeom>
-          <a:solidFill>
-            <a:srgbClr val="595959"/>
+            <a:off x="8321040" y="3474720"/>
+            <a:ext cx="3383280" cy="1737360"/>
+          </a:xfrm>
+          <a:prstGeom prst="roundRect">
+            <a:avLst>
+              <a:gd name="adj" fmla="val 6000"/>
+            </a:avLst>
+          </a:prstGeom>
+          <a:solidFill>
+            <a:srgbClr val="5B3E96"/>
           </a:solidFill>
           <a:ln>
             <a:noFill/>
           </a:ln>
+          <a:effectLst/>
         </p:spPr>
         <p:style>
           <a:lnRef idx="1">
@@ -20887,10 +22104,55 @@
           </a:fontRef>
         </p:style>
         <p:txBody>
-          <a:bodyPr rtlCol="0" anchor="ctr"/>
-          <a:lstStyle/>
-          <a:p>
-            <a:pPr algn="ctr"/>
+          <a:bodyPr rtlCol="0" anchor="ctr" wrap="square" lIns="109728" rIns="109728" tIns="54864" bIns="54864"/>
+          <a:lstStyle/>
+          <a:p>
+            <a:pPr algn="ctr">
+              <a:spcAft>
+                <a:spcPts val="400"/>
+              </a:spcAft>
+            </a:pPr>
+            <a:r>
+              <a:rPr sz="1600" b="1">
+                <a:solidFill>
+                  <a:srgbClr val="FFFFFF"/>
+                </a:solidFill>
+                <a:latin typeface="Arial"/>
+              </a:rPr>
+              <a:t>LABELS</a:t>
+            </a:r>
+          </a:p>
+          <a:p>
+            <a:pPr algn="ctr">
+              <a:spcAft>
+                <a:spcPts val="400"/>
+              </a:spcAft>
+            </a:pPr>
+            <a:r>
+              <a:rPr sz="1100" b="0">
+                <a:solidFill>
+                  <a:srgbClr val="FFFFFF"/>
+                </a:solidFill>
+                <a:latin typeface="Arial"/>
+              </a:rPr>
+              <a:t>after the call</a:t>
+            </a:r>
+          </a:p>
+          <a:p>
+            <a:pPr algn="ctr">
+              <a:spcAft>
+                <a:spcPts val="0"/>
+              </a:spcAft>
+            </a:pPr>
+            <a:r>
+              <a:rPr sz="1200" b="1">
+                <a:solidFill>
+                  <a:srgbClr val="FFFFFF"/>
+                </a:solidFill>
+                <a:latin typeface="Arial"/>
+              </a:rPr>
+              <a:t>score and improve the keyword tool</a:t>
+            </a:r>
           </a:p>
         </p:txBody>
       </p:sp>
@@ -20902,19 +22164,21 @@
         </p:nvSpPr>
         <p:spPr>
           <a:xfrm>
-            <a:off x="6355080" y="3291840"/>
-            <a:ext cx="2514600" cy="1417320"/>
+            <a:off x="502920" y="5440680"/>
+            <a:ext cx="11338560" cy="548640"/>
           </a:xfrm>
           <a:prstGeom prst="roundRect">
             <a:avLst>
-              <a:gd name="adj" fmla="val 6000"/>
+              <a:gd name="adj" fmla="val 30000"/>
             </a:avLst>
           </a:prstGeom>
           <a:solidFill>
-            <a:srgbClr val="2EA896"/>
-          </a:solidFill>
-          <a:ln>
-            <a:noFill/>
+            <a:srgbClr val="EEF2F8"/>
+          </a:solidFill>
+          <a:ln w="12700">
+            <a:solidFill>
+              <a:srgbClr val="5B3E96"/>
+            </a:solidFill>
           </a:ln>
           <a:effectLst/>
         </p:spPr>
@@ -20936,362 +22200,6 @@
           <a:bodyPr rtlCol="0" anchor="ctr" wrap="square" lIns="109728" rIns="109728" tIns="54864" bIns="54864"/>
           <a:lstStyle/>
           <a:p>
-            <a:pPr algn="l">
-              <a:spcAft>
-                <a:spcPts val="300"/>
-              </a:spcAft>
-            </a:pPr>
-            <a:r>
-              <a:rPr sz="1500" b="1">
-                <a:solidFill>
-                  <a:srgbClr val="FFFFFF"/>
-                </a:solidFill>
-                <a:latin typeface="Arial"/>
-              </a:rPr>
-              <a:t>Live adaptation</a:t>
-            </a:r>
-          </a:p>
-          <a:p>
-            <a:pPr algn="l">
-              <a:spcAft>
-                <a:spcPts val="0"/>
-              </a:spcAft>
-            </a:pPr>
-            <a:r>
-              <a:rPr sz="1200" b="0">
-                <a:solidFill>
-                  <a:srgbClr val="FFFFFF"/>
-                </a:solidFill>
-                <a:latin typeface="Arial"/>
-              </a:rPr>
-              <a:t>mood to directive each turn</a:t>
-            </a:r>
-          </a:p>
-        </p:txBody>
-      </p:sp>
-      <p:sp>
-        <p:nvSpPr>
-          <p:cNvPr id="13" name="Left Arrow 12"/>
-          <p:cNvSpPr/>
-          <p:nvPr/>
-        </p:nvSpPr>
-        <p:spPr>
-          <a:xfrm>
-            <a:off x="5961888" y="3794760"/>
-            <a:ext cx="347472" cy="365760"/>
-          </a:xfrm>
-          <a:prstGeom prst="leftArrow">
-            <a:avLst/>
-          </a:prstGeom>
-          <a:solidFill>
-            <a:srgbClr val="595959"/>
-          </a:solidFill>
-          <a:ln>
-            <a:noFill/>
-          </a:ln>
-        </p:spPr>
-        <p:style>
-          <a:lnRef idx="1">
-            <a:schemeClr val="accent1"/>
-          </a:lnRef>
-          <a:fillRef idx="3">
-            <a:schemeClr val="accent1"/>
-          </a:fillRef>
-          <a:effectRef idx="2">
-            <a:schemeClr val="accent1"/>
-          </a:effectRef>
-          <a:fontRef idx="minor">
-            <a:schemeClr val="lt1"/>
-          </a:fontRef>
-        </p:style>
-        <p:txBody>
-          <a:bodyPr rtlCol="0" anchor="ctr"/>
-          <a:lstStyle/>
-          <a:p>
-            <a:pPr algn="ctr"/>
-          </a:p>
-        </p:txBody>
-      </p:sp>
-      <p:sp>
-        <p:nvSpPr>
-          <p:cNvPr id="14" name="Rounded Rectangle 13"/>
-          <p:cNvSpPr/>
-          <p:nvPr/>
-        </p:nvSpPr>
-        <p:spPr>
-          <a:xfrm>
-            <a:off x="3429000" y="3291840"/>
-            <a:ext cx="2514600" cy="1417320"/>
-          </a:xfrm>
-          <a:prstGeom prst="roundRect">
-            <a:avLst>
-              <a:gd name="adj" fmla="val 6000"/>
-            </a:avLst>
-          </a:prstGeom>
-          <a:solidFill>
-            <a:srgbClr val="5B3E96"/>
-          </a:solidFill>
-          <a:ln>
-            <a:noFill/>
-          </a:ln>
-          <a:effectLst/>
-        </p:spPr>
-        <p:style>
-          <a:lnRef idx="1">
-            <a:schemeClr val="accent1"/>
-          </a:lnRef>
-          <a:fillRef idx="3">
-            <a:schemeClr val="accent1"/>
-          </a:fillRef>
-          <a:effectRef idx="2">
-            <a:schemeClr val="accent1"/>
-          </a:effectRef>
-          <a:fontRef idx="minor">
-            <a:schemeClr val="lt1"/>
-          </a:fontRef>
-        </p:style>
-        <p:txBody>
-          <a:bodyPr rtlCol="0" anchor="ctr" wrap="square" lIns="109728" rIns="109728" tIns="54864" bIns="54864"/>
-          <a:lstStyle/>
-          <a:p>
-            <a:pPr algn="l">
-              <a:spcAft>
-                <a:spcPts val="300"/>
-              </a:spcAft>
-            </a:pPr>
-            <a:r>
-              <a:rPr sz="1500" b="1">
-                <a:solidFill>
-                  <a:srgbClr val="FFFFFF"/>
-                </a:solidFill>
-                <a:latin typeface="Arial"/>
-              </a:rPr>
-              <a:t>Call review</a:t>
-            </a:r>
-          </a:p>
-          <a:p>
-            <a:pPr algn="l">
-              <a:spcAft>
-                <a:spcPts val="0"/>
-              </a:spcAft>
-            </a:pPr>
-            <a:r>
-              <a:rPr sz="1200" b="0">
-                <a:solidFill>
-                  <a:srgbClr val="FFFFFF"/>
-                </a:solidFill>
-                <a:latin typeface="Arial"/>
-              </a:rPr>
-              <a:t>Claude checks fit and rules</a:t>
-            </a:r>
-          </a:p>
-        </p:txBody>
-      </p:sp>
-      <p:sp>
-        <p:nvSpPr>
-          <p:cNvPr id="15" name="Left Arrow 14"/>
-          <p:cNvSpPr/>
-          <p:nvPr/>
-        </p:nvSpPr>
-        <p:spPr>
-          <a:xfrm>
-            <a:off x="3035808" y="3794760"/>
-            <a:ext cx="347472" cy="365760"/>
-          </a:xfrm>
-          <a:prstGeom prst="leftArrow">
-            <a:avLst/>
-          </a:prstGeom>
-          <a:solidFill>
-            <a:srgbClr val="595959"/>
-          </a:solidFill>
-          <a:ln>
-            <a:noFill/>
-          </a:ln>
-        </p:spPr>
-        <p:style>
-          <a:lnRef idx="1">
-            <a:schemeClr val="accent1"/>
-          </a:lnRef>
-          <a:fillRef idx="3">
-            <a:schemeClr val="accent1"/>
-          </a:fillRef>
-          <a:effectRef idx="2">
-            <a:schemeClr val="accent1"/>
-          </a:effectRef>
-          <a:fontRef idx="minor">
-            <a:schemeClr val="lt1"/>
-          </a:fontRef>
-        </p:style>
-        <p:txBody>
-          <a:bodyPr rtlCol="0" anchor="ctr"/>
-          <a:lstStyle/>
-          <a:p>
-            <a:pPr algn="ctr"/>
-          </a:p>
-        </p:txBody>
-      </p:sp>
-      <p:sp>
-        <p:nvSpPr>
-          <p:cNvPr id="16" name="Rounded Rectangle 15"/>
-          <p:cNvSpPr/>
-          <p:nvPr/>
-        </p:nvSpPr>
-        <p:spPr>
-          <a:xfrm>
-            <a:off x="502920" y="3291840"/>
-            <a:ext cx="2514600" cy="1417320"/>
-          </a:xfrm>
-          <a:prstGeom prst="roundRect">
-            <a:avLst>
-              <a:gd name="adj" fmla="val 6000"/>
-            </a:avLst>
-          </a:prstGeom>
-          <a:solidFill>
-            <a:srgbClr val="5B3E96"/>
-          </a:solidFill>
-          <a:ln>
-            <a:noFill/>
-          </a:ln>
-          <a:effectLst/>
-        </p:spPr>
-        <p:style>
-          <a:lnRef idx="1">
-            <a:schemeClr val="accent1"/>
-          </a:lnRef>
-          <a:fillRef idx="3">
-            <a:schemeClr val="accent1"/>
-          </a:fillRef>
-          <a:effectRef idx="2">
-            <a:schemeClr val="accent1"/>
-          </a:effectRef>
-          <a:fontRef idx="minor">
-            <a:schemeClr val="lt1"/>
-          </a:fontRef>
-        </p:style>
-        <p:txBody>
-          <a:bodyPr rtlCol="0" anchor="ctr" wrap="square" lIns="109728" rIns="109728" tIns="54864" bIns="54864"/>
-          <a:lstStyle/>
-          <a:p>
-            <a:pPr algn="l">
-              <a:spcAft>
-                <a:spcPts val="300"/>
-              </a:spcAft>
-            </a:pPr>
-            <a:r>
-              <a:rPr sz="1500" b="1">
-                <a:solidFill>
-                  <a:srgbClr val="FFFFFF"/>
-                </a:solidFill>
-                <a:latin typeface="Arial"/>
-              </a:rPr>
-              <a:t>Learning loops</a:t>
-            </a:r>
-          </a:p>
-          <a:p>
-            <a:pPr algn="l">
-              <a:spcAft>
-                <a:spcPts val="0"/>
-              </a:spcAft>
-            </a:pPr>
-            <a:r>
-              <a:rPr sz="1200" b="0">
-                <a:solidFill>
-                  <a:srgbClr val="FFFFFF"/>
-                </a:solidFill>
-                <a:latin typeface="Arial"/>
-              </a:rPr>
-              <a:t>better persona and hook next call</a:t>
-            </a:r>
-          </a:p>
-        </p:txBody>
-      </p:sp>
-      <p:sp>
-        <p:nvSpPr>
-          <p:cNvPr id="17" name="Down Arrow 16"/>
-          <p:cNvSpPr/>
-          <p:nvPr/>
-        </p:nvSpPr>
-        <p:spPr>
-          <a:xfrm>
-            <a:off x="10012680" y="2926080"/>
-            <a:ext cx="365760" cy="347472"/>
-          </a:xfrm>
-          <a:prstGeom prst="downArrow">
-            <a:avLst/>
-          </a:prstGeom>
-          <a:solidFill>
-            <a:srgbClr val="595959"/>
-          </a:solidFill>
-          <a:ln>
-            <a:noFill/>
-          </a:ln>
-        </p:spPr>
-        <p:style>
-          <a:lnRef idx="1">
-            <a:schemeClr val="accent1"/>
-          </a:lnRef>
-          <a:fillRef idx="3">
-            <a:schemeClr val="accent1"/>
-          </a:fillRef>
-          <a:effectRef idx="2">
-            <a:schemeClr val="accent1"/>
-          </a:effectRef>
-          <a:fontRef idx="minor">
-            <a:schemeClr val="lt1"/>
-          </a:fontRef>
-        </p:style>
-        <p:txBody>
-          <a:bodyPr rtlCol="0" anchor="ctr"/>
-          <a:lstStyle/>
-          <a:p>
-            <a:pPr algn="ctr"/>
-          </a:p>
-        </p:txBody>
-      </p:sp>
-      <p:sp>
-        <p:nvSpPr>
-          <p:cNvPr id="18" name="Rounded Rectangle 17"/>
-          <p:cNvSpPr/>
-          <p:nvPr/>
-        </p:nvSpPr>
-        <p:spPr>
-          <a:xfrm>
-            <a:off x="502920" y="5212080"/>
-            <a:ext cx="11338560" cy="731520"/>
-          </a:xfrm>
-          <a:prstGeom prst="roundRect">
-            <a:avLst>
-              <a:gd name="adj" fmla="val 6000"/>
-            </a:avLst>
-          </a:prstGeom>
-          <a:solidFill>
-            <a:srgbClr val="EEF2F8"/>
-          </a:solidFill>
-          <a:ln w="12700">
-            <a:solidFill>
-              <a:srgbClr val="002060"/>
-            </a:solidFill>
-          </a:ln>
-          <a:effectLst/>
-        </p:spPr>
-        <p:style>
-          <a:lnRef idx="1">
-            <a:schemeClr val="accent1"/>
-          </a:lnRef>
-          <a:fillRef idx="3">
-            <a:schemeClr val="accent1"/>
-          </a:fillRef>
-          <a:effectRef idx="2">
-            <a:schemeClr val="accent1"/>
-          </a:effectRef>
-          <a:fontRef idx="minor">
-            <a:schemeClr val="lt1"/>
-          </a:fontRef>
-        </p:style>
-        <p:txBody>
-          <a:bodyPr rtlCol="0" anchor="ctr" wrap="square" lIns="109728" rIns="109728" tIns="54864" bIns="54864"/>
-          <a:lstStyle/>
-          <a:p>
             <a:pPr algn="ctr">
               <a:spcAft>
                 <a:spcPts val="0"/>
@@ -21300,11 +22208,11 @@
             <a:r>
               <a:rPr sz="1300" b="1">
                 <a:solidFill>
-                  <a:srgbClr val="002060"/>
-                </a:solidFill>
-                <a:latin typeface="Arial"/>
-              </a:rPr>
-              <a:t>Safety rails: never AI, bot or manager; never claims to be human  |  numbers only from verified facts  |  names stay tokens in the sandbox  |  no price on the call</a:t>
+                  <a:srgbClr val="5B3E96"/>
+                </a:solidFill>
+                <a:latin typeface="Arial"/>
+              </a:rPr>
+              <a:t>Keyword tool answers in the call; Jev judges the same turns after the call and teaches it</a:t>
             </a:r>
           </a:p>
         </p:txBody>
@@ -21343,7 +22251,7 @@
           <a:lstStyle/>
           <a:p>
             <a:r>
-              <a:t>Future Goals</a:t>
+              <a:t>The Self-Learning Loop</a:t>
             </a:r>
           </a:p>
         </p:txBody>
@@ -21356,8 +22264,8 @@
         </p:nvSpPr>
         <p:spPr>
           <a:xfrm>
-            <a:off x="566928" y="1463040"/>
-            <a:ext cx="5212080" cy="1371600"/>
+            <a:off x="4754880" y="1325880"/>
+            <a:ext cx="2743200" cy="960120"/>
           </a:xfrm>
           <a:prstGeom prst="roundRect">
             <a:avLst>
@@ -21365,7 +22273,7 @@
             </a:avLst>
           </a:prstGeom>
           <a:solidFill>
-            <a:srgbClr val="C00000"/>
+            <a:srgbClr val="2EA896"/>
           </a:solidFill>
           <a:ln>
             <a:noFill/>
@@ -21396,13 +22304,13 @@
               </a:spcAft>
             </a:pPr>
             <a:r>
-              <a:rPr sz="1700" b="1">
+              <a:rPr sz="1500" b="1">
                 <a:solidFill>
                   <a:srgbClr val="FFFFFF"/>
                 </a:solidFill>
                 <a:latin typeface="Arial"/>
               </a:rPr>
-              <a:t>NOW: Meeting arrangement</a:t>
+              <a:t>1  CALL</a:t>
             </a:r>
           </a:p>
           <a:p>
@@ -21412,37 +22320,40 @@
               </a:spcAft>
             </a:pPr>
             <a:r>
-              <a:rPr sz="1300" b="0">
+              <a:rPr sz="1100" b="0">
                 <a:solidFill>
                   <a:srgbClr val="FFFFFF"/>
                 </a:solidFill>
                 <a:latin typeface="Arial"/>
               </a:rPr>
-              <a:t>Right persona and hook, live adaptation</a:t>
-            </a:r>
-          </a:p>
-        </p:txBody>
-      </p:sp>
-      <p:sp>
-        <p:nvSpPr>
-          <p:cNvPr id="4" name="Right Arrow 3"/>
+              <a:t>persona + hook logged as a decision</a:t>
+            </a:r>
+          </a:p>
+        </p:txBody>
+      </p:sp>
+      <p:sp>
+        <p:nvSpPr>
+          <p:cNvPr id="4" name="Rounded Rectangle 3"/>
           <p:cNvSpPr/>
           <p:nvPr/>
         </p:nvSpPr>
         <p:spPr>
           <a:xfrm>
-            <a:off x="5852160" y="1920240"/>
-            <a:ext cx="457200" cy="411480"/>
-          </a:xfrm>
-          <a:prstGeom prst="rightArrow">
-            <a:avLst/>
-          </a:prstGeom>
-          <a:solidFill>
-            <a:srgbClr val="595959"/>
+            <a:off x="8229600" y="2423160"/>
+            <a:ext cx="2743200" cy="960120"/>
+          </a:xfrm>
+          <a:prstGeom prst="roundRect">
+            <a:avLst>
+              <a:gd name="adj" fmla="val 6000"/>
+            </a:avLst>
+          </a:prstGeom>
+          <a:solidFill>
+            <a:srgbClr val="002060"/>
           </a:solidFill>
           <a:ln>
             <a:noFill/>
           </a:ln>
+          <a:effectLst/>
         </p:spPr>
         <p:style>
           <a:lnRef idx="1">
@@ -21459,10 +22370,39 @@
           </a:fontRef>
         </p:style>
         <p:txBody>
-          <a:bodyPr rtlCol="0" anchor="ctr"/>
-          <a:lstStyle/>
-          <a:p>
-            <a:pPr algn="ctr"/>
+          <a:bodyPr rtlCol="0" anchor="ctr" wrap="square" lIns="109728" rIns="109728" tIns="54864" bIns="54864"/>
+          <a:lstStyle/>
+          <a:p>
+            <a:pPr algn="ctr">
+              <a:spcAft>
+                <a:spcPts val="200"/>
+              </a:spcAft>
+            </a:pPr>
+            <a:r>
+              <a:rPr sz="1500" b="1">
+                <a:solidFill>
+                  <a:srgbClr val="FFFFFF"/>
+                </a:solidFill>
+                <a:latin typeface="Arial"/>
+              </a:rPr>
+              <a:t>2  REVIEW</a:t>
+            </a:r>
+          </a:p>
+          <a:p>
+            <a:pPr algn="ctr">
+              <a:spcAft>
+                <a:spcPts val="0"/>
+              </a:spcAft>
+            </a:pPr>
+            <a:r>
+              <a:rPr sz="1100" b="0">
+                <a:solidFill>
+                  <a:srgbClr val="FFFFFF"/>
+                </a:solidFill>
+                <a:latin typeface="Arial"/>
+              </a:rPr>
+              <a:t>Claude, rubric and rule checks</a:t>
+            </a:r>
           </a:p>
         </p:txBody>
       </p:sp>
@@ -21474,8 +22414,8 @@
         </p:nvSpPr>
         <p:spPr>
           <a:xfrm>
-            <a:off x="6400800" y="1463040"/>
-            <a:ext cx="5212080" cy="1371600"/>
+            <a:off x="7406640" y="4206240"/>
+            <a:ext cx="2743200" cy="960120"/>
           </a:xfrm>
           <a:prstGeom prst="roundRect">
             <a:avLst>
@@ -21483,7 +22423,7 @@
             </a:avLst>
           </a:prstGeom>
           <a:solidFill>
-            <a:srgbClr val="002060"/>
+            <a:srgbClr val="1B6B5E"/>
           </a:solidFill>
           <a:ln>
             <a:noFill/>
@@ -21514,13 +22454,13 @@
               </a:spcAft>
             </a:pPr>
             <a:r>
-              <a:rPr sz="1700" b="1">
+              <a:rPr sz="1500" b="1">
                 <a:solidFill>
                   <a:srgbClr val="FFFFFF"/>
                 </a:solidFill>
                 <a:latin typeface="Arial"/>
               </a:rPr>
-              <a:t>NEXT: Seller enrichment</a:t>
+              <a:t>3  OUTCOME</a:t>
             </a:r>
           </a:p>
           <a:p>
@@ -21530,66 +22470,27 @@
               </a:spcAft>
             </a:pPr>
             <a:r>
-              <a:rPr sz="1300" b="0">
+              <a:rPr sz="1100" b="0">
                 <a:solidFill>
                   <a:srgbClr val="FFFFFF"/>
                 </a:solidFill>
                 <a:latin typeface="Arial"/>
               </a:rPr>
-              <a:t>Catalogue improvement and suggestions</a:t>
-            </a:r>
-          </a:p>
-        </p:txBody>
-      </p:sp>
-      <p:sp>
-        <p:nvSpPr>
-          <p:cNvPr id="6" name="TextBox 5"/>
-          <p:cNvSpPr txBox="1"/>
-          <p:nvPr/>
-        </p:nvSpPr>
-        <p:spPr>
-          <a:xfrm>
-            <a:off x="566928" y="3154680"/>
-            <a:ext cx="10972800" cy="365760"/>
-          </a:xfrm>
-          <a:prstGeom prst="rect">
-            <a:avLst/>
-          </a:prstGeom>
-          <a:noFill/>
-        </p:spPr>
-        <p:txBody>
-          <a:bodyPr wrap="square">
-            <a:spAutoFit/>
-          </a:bodyPr>
-          <a:lstStyle/>
-          <a:p>
-            <a:pPr algn="l">
-              <a:spcAft>
-                <a:spcPts val="0"/>
-              </a:spcAft>
-            </a:pPr>
-            <a:r>
-              <a:rPr sz="1600" b="1">
-                <a:solidFill>
-                  <a:srgbClr val="5B3E96"/>
-                </a:solidFill>
-                <a:latin typeface="Arial"/>
-              </a:rPr>
-              <a:t>Personalise further, per seller</a:t>
-            </a:r>
-          </a:p>
-        </p:txBody>
-      </p:sp>
-      <p:sp>
-        <p:nvSpPr>
-          <p:cNvPr id="7" name="Rounded Rectangle 6"/>
+              <a:t>meeting fixed or not</a:t>
+            </a:r>
+          </a:p>
+        </p:txBody>
+      </p:sp>
+      <p:sp>
+        <p:nvSpPr>
+          <p:cNvPr id="6" name="Rounded Rectangle 5"/>
           <p:cNvSpPr/>
           <p:nvPr/>
         </p:nvSpPr>
         <p:spPr>
           <a:xfrm>
-            <a:off x="566928" y="3611880"/>
-            <a:ext cx="3566160" cy="1828800"/>
+            <a:off x="2103120" y="4206240"/>
+            <a:ext cx="2743200" cy="960120"/>
           </a:xfrm>
           <a:prstGeom prst="roundRect">
             <a:avLst>
@@ -21597,12 +22498,10 @@
             </a:avLst>
           </a:prstGeom>
           <a:solidFill>
-            <a:srgbClr val="FFFFFF"/>
-          </a:solidFill>
-          <a:ln w="12700">
-            <a:solidFill>
-              <a:srgbClr val="2EA896"/>
-            </a:solidFill>
+            <a:srgbClr val="C00000"/>
+          </a:solidFill>
+          <a:ln>
+            <a:noFill/>
           </a:ln>
           <a:effectLst/>
         </p:spPr>
@@ -21621,62 +22520,65 @@
           </a:fontRef>
         </p:style>
         <p:txBody>
-          <a:bodyPr rtlCol="0" anchor="ctr" wrap="square" lIns="1005840" rIns="109728" tIns="54864" bIns="54864"/>
-          <a:lstStyle/>
-          <a:p>
-            <a:pPr algn="l">
-              <a:spcAft>
-                <a:spcPts val="300"/>
-              </a:spcAft>
-            </a:pPr>
-            <a:r>
-              <a:rPr sz="1600" b="1">
-                <a:solidFill>
-                  <a:srgbClr val="2EA896"/>
-                </a:solidFill>
-                <a:latin typeface="Arial"/>
-              </a:rPr>
-              <a:t>Objective per seller</a:t>
-            </a:r>
-          </a:p>
-          <a:p>
-            <a:pPr algn="l">
-              <a:spcAft>
-                <a:spcPts val="0"/>
-              </a:spcAft>
-            </a:pPr>
-            <a:r>
-              <a:rPr sz="1300" b="0">
-                <a:solidFill>
-                  <a:srgbClr val="262626"/>
-                </a:solidFill>
-                <a:latin typeface="Arial"/>
-              </a:rPr>
-              <a:t>Meeting, enrichment or NPS</a:t>
-            </a:r>
-          </a:p>
-        </p:txBody>
-      </p:sp>
-      <p:sp>
-        <p:nvSpPr>
-          <p:cNvPr id="8" name="Oval 7"/>
+          <a:bodyPr rtlCol="0" anchor="ctr" wrap="square" lIns="109728" rIns="109728" tIns="54864" bIns="54864"/>
+          <a:lstStyle/>
+          <a:p>
+            <a:pPr algn="ctr">
+              <a:spcAft>
+                <a:spcPts val="200"/>
+              </a:spcAft>
+            </a:pPr>
+            <a:r>
+              <a:rPr sz="1500" b="1">
+                <a:solidFill>
+                  <a:srgbClr val="FFFFFF"/>
+                </a:solidFill>
+                <a:latin typeface="Arial"/>
+              </a:rPr>
+              <a:t>4  UPDATE</a:t>
+            </a:r>
+          </a:p>
+          <a:p>
+            <a:pPr algn="ctr">
+              <a:spcAft>
+                <a:spcPts val="0"/>
+              </a:spcAft>
+            </a:pPr>
+            <a:r>
+              <a:rPr sz="1100" b="0">
+                <a:solidFill>
+                  <a:srgbClr val="FFFFFF"/>
+                </a:solidFill>
+                <a:latin typeface="Arial"/>
+              </a:rPr>
+              <a:t>scoreboards, by seller segment</a:t>
+            </a:r>
+          </a:p>
+        </p:txBody>
+      </p:sp>
+      <p:sp>
+        <p:nvSpPr>
+          <p:cNvPr id="7" name="Rounded Rectangle 6"/>
           <p:cNvSpPr/>
           <p:nvPr/>
         </p:nvSpPr>
         <p:spPr>
           <a:xfrm>
-            <a:off x="749808" y="3794760"/>
-            <a:ext cx="640080" cy="640080"/>
-          </a:xfrm>
-          <a:prstGeom prst="ellipse">
-            <a:avLst/>
-          </a:prstGeom>
-          <a:solidFill>
-            <a:srgbClr val="2EA896"/>
+            <a:off x="1280160" y="2423160"/>
+            <a:ext cx="2743200" cy="960120"/>
+          </a:xfrm>
+          <a:prstGeom prst="roundRect">
+            <a:avLst>
+              <a:gd name="adj" fmla="val 6000"/>
+            </a:avLst>
+          </a:prstGeom>
+          <a:solidFill>
+            <a:srgbClr val="5B3E96"/>
           </a:solidFill>
           <a:ln>
             <a:noFill/>
           </a:ln>
+          <a:effectLst/>
         </p:spPr>
         <p:style>
           <a:lnRef idx="1">
@@ -21693,51 +22595,62 @@
           </a:fontRef>
         </p:style>
         <p:txBody>
-          <a:bodyPr rtlCol="0" anchor="ctr" lIns="0" rIns="0" tIns="0" bIns="0"/>
+          <a:bodyPr rtlCol="0" anchor="ctr" wrap="square" lIns="109728" rIns="109728" tIns="54864" bIns="54864"/>
           <a:lstStyle/>
           <a:p>
             <a:pPr algn="ctr">
               <a:spcAft>
-                <a:spcPts val="0"/>
-              </a:spcAft>
-            </a:pPr>
-            <a:r>
-              <a:rPr sz="2000" b="1">
+                <a:spcPts val="200"/>
+              </a:spcAft>
+            </a:pPr>
+            <a:r>
+              <a:rPr sz="1500" b="1">
                 <a:solidFill>
                   <a:srgbClr val="FFFFFF"/>
                 </a:solidFill>
                 <a:latin typeface="Arial"/>
               </a:rPr>
-              <a:t>1</a:t>
-            </a:r>
-          </a:p>
-        </p:txBody>
-      </p:sp>
-      <p:sp>
-        <p:nvSpPr>
-          <p:cNvPr id="9" name="Rounded Rectangle 8"/>
+              <a:t>5  BRIEF</a:t>
+            </a:r>
+          </a:p>
+          <a:p>
+            <a:pPr algn="ctr">
+              <a:spcAft>
+                <a:spcPts val="0"/>
+              </a:spcAft>
+            </a:pPr>
+            <a:r>
+              <a:rPr sz="1100" b="0">
+                <a:solidFill>
+                  <a:srgbClr val="FFFFFF"/>
+                </a:solidFill>
+                <a:latin typeface="Arial"/>
+              </a:rPr>
+              <a:t>next agent reads what worked</a:t>
+            </a:r>
+          </a:p>
+        </p:txBody>
+      </p:sp>
+      <p:sp>
+        <p:nvSpPr>
+          <p:cNvPr id="8" name="Right Arrow 7"/>
           <p:cNvSpPr/>
           <p:nvPr/>
         </p:nvSpPr>
         <p:spPr>
           <a:xfrm>
-            <a:off x="4407408" y="3611880"/>
-            <a:ext cx="3566160" cy="1828800"/>
-          </a:xfrm>
-          <a:prstGeom prst="roundRect">
-            <a:avLst>
-              <a:gd name="adj" fmla="val 6000"/>
-            </a:avLst>
-          </a:prstGeom>
-          <a:solidFill>
-            <a:srgbClr val="FFFFFF"/>
-          </a:solidFill>
-          <a:ln w="12700">
-            <a:solidFill>
-              <a:srgbClr val="E08A00"/>
-            </a:solidFill>
+            <a:off x="7635240" y="1600200"/>
+            <a:ext cx="502920" cy="411480"/>
+          </a:xfrm>
+          <a:prstGeom prst="rightArrow">
+            <a:avLst/>
+          </a:prstGeom>
+          <a:solidFill>
+            <a:srgbClr val="595959"/>
+          </a:solidFill>
+          <a:ln>
+            <a:noFill/>
           </a:ln>
-          <a:effectLst/>
         </p:spPr>
         <p:style>
           <a:lnRef idx="1">
@@ -21754,58 +22667,29 @@
           </a:fontRef>
         </p:style>
         <p:txBody>
-          <a:bodyPr rtlCol="0" anchor="ctr" wrap="square" lIns="1005840" rIns="109728" tIns="54864" bIns="54864"/>
-          <a:lstStyle/>
-          <a:p>
-            <a:pPr algn="l">
-              <a:spcAft>
-                <a:spcPts val="300"/>
-              </a:spcAft>
-            </a:pPr>
-            <a:r>
-              <a:rPr sz="1600" b="1">
-                <a:solidFill>
-                  <a:srgbClr val="E08A00"/>
-                </a:solidFill>
-                <a:latin typeface="Arial"/>
-              </a:rPr>
-              <a:t>Preferred call time</a:t>
-            </a:r>
-          </a:p>
-          <a:p>
-            <a:pPr algn="l">
-              <a:spcAft>
-                <a:spcPts val="0"/>
-              </a:spcAft>
-            </a:pPr>
-            <a:r>
-              <a:rPr sz="1300" b="0">
-                <a:solidFill>
-                  <a:srgbClr val="262626"/>
-                </a:solidFill>
-                <a:latin typeface="Arial"/>
-              </a:rPr>
-              <a:t>More calls answered</a:t>
-            </a:r>
-          </a:p>
-        </p:txBody>
-      </p:sp>
-      <p:sp>
-        <p:nvSpPr>
-          <p:cNvPr id="10" name="Oval 9"/>
+          <a:bodyPr rtlCol="0" anchor="ctr"/>
+          <a:lstStyle/>
+          <a:p>
+            <a:pPr algn="ctr"/>
+          </a:p>
+        </p:txBody>
+      </p:sp>
+      <p:sp>
+        <p:nvSpPr>
+          <p:cNvPr id="9" name="Down Arrow 8"/>
           <p:cNvSpPr/>
           <p:nvPr/>
         </p:nvSpPr>
         <p:spPr>
           <a:xfrm>
-            <a:off x="4590288" y="3794760"/>
-            <a:ext cx="640080" cy="640080"/>
-          </a:xfrm>
-          <a:prstGeom prst="ellipse">
+            <a:off x="9326880" y="3474720"/>
+            <a:ext cx="411480" cy="640080"/>
+          </a:xfrm>
+          <a:prstGeom prst="downArrow">
             <a:avLst/>
           </a:prstGeom>
           <a:solidFill>
-            <a:srgbClr val="E08A00"/>
+            <a:srgbClr val="595959"/>
           </a:solidFill>
           <a:ln>
             <a:noFill/>
@@ -21826,51 +22710,33 @@
           </a:fontRef>
         </p:style>
         <p:txBody>
-          <a:bodyPr rtlCol="0" anchor="ctr" lIns="0" rIns="0" tIns="0" bIns="0"/>
-          <a:lstStyle/>
-          <a:p>
-            <a:pPr algn="ctr">
-              <a:spcAft>
-                <a:spcPts val="0"/>
-              </a:spcAft>
-            </a:pPr>
-            <a:r>
-              <a:rPr sz="2000" b="1">
-                <a:solidFill>
-                  <a:srgbClr val="FFFFFF"/>
-                </a:solidFill>
-                <a:latin typeface="Arial"/>
-              </a:rPr>
-              <a:t>2</a:t>
-            </a:r>
-          </a:p>
-        </p:txBody>
-      </p:sp>
-      <p:sp>
-        <p:nvSpPr>
-          <p:cNvPr id="11" name="Rounded Rectangle 10"/>
+          <a:bodyPr rtlCol="0" anchor="ctr"/>
+          <a:lstStyle/>
+          <a:p>
+            <a:pPr algn="ctr"/>
+          </a:p>
+        </p:txBody>
+      </p:sp>
+      <p:sp>
+        <p:nvSpPr>
+          <p:cNvPr id="10" name="Left Arrow 9"/>
           <p:cNvSpPr/>
           <p:nvPr/>
         </p:nvSpPr>
         <p:spPr>
           <a:xfrm>
-            <a:off x="8247888" y="3611880"/>
-            <a:ext cx="3566160" cy="1828800"/>
-          </a:xfrm>
-          <a:prstGeom prst="roundRect">
-            <a:avLst>
-              <a:gd name="adj" fmla="val 6000"/>
-            </a:avLst>
-          </a:prstGeom>
-          <a:solidFill>
-            <a:srgbClr val="FFFFFF"/>
-          </a:solidFill>
-          <a:ln w="12700">
-            <a:solidFill>
-              <a:srgbClr val="5B3E96"/>
-            </a:solidFill>
+            <a:off x="5029200" y="4480560"/>
+            <a:ext cx="2286000" cy="411480"/>
+          </a:xfrm>
+          <a:prstGeom prst="leftArrow">
+            <a:avLst/>
+          </a:prstGeom>
+          <a:solidFill>
+            <a:srgbClr val="595959"/>
+          </a:solidFill>
+          <a:ln>
+            <a:noFill/>
           </a:ln>
-          <a:effectLst/>
         </p:spPr>
         <p:style>
           <a:lnRef idx="1">
@@ -21887,58 +22753,29 @@
           </a:fontRef>
         </p:style>
         <p:txBody>
-          <a:bodyPr rtlCol="0" anchor="ctr" wrap="square" lIns="1005840" rIns="109728" tIns="54864" bIns="54864"/>
-          <a:lstStyle/>
-          <a:p>
-            <a:pPr algn="l">
-              <a:spcAft>
-                <a:spcPts val="300"/>
-              </a:spcAft>
-            </a:pPr>
-            <a:r>
-              <a:rPr sz="1600" b="1">
-                <a:solidFill>
-                  <a:srgbClr val="5B3E96"/>
-                </a:solidFill>
-                <a:latin typeface="Arial"/>
-              </a:rPr>
-              <a:t>Preferred language</a:t>
-            </a:r>
-          </a:p>
-          <a:p>
-            <a:pPr algn="l">
-              <a:spcAft>
-                <a:spcPts val="0"/>
-              </a:spcAft>
-            </a:pPr>
-            <a:r>
-              <a:rPr sz="1300" b="0">
-                <a:solidFill>
-                  <a:srgbClr val="262626"/>
-                </a:solidFill>
-                <a:latin typeface="Arial"/>
-              </a:rPr>
-              <a:t>Suggested from the seller's data</a:t>
-            </a:r>
-          </a:p>
-        </p:txBody>
-      </p:sp>
-      <p:sp>
-        <p:nvSpPr>
-          <p:cNvPr id="12" name="Oval 11"/>
+          <a:bodyPr rtlCol="0" anchor="ctr"/>
+          <a:lstStyle/>
+          <a:p>
+            <a:pPr algn="ctr"/>
+          </a:p>
+        </p:txBody>
+      </p:sp>
+      <p:sp>
+        <p:nvSpPr>
+          <p:cNvPr id="11" name="Up Arrow 10"/>
           <p:cNvSpPr/>
           <p:nvPr/>
         </p:nvSpPr>
         <p:spPr>
           <a:xfrm>
-            <a:off x="8430767" y="3794760"/>
-            <a:ext cx="640080" cy="640080"/>
-          </a:xfrm>
-          <a:prstGeom prst="ellipse">
+            <a:off x="2377440" y="3474720"/>
+            <a:ext cx="411480" cy="640080"/>
+          </a:xfrm>
+          <a:prstGeom prst="upArrow">
             <a:avLst/>
           </a:prstGeom>
           <a:solidFill>
-            <a:srgbClr val="5B3E96"/>
+            <a:srgbClr val="595959"/>
           </a:solidFill>
           <a:ln>
             <a:noFill/>
@@ -21959,6 +22796,92 @@
           </a:fontRef>
         </p:style>
         <p:txBody>
+          <a:bodyPr rtlCol="0" anchor="ctr"/>
+          <a:lstStyle/>
+          <a:p>
+            <a:pPr algn="ctr"/>
+          </a:p>
+        </p:txBody>
+      </p:sp>
+      <p:sp>
+        <p:nvSpPr>
+          <p:cNvPr id="12" name="Right Arrow 11"/>
+          <p:cNvSpPr/>
+          <p:nvPr/>
+        </p:nvSpPr>
+        <p:spPr>
+          <a:xfrm>
+            <a:off x="3931920" y="1600200"/>
+            <a:ext cx="731520" cy="411480"/>
+          </a:xfrm>
+          <a:prstGeom prst="rightArrow">
+            <a:avLst/>
+          </a:prstGeom>
+          <a:solidFill>
+            <a:srgbClr val="595959"/>
+          </a:solidFill>
+          <a:ln>
+            <a:noFill/>
+          </a:ln>
+        </p:spPr>
+        <p:style>
+          <a:lnRef idx="1">
+            <a:schemeClr val="accent1"/>
+          </a:lnRef>
+          <a:fillRef idx="3">
+            <a:schemeClr val="accent1"/>
+          </a:fillRef>
+          <a:effectRef idx="2">
+            <a:schemeClr val="accent1"/>
+          </a:effectRef>
+          <a:fontRef idx="minor">
+            <a:schemeClr val="lt1"/>
+          </a:fontRef>
+        </p:style>
+        <p:txBody>
+          <a:bodyPr rtlCol="0" anchor="ctr"/>
+          <a:lstStyle/>
+          <a:p>
+            <a:pPr algn="ctr"/>
+          </a:p>
+        </p:txBody>
+      </p:sp>
+      <p:sp>
+        <p:nvSpPr>
+          <p:cNvPr id="13" name="Oval 12"/>
+          <p:cNvSpPr/>
+          <p:nvPr/>
+        </p:nvSpPr>
+        <p:spPr>
+          <a:xfrm>
+            <a:off x="4846320" y="2468880"/>
+            <a:ext cx="1828800" cy="1828800"/>
+          </a:xfrm>
+          <a:prstGeom prst="ellipse">
+            <a:avLst/>
+          </a:prstGeom>
+          <a:solidFill>
+            <a:srgbClr val="EEF2F8"/>
+          </a:solidFill>
+          <a:ln>
+            <a:noFill/>
+          </a:ln>
+        </p:spPr>
+        <p:style>
+          <a:lnRef idx="1">
+            <a:schemeClr val="accent1"/>
+          </a:lnRef>
+          <a:fillRef idx="3">
+            <a:schemeClr val="accent1"/>
+          </a:fillRef>
+          <a:effectRef idx="2">
+            <a:schemeClr val="accent1"/>
+          </a:effectRef>
+          <a:fontRef idx="minor">
+            <a:schemeClr val="lt1"/>
+          </a:fontRef>
+        </p:style>
+        <p:txBody>
           <a:bodyPr rtlCol="0" anchor="ctr" lIns="0" rIns="0" tIns="0" bIns="0"/>
           <a:lstStyle/>
           <a:p>
@@ -21968,13 +22891,74 @@
               </a:spcAft>
             </a:pPr>
             <a:r>
-              <a:rPr sz="2000" b="1">
-                <a:solidFill>
-                  <a:srgbClr val="FFFFFF"/>
-                </a:solidFill>
-                <a:latin typeface="Arial"/>
-              </a:rPr>
-              <a:t>3</a:t>
+              <a:rPr sz="1300" b="1">
+                <a:solidFill>
+                  <a:srgbClr val="002060"/>
+                </a:solidFill>
+                <a:latin typeface="Arial"/>
+              </a:rPr>
+              <a:t>The agent decides again, with more evidence</a:t>
+            </a:r>
+          </a:p>
+        </p:txBody>
+      </p:sp>
+      <p:sp>
+        <p:nvSpPr>
+          <p:cNvPr id="14" name="Rounded Rectangle 13"/>
+          <p:cNvSpPr/>
+          <p:nvPr/>
+        </p:nvSpPr>
+        <p:spPr>
+          <a:xfrm>
+            <a:off x="502920" y="5440680"/>
+            <a:ext cx="11338560" cy="640080"/>
+          </a:xfrm>
+          <a:prstGeom prst="roundRect">
+            <a:avLst>
+              <a:gd name="adj" fmla="val 30000"/>
+            </a:avLst>
+          </a:prstGeom>
+          <a:solidFill>
+            <a:srgbClr val="FFFFFF"/>
+          </a:solidFill>
+          <a:ln w="12700">
+            <a:solidFill>
+              <a:srgbClr val="002060"/>
+            </a:solidFill>
+          </a:ln>
+          <a:effectLst/>
+        </p:spPr>
+        <p:style>
+          <a:lnRef idx="1">
+            <a:schemeClr val="accent1"/>
+          </a:lnRef>
+          <a:fillRef idx="3">
+            <a:schemeClr val="accent1"/>
+          </a:fillRef>
+          <a:effectRef idx="2">
+            <a:schemeClr val="accent1"/>
+          </a:effectRef>
+          <a:fontRef idx="minor">
+            <a:schemeClr val="lt1"/>
+          </a:fontRef>
+        </p:style>
+        <p:txBody>
+          <a:bodyPr rtlCol="0" anchor="ctr" wrap="square" lIns="109728" rIns="109728" tIns="54864" bIns="54864"/>
+          <a:lstStyle/>
+          <a:p>
+            <a:pPr algn="ctr">
+              <a:spcAft>
+                <a:spcPts val="0"/>
+              </a:spcAft>
+            </a:pPr>
+            <a:r>
+              <a:rPr sz="1200" b="1">
+                <a:solidFill>
+                  <a:srgbClr val="002060"/>
+                </a:solidFill>
+                <a:latin typeface="Arial"/>
+              </a:rPr>
+              <a:t>No retraining and no hand-tuning: the scoreboards move on every call. A person approves any change to the library or the keyword tool</a:t>
             </a:r>
           </a:p>
         </p:txBody>
@@ -21988,6 +22972,2369 @@
 </file>
 
 <file path=ppt/slides/slide21.xml><?xml version="1.0" encoding="utf-8"?>
+<p:sld xmlns:a="http://schemas.openxmlformats.org/drawingml/2006/main" xmlns:p="http://schemas.openxmlformats.org/presentationml/2006/main" xmlns:r="http://schemas.openxmlformats.org/officeDocument/2006/relationships">
+  <p:cSld>
+    <p:spTree>
+      <p:nvGrpSpPr>
+        <p:cNvPr id="1" name=""/>
+        <p:cNvGrpSpPr/>
+        <p:nvPr/>
+      </p:nvGrpSpPr>
+      <p:grpSpPr/>
+      <p:sp>
+        <p:nvSpPr>
+          <p:cNvPr id="2" name="Title 1"/>
+          <p:cNvSpPr>
+            <a:spLocks noGrp="1"/>
+          </p:cNvSpPr>
+          <p:nvPr>
+            <p:ph type="title"/>
+          </p:nvPr>
+        </p:nvSpPr>
+        <p:spPr/>
+        <p:txBody>
+          <a:bodyPr/>
+          <a:lstStyle/>
+          <a:p>
+            <a:r>
+              <a:t>What The Loop Learns</a:t>
+            </a:r>
+          </a:p>
+        </p:txBody>
+      </p:sp>
+      <p:sp>
+        <p:nvSpPr>
+          <p:cNvPr id="3" name="Oval 2"/>
+          <p:cNvSpPr/>
+          <p:nvPr/>
+        </p:nvSpPr>
+        <p:spPr>
+          <a:xfrm>
+            <a:off x="4892040" y="2606040"/>
+            <a:ext cx="2377440" cy="2377440"/>
+          </a:xfrm>
+          <a:prstGeom prst="ellipse">
+            <a:avLst/>
+          </a:prstGeom>
+          <a:solidFill>
+            <a:srgbClr val="002060"/>
+          </a:solidFill>
+          <a:ln>
+            <a:noFill/>
+          </a:ln>
+        </p:spPr>
+        <p:style>
+          <a:lnRef idx="1">
+            <a:schemeClr val="accent1"/>
+          </a:lnRef>
+          <a:fillRef idx="3">
+            <a:schemeClr val="accent1"/>
+          </a:fillRef>
+          <a:effectRef idx="2">
+            <a:schemeClr val="accent1"/>
+          </a:effectRef>
+          <a:fontRef idx="minor">
+            <a:schemeClr val="lt1"/>
+          </a:fontRef>
+        </p:style>
+        <p:txBody>
+          <a:bodyPr rtlCol="0" anchor="ctr" lIns="0" rIns="0" tIns="0" bIns="0"/>
+          <a:lstStyle/>
+          <a:p>
+            <a:pPr algn="ctr">
+              <a:spcAft>
+                <a:spcPts val="0"/>
+              </a:spcAft>
+            </a:pPr>
+            <a:r>
+              <a:rPr sz="1800" b="1">
+                <a:solidFill>
+                  <a:srgbClr val="FFFFFF"/>
+                </a:solidFill>
+                <a:latin typeface="Arial"/>
+              </a:rPr>
+              <a:t>Meeting fixed?</a:t>
+            </a:r>
+          </a:p>
+        </p:txBody>
+      </p:sp>
+      <p:sp>
+        <p:nvSpPr>
+          <p:cNvPr id="4" name="Rounded Rectangle 3"/>
+          <p:cNvSpPr/>
+          <p:nvPr/>
+        </p:nvSpPr>
+        <p:spPr>
+          <a:xfrm>
+            <a:off x="566928" y="1417320"/>
+            <a:ext cx="3566160" cy="1097280"/>
+          </a:xfrm>
+          <a:prstGeom prst="roundRect">
+            <a:avLst>
+              <a:gd name="adj" fmla="val 6000"/>
+            </a:avLst>
+          </a:prstGeom>
+          <a:solidFill>
+            <a:srgbClr val="C00000"/>
+          </a:solidFill>
+          <a:ln>
+            <a:noFill/>
+          </a:ln>
+          <a:effectLst/>
+        </p:spPr>
+        <p:style>
+          <a:lnRef idx="1">
+            <a:schemeClr val="accent1"/>
+          </a:lnRef>
+          <a:fillRef idx="3">
+            <a:schemeClr val="accent1"/>
+          </a:fillRef>
+          <a:effectRef idx="2">
+            <a:schemeClr val="accent1"/>
+          </a:effectRef>
+          <a:fontRef idx="minor">
+            <a:schemeClr val="lt1"/>
+          </a:fontRef>
+        </p:style>
+        <p:txBody>
+          <a:bodyPr rtlCol="0" anchor="ctr" wrap="square" lIns="109728" rIns="109728" tIns="54864" bIns="54864"/>
+          <a:lstStyle/>
+          <a:p>
+            <a:pPr algn="ctr">
+              <a:spcAft>
+                <a:spcPts val="200"/>
+              </a:spcAft>
+            </a:pPr>
+            <a:r>
+              <a:rPr sz="1500" b="1">
+                <a:solidFill>
+                  <a:srgbClr val="FFFFFF"/>
+                </a:solidFill>
+                <a:latin typeface="Arial"/>
+              </a:rPr>
+              <a:t>Which persona</a:t>
+            </a:r>
+          </a:p>
+          <a:p>
+            <a:pPr algn="ctr">
+              <a:spcAft>
+                <a:spcPts val="0"/>
+              </a:spcAft>
+            </a:pPr>
+            <a:r>
+              <a:rPr sz="1100" b="0">
+                <a:solidFill>
+                  <a:srgbClr val="FFFFFF"/>
+                </a:solidFill>
+                <a:latin typeface="Arial"/>
+              </a:rPr>
+              <a:t>per seller segment</a:t>
+            </a:r>
+          </a:p>
+        </p:txBody>
+      </p:sp>
+      <p:sp>
+        <p:nvSpPr>
+          <p:cNvPr id="5" name="Rounded Rectangle 4"/>
+          <p:cNvSpPr/>
+          <p:nvPr/>
+        </p:nvSpPr>
+        <p:spPr>
+          <a:xfrm>
+            <a:off x="566928" y="2743200"/>
+            <a:ext cx="3566160" cy="1097280"/>
+          </a:xfrm>
+          <a:prstGeom prst="roundRect">
+            <a:avLst>
+              <a:gd name="adj" fmla="val 6000"/>
+            </a:avLst>
+          </a:prstGeom>
+          <a:solidFill>
+            <a:srgbClr val="2EA896"/>
+          </a:solidFill>
+          <a:ln>
+            <a:noFill/>
+          </a:ln>
+          <a:effectLst/>
+        </p:spPr>
+        <p:style>
+          <a:lnRef idx="1">
+            <a:schemeClr val="accent1"/>
+          </a:lnRef>
+          <a:fillRef idx="3">
+            <a:schemeClr val="accent1"/>
+          </a:fillRef>
+          <a:effectRef idx="2">
+            <a:schemeClr val="accent1"/>
+          </a:effectRef>
+          <a:fontRef idx="minor">
+            <a:schemeClr val="lt1"/>
+          </a:fontRef>
+        </p:style>
+        <p:txBody>
+          <a:bodyPr rtlCol="0" anchor="ctr" wrap="square" lIns="109728" rIns="109728" tIns="54864" bIns="54864"/>
+          <a:lstStyle/>
+          <a:p>
+            <a:pPr algn="ctr">
+              <a:spcAft>
+                <a:spcPts val="200"/>
+              </a:spcAft>
+            </a:pPr>
+            <a:r>
+              <a:rPr sz="1500" b="1">
+                <a:solidFill>
+                  <a:srgbClr val="FFFFFF"/>
+                </a:solidFill>
+                <a:latin typeface="Arial"/>
+              </a:rPr>
+              <a:t>Which hook</a:t>
+            </a:r>
+          </a:p>
+          <a:p>
+            <a:pPr algn="ctr">
+              <a:spcAft>
+                <a:spcPts val="0"/>
+              </a:spcAft>
+            </a:pPr>
+            <a:r>
+              <a:rPr sz="1100" b="0">
+                <a:solidFill>
+                  <a:srgbClr val="FFFFFF"/>
+                </a:solidFill>
+                <a:latin typeface="Arial"/>
+              </a:rPr>
+              <a:t>per seller segment</a:t>
+            </a:r>
+          </a:p>
+        </p:txBody>
+      </p:sp>
+      <p:sp>
+        <p:nvSpPr>
+          <p:cNvPr id="6" name="Rounded Rectangle 5"/>
+          <p:cNvSpPr/>
+          <p:nvPr/>
+        </p:nvSpPr>
+        <p:spPr>
+          <a:xfrm>
+            <a:off x="566928" y="4069080"/>
+            <a:ext cx="3566160" cy="1097280"/>
+          </a:xfrm>
+          <a:prstGeom prst="roundRect">
+            <a:avLst>
+              <a:gd name="adj" fmla="val 6000"/>
+            </a:avLst>
+          </a:prstGeom>
+          <a:solidFill>
+            <a:srgbClr val="5B3E96"/>
+          </a:solidFill>
+          <a:ln>
+            <a:noFill/>
+          </a:ln>
+          <a:effectLst/>
+        </p:spPr>
+        <p:style>
+          <a:lnRef idx="1">
+            <a:schemeClr val="accent1"/>
+          </a:lnRef>
+          <a:fillRef idx="3">
+            <a:schemeClr val="accent1"/>
+          </a:fillRef>
+          <a:effectRef idx="2">
+            <a:schemeClr val="accent1"/>
+          </a:effectRef>
+          <a:fontRef idx="minor">
+            <a:schemeClr val="lt1"/>
+          </a:fontRef>
+        </p:style>
+        <p:txBody>
+          <a:bodyPr rtlCol="0" anchor="ctr" wrap="square" lIns="109728" rIns="109728" tIns="54864" bIns="54864"/>
+          <a:lstStyle/>
+          <a:p>
+            <a:pPr algn="ctr">
+              <a:spcAft>
+                <a:spcPts val="200"/>
+              </a:spcAft>
+            </a:pPr>
+            <a:r>
+              <a:rPr sz="1500" b="1">
+                <a:solidFill>
+                  <a:srgbClr val="FFFFFF"/>
+                </a:solidFill>
+                <a:latin typeface="Arial"/>
+              </a:rPr>
+              <a:t>Which field values</a:t>
+            </a:r>
+          </a:p>
+          <a:p>
+            <a:pPr algn="ctr">
+              <a:spcAft>
+                <a:spcPts val="0"/>
+              </a:spcAft>
+            </a:pPr>
+            <a:r>
+              <a:rPr sz="1100" b="0">
+                <a:solidFill>
+                  <a:srgbClr val="FFFFFF"/>
+                </a:solidFill>
+                <a:latin typeface="Arial"/>
+              </a:rPr>
+              <a:t>pace, language, empathy, words</a:t>
+            </a:r>
+          </a:p>
+        </p:txBody>
+      </p:sp>
+      <p:sp>
+        <p:nvSpPr>
+          <p:cNvPr id="7" name="Rounded Rectangle 6"/>
+          <p:cNvSpPr/>
+          <p:nvPr/>
+        </p:nvSpPr>
+        <p:spPr>
+          <a:xfrm>
+            <a:off x="8138160" y="1417320"/>
+            <a:ext cx="3566160" cy="1097280"/>
+          </a:xfrm>
+          <a:prstGeom prst="roundRect">
+            <a:avLst>
+              <a:gd name="adj" fmla="val 6000"/>
+            </a:avLst>
+          </a:prstGeom>
+          <a:solidFill>
+            <a:srgbClr val="002060"/>
+          </a:solidFill>
+          <a:ln>
+            <a:noFill/>
+          </a:ln>
+          <a:effectLst/>
+        </p:spPr>
+        <p:style>
+          <a:lnRef idx="1">
+            <a:schemeClr val="accent1"/>
+          </a:lnRef>
+          <a:fillRef idx="3">
+            <a:schemeClr val="accent1"/>
+          </a:fillRef>
+          <a:effectRef idx="2">
+            <a:schemeClr val="accent1"/>
+          </a:effectRef>
+          <a:fontRef idx="minor">
+            <a:schemeClr val="lt1"/>
+          </a:fontRef>
+        </p:style>
+        <p:txBody>
+          <a:bodyPr rtlCol="0" anchor="ctr" wrap="square" lIns="109728" rIns="109728" tIns="54864" bIns="54864"/>
+          <a:lstStyle/>
+          <a:p>
+            <a:pPr algn="ctr">
+              <a:spcAft>
+                <a:spcPts val="200"/>
+              </a:spcAft>
+            </a:pPr>
+            <a:r>
+              <a:rPr sz="1500" b="1">
+                <a:solidFill>
+                  <a:srgbClr val="FFFFFF"/>
+                </a:solidFill>
+                <a:latin typeface="Arial"/>
+              </a:rPr>
+              <a:t>Which reason type</a:t>
+            </a:r>
+          </a:p>
+          <a:p>
+            <a:pPr algn="ctr">
+              <a:spcAft>
+                <a:spcPts val="0"/>
+              </a:spcAft>
+            </a:pPr>
+            <a:r>
+              <a:rPr sz="1100" b="0">
+                <a:solidFill>
+                  <a:srgbClr val="FFFFFF"/>
+                </a:solidFill>
+                <a:latin typeface="Arial"/>
+              </a:rPr>
+              <a:t>evidence beats default?</a:t>
+            </a:r>
+          </a:p>
+        </p:txBody>
+      </p:sp>
+      <p:sp>
+        <p:nvSpPr>
+          <p:cNvPr id="8" name="Rounded Rectangle 7"/>
+          <p:cNvSpPr/>
+          <p:nvPr/>
+        </p:nvSpPr>
+        <p:spPr>
+          <a:xfrm>
+            <a:off x="8138160" y="2743200"/>
+            <a:ext cx="3566160" cy="1097280"/>
+          </a:xfrm>
+          <a:prstGeom prst="roundRect">
+            <a:avLst>
+              <a:gd name="adj" fmla="val 6000"/>
+            </a:avLst>
+          </a:prstGeom>
+          <a:solidFill>
+            <a:srgbClr val="E08A00"/>
+          </a:solidFill>
+          <a:ln>
+            <a:noFill/>
+          </a:ln>
+          <a:effectLst/>
+        </p:spPr>
+        <p:style>
+          <a:lnRef idx="1">
+            <a:schemeClr val="accent1"/>
+          </a:lnRef>
+          <a:fillRef idx="3">
+            <a:schemeClr val="accent1"/>
+          </a:fillRef>
+          <a:effectRef idx="2">
+            <a:schemeClr val="accent1"/>
+          </a:effectRef>
+          <a:fontRef idx="minor">
+            <a:schemeClr val="lt1"/>
+          </a:fontRef>
+        </p:style>
+        <p:txBody>
+          <a:bodyPr rtlCol="0" anchor="ctr" wrap="square" lIns="109728" rIns="109728" tIns="54864" bIns="54864"/>
+          <a:lstStyle/>
+          <a:p>
+            <a:pPr algn="ctr">
+              <a:spcAft>
+                <a:spcPts val="200"/>
+              </a:spcAft>
+            </a:pPr>
+            <a:r>
+              <a:rPr sz="1500" b="1">
+                <a:solidFill>
+                  <a:srgbClr val="FFFFFF"/>
+                </a:solidFill>
+                <a:latin typeface="Arial"/>
+              </a:rPr>
+              <a:t>Which start rule</a:t>
+            </a:r>
+          </a:p>
+          <a:p>
+            <a:pPr algn="ctr">
+              <a:spcAft>
+                <a:spcPts val="0"/>
+              </a:spcAft>
+            </a:pPr>
+            <a:r>
+              <a:rPr sz="1100" b="0">
+                <a:solidFill>
+                  <a:srgbClr val="FFFFFF"/>
+                </a:solidFill>
+                <a:latin typeface="Arial"/>
+              </a:rPr>
+              <a:t>do our defaults help?</a:t>
+            </a:r>
+          </a:p>
+        </p:txBody>
+      </p:sp>
+      <p:sp>
+        <p:nvSpPr>
+          <p:cNvPr id="9" name="Rounded Rectangle 8"/>
+          <p:cNvSpPr/>
+          <p:nvPr/>
+        </p:nvSpPr>
+        <p:spPr>
+          <a:xfrm>
+            <a:off x="8138160" y="4069080"/>
+            <a:ext cx="3566160" cy="1097280"/>
+          </a:xfrm>
+          <a:prstGeom prst="roundRect">
+            <a:avLst>
+              <a:gd name="adj" fmla="val 6000"/>
+            </a:avLst>
+          </a:prstGeom>
+          <a:solidFill>
+            <a:srgbClr val="1B6B5E"/>
+          </a:solidFill>
+          <a:ln>
+            <a:noFill/>
+          </a:ln>
+          <a:effectLst/>
+        </p:spPr>
+        <p:style>
+          <a:lnRef idx="1">
+            <a:schemeClr val="accent1"/>
+          </a:lnRef>
+          <a:fillRef idx="3">
+            <a:schemeClr val="accent1"/>
+          </a:fillRef>
+          <a:effectRef idx="2">
+            <a:schemeClr val="accent1"/>
+          </a:effectRef>
+          <a:fontRef idx="minor">
+            <a:schemeClr val="lt1"/>
+          </a:fontRef>
+        </p:style>
+        <p:txBody>
+          <a:bodyPr rtlCol="0" anchor="ctr" wrap="square" lIns="109728" rIns="109728" tIns="54864" bIns="54864"/>
+          <a:lstStyle/>
+          <a:p>
+            <a:pPr algn="ctr">
+              <a:spcAft>
+                <a:spcPts val="200"/>
+              </a:spcAft>
+            </a:pPr>
+            <a:r>
+              <a:rPr sz="1500" b="1">
+                <a:solidFill>
+                  <a:srgbClr val="FFFFFF"/>
+                </a:solidFill>
+                <a:latin typeface="Arial"/>
+              </a:rPr>
+              <a:t>Real uplift</a:t>
+            </a:r>
+          </a:p>
+          <a:p>
+            <a:pPr algn="ctr">
+              <a:spcAft>
+                <a:spcPts val="0"/>
+              </a:spcAft>
+            </a:pPr>
+            <a:r>
+              <a:rPr sz="1100" b="0">
+                <a:solidFill>
+                  <a:srgbClr val="FFFFFF"/>
+                </a:solidFill>
+                <a:latin typeface="Arial"/>
+              </a:rPr>
+              <a:t>against a control persona</a:t>
+            </a:r>
+          </a:p>
+        </p:txBody>
+      </p:sp>
+      <p:sp>
+        <p:nvSpPr>
+          <p:cNvPr id="10" name="Left Arrow 9"/>
+          <p:cNvSpPr/>
+          <p:nvPr/>
+        </p:nvSpPr>
+        <p:spPr>
+          <a:xfrm>
+            <a:off x="4206240" y="3108960"/>
+            <a:ext cx="640080" cy="365760"/>
+          </a:xfrm>
+          <a:prstGeom prst="leftArrow">
+            <a:avLst/>
+          </a:prstGeom>
+          <a:solidFill>
+            <a:srgbClr val="595959"/>
+          </a:solidFill>
+          <a:ln>
+            <a:noFill/>
+          </a:ln>
+        </p:spPr>
+        <p:style>
+          <a:lnRef idx="1">
+            <a:schemeClr val="accent1"/>
+          </a:lnRef>
+          <a:fillRef idx="3">
+            <a:schemeClr val="accent1"/>
+          </a:fillRef>
+          <a:effectRef idx="2">
+            <a:schemeClr val="accent1"/>
+          </a:effectRef>
+          <a:fontRef idx="minor">
+            <a:schemeClr val="lt1"/>
+          </a:fontRef>
+        </p:style>
+        <p:txBody>
+          <a:bodyPr rtlCol="0" anchor="ctr"/>
+          <a:lstStyle/>
+          <a:p>
+            <a:pPr algn="ctr"/>
+          </a:p>
+        </p:txBody>
+      </p:sp>
+      <p:sp>
+        <p:nvSpPr>
+          <p:cNvPr id="11" name="Right Arrow 10"/>
+          <p:cNvSpPr/>
+          <p:nvPr/>
+        </p:nvSpPr>
+        <p:spPr>
+          <a:xfrm>
+            <a:off x="7315200" y="3108960"/>
+            <a:ext cx="731520" cy="365760"/>
+          </a:xfrm>
+          <a:prstGeom prst="rightArrow">
+            <a:avLst/>
+          </a:prstGeom>
+          <a:solidFill>
+            <a:srgbClr val="595959"/>
+          </a:solidFill>
+          <a:ln>
+            <a:noFill/>
+          </a:ln>
+        </p:spPr>
+        <p:style>
+          <a:lnRef idx="1">
+            <a:schemeClr val="accent1"/>
+          </a:lnRef>
+          <a:fillRef idx="3">
+            <a:schemeClr val="accent1"/>
+          </a:fillRef>
+          <a:effectRef idx="2">
+            <a:schemeClr val="accent1"/>
+          </a:effectRef>
+          <a:fontRef idx="minor">
+            <a:schemeClr val="lt1"/>
+          </a:fontRef>
+        </p:style>
+        <p:txBody>
+          <a:bodyPr rtlCol="0" anchor="ctr"/>
+          <a:lstStyle/>
+          <a:p>
+            <a:pPr algn="ctr"/>
+          </a:p>
+        </p:txBody>
+      </p:sp>
+      <p:sp>
+        <p:nvSpPr>
+          <p:cNvPr id="12" name="Rounded Rectangle 11"/>
+          <p:cNvSpPr/>
+          <p:nvPr/>
+        </p:nvSpPr>
+        <p:spPr>
+          <a:xfrm>
+            <a:off x="502920" y="5440680"/>
+            <a:ext cx="11338560" cy="640080"/>
+          </a:xfrm>
+          <a:prstGeom prst="roundRect">
+            <a:avLst>
+              <a:gd name="adj" fmla="val 30000"/>
+            </a:avLst>
+          </a:prstGeom>
+          <a:solidFill>
+            <a:srgbClr val="EEF2F8"/>
+          </a:solidFill>
+          <a:ln w="12700">
+            <a:solidFill>
+              <a:srgbClr val="5B3E96"/>
+            </a:solidFill>
+          </a:ln>
+          <a:effectLst/>
+        </p:spPr>
+        <p:style>
+          <a:lnRef idx="1">
+            <a:schemeClr val="accent1"/>
+          </a:lnRef>
+          <a:fillRef idx="3">
+            <a:schemeClr val="accent1"/>
+          </a:fillRef>
+          <a:effectRef idx="2">
+            <a:schemeClr val="accent1"/>
+          </a:effectRef>
+          <a:fontRef idx="minor">
+            <a:schemeClr val="lt1"/>
+          </a:fontRef>
+        </p:style>
+        <p:txBody>
+          <a:bodyPr rtlCol="0" anchor="ctr" wrap="square" lIns="109728" rIns="109728" tIns="54864" bIns="54864"/>
+          <a:lstStyle/>
+          <a:p>
+            <a:pPr algn="ctr">
+              <a:spcAft>
+                <a:spcPts val="0"/>
+              </a:spcAft>
+            </a:pPr>
+            <a:r>
+              <a:rPr sz="1300" b="1">
+                <a:solidFill>
+                  <a:srgbClr val="5B3E96"/>
+                </a:solidFill>
+                <a:latin typeface="Arial"/>
+              </a:rPr>
+              <a:t>Every call credits the persona, the hook and each field the agent chose, with the reason it gave</a:t>
+            </a:r>
+          </a:p>
+        </p:txBody>
+      </p:sp>
+    </p:spTree>
+  </p:cSld>
+  <p:clrMapOvr>
+    <a:masterClrMapping/>
+  </p:clrMapOvr>
+</p:sld>
+</file>
+
+<file path=ppt/slides/slide22.xml><?xml version="1.0" encoding="utf-8"?>
+<p:sld xmlns:a="http://schemas.openxmlformats.org/drawingml/2006/main" xmlns:p="http://schemas.openxmlformats.org/presentationml/2006/main" xmlns:r="http://schemas.openxmlformats.org/officeDocument/2006/relationships">
+  <p:cSld>
+    <p:spTree>
+      <p:nvGrpSpPr>
+        <p:cNvPr id="1" name=""/>
+        <p:cNvGrpSpPr/>
+        <p:nvPr/>
+      </p:nvGrpSpPr>
+      <p:grpSpPr/>
+      <p:sp>
+        <p:nvSpPr>
+          <p:cNvPr id="2" name="Title 1"/>
+          <p:cNvSpPr>
+            <a:spLocks noGrp="1"/>
+          </p:cNvSpPr>
+          <p:nvPr>
+            <p:ph type="title"/>
+          </p:nvPr>
+        </p:nvSpPr>
+        <p:spPr/>
+        <p:txBody>
+          <a:bodyPr/>
+          <a:lstStyle/>
+          <a:p>
+            <a:r>
+              <a:t>Our Architecture</a:t>
+            </a:r>
+          </a:p>
+        </p:txBody>
+      </p:sp>
+      <p:sp>
+        <p:nvSpPr>
+          <p:cNvPr id="3" name="Rounded Rectangle 2"/>
+          <p:cNvSpPr/>
+          <p:nvPr/>
+        </p:nvSpPr>
+        <p:spPr>
+          <a:xfrm>
+            <a:off x="502920" y="1463040"/>
+            <a:ext cx="2514600" cy="1417320"/>
+          </a:xfrm>
+          <a:prstGeom prst="roundRect">
+            <a:avLst>
+              <a:gd name="adj" fmla="val 6000"/>
+            </a:avLst>
+          </a:prstGeom>
+          <a:solidFill>
+            <a:srgbClr val="002060"/>
+          </a:solidFill>
+          <a:ln>
+            <a:noFill/>
+          </a:ln>
+          <a:effectLst/>
+        </p:spPr>
+        <p:style>
+          <a:lnRef idx="1">
+            <a:schemeClr val="accent1"/>
+          </a:lnRef>
+          <a:fillRef idx="3">
+            <a:schemeClr val="accent1"/>
+          </a:fillRef>
+          <a:effectRef idx="2">
+            <a:schemeClr val="accent1"/>
+          </a:effectRef>
+          <a:fontRef idx="minor">
+            <a:schemeClr val="lt1"/>
+          </a:fontRef>
+        </p:style>
+        <p:txBody>
+          <a:bodyPr rtlCol="0" anchor="ctr" wrap="square" lIns="109728" rIns="109728" tIns="54864" bIns="54864"/>
+          <a:lstStyle/>
+          <a:p>
+            <a:pPr algn="l">
+              <a:spcAft>
+                <a:spcPts val="300"/>
+              </a:spcAft>
+            </a:pPr>
+            <a:r>
+              <a:rPr sz="1500" b="1">
+                <a:solidFill>
+                  <a:srgbClr val="FFFFFF"/>
+                </a:solidFill>
+                <a:latin typeface="Arial"/>
+              </a:rPr>
+              <a:t>Seller data</a:t>
+            </a:r>
+          </a:p>
+          <a:p>
+            <a:pPr algn="l">
+              <a:spcAft>
+                <a:spcPts val="0"/>
+              </a:spcAft>
+            </a:pPr>
+            <a:r>
+              <a:rPr sz="1200" b="0">
+                <a:solidFill>
+                  <a:srgbClr val="FFFFFF"/>
+                </a:solidFill>
+                <a:latin typeface="Arial"/>
+              </a:rPr>
+              <a:t>files, APIs, buy-lead database</a:t>
+            </a:r>
+          </a:p>
+        </p:txBody>
+      </p:sp>
+      <p:sp>
+        <p:nvSpPr>
+          <p:cNvPr id="4" name="Right Arrow 3"/>
+          <p:cNvSpPr/>
+          <p:nvPr/>
+        </p:nvSpPr>
+        <p:spPr>
+          <a:xfrm>
+            <a:off x="3044952" y="1965960"/>
+            <a:ext cx="347472" cy="365760"/>
+          </a:xfrm>
+          <a:prstGeom prst="rightArrow">
+            <a:avLst/>
+          </a:prstGeom>
+          <a:solidFill>
+            <a:srgbClr val="595959"/>
+          </a:solidFill>
+          <a:ln>
+            <a:noFill/>
+          </a:ln>
+        </p:spPr>
+        <p:style>
+          <a:lnRef idx="1">
+            <a:schemeClr val="accent1"/>
+          </a:lnRef>
+          <a:fillRef idx="3">
+            <a:schemeClr val="accent1"/>
+          </a:fillRef>
+          <a:effectRef idx="2">
+            <a:schemeClr val="accent1"/>
+          </a:effectRef>
+          <a:fontRef idx="minor">
+            <a:schemeClr val="lt1"/>
+          </a:fontRef>
+        </p:style>
+        <p:txBody>
+          <a:bodyPr rtlCol="0" anchor="ctr"/>
+          <a:lstStyle/>
+          <a:p>
+            <a:pPr algn="ctr"/>
+          </a:p>
+        </p:txBody>
+      </p:sp>
+      <p:sp>
+        <p:nvSpPr>
+          <p:cNvPr id="5" name="Rounded Rectangle 4"/>
+          <p:cNvSpPr/>
+          <p:nvPr/>
+        </p:nvSpPr>
+        <p:spPr>
+          <a:xfrm>
+            <a:off x="3429000" y="1463040"/>
+            <a:ext cx="2514600" cy="1417320"/>
+          </a:xfrm>
+          <a:prstGeom prst="roundRect">
+            <a:avLst>
+              <a:gd name="adj" fmla="val 6000"/>
+            </a:avLst>
+          </a:prstGeom>
+          <a:solidFill>
+            <a:srgbClr val="002060"/>
+          </a:solidFill>
+          <a:ln>
+            <a:noFill/>
+          </a:ln>
+          <a:effectLst/>
+        </p:spPr>
+        <p:style>
+          <a:lnRef idx="1">
+            <a:schemeClr val="accent1"/>
+          </a:lnRef>
+          <a:fillRef idx="3">
+            <a:schemeClr val="accent1"/>
+          </a:fillRef>
+          <a:effectRef idx="2">
+            <a:schemeClr val="accent1"/>
+          </a:effectRef>
+          <a:fontRef idx="minor">
+            <a:schemeClr val="lt1"/>
+          </a:fontRef>
+        </p:style>
+        <p:txBody>
+          <a:bodyPr rtlCol="0" anchor="ctr" wrap="square" lIns="109728" rIns="109728" tIns="54864" bIns="54864"/>
+          <a:lstStyle/>
+          <a:p>
+            <a:pPr algn="l">
+              <a:spcAft>
+                <a:spcPts val="300"/>
+              </a:spcAft>
+            </a:pPr>
+            <a:r>
+              <a:rPr sz="1500" b="1">
+                <a:solidFill>
+                  <a:srgbClr val="FFFFFF"/>
+                </a:solidFill>
+                <a:latin typeface="Arial"/>
+              </a:rPr>
+              <a:t>Context builder</a:t>
+            </a:r>
+          </a:p>
+          <a:p>
+            <a:pPr algn="l">
+              <a:spcAft>
+                <a:spcPts val="0"/>
+              </a:spcAft>
+            </a:pPr>
+            <a:r>
+              <a:rPr sz="1200" b="0">
+                <a:solidFill>
+                  <a:srgbClr val="FFFFFF"/>
+                </a:solidFill>
+                <a:latin typeface="Arial"/>
+              </a:rPr>
+              <a:t>one folder per seller</a:t>
+            </a:r>
+          </a:p>
+        </p:txBody>
+      </p:sp>
+      <p:sp>
+        <p:nvSpPr>
+          <p:cNvPr id="6" name="Right Arrow 5"/>
+          <p:cNvSpPr/>
+          <p:nvPr/>
+        </p:nvSpPr>
+        <p:spPr>
+          <a:xfrm>
+            <a:off x="5971031" y="1965960"/>
+            <a:ext cx="347472" cy="365760"/>
+          </a:xfrm>
+          <a:prstGeom prst="rightArrow">
+            <a:avLst/>
+          </a:prstGeom>
+          <a:solidFill>
+            <a:srgbClr val="595959"/>
+          </a:solidFill>
+          <a:ln>
+            <a:noFill/>
+          </a:ln>
+        </p:spPr>
+        <p:style>
+          <a:lnRef idx="1">
+            <a:schemeClr val="accent1"/>
+          </a:lnRef>
+          <a:fillRef idx="3">
+            <a:schemeClr val="accent1"/>
+          </a:fillRef>
+          <a:effectRef idx="2">
+            <a:schemeClr val="accent1"/>
+          </a:effectRef>
+          <a:fontRef idx="minor">
+            <a:schemeClr val="lt1"/>
+          </a:fontRef>
+        </p:style>
+        <p:txBody>
+          <a:bodyPr rtlCol="0" anchor="ctr"/>
+          <a:lstStyle/>
+          <a:p>
+            <a:pPr algn="ctr"/>
+          </a:p>
+        </p:txBody>
+      </p:sp>
+      <p:sp>
+        <p:nvSpPr>
+          <p:cNvPr id="7" name="Rounded Rectangle 6"/>
+          <p:cNvSpPr/>
+          <p:nvPr/>
+        </p:nvSpPr>
+        <p:spPr>
+          <a:xfrm>
+            <a:off x="6355080" y="1463040"/>
+            <a:ext cx="2514600" cy="1417320"/>
+          </a:xfrm>
+          <a:prstGeom prst="roundRect">
+            <a:avLst>
+              <a:gd name="adj" fmla="val 6000"/>
+            </a:avLst>
+          </a:prstGeom>
+          <a:solidFill>
+            <a:srgbClr val="002060"/>
+          </a:solidFill>
+          <a:ln>
+            <a:noFill/>
+          </a:ln>
+          <a:effectLst/>
+        </p:spPr>
+        <p:style>
+          <a:lnRef idx="1">
+            <a:schemeClr val="accent1"/>
+          </a:lnRef>
+          <a:fillRef idx="3">
+            <a:schemeClr val="accent1"/>
+          </a:fillRef>
+          <a:effectRef idx="2">
+            <a:schemeClr val="accent1"/>
+          </a:effectRef>
+          <a:fontRef idx="minor">
+            <a:schemeClr val="lt1"/>
+          </a:fontRef>
+        </p:style>
+        <p:txBody>
+          <a:bodyPr rtlCol="0" anchor="ctr" wrap="square" lIns="109728" rIns="109728" tIns="54864" bIns="54864"/>
+          <a:lstStyle/>
+          <a:p>
+            <a:pPr algn="l">
+              <a:spcAft>
+                <a:spcPts val="300"/>
+              </a:spcAft>
+            </a:pPr>
+            <a:r>
+              <a:rPr sz="1500" b="1">
+                <a:solidFill>
+                  <a:srgbClr val="FFFFFF"/>
+                </a:solidFill>
+                <a:latin typeface="Arial"/>
+              </a:rPr>
+              <a:t>Safe export</a:t>
+            </a:r>
+          </a:p>
+          <a:p>
+            <a:pPr algn="l">
+              <a:spcAft>
+                <a:spcPts val="0"/>
+              </a:spcAft>
+            </a:pPr>
+            <a:r>
+              <a:rPr sz="1200" b="0">
+                <a:solidFill>
+                  <a:srgbClr val="FFFFFF"/>
+                </a:solidFill>
+                <a:latin typeface="Arial"/>
+              </a:rPr>
+              <a:t>names become tokens</a:t>
+            </a:r>
+          </a:p>
+        </p:txBody>
+      </p:sp>
+      <p:sp>
+        <p:nvSpPr>
+          <p:cNvPr id="8" name="Right Arrow 7"/>
+          <p:cNvSpPr/>
+          <p:nvPr/>
+        </p:nvSpPr>
+        <p:spPr>
+          <a:xfrm>
+            <a:off x="8897112" y="1965960"/>
+            <a:ext cx="347472" cy="365760"/>
+          </a:xfrm>
+          <a:prstGeom prst="rightArrow">
+            <a:avLst/>
+          </a:prstGeom>
+          <a:solidFill>
+            <a:srgbClr val="595959"/>
+          </a:solidFill>
+          <a:ln>
+            <a:noFill/>
+          </a:ln>
+        </p:spPr>
+        <p:style>
+          <a:lnRef idx="1">
+            <a:schemeClr val="accent1"/>
+          </a:lnRef>
+          <a:fillRef idx="3">
+            <a:schemeClr val="accent1"/>
+          </a:fillRef>
+          <a:effectRef idx="2">
+            <a:schemeClr val="accent1"/>
+          </a:effectRef>
+          <a:fontRef idx="minor">
+            <a:schemeClr val="lt1"/>
+          </a:fontRef>
+        </p:style>
+        <p:txBody>
+          <a:bodyPr rtlCol="0" anchor="ctr"/>
+          <a:lstStyle/>
+          <a:p>
+            <a:pPr algn="ctr"/>
+          </a:p>
+        </p:txBody>
+      </p:sp>
+      <p:sp>
+        <p:nvSpPr>
+          <p:cNvPr id="9" name="Rounded Rectangle 8"/>
+          <p:cNvSpPr/>
+          <p:nvPr/>
+        </p:nvSpPr>
+        <p:spPr>
+          <a:xfrm>
+            <a:off x="9281160" y="1463040"/>
+            <a:ext cx="2514600" cy="1417320"/>
+          </a:xfrm>
+          <a:prstGeom prst="roundRect">
+            <a:avLst>
+              <a:gd name="adj" fmla="val 6000"/>
+            </a:avLst>
+          </a:prstGeom>
+          <a:solidFill>
+            <a:srgbClr val="C00000"/>
+          </a:solidFill>
+          <a:ln>
+            <a:noFill/>
+          </a:ln>
+          <a:effectLst/>
+        </p:spPr>
+        <p:style>
+          <a:lnRef idx="1">
+            <a:schemeClr val="accent1"/>
+          </a:lnRef>
+          <a:fillRef idx="3">
+            <a:schemeClr val="accent1"/>
+          </a:fillRef>
+          <a:effectRef idx="2">
+            <a:schemeClr val="accent1"/>
+          </a:effectRef>
+          <a:fontRef idx="minor">
+            <a:schemeClr val="lt1"/>
+          </a:fontRef>
+        </p:style>
+        <p:txBody>
+          <a:bodyPr rtlCol="0" anchor="ctr" wrap="square" lIns="109728" rIns="109728" tIns="54864" bIns="54864"/>
+          <a:lstStyle/>
+          <a:p>
+            <a:pPr algn="l">
+              <a:spcAft>
+                <a:spcPts val="300"/>
+              </a:spcAft>
+            </a:pPr>
+            <a:r>
+              <a:rPr sz="1500" b="1">
+                <a:solidFill>
+                  <a:srgbClr val="FFFFFF"/>
+                </a:solidFill>
+                <a:latin typeface="Arial"/>
+              </a:rPr>
+              <a:t>Persona agent</a:t>
+            </a:r>
+          </a:p>
+          <a:p>
+            <a:pPr algn="l">
+              <a:spcAft>
+                <a:spcPts val="0"/>
+              </a:spcAft>
+            </a:pPr>
+            <a:r>
+              <a:rPr sz="1200" b="0">
+                <a:solidFill>
+                  <a:srgbClr val="FFFFFF"/>
+                </a:solidFill>
+                <a:latin typeface="Arial"/>
+              </a:rPr>
+              <a:t>Claude in a sandbox, every choice cited</a:t>
+            </a:r>
+          </a:p>
+        </p:txBody>
+      </p:sp>
+      <p:sp>
+        <p:nvSpPr>
+          <p:cNvPr id="10" name="Rounded Rectangle 9"/>
+          <p:cNvSpPr/>
+          <p:nvPr/>
+        </p:nvSpPr>
+        <p:spPr>
+          <a:xfrm>
+            <a:off x="9281160" y="3291840"/>
+            <a:ext cx="2514600" cy="1417320"/>
+          </a:xfrm>
+          <a:prstGeom prst="roundRect">
+            <a:avLst>
+              <a:gd name="adj" fmla="val 6000"/>
+            </a:avLst>
+          </a:prstGeom>
+          <a:solidFill>
+            <a:srgbClr val="2EA896"/>
+          </a:solidFill>
+          <a:ln>
+            <a:noFill/>
+          </a:ln>
+          <a:effectLst/>
+        </p:spPr>
+        <p:style>
+          <a:lnRef idx="1">
+            <a:schemeClr val="accent1"/>
+          </a:lnRef>
+          <a:fillRef idx="3">
+            <a:schemeClr val="accent1"/>
+          </a:fillRef>
+          <a:effectRef idx="2">
+            <a:schemeClr val="accent1"/>
+          </a:effectRef>
+          <a:fontRef idx="minor">
+            <a:schemeClr val="lt1"/>
+          </a:fontRef>
+        </p:style>
+        <p:txBody>
+          <a:bodyPr rtlCol="0" anchor="ctr" wrap="square" lIns="109728" rIns="109728" tIns="54864" bIns="54864"/>
+          <a:lstStyle/>
+          <a:p>
+            <a:pPr algn="l">
+              <a:spcAft>
+                <a:spcPts val="300"/>
+              </a:spcAft>
+            </a:pPr>
+            <a:r>
+              <a:rPr sz="1500" b="1">
+                <a:solidFill>
+                  <a:srgbClr val="FFFFFF"/>
+                </a:solidFill>
+                <a:latin typeface="Arial"/>
+              </a:rPr>
+              <a:t>Sarvam voice agent</a:t>
+            </a:r>
+          </a:p>
+          <a:p>
+            <a:pPr algn="l">
+              <a:spcAft>
+                <a:spcPts val="0"/>
+              </a:spcAft>
+            </a:pPr>
+            <a:r>
+              <a:rPr sz="1200" b="0">
+                <a:solidFill>
+                  <a:srgbClr val="FFFFFF"/>
+                </a:solidFill>
+                <a:latin typeface="Arial"/>
+              </a:rPr>
+              <a:t>voice, pace, language, opening</a:t>
+            </a:r>
+          </a:p>
+        </p:txBody>
+      </p:sp>
+      <p:sp>
+        <p:nvSpPr>
+          <p:cNvPr id="11" name="Left Arrow 10"/>
+          <p:cNvSpPr/>
+          <p:nvPr/>
+        </p:nvSpPr>
+        <p:spPr>
+          <a:xfrm>
+            <a:off x="8887968" y="3794760"/>
+            <a:ext cx="347472" cy="365760"/>
+          </a:xfrm>
+          <a:prstGeom prst="leftArrow">
+            <a:avLst/>
+          </a:prstGeom>
+          <a:solidFill>
+            <a:srgbClr val="595959"/>
+          </a:solidFill>
+          <a:ln>
+            <a:noFill/>
+          </a:ln>
+        </p:spPr>
+        <p:style>
+          <a:lnRef idx="1">
+            <a:schemeClr val="accent1"/>
+          </a:lnRef>
+          <a:fillRef idx="3">
+            <a:schemeClr val="accent1"/>
+          </a:fillRef>
+          <a:effectRef idx="2">
+            <a:schemeClr val="accent1"/>
+          </a:effectRef>
+          <a:fontRef idx="minor">
+            <a:schemeClr val="lt1"/>
+          </a:fontRef>
+        </p:style>
+        <p:txBody>
+          <a:bodyPr rtlCol="0" anchor="ctr"/>
+          <a:lstStyle/>
+          <a:p>
+            <a:pPr algn="ctr"/>
+          </a:p>
+        </p:txBody>
+      </p:sp>
+      <p:sp>
+        <p:nvSpPr>
+          <p:cNvPr id="12" name="Rounded Rectangle 11"/>
+          <p:cNvSpPr/>
+          <p:nvPr/>
+        </p:nvSpPr>
+        <p:spPr>
+          <a:xfrm>
+            <a:off x="6355080" y="3291840"/>
+            <a:ext cx="2514600" cy="1417320"/>
+          </a:xfrm>
+          <a:prstGeom prst="roundRect">
+            <a:avLst>
+              <a:gd name="adj" fmla="val 6000"/>
+            </a:avLst>
+          </a:prstGeom>
+          <a:solidFill>
+            <a:srgbClr val="2EA896"/>
+          </a:solidFill>
+          <a:ln>
+            <a:noFill/>
+          </a:ln>
+          <a:effectLst/>
+        </p:spPr>
+        <p:style>
+          <a:lnRef idx="1">
+            <a:schemeClr val="accent1"/>
+          </a:lnRef>
+          <a:fillRef idx="3">
+            <a:schemeClr val="accent1"/>
+          </a:fillRef>
+          <a:effectRef idx="2">
+            <a:schemeClr val="accent1"/>
+          </a:effectRef>
+          <a:fontRef idx="minor">
+            <a:schemeClr val="lt1"/>
+          </a:fontRef>
+        </p:style>
+        <p:txBody>
+          <a:bodyPr rtlCol="0" anchor="ctr" wrap="square" lIns="109728" rIns="109728" tIns="54864" bIns="54864"/>
+          <a:lstStyle/>
+          <a:p>
+            <a:pPr algn="l">
+              <a:spcAft>
+                <a:spcPts val="300"/>
+              </a:spcAft>
+            </a:pPr>
+            <a:r>
+              <a:rPr sz="1500" b="1">
+                <a:solidFill>
+                  <a:srgbClr val="FFFFFF"/>
+                </a:solidFill>
+                <a:latin typeface="Arial"/>
+              </a:rPr>
+              <a:t>Live adaptation</a:t>
+            </a:r>
+          </a:p>
+          <a:p>
+            <a:pPr algn="l">
+              <a:spcAft>
+                <a:spcPts val="0"/>
+              </a:spcAft>
+            </a:pPr>
+            <a:r>
+              <a:rPr sz="1200" b="0">
+                <a:solidFill>
+                  <a:srgbClr val="FFFFFF"/>
+                </a:solidFill>
+                <a:latin typeface="Arial"/>
+              </a:rPr>
+              <a:t>mood to directive each turn</a:t>
+            </a:r>
+          </a:p>
+        </p:txBody>
+      </p:sp>
+      <p:sp>
+        <p:nvSpPr>
+          <p:cNvPr id="13" name="Left Arrow 12"/>
+          <p:cNvSpPr/>
+          <p:nvPr/>
+        </p:nvSpPr>
+        <p:spPr>
+          <a:xfrm>
+            <a:off x="5961888" y="3794760"/>
+            <a:ext cx="347472" cy="365760"/>
+          </a:xfrm>
+          <a:prstGeom prst="leftArrow">
+            <a:avLst/>
+          </a:prstGeom>
+          <a:solidFill>
+            <a:srgbClr val="595959"/>
+          </a:solidFill>
+          <a:ln>
+            <a:noFill/>
+          </a:ln>
+        </p:spPr>
+        <p:style>
+          <a:lnRef idx="1">
+            <a:schemeClr val="accent1"/>
+          </a:lnRef>
+          <a:fillRef idx="3">
+            <a:schemeClr val="accent1"/>
+          </a:fillRef>
+          <a:effectRef idx="2">
+            <a:schemeClr val="accent1"/>
+          </a:effectRef>
+          <a:fontRef idx="minor">
+            <a:schemeClr val="lt1"/>
+          </a:fontRef>
+        </p:style>
+        <p:txBody>
+          <a:bodyPr rtlCol="0" anchor="ctr"/>
+          <a:lstStyle/>
+          <a:p>
+            <a:pPr algn="ctr"/>
+          </a:p>
+        </p:txBody>
+      </p:sp>
+      <p:sp>
+        <p:nvSpPr>
+          <p:cNvPr id="14" name="Rounded Rectangle 13"/>
+          <p:cNvSpPr/>
+          <p:nvPr/>
+        </p:nvSpPr>
+        <p:spPr>
+          <a:xfrm>
+            <a:off x="3429000" y="3291840"/>
+            <a:ext cx="2514600" cy="1417320"/>
+          </a:xfrm>
+          <a:prstGeom prst="roundRect">
+            <a:avLst>
+              <a:gd name="adj" fmla="val 6000"/>
+            </a:avLst>
+          </a:prstGeom>
+          <a:solidFill>
+            <a:srgbClr val="5B3E96"/>
+          </a:solidFill>
+          <a:ln>
+            <a:noFill/>
+          </a:ln>
+          <a:effectLst/>
+        </p:spPr>
+        <p:style>
+          <a:lnRef idx="1">
+            <a:schemeClr val="accent1"/>
+          </a:lnRef>
+          <a:fillRef idx="3">
+            <a:schemeClr val="accent1"/>
+          </a:fillRef>
+          <a:effectRef idx="2">
+            <a:schemeClr val="accent1"/>
+          </a:effectRef>
+          <a:fontRef idx="minor">
+            <a:schemeClr val="lt1"/>
+          </a:fontRef>
+        </p:style>
+        <p:txBody>
+          <a:bodyPr rtlCol="0" anchor="ctr" wrap="square" lIns="109728" rIns="109728" tIns="54864" bIns="54864"/>
+          <a:lstStyle/>
+          <a:p>
+            <a:pPr algn="l">
+              <a:spcAft>
+                <a:spcPts val="300"/>
+              </a:spcAft>
+            </a:pPr>
+            <a:r>
+              <a:rPr sz="1500" b="1">
+                <a:solidFill>
+                  <a:srgbClr val="FFFFFF"/>
+                </a:solidFill>
+                <a:latin typeface="Arial"/>
+              </a:rPr>
+              <a:t>Call review</a:t>
+            </a:r>
+          </a:p>
+          <a:p>
+            <a:pPr algn="l">
+              <a:spcAft>
+                <a:spcPts val="0"/>
+              </a:spcAft>
+            </a:pPr>
+            <a:r>
+              <a:rPr sz="1200" b="0">
+                <a:solidFill>
+                  <a:srgbClr val="FFFFFF"/>
+                </a:solidFill>
+                <a:latin typeface="Arial"/>
+              </a:rPr>
+              <a:t>Claude checks fit and rules</a:t>
+            </a:r>
+          </a:p>
+        </p:txBody>
+      </p:sp>
+      <p:sp>
+        <p:nvSpPr>
+          <p:cNvPr id="15" name="Left Arrow 14"/>
+          <p:cNvSpPr/>
+          <p:nvPr/>
+        </p:nvSpPr>
+        <p:spPr>
+          <a:xfrm>
+            <a:off x="3035808" y="3794760"/>
+            <a:ext cx="347472" cy="365760"/>
+          </a:xfrm>
+          <a:prstGeom prst="leftArrow">
+            <a:avLst/>
+          </a:prstGeom>
+          <a:solidFill>
+            <a:srgbClr val="595959"/>
+          </a:solidFill>
+          <a:ln>
+            <a:noFill/>
+          </a:ln>
+        </p:spPr>
+        <p:style>
+          <a:lnRef idx="1">
+            <a:schemeClr val="accent1"/>
+          </a:lnRef>
+          <a:fillRef idx="3">
+            <a:schemeClr val="accent1"/>
+          </a:fillRef>
+          <a:effectRef idx="2">
+            <a:schemeClr val="accent1"/>
+          </a:effectRef>
+          <a:fontRef idx="minor">
+            <a:schemeClr val="lt1"/>
+          </a:fontRef>
+        </p:style>
+        <p:txBody>
+          <a:bodyPr rtlCol="0" anchor="ctr"/>
+          <a:lstStyle/>
+          <a:p>
+            <a:pPr algn="ctr"/>
+          </a:p>
+        </p:txBody>
+      </p:sp>
+      <p:sp>
+        <p:nvSpPr>
+          <p:cNvPr id="16" name="Rounded Rectangle 15"/>
+          <p:cNvSpPr/>
+          <p:nvPr/>
+        </p:nvSpPr>
+        <p:spPr>
+          <a:xfrm>
+            <a:off x="502920" y="3291840"/>
+            <a:ext cx="2514600" cy="1417320"/>
+          </a:xfrm>
+          <a:prstGeom prst="roundRect">
+            <a:avLst>
+              <a:gd name="adj" fmla="val 6000"/>
+            </a:avLst>
+          </a:prstGeom>
+          <a:solidFill>
+            <a:srgbClr val="5B3E96"/>
+          </a:solidFill>
+          <a:ln>
+            <a:noFill/>
+          </a:ln>
+          <a:effectLst/>
+        </p:spPr>
+        <p:style>
+          <a:lnRef idx="1">
+            <a:schemeClr val="accent1"/>
+          </a:lnRef>
+          <a:fillRef idx="3">
+            <a:schemeClr val="accent1"/>
+          </a:fillRef>
+          <a:effectRef idx="2">
+            <a:schemeClr val="accent1"/>
+          </a:effectRef>
+          <a:fontRef idx="minor">
+            <a:schemeClr val="lt1"/>
+          </a:fontRef>
+        </p:style>
+        <p:txBody>
+          <a:bodyPr rtlCol="0" anchor="ctr" wrap="square" lIns="109728" rIns="109728" tIns="54864" bIns="54864"/>
+          <a:lstStyle/>
+          <a:p>
+            <a:pPr algn="l">
+              <a:spcAft>
+                <a:spcPts val="300"/>
+              </a:spcAft>
+            </a:pPr>
+            <a:r>
+              <a:rPr sz="1500" b="1">
+                <a:solidFill>
+                  <a:srgbClr val="FFFFFF"/>
+                </a:solidFill>
+                <a:latin typeface="Arial"/>
+              </a:rPr>
+              <a:t>Learning loops</a:t>
+            </a:r>
+          </a:p>
+          <a:p>
+            <a:pPr algn="l">
+              <a:spcAft>
+                <a:spcPts val="0"/>
+              </a:spcAft>
+            </a:pPr>
+            <a:r>
+              <a:rPr sz="1200" b="0">
+                <a:solidFill>
+                  <a:srgbClr val="FFFFFF"/>
+                </a:solidFill>
+                <a:latin typeface="Arial"/>
+              </a:rPr>
+              <a:t>better persona and hook next call</a:t>
+            </a:r>
+          </a:p>
+        </p:txBody>
+      </p:sp>
+      <p:sp>
+        <p:nvSpPr>
+          <p:cNvPr id="17" name="Down Arrow 16"/>
+          <p:cNvSpPr/>
+          <p:nvPr/>
+        </p:nvSpPr>
+        <p:spPr>
+          <a:xfrm>
+            <a:off x="10012680" y="2926080"/>
+            <a:ext cx="365760" cy="347472"/>
+          </a:xfrm>
+          <a:prstGeom prst="downArrow">
+            <a:avLst/>
+          </a:prstGeom>
+          <a:solidFill>
+            <a:srgbClr val="595959"/>
+          </a:solidFill>
+          <a:ln>
+            <a:noFill/>
+          </a:ln>
+        </p:spPr>
+        <p:style>
+          <a:lnRef idx="1">
+            <a:schemeClr val="accent1"/>
+          </a:lnRef>
+          <a:fillRef idx="3">
+            <a:schemeClr val="accent1"/>
+          </a:fillRef>
+          <a:effectRef idx="2">
+            <a:schemeClr val="accent1"/>
+          </a:effectRef>
+          <a:fontRef idx="minor">
+            <a:schemeClr val="lt1"/>
+          </a:fontRef>
+        </p:style>
+        <p:txBody>
+          <a:bodyPr rtlCol="0" anchor="ctr"/>
+          <a:lstStyle/>
+          <a:p>
+            <a:pPr algn="ctr"/>
+          </a:p>
+        </p:txBody>
+      </p:sp>
+      <p:sp>
+        <p:nvSpPr>
+          <p:cNvPr id="18" name="Rounded Rectangle 17"/>
+          <p:cNvSpPr/>
+          <p:nvPr/>
+        </p:nvSpPr>
+        <p:spPr>
+          <a:xfrm>
+            <a:off x="502920" y="5212080"/>
+            <a:ext cx="11338560" cy="731520"/>
+          </a:xfrm>
+          <a:prstGeom prst="roundRect">
+            <a:avLst>
+              <a:gd name="adj" fmla="val 6000"/>
+            </a:avLst>
+          </a:prstGeom>
+          <a:solidFill>
+            <a:srgbClr val="EEF2F8"/>
+          </a:solidFill>
+          <a:ln w="12700">
+            <a:solidFill>
+              <a:srgbClr val="002060"/>
+            </a:solidFill>
+          </a:ln>
+          <a:effectLst/>
+        </p:spPr>
+        <p:style>
+          <a:lnRef idx="1">
+            <a:schemeClr val="accent1"/>
+          </a:lnRef>
+          <a:fillRef idx="3">
+            <a:schemeClr val="accent1"/>
+          </a:fillRef>
+          <a:effectRef idx="2">
+            <a:schemeClr val="accent1"/>
+          </a:effectRef>
+          <a:fontRef idx="minor">
+            <a:schemeClr val="lt1"/>
+          </a:fontRef>
+        </p:style>
+        <p:txBody>
+          <a:bodyPr rtlCol="0" anchor="ctr" wrap="square" lIns="109728" rIns="109728" tIns="54864" bIns="54864"/>
+          <a:lstStyle/>
+          <a:p>
+            <a:pPr algn="ctr">
+              <a:spcAft>
+                <a:spcPts val="0"/>
+              </a:spcAft>
+            </a:pPr>
+            <a:r>
+              <a:rPr sz="1300" b="1">
+                <a:solidFill>
+                  <a:srgbClr val="002060"/>
+                </a:solidFill>
+                <a:latin typeface="Arial"/>
+              </a:rPr>
+              <a:t>Safety rails: never AI, bot or manager; never claims to be human  |  numbers only from verified facts  |  names stay tokens in the sandbox  |  no price on the call</a:t>
+            </a:r>
+          </a:p>
+        </p:txBody>
+      </p:sp>
+    </p:spTree>
+  </p:cSld>
+  <p:clrMapOvr>
+    <a:masterClrMapping/>
+  </p:clrMapOvr>
+</p:sld>
+</file>
+
+<file path=ppt/slides/slide23.xml><?xml version="1.0" encoding="utf-8"?>
+<p:sld xmlns:a="http://schemas.openxmlformats.org/drawingml/2006/main" xmlns:p="http://schemas.openxmlformats.org/presentationml/2006/main" xmlns:r="http://schemas.openxmlformats.org/officeDocument/2006/relationships">
+  <p:cSld>
+    <p:spTree>
+      <p:nvGrpSpPr>
+        <p:cNvPr id="1" name=""/>
+        <p:cNvGrpSpPr/>
+        <p:nvPr/>
+      </p:nvGrpSpPr>
+      <p:grpSpPr/>
+      <p:sp>
+        <p:nvSpPr>
+          <p:cNvPr id="2" name="Title 1"/>
+          <p:cNvSpPr>
+            <a:spLocks noGrp="1"/>
+          </p:cNvSpPr>
+          <p:nvPr>
+            <p:ph type="title"/>
+          </p:nvPr>
+        </p:nvSpPr>
+        <p:spPr/>
+        <p:txBody>
+          <a:bodyPr/>
+          <a:lstStyle/>
+          <a:p>
+            <a:r>
+              <a:t>Future Goals</a:t>
+            </a:r>
+          </a:p>
+        </p:txBody>
+      </p:sp>
+      <p:sp>
+        <p:nvSpPr>
+          <p:cNvPr id="3" name="Rounded Rectangle 2"/>
+          <p:cNvSpPr/>
+          <p:nvPr/>
+        </p:nvSpPr>
+        <p:spPr>
+          <a:xfrm>
+            <a:off x="566928" y="1463040"/>
+            <a:ext cx="5212080" cy="1371600"/>
+          </a:xfrm>
+          <a:prstGeom prst="roundRect">
+            <a:avLst>
+              <a:gd name="adj" fmla="val 6000"/>
+            </a:avLst>
+          </a:prstGeom>
+          <a:solidFill>
+            <a:srgbClr val="C00000"/>
+          </a:solidFill>
+          <a:ln>
+            <a:noFill/>
+          </a:ln>
+          <a:effectLst/>
+        </p:spPr>
+        <p:style>
+          <a:lnRef idx="1">
+            <a:schemeClr val="accent1"/>
+          </a:lnRef>
+          <a:fillRef idx="3">
+            <a:schemeClr val="accent1"/>
+          </a:fillRef>
+          <a:effectRef idx="2">
+            <a:schemeClr val="accent1"/>
+          </a:effectRef>
+          <a:fontRef idx="minor">
+            <a:schemeClr val="lt1"/>
+          </a:fontRef>
+        </p:style>
+        <p:txBody>
+          <a:bodyPr rtlCol="0" anchor="ctr" wrap="square" lIns="109728" rIns="109728" tIns="54864" bIns="54864"/>
+          <a:lstStyle/>
+          <a:p>
+            <a:pPr algn="ctr">
+              <a:spcAft>
+                <a:spcPts val="200"/>
+              </a:spcAft>
+            </a:pPr>
+            <a:r>
+              <a:rPr sz="1700" b="1">
+                <a:solidFill>
+                  <a:srgbClr val="FFFFFF"/>
+                </a:solidFill>
+                <a:latin typeface="Arial"/>
+              </a:rPr>
+              <a:t>NOW: Meeting arrangement</a:t>
+            </a:r>
+          </a:p>
+          <a:p>
+            <a:pPr algn="ctr">
+              <a:spcAft>
+                <a:spcPts val="0"/>
+              </a:spcAft>
+            </a:pPr>
+            <a:r>
+              <a:rPr sz="1300" b="0">
+                <a:solidFill>
+                  <a:srgbClr val="FFFFFF"/>
+                </a:solidFill>
+                <a:latin typeface="Arial"/>
+              </a:rPr>
+              <a:t>Right persona and hook, live adaptation</a:t>
+            </a:r>
+          </a:p>
+        </p:txBody>
+      </p:sp>
+      <p:sp>
+        <p:nvSpPr>
+          <p:cNvPr id="4" name="Right Arrow 3"/>
+          <p:cNvSpPr/>
+          <p:nvPr/>
+        </p:nvSpPr>
+        <p:spPr>
+          <a:xfrm>
+            <a:off x="5852160" y="1920240"/>
+            <a:ext cx="457200" cy="411480"/>
+          </a:xfrm>
+          <a:prstGeom prst="rightArrow">
+            <a:avLst/>
+          </a:prstGeom>
+          <a:solidFill>
+            <a:srgbClr val="595959"/>
+          </a:solidFill>
+          <a:ln>
+            <a:noFill/>
+          </a:ln>
+        </p:spPr>
+        <p:style>
+          <a:lnRef idx="1">
+            <a:schemeClr val="accent1"/>
+          </a:lnRef>
+          <a:fillRef idx="3">
+            <a:schemeClr val="accent1"/>
+          </a:fillRef>
+          <a:effectRef idx="2">
+            <a:schemeClr val="accent1"/>
+          </a:effectRef>
+          <a:fontRef idx="minor">
+            <a:schemeClr val="lt1"/>
+          </a:fontRef>
+        </p:style>
+        <p:txBody>
+          <a:bodyPr rtlCol="0" anchor="ctr"/>
+          <a:lstStyle/>
+          <a:p>
+            <a:pPr algn="ctr"/>
+          </a:p>
+        </p:txBody>
+      </p:sp>
+      <p:sp>
+        <p:nvSpPr>
+          <p:cNvPr id="5" name="Rounded Rectangle 4"/>
+          <p:cNvSpPr/>
+          <p:nvPr/>
+        </p:nvSpPr>
+        <p:spPr>
+          <a:xfrm>
+            <a:off x="6400800" y="1463040"/>
+            <a:ext cx="5212080" cy="1371600"/>
+          </a:xfrm>
+          <a:prstGeom prst="roundRect">
+            <a:avLst>
+              <a:gd name="adj" fmla="val 6000"/>
+            </a:avLst>
+          </a:prstGeom>
+          <a:solidFill>
+            <a:srgbClr val="002060"/>
+          </a:solidFill>
+          <a:ln>
+            <a:noFill/>
+          </a:ln>
+          <a:effectLst/>
+        </p:spPr>
+        <p:style>
+          <a:lnRef idx="1">
+            <a:schemeClr val="accent1"/>
+          </a:lnRef>
+          <a:fillRef idx="3">
+            <a:schemeClr val="accent1"/>
+          </a:fillRef>
+          <a:effectRef idx="2">
+            <a:schemeClr val="accent1"/>
+          </a:effectRef>
+          <a:fontRef idx="minor">
+            <a:schemeClr val="lt1"/>
+          </a:fontRef>
+        </p:style>
+        <p:txBody>
+          <a:bodyPr rtlCol="0" anchor="ctr" wrap="square" lIns="109728" rIns="109728" tIns="54864" bIns="54864"/>
+          <a:lstStyle/>
+          <a:p>
+            <a:pPr algn="ctr">
+              <a:spcAft>
+                <a:spcPts val="200"/>
+              </a:spcAft>
+            </a:pPr>
+            <a:r>
+              <a:rPr sz="1700" b="1">
+                <a:solidFill>
+                  <a:srgbClr val="FFFFFF"/>
+                </a:solidFill>
+                <a:latin typeface="Arial"/>
+              </a:rPr>
+              <a:t>NEXT: Seller enrichment</a:t>
+            </a:r>
+          </a:p>
+          <a:p>
+            <a:pPr algn="ctr">
+              <a:spcAft>
+                <a:spcPts val="0"/>
+              </a:spcAft>
+            </a:pPr>
+            <a:r>
+              <a:rPr sz="1300" b="0">
+                <a:solidFill>
+                  <a:srgbClr val="FFFFFF"/>
+                </a:solidFill>
+                <a:latin typeface="Arial"/>
+              </a:rPr>
+              <a:t>Catalogue improvement and suggestions</a:t>
+            </a:r>
+          </a:p>
+        </p:txBody>
+      </p:sp>
+      <p:sp>
+        <p:nvSpPr>
+          <p:cNvPr id="6" name="TextBox 5"/>
+          <p:cNvSpPr txBox="1"/>
+          <p:nvPr/>
+        </p:nvSpPr>
+        <p:spPr>
+          <a:xfrm>
+            <a:off x="566928" y="3154680"/>
+            <a:ext cx="10972800" cy="365760"/>
+          </a:xfrm>
+          <a:prstGeom prst="rect">
+            <a:avLst/>
+          </a:prstGeom>
+          <a:noFill/>
+        </p:spPr>
+        <p:txBody>
+          <a:bodyPr wrap="square">
+            <a:spAutoFit/>
+          </a:bodyPr>
+          <a:lstStyle/>
+          <a:p>
+            <a:pPr algn="l">
+              <a:spcAft>
+                <a:spcPts val="0"/>
+              </a:spcAft>
+            </a:pPr>
+            <a:r>
+              <a:rPr sz="1600" b="1">
+                <a:solidFill>
+                  <a:srgbClr val="5B3E96"/>
+                </a:solidFill>
+                <a:latin typeface="Arial"/>
+              </a:rPr>
+              <a:t>Personalise further, per seller</a:t>
+            </a:r>
+          </a:p>
+        </p:txBody>
+      </p:sp>
+      <p:sp>
+        <p:nvSpPr>
+          <p:cNvPr id="7" name="Rounded Rectangle 6"/>
+          <p:cNvSpPr/>
+          <p:nvPr/>
+        </p:nvSpPr>
+        <p:spPr>
+          <a:xfrm>
+            <a:off x="566928" y="3611880"/>
+            <a:ext cx="3566160" cy="1828800"/>
+          </a:xfrm>
+          <a:prstGeom prst="roundRect">
+            <a:avLst>
+              <a:gd name="adj" fmla="val 6000"/>
+            </a:avLst>
+          </a:prstGeom>
+          <a:solidFill>
+            <a:srgbClr val="FFFFFF"/>
+          </a:solidFill>
+          <a:ln w="12700">
+            <a:solidFill>
+              <a:srgbClr val="2EA896"/>
+            </a:solidFill>
+          </a:ln>
+          <a:effectLst/>
+        </p:spPr>
+        <p:style>
+          <a:lnRef idx="1">
+            <a:schemeClr val="accent1"/>
+          </a:lnRef>
+          <a:fillRef idx="3">
+            <a:schemeClr val="accent1"/>
+          </a:fillRef>
+          <a:effectRef idx="2">
+            <a:schemeClr val="accent1"/>
+          </a:effectRef>
+          <a:fontRef idx="minor">
+            <a:schemeClr val="lt1"/>
+          </a:fontRef>
+        </p:style>
+        <p:txBody>
+          <a:bodyPr rtlCol="0" anchor="ctr" wrap="square" lIns="1005840" rIns="109728" tIns="54864" bIns="54864"/>
+          <a:lstStyle/>
+          <a:p>
+            <a:pPr algn="l">
+              <a:spcAft>
+                <a:spcPts val="300"/>
+              </a:spcAft>
+            </a:pPr>
+            <a:r>
+              <a:rPr sz="1600" b="1">
+                <a:solidFill>
+                  <a:srgbClr val="2EA896"/>
+                </a:solidFill>
+                <a:latin typeface="Arial"/>
+              </a:rPr>
+              <a:t>Objective per seller</a:t>
+            </a:r>
+          </a:p>
+          <a:p>
+            <a:pPr algn="l">
+              <a:spcAft>
+                <a:spcPts val="0"/>
+              </a:spcAft>
+            </a:pPr>
+            <a:r>
+              <a:rPr sz="1300" b="0">
+                <a:solidFill>
+                  <a:srgbClr val="262626"/>
+                </a:solidFill>
+                <a:latin typeface="Arial"/>
+              </a:rPr>
+              <a:t>Meeting, enrichment or NPS</a:t>
+            </a:r>
+          </a:p>
+        </p:txBody>
+      </p:sp>
+      <p:sp>
+        <p:nvSpPr>
+          <p:cNvPr id="8" name="Oval 7"/>
+          <p:cNvSpPr/>
+          <p:nvPr/>
+        </p:nvSpPr>
+        <p:spPr>
+          <a:xfrm>
+            <a:off x="749808" y="3794760"/>
+            <a:ext cx="640080" cy="640080"/>
+          </a:xfrm>
+          <a:prstGeom prst="ellipse">
+            <a:avLst/>
+          </a:prstGeom>
+          <a:solidFill>
+            <a:srgbClr val="2EA896"/>
+          </a:solidFill>
+          <a:ln>
+            <a:noFill/>
+          </a:ln>
+        </p:spPr>
+        <p:style>
+          <a:lnRef idx="1">
+            <a:schemeClr val="accent1"/>
+          </a:lnRef>
+          <a:fillRef idx="3">
+            <a:schemeClr val="accent1"/>
+          </a:fillRef>
+          <a:effectRef idx="2">
+            <a:schemeClr val="accent1"/>
+          </a:effectRef>
+          <a:fontRef idx="minor">
+            <a:schemeClr val="lt1"/>
+          </a:fontRef>
+        </p:style>
+        <p:txBody>
+          <a:bodyPr rtlCol="0" anchor="ctr" lIns="0" rIns="0" tIns="0" bIns="0"/>
+          <a:lstStyle/>
+          <a:p>
+            <a:pPr algn="ctr">
+              <a:spcAft>
+                <a:spcPts val="0"/>
+              </a:spcAft>
+            </a:pPr>
+            <a:r>
+              <a:rPr sz="2000" b="1">
+                <a:solidFill>
+                  <a:srgbClr val="FFFFFF"/>
+                </a:solidFill>
+                <a:latin typeface="Arial"/>
+              </a:rPr>
+              <a:t>1</a:t>
+            </a:r>
+          </a:p>
+        </p:txBody>
+      </p:sp>
+      <p:sp>
+        <p:nvSpPr>
+          <p:cNvPr id="9" name="Rounded Rectangle 8"/>
+          <p:cNvSpPr/>
+          <p:nvPr/>
+        </p:nvSpPr>
+        <p:spPr>
+          <a:xfrm>
+            <a:off x="4407408" y="3611880"/>
+            <a:ext cx="3566160" cy="1828800"/>
+          </a:xfrm>
+          <a:prstGeom prst="roundRect">
+            <a:avLst>
+              <a:gd name="adj" fmla="val 6000"/>
+            </a:avLst>
+          </a:prstGeom>
+          <a:solidFill>
+            <a:srgbClr val="FFFFFF"/>
+          </a:solidFill>
+          <a:ln w="12700">
+            <a:solidFill>
+              <a:srgbClr val="E08A00"/>
+            </a:solidFill>
+          </a:ln>
+          <a:effectLst/>
+        </p:spPr>
+        <p:style>
+          <a:lnRef idx="1">
+            <a:schemeClr val="accent1"/>
+          </a:lnRef>
+          <a:fillRef idx="3">
+            <a:schemeClr val="accent1"/>
+          </a:fillRef>
+          <a:effectRef idx="2">
+            <a:schemeClr val="accent1"/>
+          </a:effectRef>
+          <a:fontRef idx="minor">
+            <a:schemeClr val="lt1"/>
+          </a:fontRef>
+        </p:style>
+        <p:txBody>
+          <a:bodyPr rtlCol="0" anchor="ctr" wrap="square" lIns="1005840" rIns="109728" tIns="54864" bIns="54864"/>
+          <a:lstStyle/>
+          <a:p>
+            <a:pPr algn="l">
+              <a:spcAft>
+                <a:spcPts val="300"/>
+              </a:spcAft>
+            </a:pPr>
+            <a:r>
+              <a:rPr sz="1600" b="1">
+                <a:solidFill>
+                  <a:srgbClr val="E08A00"/>
+                </a:solidFill>
+                <a:latin typeface="Arial"/>
+              </a:rPr>
+              <a:t>Preferred call time</a:t>
+            </a:r>
+          </a:p>
+          <a:p>
+            <a:pPr algn="l">
+              <a:spcAft>
+                <a:spcPts val="0"/>
+              </a:spcAft>
+            </a:pPr>
+            <a:r>
+              <a:rPr sz="1300" b="0">
+                <a:solidFill>
+                  <a:srgbClr val="262626"/>
+                </a:solidFill>
+                <a:latin typeface="Arial"/>
+              </a:rPr>
+              <a:t>More calls answered</a:t>
+            </a:r>
+          </a:p>
+        </p:txBody>
+      </p:sp>
+      <p:sp>
+        <p:nvSpPr>
+          <p:cNvPr id="10" name="Oval 9"/>
+          <p:cNvSpPr/>
+          <p:nvPr/>
+        </p:nvSpPr>
+        <p:spPr>
+          <a:xfrm>
+            <a:off x="4590288" y="3794760"/>
+            <a:ext cx="640080" cy="640080"/>
+          </a:xfrm>
+          <a:prstGeom prst="ellipse">
+            <a:avLst/>
+          </a:prstGeom>
+          <a:solidFill>
+            <a:srgbClr val="E08A00"/>
+          </a:solidFill>
+          <a:ln>
+            <a:noFill/>
+          </a:ln>
+        </p:spPr>
+        <p:style>
+          <a:lnRef idx="1">
+            <a:schemeClr val="accent1"/>
+          </a:lnRef>
+          <a:fillRef idx="3">
+            <a:schemeClr val="accent1"/>
+          </a:fillRef>
+          <a:effectRef idx="2">
+            <a:schemeClr val="accent1"/>
+          </a:effectRef>
+          <a:fontRef idx="minor">
+            <a:schemeClr val="lt1"/>
+          </a:fontRef>
+        </p:style>
+        <p:txBody>
+          <a:bodyPr rtlCol="0" anchor="ctr" lIns="0" rIns="0" tIns="0" bIns="0"/>
+          <a:lstStyle/>
+          <a:p>
+            <a:pPr algn="ctr">
+              <a:spcAft>
+                <a:spcPts val="0"/>
+              </a:spcAft>
+            </a:pPr>
+            <a:r>
+              <a:rPr sz="2000" b="1">
+                <a:solidFill>
+                  <a:srgbClr val="FFFFFF"/>
+                </a:solidFill>
+                <a:latin typeface="Arial"/>
+              </a:rPr>
+              <a:t>2</a:t>
+            </a:r>
+          </a:p>
+        </p:txBody>
+      </p:sp>
+      <p:sp>
+        <p:nvSpPr>
+          <p:cNvPr id="11" name="Rounded Rectangle 10"/>
+          <p:cNvSpPr/>
+          <p:nvPr/>
+        </p:nvSpPr>
+        <p:spPr>
+          <a:xfrm>
+            <a:off x="8247888" y="3611880"/>
+            <a:ext cx="3566160" cy="1828800"/>
+          </a:xfrm>
+          <a:prstGeom prst="roundRect">
+            <a:avLst>
+              <a:gd name="adj" fmla="val 6000"/>
+            </a:avLst>
+          </a:prstGeom>
+          <a:solidFill>
+            <a:srgbClr val="FFFFFF"/>
+          </a:solidFill>
+          <a:ln w="12700">
+            <a:solidFill>
+              <a:srgbClr val="5B3E96"/>
+            </a:solidFill>
+          </a:ln>
+          <a:effectLst/>
+        </p:spPr>
+        <p:style>
+          <a:lnRef idx="1">
+            <a:schemeClr val="accent1"/>
+          </a:lnRef>
+          <a:fillRef idx="3">
+            <a:schemeClr val="accent1"/>
+          </a:fillRef>
+          <a:effectRef idx="2">
+            <a:schemeClr val="accent1"/>
+          </a:effectRef>
+          <a:fontRef idx="minor">
+            <a:schemeClr val="lt1"/>
+          </a:fontRef>
+        </p:style>
+        <p:txBody>
+          <a:bodyPr rtlCol="0" anchor="ctr" wrap="square" lIns="1005840" rIns="109728" tIns="54864" bIns="54864"/>
+          <a:lstStyle/>
+          <a:p>
+            <a:pPr algn="l">
+              <a:spcAft>
+                <a:spcPts val="300"/>
+              </a:spcAft>
+            </a:pPr>
+            <a:r>
+              <a:rPr sz="1600" b="1">
+                <a:solidFill>
+                  <a:srgbClr val="5B3E96"/>
+                </a:solidFill>
+                <a:latin typeface="Arial"/>
+              </a:rPr>
+              <a:t>Preferred language</a:t>
+            </a:r>
+          </a:p>
+          <a:p>
+            <a:pPr algn="l">
+              <a:spcAft>
+                <a:spcPts val="0"/>
+              </a:spcAft>
+            </a:pPr>
+            <a:r>
+              <a:rPr sz="1300" b="0">
+                <a:solidFill>
+                  <a:srgbClr val="262626"/>
+                </a:solidFill>
+                <a:latin typeface="Arial"/>
+              </a:rPr>
+              <a:t>Suggested from the seller's data</a:t>
+            </a:r>
+          </a:p>
+        </p:txBody>
+      </p:sp>
+      <p:sp>
+        <p:nvSpPr>
+          <p:cNvPr id="12" name="Oval 11"/>
+          <p:cNvSpPr/>
+          <p:nvPr/>
+        </p:nvSpPr>
+        <p:spPr>
+          <a:xfrm>
+            <a:off x="8430767" y="3794760"/>
+            <a:ext cx="640080" cy="640080"/>
+          </a:xfrm>
+          <a:prstGeom prst="ellipse">
+            <a:avLst/>
+          </a:prstGeom>
+          <a:solidFill>
+            <a:srgbClr val="5B3E96"/>
+          </a:solidFill>
+          <a:ln>
+            <a:noFill/>
+          </a:ln>
+        </p:spPr>
+        <p:style>
+          <a:lnRef idx="1">
+            <a:schemeClr val="accent1"/>
+          </a:lnRef>
+          <a:fillRef idx="3">
+            <a:schemeClr val="accent1"/>
+          </a:fillRef>
+          <a:effectRef idx="2">
+            <a:schemeClr val="accent1"/>
+          </a:effectRef>
+          <a:fontRef idx="minor">
+            <a:schemeClr val="lt1"/>
+          </a:fontRef>
+        </p:style>
+        <p:txBody>
+          <a:bodyPr rtlCol="0" anchor="ctr" lIns="0" rIns="0" tIns="0" bIns="0"/>
+          <a:lstStyle/>
+          <a:p>
+            <a:pPr algn="ctr">
+              <a:spcAft>
+                <a:spcPts val="0"/>
+              </a:spcAft>
+            </a:pPr>
+            <a:r>
+              <a:rPr sz="2000" b="1">
+                <a:solidFill>
+                  <a:srgbClr val="FFFFFF"/>
+                </a:solidFill>
+                <a:latin typeface="Arial"/>
+              </a:rPr>
+              <a:t>3</a:t>
+            </a:r>
+          </a:p>
+        </p:txBody>
+      </p:sp>
+    </p:spTree>
+  </p:cSld>
+  <p:clrMapOvr>
+    <a:masterClrMapping/>
+  </p:clrMapOvr>
+</p:sld>
+</file>
+
+<file path=ppt/slides/slide24.xml><?xml version="1.0" encoding="utf-8"?>
 <p:sld xmlns:a="http://schemas.openxmlformats.org/drawingml/2006/main" xmlns:p="http://schemas.openxmlformats.org/presentationml/2006/main" xmlns:r="http://schemas.openxmlformats.org/officeDocument/2006/relationships">
   <p:cSld>
     <p:spTree>

--- a/outputs/plans/VANI_Persona_Design_Deck_v2_visual.pptx
+++ b/outputs/plans/VANI_Persona_Design_Deck_v2_visual.pptx
@@ -1059,7 +1059,7 @@
           <a:lstStyle/>
           <a:p>
             <a:r>
-              <a:t>For each seller we collect 62 data points from about 60 IndiaMART sources: their business, their catalogue gaps, live buy leads, their competitors, how past calls went. Each data point can give VANI a reason for the meeting. Before the model sees the data we remove all personal data: names become tokens, and phone, GST and PAN numbers never leave IndiaMART (a hard check refuses any export that still holds one; real names are put back only on the laptop, for the voice call). About 53 of the 62 data points are filled for an average seller; the count of sources is approximate. The groups: identity (company, contact, designation; recorded gender only chooses the voice and is never said); location and language (city, state, GST state, onboarding cities, city tier, Hindi belt, languages heard on calls); business (plan free or paid, member since, turnover band, nature, profile text, company page); catalogue (top categories, product counts, quality score, products without photo or price, top five categories by active products); demand and money (buy leads bought, credits and lapse, rejection reasons, category value, seller order value, same-size peers, showcase leads, competitor list with plan); enquiries and channels; relationship (assigned sales handler, complaints, executive contact, do-not-call and frustration flags); past VANI calls with mood signals and objections. Size labels: below 40 lakh small, 40 lakh to 1.5 crore medium, 1.5 to 5 crore medium-high, 5 crore and above high. Plan: free is NSD, paid is CSD, TMW, KCD and other paid divisions.</a:t>
+              <a:t>For each seller we collect 62 data points from about 60 IndiaMART sources: their business, their catalogue gaps, live buy leads, their competitors, how past calls went. Each data point can give VANI a reason for the meeting. Before the model sees the data we remove all personal data: names become tokens, and phone, GST and PAN numbers never leave IndiaMART (a hard check refuses any export that still holds one; real names are put back only at call time, for the voice). About 53 of the 62 data points are filled for an average seller; the count of sources is approximate. The groups: identity (company, contact, designation; recorded gender only chooses the voice and is never said); location and language (city, state, GST state, onboarding cities, city tier, Hindi belt, languages heard on calls); business (plan free or paid, member since, turnover band, nature, profile text, company page); catalogue (top categories, product counts, quality score, products without photo or price, top five categories by active products); demand and money (buy leads bought, credits and lapse, rejection reasons, category value, seller order value, same-size peers, showcase leads, competitor list with plan); enquiries and channels; relationship (assigned sales handler, complaints, executive contact, do-not-call and frustration flags); past VANI calls with mood signals and objections. Size labels: below 40 lakh small, 40 lakh to 1.5 crore medium, 1.5 to 5 crore medium-high, 5 crore and above high. Plan: free is NSD, paid is CSD, TMW, KCD and other paid divisions.</a:t>
             </a:r>
           </a:p>
         </p:txBody>
@@ -1465,7 +1465,7 @@
           <a:lstStyle/>
           <a:p>
             <a:r>
-              <a:t>Examples of the live signal tool at work. Every seller turn is read; the tool returns a mode (rushed, frustrated, confused, interested, declined, bot question, opt-out, language switch; question and handler questions as one-turn overlays) and a directive. In scripted test calls every switch type fired on the same turn, including a language switch from Marathi to Hindi to English. A switch log row records: turn, utterance, from mode, to mode, cue, directive id, change made, reason, whether asking for the meeting is allowed, milliseconds. Honest limits: voice, pace and pitch cannot change mid-call (a Sarvam platform limit), tone changes through wording; the instant keyword classifier is a baseline with about 0.60 measured accuracy on a small reviewed set, presented as a measurement not a production figure. Jev (typesafe jev-1.13, a decision model reached through OpenRouter) judges mood with six questions (rushed, frustrated, confused, bot question, interested, language) in one request, about 0.5 s at the median; it was tested in live scripted calls through a relay, and it labels real call turns that score and improve the keyword tool between runs. In the live call the instant keyword tool decides, because the network round trip adds about 0.5 s to a spoken reply; Jev runs on real calls after the call. Handler: with a handler name VANI says the name and books with that person; with a pool it says 'our IndiaMART team handles your account; the executive will introduce themselves when they call' and never a made-up name. 'Nahi chahiye' keeps the call open and restates the hook.</a:t>
+              <a:t>Examples of the live signal tool at work. Every seller turn is read; the tool returns a mode (rushed, frustrated, confused, interested, declined, bot question, opt-out, language switch; question and handler questions as one-turn overlays) and a directive. In scripted test calls every switch type fired on the same turn, including a language switch from Marathi to Hindi to English. A switch log row records: turn, utterance, from mode, to mode, cue, directive id, change made, reason, whether asking for the meeting is allowed, milliseconds. Honest limits: voice, pace and pitch cannot change mid-call (a Sarvam platform limit), tone changes through wording; the instant keyword classifier is a baseline with about 0.60 measured accuracy on a small reviewed set, presented as a measurement not a production figure. Jev (typesafe jev-1.13, a decision model reached through OpenRouter) judges mood with six questions (rushed, frustrated, confused, bot question, interested, language) in one request, about 0.5 s at the median; it was tested in live scripted calls through a relay, and it labels real call turns that score and improve the keyword tool between runs. In the live call the instant keyword tool decides, because the network round trip adds about 0.5 s to a spoken reply; Jev labels real calls between calls. Handler: with a handler name VANI says the name and books with that person; with a pool it says 'our IndiaMART team handles your account; the executive will introduce themselves when they call' and never a made-up name. 'Nahi chahiye' keeps the call open and restates the hook.</a:t>
             </a:r>
           </a:p>
         </p:txBody>
@@ -1523,7 +1523,7 @@
           <a:lstStyle/>
           <a:p>
             <a:r>
-              <a:t>Two layers decide the seller's mood. Layer 1, the keyword tool, runs inside the Sarvam call on every seller turn in well under a millisecond, so the directive applies on the same turn; its measured accuracy is about 0.60 on a small reviewed set, presented as a measurement. Layer 2, Jev (typesafe jev-1.13, a decision model reached through OpenRouter), answers six yes/no mood questions in one request (rushed, frustrated, confused, bot question, interested, language) with a probability for each; about 0.5 s at the median, a tiny fraction of a cent per turn; 49 of 51 correct on a native-script test set and 10 of 10 on a tricky set; it catches cases the keywords miss, such as an irritated 'I am asking again, tell me the price or I hang up'. Jev labels real call turns, which scores and improves the keyword tool between runs (the gold set), and we tested it in live scripted calls through a relay. In the live call the instant keyword tool decides, because a web call to Jev adds about 0.5 s to a spoken reply; Jev runs on real calls after the call and was tested live through a relay. A hybrid that asks Jev only on unclear turns within a strict time budget is the next step. We also evaluated a Sarvam chat model, a small trained classifier and fast hosted models, and measured their latency before choosing this design.</a:t>
+              <a:t>Two layers decide the seller's mood. Layer 1, the keyword tool, runs inside the Sarvam call on every seller turn in well under a millisecond, so the directive applies on the same turn; its measured accuracy is about 0.60 on a small reviewed set, presented as a measurement. Layer 2, Jev (typesafe jev-1.13, a decision model reached through OpenRouter), answers six yes/no mood questions in one request (rushed, frustrated, confused, bot question, interested, language) with a probability for each; about 0.5 s at the median, a tiny fraction of a cent per turn; 49 of 51 correct on a native-script test set and 10 of 10 on a tricky set; it catches cases the keywords miss, such as an irritated 'I am asking again, tell me the price or I hang up'. Jev labels real call turns, which scores and improves the keyword tool between runs (the gold set), and we tested it in live scripted calls through a relay. In the live call the instant keyword tool decides, because a web call to Jev adds about 0.5 s to a spoken reply; Jev labels real calls between calls and was tested live through a relay. A hybrid that asks Jev only on unclear turns within a strict time budget is the next step. We also evaluated a Sarvam chat model, a small trained classifier and fast hosted models, and measured their latency before choosing this design.</a:t>
             </a:r>
           </a:p>
         </p:txBody>
@@ -1697,7 +1697,7 @@
           <a:lstStyle/>
           <a:p>
             <a:r>
-              <a:t>Context builder: offline PS07 and Global Context files, internal APIs (data warehouse, user service, company page) and read-only queries on the buy-lead and catalogue databases write one folder per seller (laptop, VPN). Safe export: names become tokens, a hard PII check refuses any leak, sources are stripped; real names stay on the laptop. Persona agent: Claude Opus 5.5 in an isolated Daytona sandbox; scripts compute traits, states, guards and hook eligibility and propose the top two personas; the agent selects one and decides every field with a checkable reason; a single writer tool, read log, stop gate and validator refuse anything uncited. Compile: the validated persona becomes the Sarvam agent's per-call variables and prompt sections; names are filled in only then, on the laptop. Voice call: the Sarvam voice agent (speech to text, language model, text to speech) with a start tool, a signal tool and a booking tool, one fixed prompt template with per-call variables, and the IndiaMART knowledge base. Review and learning: Claude reviews each call; scoreboards update by seller segment. Compliance: identity rule (never AI, bot or manager; never claims to be human; if pressed, 'IndiaMART's virtual assistant'), verified facts only, no selling on the call, 7 fatal and 13 non-fatal rubric items checked before and after each call; humans approve persona library changes.</a:t>
+              <a:t>Context builder: offline PS07 and Global Context files, internal APIs (data warehouse, user service, company page) and read-only queries on the buy-lead and catalogue databases write one folder per seller (inside IndiaMART, on VPN). Safe export: names become tokens, a hard PII check refuses any leak, sources are stripped; real names stay inside IndiaMART. Persona agent: Claude Opus 5.5 in an isolated Daytona sandbox; scripts compute traits, states, guards and hook eligibility and propose the top two personas; the agent selects one and decides every field with a checkable reason; a single writer tool, read log, stop gate and validator refuse anything uncited. Compile: the validated persona becomes the Sarvam agent's per-call variables and prompt sections; names are filled in only then, at call time. Voice call: the Sarvam voice agent (speech to text, language model, text to speech) with a start tool, a signal tool and a booking tool, one fixed prompt template with per-call variables, and the IndiaMART knowledge base. Review and learning: Claude reviews each call; scoreboards update by seller segment. Compliance: identity rule (never AI, bot or manager; never claims to be human; if pressed, 'IndiaMART's virtual assistant'), verified facts only, no selling on the call, 7 fatal and 13 non-fatal rubric items checked before and after each call; humans approve persona library changes.</a:t>
             </a:r>
           </a:p>
         </p:txBody>
@@ -21851,7 +21851,7 @@
                 </a:solidFill>
                 <a:latin typeface="Arial"/>
               </a:rPr>
-              <a:t>Jev decision model: after the call</a:t>
+              <a:t>Jev decision model: between calls</a:t>
             </a:r>
           </a:p>
           <a:p>
@@ -22135,7 +22135,7 @@
                 </a:solidFill>
                 <a:latin typeface="Arial"/>
               </a:rPr>
-              <a:t>after the call</a:t>
+              <a:t>between calls</a:t>
             </a:r>
           </a:p>
           <a:p>
@@ -22212,7 +22212,7 @@
                 </a:solidFill>
                 <a:latin typeface="Arial"/>
               </a:rPr>
-              <a:t>Keyword tool answers in the call; Jev judges the same turns after the call and teaches it</a:t>
+              <a:t>Keyword tool answers in the call; Jev judges the same turns between calls and teaches it</a:t>
             </a:r>
           </a:p>
         </p:txBody>
